--- a/miracle_capital_semilla_pitch.pptx
+++ b/miracle_capital_semilla_pitch.pptx
@@ -17,9 +17,10 @@
     <p:sldId id="265" r:id="rId11"/>
     <p:sldId id="266" r:id="rId12"/>
     <p:sldId id="267" r:id="rId13"/>
+    <p:sldId id="268" r:id="rId14"/>
   </p:sldIdLst>
   <p:notesMasterIdLst>
-    <p:notesMasterId r:id="rId14"/>
+    <p:notesMasterId r:id="rId15"/>
   </p:notesMasterIdLst>
   <p:sldSz cx="9144000" cy="5143500"/>
   <p:notesSz cx="5143500" cy="9144000"/>
@@ -801,6 +802,94 @@
             <a:fld id="{F7021451-1387-4CA6-816F-3879F97B5CBC}" type="slidenum">
               <a:rPr lang="en-US"/>
               <a:t>12</a:t>
+            </a:fld>
+            <a:endParaRPr lang="en-US"/>
+          </a:p>
+        </p:txBody>
+      </p:sp>
+    </p:spTree>
+    <p:extLst>
+      <p:ext uri="{BB962C8B-B14F-4D97-AF65-F5344CB8AC3E}">
+        <p14:creationId xmlns:p14="http://schemas.microsoft.com/office/powerpoint/2010/main" val="1024086991"/>
+      </p:ext>
+    </p:extLst>
+  </p:cSld>
+  <p:clrMapOvr>
+    <a:masterClrMapping/>
+  </p:clrMapOvr>
+</p:notes>
+</file>
+
+<file path=ppt/notesSlides/notesSlide13.xml><?xml version="1.0" encoding="utf-8"?>
+<p:notes xmlns:a="http://schemas.openxmlformats.org/drawingml/2006/main" xmlns:r="http://schemas.openxmlformats.org/officeDocument/2006/relationships" xmlns:p="http://schemas.openxmlformats.org/presentationml/2006/main">
+  <p:cSld>
+    <p:spTree>
+      <p:nvGrpSpPr>
+        <p:cNvPr id="1" name=""/>
+        <p:cNvGrpSpPr/>
+        <p:nvPr/>
+      </p:nvGrpSpPr>
+      <p:grpSpPr>
+        <a:xfrm>
+          <a:off x="0" y="0"/>
+          <a:ext cx="0" cy="0"/>
+          <a:chOff x="0" y="0"/>
+          <a:chExt cx="0" cy="0"/>
+        </a:xfrm>
+      </p:grpSpPr>
+      <p:sp>
+        <p:nvSpPr>
+          <p:cNvPr id="2" name="Slide Image Placeholder 1"/>
+          <p:cNvSpPr>
+            <a:spLocks noGrp="1" noRot="1" noChangeAspect="1"/>
+          </p:cNvSpPr>
+          <p:nvPr>
+            <p:ph type="sldImg"/>
+          </p:nvPr>
+        </p:nvSpPr>
+        <p:spPr/>
+      </p:sp>
+      <p:sp>
+        <p:nvSpPr>
+          <p:cNvPr id="3" name="Notes Placeholder 2"/>
+          <p:cNvSpPr>
+            <a:spLocks noGrp="1"/>
+          </p:cNvSpPr>
+          <p:nvPr>
+            <p:ph type="body" idx="1"/>
+          </p:nvPr>
+        </p:nvSpPr>
+        <p:spPr/>
+        <p:txBody>
+          <a:bodyPr/>
+          <a:lstStyle/>
+          <a:p>
+            <a:r>
+              <a:rPr lang="en-US" dirty="0"/>
+              <a:t/>
+            </a:r>
+            <a:endParaRPr lang="en-US" dirty="0"/>
+          </a:p>
+        </p:txBody>
+      </p:sp>
+      <p:sp>
+        <p:nvSpPr>
+          <p:cNvPr id="4" name="Slide Number Placeholder 3"/>
+          <p:cNvSpPr>
+            <a:spLocks noGrp="1"/>
+          </p:cNvSpPr>
+          <p:nvPr>
+            <p:ph type="sldNum" sz="quarter" idx="10"/>
+          </p:nvPr>
+        </p:nvSpPr>
+        <p:spPr/>
+        <p:txBody>
+          <a:bodyPr/>
+          <a:lstStyle/>
+          <a:p>
+            <a:fld id="{F7021451-1387-4CA6-816F-3879F97B5CBC}" type="slidenum">
+              <a:rPr lang="en-US"/>
+              <a:t>13</a:t>
             </a:fld>
             <a:endParaRPr lang="en-US"/>
           </a:p>
@@ -1862,7 +1951,7 @@
         </p:nvSpPr>
         <p:spPr>
           <a:xfrm>
-            <a:off x="502920" y="365760"/>
+            <a:off x="502920" y="320040"/>
             <a:ext cx="8138160" cy="274320"/>
           </a:xfrm>
           <a:prstGeom prst="rect">
@@ -1901,8 +1990,8 @@
         </p:nvSpPr>
         <p:spPr>
           <a:xfrm>
-            <a:off x="502920" y="777240"/>
-            <a:ext cx="5208422" cy="1463040"/>
+            <a:off x="502920" y="731520"/>
+            <a:ext cx="5208422" cy="1371600"/>
           </a:xfrm>
           <a:prstGeom prst="rect">
             <a:avLst/>
@@ -1921,7 +2010,7 @@
               <a:buNone/>
             </a:pPr>
             <a:r>
-              <a:rPr lang="en-US" sz="2700" b="1" dirty="0">
+              <a:rPr lang="en-US" sz="2600" b="1" dirty="0">
                 <a:solidFill>
                   <a:srgbClr val="1D1D1F"/>
                 </a:solidFill>
@@ -1931,7 +2020,7 @@
               </a:rPr>
               <a:t>El médico está perdiendo tiempo clínico frente al computador.</a:t>
             </a:r>
-            <a:endParaRPr lang="en-US" sz="2700" dirty="0"/>
+            <a:endParaRPr lang="en-US" sz="2600" dirty="0"/>
           </a:p>
         </p:txBody>
       </p:sp>
@@ -1943,7 +2032,7 @@
         </p:nvSpPr>
         <p:spPr>
           <a:xfrm>
-            <a:off x="502920" y="2331720"/>
+            <a:off x="502920" y="2240280"/>
             <a:ext cx="5208422" cy="685800"/>
           </a:xfrm>
           <a:prstGeom prst="rect">
@@ -1960,7 +2049,7 @@
               <a:buNone/>
             </a:pPr>
             <a:r>
-              <a:rPr lang="en-US" sz="1550" i="1" dirty="0">
+              <a:rPr lang="en-US" sz="1500" i="1" dirty="0">
                 <a:solidFill>
                   <a:srgbClr val="48484A"/>
                 </a:solidFill>
@@ -1970,7 +2059,7 @@
               </a:rPr>
               <a:t>Por cada 1 hora con pacientes, casi 2 horas pueden irse en registros y tareas de escritorio.</a:t>
             </a:r>
-            <a:endParaRPr lang="en-US" sz="1550" dirty="0"/>
+            <a:endParaRPr lang="en-US" sz="1500" dirty="0"/>
           </a:p>
         </p:txBody>
       </p:sp>
@@ -1982,7 +2071,7 @@
         </p:nvSpPr>
         <p:spPr>
           <a:xfrm>
-            <a:off x="502920" y="3108960"/>
+            <a:off x="502920" y="2971800"/>
             <a:ext cx="5208422" cy="822960"/>
           </a:xfrm>
           <a:prstGeom prst="rect">
@@ -1999,7 +2088,7 @@
               <a:buNone/>
             </a:pPr>
             <a:r>
-              <a:rPr lang="en-US" sz="900" dirty="0">
+              <a:rPr lang="en-US" sz="850" dirty="0">
                 <a:solidFill>
                   <a:srgbClr val="6E6E73"/>
                 </a:solidFill>
@@ -2009,7 +2098,7 @@
               </a:rPr>
               <a:t>Fuente: Sinsky et al., Annals of Internal Medicine, 2016 — médicos en consulta ambulatoria dedicaron 27,0% de su tiempo al contacto clínico directo y 49,2% a EHR/tareas de escritorio, con 1–2 horas adicionales cada noche en documentación.</a:t>
             </a:r>
-            <a:endParaRPr lang="en-US" sz="900" dirty="0"/>
+            <a:endParaRPr lang="en-US" sz="850" dirty="0"/>
           </a:p>
         </p:txBody>
       </p:sp>
@@ -2021,12 +2110,12 @@
         </p:nvSpPr>
         <p:spPr>
           <a:xfrm>
-            <a:off x="6036869" y="777240"/>
-            <a:ext cx="2604211" cy="1691640"/>
+            <a:off x="6036869" y="731520"/>
+            <a:ext cx="2604211" cy="1783080"/>
           </a:xfrm>
           <a:prstGeom prst="roundRect">
             <a:avLst>
-              <a:gd name="adj" fmla="val 4865"/>
+              <a:gd name="adj" fmla="val 4615"/>
             </a:avLst>
           </a:prstGeom>
           <a:solidFill>
@@ -2055,8 +2144,8 @@
         </p:nvSpPr>
         <p:spPr>
           <a:xfrm>
-            <a:off x="7018934" y="960120"/>
-            <a:ext cx="640080" cy="640080"/>
+            <a:off x="7046366" y="896112"/>
+            <a:ext cx="585216" cy="585216"/>
           </a:xfrm>
           <a:prstGeom prst="ellipse">
             <a:avLst/>
@@ -2083,8 +2172,8 @@
         </p:blipFill>
         <p:spPr>
           <a:xfrm>
-            <a:off x="7108546" y="1049731"/>
-            <a:ext cx="460858" cy="460858"/>
+            <a:off x="7128297" y="978042"/>
+            <a:ext cx="421356" cy="421356"/>
           </a:xfrm>
           <a:prstGeom prst="rect">
             <a:avLst/>
@@ -2099,8 +2188,8 @@
         </p:nvSpPr>
         <p:spPr>
           <a:xfrm>
-            <a:off x="6036869" y="1691640"/>
-            <a:ext cx="2604211" cy="228600"/>
+            <a:off x="6174029" y="1572768"/>
+            <a:ext cx="2329891" cy="201168"/>
           </a:xfrm>
           <a:prstGeom prst="rect">
             <a:avLst/>
@@ -2138,24 +2227,24 @@
         </p:nvSpPr>
         <p:spPr>
           <a:xfrm>
-            <a:off x="6036869" y="1920240"/>
-            <a:ext cx="2604211" cy="411480"/>
-          </a:xfrm>
-          <a:prstGeom prst="rect">
-            <a:avLst/>
-          </a:prstGeom>
-          <a:noFill/>
-          <a:ln/>
-        </p:spPr>
-        <p:txBody>
-          <a:bodyPr wrap="square" lIns="0" tIns="0" rIns="0" bIns="0" rtlCol="0" anchor="ctr"/>
+            <a:off x="6174029" y="1773936"/>
+            <a:ext cx="2329891" cy="640080"/>
+          </a:xfrm>
+          <a:prstGeom prst="rect">
+            <a:avLst/>
+          </a:prstGeom>
+          <a:noFill/>
+          <a:ln/>
+        </p:spPr>
+        <p:txBody>
+          <a:bodyPr wrap="square" lIns="0" tIns="0" rIns="0" bIns="0" rtlCol="0" anchor="t"/>
           <a:lstStyle/>
           <a:p>
             <a:pPr algn="ctr" indent="0" marL="0">
               <a:buNone/>
             </a:pPr>
             <a:r>
-              <a:rPr lang="en-US" sz="950" dirty="0">
+              <a:rPr lang="en-US" sz="850" dirty="0">
                 <a:solidFill>
                   <a:srgbClr val="48484A"/>
                 </a:solidFill>
@@ -2163,9 +2252,9 @@
                 <a:ea typeface="Arial" pitchFamily="34" charset="-122"/>
                 <a:cs typeface="Arial" pitchFamily="34" charset="-120"/>
               </a:rPr>
-              <a:t>Con el paciente</a:t>
-            </a:r>
-            <a:endParaRPr lang="en-US" sz="950" dirty="0"/>
+              <a:t>Consulta tras consulta, con el paciente al frente</a:t>
+            </a:r>
+            <a:endParaRPr lang="en-US" sz="850" dirty="0"/>
           </a:p>
         </p:txBody>
       </p:sp>
@@ -2177,12 +2266,12 @@
         </p:nvSpPr>
         <p:spPr>
           <a:xfrm>
-            <a:off x="6036869" y="2651760"/>
-            <a:ext cx="2604211" cy="1691640"/>
+            <a:off x="6036869" y="2697480"/>
+            <a:ext cx="2604211" cy="1828800"/>
           </a:xfrm>
           <a:prstGeom prst="roundRect">
             <a:avLst>
-              <a:gd name="adj" fmla="val 4865"/>
+              <a:gd name="adj" fmla="val 4500"/>
             </a:avLst>
           </a:prstGeom>
           <a:solidFill>
@@ -2211,8 +2300,8 @@
         </p:nvSpPr>
         <p:spPr>
           <a:xfrm>
-            <a:off x="7018934" y="2834640"/>
-            <a:ext cx="640080" cy="640080"/>
+            <a:off x="7046366" y="2862072"/>
+            <a:ext cx="585216" cy="585216"/>
           </a:xfrm>
           <a:prstGeom prst="ellipse">
             <a:avLst/>
@@ -2239,8 +2328,8 @@
         </p:blipFill>
         <p:spPr>
           <a:xfrm>
-            <a:off x="7108546" y="2924251"/>
-            <a:ext cx="460858" cy="460858"/>
+            <a:off x="7128297" y="2944002"/>
+            <a:ext cx="421356" cy="421356"/>
           </a:xfrm>
           <a:prstGeom prst="rect">
             <a:avLst/>
@@ -2255,8 +2344,8 @@
         </p:nvSpPr>
         <p:spPr>
           <a:xfrm>
-            <a:off x="6036869" y="3566160"/>
-            <a:ext cx="2604211" cy="228600"/>
+            <a:off x="6174029" y="3538728"/>
+            <a:ext cx="2329891" cy="201168"/>
           </a:xfrm>
           <a:prstGeom prst="rect">
             <a:avLst/>
@@ -2294,24 +2383,24 @@
         </p:nvSpPr>
         <p:spPr>
           <a:xfrm>
-            <a:off x="6036869" y="3794760"/>
-            <a:ext cx="2604211" cy="411480"/>
-          </a:xfrm>
-          <a:prstGeom prst="rect">
-            <a:avLst/>
-          </a:prstGeom>
-          <a:noFill/>
-          <a:ln/>
-        </p:spPr>
-        <p:txBody>
-          <a:bodyPr wrap="square" lIns="0" tIns="0" rIns="0" bIns="0" rtlCol="0" anchor="ctr"/>
+            <a:off x="6174029" y="3739896"/>
+            <a:ext cx="2329891" cy="685800"/>
+          </a:xfrm>
+          <a:prstGeom prst="rect">
+            <a:avLst/>
+          </a:prstGeom>
+          <a:noFill/>
+          <a:ln/>
+        </p:spPr>
+        <p:txBody>
+          <a:bodyPr wrap="square" lIns="0" tIns="0" rIns="0" bIns="0" rtlCol="0" anchor="t"/>
           <a:lstStyle/>
           <a:p>
             <a:pPr algn="ctr" indent="0" marL="0">
               <a:buNone/>
             </a:pPr>
             <a:r>
-              <a:rPr lang="en-US" sz="950" dirty="0">
+              <a:rPr lang="en-US" sz="850" dirty="0">
                 <a:solidFill>
                   <a:srgbClr val="6E6E73"/>
                 </a:solidFill>
@@ -2319,9 +2408,9 @@
                 <a:ea typeface="Arial" pitchFamily="34" charset="-122"/>
                 <a:cs typeface="Arial" pitchFamily="34" charset="-120"/>
               </a:rPr>
-              <a:t>Con el sistema</a:t>
-            </a:r>
-            <a:endParaRPr lang="en-US" sz="950" dirty="0"/>
+              <a:t>El mismo médico, a las 10 p.m., todavía llenando historias clínicas</a:t>
+            </a:r>
+            <a:endParaRPr lang="en-US" sz="850" dirty="0"/>
           </a:p>
         </p:txBody>
       </p:sp>
@@ -2365,7 +2454,7 @@
         </p:nvSpPr>
         <p:spPr>
           <a:xfrm>
-            <a:off x="502920" y="365760"/>
+            <a:off x="502920" y="320040"/>
             <a:ext cx="8138160" cy="274320"/>
           </a:xfrm>
           <a:prstGeom prst="rect">
@@ -2390,7 +2479,7 @@
                 <a:ea typeface="Arial" pitchFamily="34" charset="-122"/>
                 <a:cs typeface="Arial" pitchFamily="34" charset="-120"/>
               </a:rPr>
-              <a:t>EQUIPO</a:t>
+              <a:t>DEFENSIBILIDAD</a:t>
             </a:r>
             <a:endParaRPr lang="en-US" sz="1050" dirty="0"/>
           </a:p>
@@ -2404,7 +2493,7 @@
         </p:nvSpPr>
         <p:spPr>
           <a:xfrm>
-            <a:off x="502920" y="685800"/>
+            <a:off x="502920" y="658368"/>
             <a:ext cx="8138160" cy="548640"/>
           </a:xfrm>
           <a:prstGeom prst="rect">
@@ -2421,7 +2510,7 @@
               <a:buNone/>
             </a:pPr>
             <a:r>
-              <a:rPr lang="en-US" sz="2400" b="1" dirty="0">
+              <a:rPr lang="en-US" sz="2200" b="1" dirty="0">
                 <a:solidFill>
                   <a:srgbClr val="1D1D1F"/>
                 </a:solidFill>
@@ -2429,9 +2518,23 @@
                 <a:ea typeface="Arial" pitchFamily="34" charset="-122"/>
                 <a:cs typeface="Arial" pitchFamily="34" charset="-120"/>
               </a:rPr>
-              <a:t>Equipo con capacidad técnica, comercial y sectorial.</a:t>
-            </a:r>
-            <a:endParaRPr lang="en-US" sz="2400" dirty="0"/>
+              <a:t>Lo difícil no es transcribir. </a:t>
+            </a:r>
+            <a:pPr indent="0" marL="0">
+              <a:buNone/>
+            </a:pPr>
+            <a:r>
+              <a:rPr lang="en-US" sz="2200" b="1" dirty="0">
+                <a:solidFill>
+                  <a:srgbClr val="0A3D91"/>
+                </a:solidFill>
+                <a:latin typeface="Arial" pitchFamily="34" charset="0"/>
+                <a:ea typeface="Arial" pitchFamily="34" charset="-122"/>
+                <a:cs typeface="Arial" pitchFamily="34" charset="-120"/>
+              </a:rPr>
+              <a:t>Es todo lo demás.</a:t>
+            </a:r>
+            <a:endParaRPr lang="en-US" sz="2200" dirty="0"/>
           </a:p>
         </p:txBody>
       </p:sp>
@@ -2443,12 +2546,12 @@
         </p:nvSpPr>
         <p:spPr>
           <a:xfrm>
-            <a:off x="502920" y="1463040"/>
-            <a:ext cx="3931920" cy="1234440"/>
+            <a:off x="502920" y="1325880"/>
+            <a:ext cx="2542032" cy="2148840"/>
           </a:xfrm>
           <a:prstGeom prst="roundRect">
             <a:avLst>
-              <a:gd name="adj" fmla="val 6667"/>
+              <a:gd name="adj" fmla="val 3830"/>
             </a:avLst>
           </a:prstGeom>
           <a:solidFill>
@@ -2477,8 +2580,8 @@
         </p:nvSpPr>
         <p:spPr>
           <a:xfrm>
-            <a:off x="704088" y="1664208"/>
-            <a:ext cx="502920" cy="502920"/>
+            <a:off x="685800" y="1508760"/>
+            <a:ext cx="384048" cy="384048"/>
           </a:xfrm>
           <a:prstGeom prst="ellipse">
             <a:avLst/>
@@ -2505,8 +2608,8 @@
         </p:blipFill>
         <p:spPr>
           <a:xfrm>
-            <a:off x="774497" y="1734617"/>
-            <a:ext cx="362102" cy="362102"/>
+            <a:off x="739567" y="1562527"/>
+            <a:ext cx="276515" cy="276515"/>
           </a:xfrm>
           <a:prstGeom prst="rect">
             <a:avLst/>
@@ -2521,8 +2624,8 @@
         </p:nvSpPr>
         <p:spPr>
           <a:xfrm>
-            <a:off x="1325880" y="1609344"/>
-            <a:ext cx="2926080" cy="365760"/>
+            <a:off x="685800" y="1984248"/>
+            <a:ext cx="2176272" cy="457200"/>
           </a:xfrm>
           <a:prstGeom prst="rect">
             <a:avLst/>
@@ -2538,17 +2641,17 @@
               <a:buNone/>
             </a:pPr>
             <a:r>
-              <a:rPr lang="en-US" sz="850" b="1" spc="50" kern="0" dirty="0">
-                <a:solidFill>
-                  <a:srgbClr val="0071E3"/>
-                </a:solidFill>
-                <a:latin typeface="Arial" pitchFamily="34" charset="0"/>
-                <a:ea typeface="Arial" pitchFamily="34" charset="-122"/>
-                <a:cs typeface="Arial" pitchFamily="34" charset="-120"/>
-              </a:rPr>
-              <a:t>DESARROLLO DE SOFTWARE Y ARQUITECTURA</a:t>
-            </a:r>
-            <a:endParaRPr lang="en-US" sz="850" dirty="0"/>
+              <a:rPr lang="en-US" sz="1150" b="1" dirty="0">
+                <a:solidFill>
+                  <a:srgbClr val="1D1D1F"/>
+                </a:solidFill>
+                <a:latin typeface="Arial" pitchFamily="34" charset="0"/>
+                <a:ea typeface="Arial" pitchFamily="34" charset="-122"/>
+                <a:cs typeface="Arial" pitchFamily="34" charset="-120"/>
+              </a:rPr>
+              <a:t>Datos que mejoran el producto</a:t>
+            </a:r>
+            <a:endParaRPr lang="en-US" sz="1150" dirty="0"/>
           </a:p>
         </p:txBody>
       </p:sp>
@@ -2560,90 +2663,51 @@
         </p:nvSpPr>
         <p:spPr>
           <a:xfrm>
-            <a:off x="1325880" y="2029968"/>
-            <a:ext cx="2926080" cy="274320"/>
-          </a:xfrm>
-          <a:prstGeom prst="rect">
-            <a:avLst/>
-          </a:prstGeom>
-          <a:noFill/>
-          <a:ln/>
-        </p:spPr>
-        <p:txBody>
-          <a:bodyPr wrap="square" lIns="0" tIns="0" rIns="0" bIns="0" rtlCol="0" anchor="ctr"/>
+            <a:off x="685800" y="2496312"/>
+            <a:ext cx="2176272" cy="886968"/>
+          </a:xfrm>
+          <a:prstGeom prst="rect">
+            <a:avLst/>
+          </a:prstGeom>
+          <a:noFill/>
+          <a:ln/>
+        </p:spPr>
+        <p:txBody>
+          <a:bodyPr wrap="square" lIns="0" tIns="0" rIns="0" bIns="0" rtlCol="0" anchor="t"/>
           <a:lstStyle/>
           <a:p>
             <a:pPr indent="0" marL="0">
               <a:buNone/>
             </a:pPr>
             <a:r>
-              <a:rPr lang="en-US" sz="1300" b="1" dirty="0">
-                <a:solidFill>
-                  <a:srgbClr val="1D1D1F"/>
-                </a:solidFill>
-                <a:latin typeface="Arial" pitchFamily="34" charset="0"/>
-                <a:ea typeface="Arial" pitchFamily="34" charset="-122"/>
-                <a:cs typeface="Arial" pitchFamily="34" charset="-120"/>
-              </a:rPr>
-              <a:t>[Nombre]</a:t>
-            </a:r>
-            <a:endParaRPr lang="en-US" sz="1300" dirty="0"/>
-          </a:p>
-        </p:txBody>
-      </p:sp>
-      <p:sp>
-        <p:nvSpPr>
-          <p:cNvPr id="9" name="Text 6"/>
-          <p:cNvSpPr/>
-          <p:nvPr/>
-        </p:nvSpPr>
-        <p:spPr>
-          <a:xfrm>
-            <a:off x="1325880" y="2322576"/>
-            <a:ext cx="2926080" cy="274320"/>
-          </a:xfrm>
-          <a:prstGeom prst="rect">
-            <a:avLst/>
-          </a:prstGeom>
-          <a:noFill/>
-          <a:ln/>
-        </p:spPr>
-        <p:txBody>
-          <a:bodyPr wrap="square" lIns="0" tIns="0" rIns="0" bIns="0" rtlCol="0" anchor="ctr"/>
-          <a:lstStyle/>
-          <a:p>
-            <a:pPr indent="0" marL="0">
-              <a:buNone/>
-            </a:pPr>
-            <a:r>
-              <a:rPr lang="en-US" sz="1000" dirty="0">
-                <a:solidFill>
-                  <a:srgbClr val="6E6E73"/>
-                </a:solidFill>
-                <a:latin typeface="Arial" pitchFamily="34" charset="0"/>
-                <a:ea typeface="Arial" pitchFamily="34" charset="-122"/>
-                <a:cs typeface="Arial" pitchFamily="34" charset="-120"/>
-              </a:rPr>
-              <a:t>[Rol]</a:t>
-            </a:r>
-            <a:endParaRPr lang="en-US" sz="1000" dirty="0"/>
-          </a:p>
-        </p:txBody>
-      </p:sp>
-      <p:sp>
-        <p:nvSpPr>
-          <p:cNvPr id="10" name="Shape 7"/>
-          <p:cNvSpPr/>
-          <p:nvPr/>
-        </p:nvSpPr>
-        <p:spPr>
-          <a:xfrm>
-            <a:off x="4709160" y="1463040"/>
-            <a:ext cx="3931920" cy="1234440"/>
+              <a:rPr lang="en-US" sz="880" dirty="0">
+                <a:solidFill>
+                  <a:srgbClr val="48484A"/>
+                </a:solidFill>
+                <a:latin typeface="Arial" pitchFamily="34" charset="0"/>
+                <a:ea typeface="Arial" pitchFamily="34" charset="-122"/>
+                <a:cs typeface="Arial" pitchFamily="34" charset="-120"/>
+              </a:rPr>
+              <a:t>Cada consulta documentada afina el español clínico regional del sistema. Más médicos → mejor producto → más médicos.</a:t>
+            </a:r>
+            <a:endParaRPr lang="en-US" sz="880" dirty="0"/>
+          </a:p>
+        </p:txBody>
+      </p:sp>
+      <p:sp>
+        <p:nvSpPr>
+          <p:cNvPr id="9" name="Shape 6"/>
+          <p:cNvSpPr/>
+          <p:nvPr/>
+        </p:nvSpPr>
+        <p:spPr>
+          <a:xfrm>
+            <a:off x="3300984" y="1325880"/>
+            <a:ext cx="2542032" cy="2148840"/>
           </a:xfrm>
           <a:prstGeom prst="roundRect">
             <a:avLst>
-              <a:gd name="adj" fmla="val 6667"/>
+              <a:gd name="adj" fmla="val 3830"/>
             </a:avLst>
           </a:prstGeom>
           <a:solidFill>
@@ -2666,14 +2730,14 @@
       </p:sp>
       <p:sp>
         <p:nvSpPr>
-          <p:cNvPr id="11" name="Shape 8"/>
-          <p:cNvSpPr/>
-          <p:nvPr/>
-        </p:nvSpPr>
-        <p:spPr>
-          <a:xfrm>
-            <a:off x="4910328" y="1664208"/>
-            <a:ext cx="502920" cy="502920"/>
+          <p:cNvPr id="10" name="Shape 7"/>
+          <p:cNvSpPr/>
+          <p:nvPr/>
+        </p:nvSpPr>
+        <p:spPr>
+          <a:xfrm>
+            <a:off x="3483864" y="1508760"/>
+            <a:ext cx="384048" cy="384048"/>
           </a:xfrm>
           <a:prstGeom prst="ellipse">
             <a:avLst/>
@@ -2686,7 +2750,7 @@
       </p:sp>
       <p:pic>
         <p:nvPicPr>
-          <p:cNvPr id="12" name="Image 1" descr="preencoded.png">    </p:cNvPr>
+          <p:cNvPr id="11" name="Image 1" descr="preencoded.png">    </p:cNvPr>
           <p:cNvPicPr>
             <a:picLocks noChangeAspect="1"/>
           </p:cNvPicPr>
@@ -2700,8 +2764,8 @@
         </p:blipFill>
         <p:spPr>
           <a:xfrm>
-            <a:off x="4980737" y="1734617"/>
-            <a:ext cx="362102" cy="362102"/>
+            <a:off x="3537631" y="1562527"/>
+            <a:ext cx="276515" cy="276515"/>
           </a:xfrm>
           <a:prstGeom prst="rect">
             <a:avLst/>
@@ -2710,14 +2774,53 @@
       </p:pic>
       <p:sp>
         <p:nvSpPr>
+          <p:cNvPr id="12" name="Text 8"/>
+          <p:cNvSpPr/>
+          <p:nvPr/>
+        </p:nvSpPr>
+        <p:spPr>
+          <a:xfrm>
+            <a:off x="3483864" y="1984248"/>
+            <a:ext cx="2176272" cy="457200"/>
+          </a:xfrm>
+          <a:prstGeom prst="rect">
+            <a:avLst/>
+          </a:prstGeom>
+          <a:noFill/>
+          <a:ln/>
+        </p:spPr>
+        <p:txBody>
+          <a:bodyPr wrap="square" lIns="0" tIns="0" rIns="0" bIns="0" rtlCol="0" anchor="t"/>
+          <a:lstStyle/>
+          <a:p>
+            <a:pPr indent="0" marL="0">
+              <a:buNone/>
+            </a:pPr>
+            <a:r>
+              <a:rPr lang="en-US" sz="1150" b="1" dirty="0">
+                <a:solidFill>
+                  <a:srgbClr val="1D1D1F"/>
+                </a:solidFill>
+                <a:latin typeface="Arial" pitchFamily="34" charset="0"/>
+                <a:ea typeface="Arial" pitchFamily="34" charset="-122"/>
+                <a:cs typeface="Arial" pitchFamily="34" charset="-120"/>
+              </a:rPr>
+              <a:t>Sin fricción de integración</a:t>
+            </a:r>
+            <a:endParaRPr lang="en-US" sz="1150" dirty="0"/>
+          </a:p>
+        </p:txBody>
+      </p:sp>
+      <p:sp>
+        <p:nvSpPr>
           <p:cNvPr id="13" name="Text 9"/>
           <p:cNvSpPr/>
           <p:nvPr/>
         </p:nvSpPr>
         <p:spPr>
           <a:xfrm>
-            <a:off x="5532120" y="1609344"/>
-            <a:ext cx="2926080" cy="365760"/>
+            <a:off x="3483864" y="2496312"/>
+            <a:ext cx="2176272" cy="886968"/>
           </a:xfrm>
           <a:prstGeom prst="rect">
             <a:avLst/>
@@ -2733,112 +2836,34 @@
               <a:buNone/>
             </a:pPr>
             <a:r>
-              <a:rPr lang="en-US" sz="850" b="1" spc="50" kern="0" dirty="0">
-                <a:solidFill>
-                  <a:srgbClr val="0071E3"/>
-                </a:solidFill>
-                <a:latin typeface="Arial" pitchFamily="34" charset="0"/>
-                <a:ea typeface="Arial" pitchFamily="34" charset="-122"/>
-                <a:cs typeface="Arial" pitchFamily="34" charset="-120"/>
-              </a:rPr>
-              <a:t>IA, AUTOMATIZACIÓN Y PRODUCTO</a:t>
-            </a:r>
-            <a:endParaRPr lang="en-US" sz="850" dirty="0"/>
-          </a:p>
-        </p:txBody>
-      </p:sp>
-      <p:sp>
-        <p:nvSpPr>
-          <p:cNvPr id="14" name="Text 10"/>
-          <p:cNvSpPr/>
-          <p:nvPr/>
-        </p:nvSpPr>
-        <p:spPr>
-          <a:xfrm>
-            <a:off x="5532120" y="2029968"/>
-            <a:ext cx="2926080" cy="274320"/>
-          </a:xfrm>
-          <a:prstGeom prst="rect">
-            <a:avLst/>
-          </a:prstGeom>
-          <a:noFill/>
-          <a:ln/>
-        </p:spPr>
-        <p:txBody>
-          <a:bodyPr wrap="square" lIns="0" tIns="0" rIns="0" bIns="0" rtlCol="0" anchor="ctr"/>
-          <a:lstStyle/>
-          <a:p>
-            <a:pPr indent="0" marL="0">
-              <a:buNone/>
-            </a:pPr>
-            <a:r>
-              <a:rPr lang="en-US" sz="1300" b="1" dirty="0">
-                <a:solidFill>
-                  <a:srgbClr val="1D1D1F"/>
-                </a:solidFill>
-                <a:latin typeface="Arial" pitchFamily="34" charset="0"/>
-                <a:ea typeface="Arial" pitchFamily="34" charset="-122"/>
-                <a:cs typeface="Arial" pitchFamily="34" charset="-120"/>
-              </a:rPr>
-              <a:t>[Nombre]</a:t>
-            </a:r>
-            <a:endParaRPr lang="en-US" sz="1300" dirty="0"/>
-          </a:p>
-        </p:txBody>
-      </p:sp>
-      <p:sp>
-        <p:nvSpPr>
-          <p:cNvPr id="15" name="Text 11"/>
-          <p:cNvSpPr/>
-          <p:nvPr/>
-        </p:nvSpPr>
-        <p:spPr>
-          <a:xfrm>
-            <a:off x="5532120" y="2322576"/>
-            <a:ext cx="2926080" cy="274320"/>
-          </a:xfrm>
-          <a:prstGeom prst="rect">
-            <a:avLst/>
-          </a:prstGeom>
-          <a:noFill/>
-          <a:ln/>
-        </p:spPr>
-        <p:txBody>
-          <a:bodyPr wrap="square" lIns="0" tIns="0" rIns="0" bIns="0" rtlCol="0" anchor="ctr"/>
-          <a:lstStyle/>
-          <a:p>
-            <a:pPr indent="0" marL="0">
-              <a:buNone/>
-            </a:pPr>
-            <a:r>
-              <a:rPr lang="en-US" sz="1000" dirty="0">
-                <a:solidFill>
-                  <a:srgbClr val="6E6E73"/>
-                </a:solidFill>
-                <a:latin typeface="Arial" pitchFamily="34" charset="0"/>
-                <a:ea typeface="Arial" pitchFamily="34" charset="-122"/>
-                <a:cs typeface="Arial" pitchFamily="34" charset="-120"/>
-              </a:rPr>
-              <a:t>[Rol]</a:t>
-            </a:r>
-            <a:endParaRPr lang="en-US" sz="1000" dirty="0"/>
-          </a:p>
-        </p:txBody>
-      </p:sp>
-      <p:sp>
-        <p:nvSpPr>
-          <p:cNvPr id="16" name="Shape 12"/>
-          <p:cNvSpPr/>
-          <p:nvPr/>
-        </p:nvSpPr>
-        <p:spPr>
-          <a:xfrm>
-            <a:off x="502920" y="2971800"/>
-            <a:ext cx="3931920" cy="1234440"/>
+              <a:rPr lang="en-US" sz="880" dirty="0">
+                <a:solidFill>
+                  <a:srgbClr val="48484A"/>
+                </a:solidFill>
+                <a:latin typeface="Arial" pitchFamily="34" charset="0"/>
+                <a:ea typeface="Arial" pitchFamily="34" charset="-122"/>
+                <a:cs typeface="Arial" pitchFamily="34" charset="-120"/>
+              </a:rPr>
+              <a:t>Miracle opera el HIS que la clínica ya usa. Donde otros necesitan meses de integración, nosotros entramos el mismo día.</a:t>
+            </a:r>
+            <a:endParaRPr lang="en-US" sz="880" dirty="0"/>
+          </a:p>
+        </p:txBody>
+      </p:sp>
+      <p:sp>
+        <p:nvSpPr>
+          <p:cNvPr id="14" name="Shape 10"/>
+          <p:cNvSpPr/>
+          <p:nvPr/>
+        </p:nvSpPr>
+        <p:spPr>
+          <a:xfrm>
+            <a:off x="6099048" y="1325880"/>
+            <a:ext cx="2542032" cy="2148840"/>
           </a:xfrm>
           <a:prstGeom prst="roundRect">
             <a:avLst>
-              <a:gd name="adj" fmla="val 6667"/>
+              <a:gd name="adj" fmla="val 3830"/>
             </a:avLst>
           </a:prstGeom>
           <a:solidFill>
@@ -2861,14 +2886,14 @@
       </p:sp>
       <p:sp>
         <p:nvSpPr>
-          <p:cNvPr id="17" name="Shape 13"/>
-          <p:cNvSpPr/>
-          <p:nvPr/>
-        </p:nvSpPr>
-        <p:spPr>
-          <a:xfrm>
-            <a:off x="704088" y="3172968"/>
-            <a:ext cx="502920" cy="502920"/>
+          <p:cNvPr id="15" name="Shape 11"/>
+          <p:cNvSpPr/>
+          <p:nvPr/>
+        </p:nvSpPr>
+        <p:spPr>
+          <a:xfrm>
+            <a:off x="6281928" y="1508760"/>
+            <a:ext cx="384048" cy="384048"/>
           </a:xfrm>
           <a:prstGeom prst="ellipse">
             <a:avLst/>
@@ -2881,7 +2906,7 @@
       </p:sp>
       <p:pic>
         <p:nvPicPr>
-          <p:cNvPr id="18" name="Image 2" descr="preencoded.png">    </p:cNvPr>
+          <p:cNvPr id="16" name="Image 2" descr="preencoded.png">    </p:cNvPr>
           <p:cNvPicPr>
             <a:picLocks noChangeAspect="1"/>
           </p:cNvPicPr>
@@ -2895,8 +2920,8 @@
         </p:blipFill>
         <p:spPr>
           <a:xfrm>
-            <a:off x="774497" y="3243377"/>
-            <a:ext cx="362102" cy="362102"/>
+            <a:off x="6335695" y="1562527"/>
+            <a:ext cx="276515" cy="276515"/>
           </a:xfrm>
           <a:prstGeom prst="rect">
             <a:avLst/>
@@ -2905,14 +2930,14 @@
       </p:pic>
       <p:sp>
         <p:nvSpPr>
-          <p:cNvPr id="19" name="Text 14"/>
-          <p:cNvSpPr/>
-          <p:nvPr/>
-        </p:nvSpPr>
-        <p:spPr>
-          <a:xfrm>
-            <a:off x="1325880" y="3118104"/>
-            <a:ext cx="2926080" cy="365760"/>
+          <p:cNvPr id="17" name="Text 12"/>
+          <p:cNvSpPr/>
+          <p:nvPr/>
+        </p:nvSpPr>
+        <p:spPr>
+          <a:xfrm>
+            <a:off x="6281928" y="1984248"/>
+            <a:ext cx="2176272" cy="457200"/>
           </a:xfrm>
           <a:prstGeom prst="rect">
             <a:avLst/>
@@ -2928,120 +2953,81 @@
               <a:buNone/>
             </a:pPr>
             <a:r>
-              <a:rPr lang="en-US" sz="850" b="1" spc="50" kern="0" dirty="0">
-                <a:solidFill>
-                  <a:srgbClr val="0071E3"/>
-                </a:solidFill>
-                <a:latin typeface="Arial" pitchFamily="34" charset="0"/>
-                <a:ea typeface="Arial" pitchFamily="34" charset="-122"/>
-                <a:cs typeface="Arial" pitchFamily="34" charset="-120"/>
-              </a:rPr>
-              <a:t>ESTRATEGIA COMERCIAL, VENTAS Y VALIDACIÓN</a:t>
-            </a:r>
-            <a:endParaRPr lang="en-US" sz="850" dirty="0"/>
-          </a:p>
-        </p:txBody>
-      </p:sp>
-      <p:sp>
-        <p:nvSpPr>
-          <p:cNvPr id="20" name="Text 15"/>
-          <p:cNvSpPr/>
-          <p:nvPr/>
-        </p:nvSpPr>
-        <p:spPr>
-          <a:xfrm>
-            <a:off x="1325880" y="3538728"/>
-            <a:ext cx="2926080" cy="274320"/>
-          </a:xfrm>
-          <a:prstGeom prst="rect">
-            <a:avLst/>
-          </a:prstGeom>
-          <a:noFill/>
-          <a:ln/>
-        </p:spPr>
-        <p:txBody>
-          <a:bodyPr wrap="square" lIns="0" tIns="0" rIns="0" bIns="0" rtlCol="0" anchor="ctr"/>
+              <a:rPr lang="en-US" sz="1150" b="1" dirty="0">
+                <a:solidFill>
+                  <a:srgbClr val="1D1D1F"/>
+                </a:solidFill>
+                <a:latin typeface="Arial" pitchFamily="34" charset="0"/>
+                <a:ea typeface="Arial" pitchFamily="34" charset="-122"/>
+                <a:cs typeface="Arial" pitchFamily="34" charset="-120"/>
+              </a:rPr>
+              <a:t>Presencia física en el consultorio</a:t>
+            </a:r>
+            <a:endParaRPr lang="en-US" sz="1150" dirty="0"/>
+          </a:p>
+        </p:txBody>
+      </p:sp>
+      <p:sp>
+        <p:nvSpPr>
+          <p:cNvPr id="18" name="Text 13"/>
+          <p:cNvSpPr/>
+          <p:nvPr/>
+        </p:nvSpPr>
+        <p:spPr>
+          <a:xfrm>
+            <a:off x="6281928" y="2496312"/>
+            <a:ext cx="2176272" cy="886968"/>
+          </a:xfrm>
+          <a:prstGeom prst="rect">
+            <a:avLst/>
+          </a:prstGeom>
+          <a:noFill/>
+          <a:ln/>
+        </p:spPr>
+        <p:txBody>
+          <a:bodyPr wrap="square" lIns="0" tIns="0" rIns="0" bIns="0" rtlCol="0" anchor="t"/>
           <a:lstStyle/>
           <a:p>
             <a:pPr indent="0" marL="0">
               <a:buNone/>
             </a:pPr>
             <a:r>
-              <a:rPr lang="en-US" sz="1300" b="1" dirty="0">
-                <a:solidFill>
-                  <a:srgbClr val="1D1D1F"/>
-                </a:solidFill>
-                <a:latin typeface="Arial" pitchFamily="34" charset="0"/>
-                <a:ea typeface="Arial" pitchFamily="34" charset="-122"/>
-                <a:cs typeface="Arial" pitchFamily="34" charset="-120"/>
-              </a:rPr>
-              <a:t>[Nombre]</a:t>
-            </a:r>
-            <a:endParaRPr lang="en-US" sz="1300" dirty="0"/>
-          </a:p>
-        </p:txBody>
-      </p:sp>
-      <p:sp>
-        <p:nvSpPr>
-          <p:cNvPr id="21" name="Text 16"/>
-          <p:cNvSpPr/>
-          <p:nvPr/>
-        </p:nvSpPr>
-        <p:spPr>
-          <a:xfrm>
-            <a:off x="1325880" y="3831336"/>
-            <a:ext cx="2926080" cy="274320"/>
-          </a:xfrm>
-          <a:prstGeom prst="rect">
-            <a:avLst/>
-          </a:prstGeom>
-          <a:noFill/>
-          <a:ln/>
-        </p:spPr>
-        <p:txBody>
-          <a:bodyPr wrap="square" lIns="0" tIns="0" rIns="0" bIns="0" rtlCol="0" anchor="ctr"/>
-          <a:lstStyle/>
-          <a:p>
-            <a:pPr indent="0" marL="0">
-              <a:buNone/>
-            </a:pPr>
-            <a:r>
-              <a:rPr lang="en-US" sz="1000" dirty="0">
-                <a:solidFill>
-                  <a:srgbClr val="6E6E73"/>
-                </a:solidFill>
-                <a:latin typeface="Arial" pitchFamily="34" charset="0"/>
-                <a:ea typeface="Arial" pitchFamily="34" charset="-122"/>
-                <a:cs typeface="Arial" pitchFamily="34" charset="-120"/>
-              </a:rPr>
-              <a:t>[Rol]</a:t>
-            </a:r>
-            <a:endParaRPr lang="en-US" sz="1000" dirty="0"/>
-          </a:p>
-        </p:txBody>
-      </p:sp>
-      <p:sp>
-        <p:nvSpPr>
-          <p:cNvPr id="22" name="Shape 17"/>
-          <p:cNvSpPr/>
-          <p:nvPr/>
-        </p:nvSpPr>
-        <p:spPr>
-          <a:xfrm>
-            <a:off x="4709160" y="2971800"/>
-            <a:ext cx="3931920" cy="1234440"/>
+              <a:rPr lang="en-US" sz="880" dirty="0">
+                <a:solidFill>
+                  <a:srgbClr val="48484A"/>
+                </a:solidFill>
+                <a:latin typeface="Arial" pitchFamily="34" charset="0"/>
+                <a:ea typeface="Arial" pitchFamily="34" charset="-122"/>
+                <a:cs typeface="Arial" pitchFamily="34" charset="-120"/>
+              </a:rPr>
+              <a:t>El dispositivo dedicado garantiza calidad de audio clínico y crea un hábito diario: un costo de cambio real frente a cualquier app.</a:t>
+            </a:r>
+            <a:endParaRPr lang="en-US" sz="880" dirty="0"/>
+          </a:p>
+        </p:txBody>
+      </p:sp>
+      <p:sp>
+        <p:nvSpPr>
+          <p:cNvPr id="19" name="Shape 14"/>
+          <p:cNvSpPr/>
+          <p:nvPr/>
+        </p:nvSpPr>
+        <p:spPr>
+          <a:xfrm>
+            <a:off x="502920" y="3749040"/>
+            <a:ext cx="8138160" cy="685800"/>
           </a:xfrm>
           <a:prstGeom prst="roundRect">
             <a:avLst>
-              <a:gd name="adj" fmla="val 6667"/>
+              <a:gd name="adj" fmla="val 12000"/>
             </a:avLst>
           </a:prstGeom>
           <a:solidFill>
-            <a:srgbClr val="FFFFFF"/>
+            <a:srgbClr val="EAF3FF"/>
           </a:solidFill>
           <a:ln w="9525">
             <a:solidFill>
-              <a:srgbClr val="E2E2E6"/>
+              <a:srgbClr val="CFE4FB"/>
             </a:solidFill>
             <a:prstDash val="solid"/>
           </a:ln>
@@ -3056,27 +3042,27 @@
       </p:sp>
       <p:sp>
         <p:nvSpPr>
-          <p:cNvPr id="23" name="Shape 18"/>
-          <p:cNvSpPr/>
-          <p:nvPr/>
-        </p:nvSpPr>
-        <p:spPr>
-          <a:xfrm>
-            <a:off x="4910328" y="3172968"/>
-            <a:ext cx="502920" cy="502920"/>
+          <p:cNvPr id="20" name="Shape 15"/>
+          <p:cNvSpPr/>
+          <p:nvPr/>
+        </p:nvSpPr>
+        <p:spPr>
+          <a:xfrm>
+            <a:off x="704088" y="3886200"/>
+            <a:ext cx="411480" cy="411480"/>
           </a:xfrm>
           <a:prstGeom prst="ellipse">
             <a:avLst/>
           </a:prstGeom>
           <a:solidFill>
-            <a:srgbClr val="EAF3FF"/>
+            <a:srgbClr val="FFFFFF"/>
           </a:solidFill>
           <a:ln/>
         </p:spPr>
       </p:sp>
       <p:pic>
         <p:nvPicPr>
-          <p:cNvPr id="24" name="Image 3" descr="preencoded.png">    </p:cNvPr>
+          <p:cNvPr id="21" name="Image 3" descr="preencoded.png">    </p:cNvPr>
           <p:cNvPicPr>
             <a:picLocks noChangeAspect="1"/>
           </p:cNvPicPr>
@@ -3090,8 +3076,8 @@
         </p:blipFill>
         <p:spPr>
           <a:xfrm>
-            <a:off x="4980737" y="3243377"/>
-            <a:ext cx="362102" cy="362102"/>
+            <a:off x="761695" y="3943807"/>
+            <a:ext cx="296266" cy="296266"/>
           </a:xfrm>
           <a:prstGeom prst="rect">
             <a:avLst/>
@@ -3100,147 +3086,30 @@
       </p:pic>
       <p:sp>
         <p:nvSpPr>
-          <p:cNvPr id="25" name="Text 19"/>
-          <p:cNvSpPr/>
-          <p:nvPr/>
-        </p:nvSpPr>
-        <p:spPr>
-          <a:xfrm>
-            <a:off x="5532120" y="3118104"/>
-            <a:ext cx="2926080" cy="365760"/>
-          </a:xfrm>
-          <a:prstGeom prst="rect">
-            <a:avLst/>
-          </a:prstGeom>
-          <a:noFill/>
-          <a:ln/>
-        </p:spPr>
-        <p:txBody>
-          <a:bodyPr wrap="square" lIns="0" tIns="0" rIns="0" bIns="0" rtlCol="0" anchor="t"/>
+          <p:cNvPr id="22" name="Text 16"/>
+          <p:cNvSpPr/>
+          <p:nvPr/>
+        </p:nvSpPr>
+        <p:spPr>
+          <a:xfrm>
+            <a:off x="1280160" y="3749040"/>
+            <a:ext cx="7132320" cy="685800"/>
+          </a:xfrm>
+          <a:prstGeom prst="rect">
+            <a:avLst/>
+          </a:prstGeom>
+          <a:noFill/>
+          <a:ln/>
+        </p:spPr>
+        <p:txBody>
+          <a:bodyPr wrap="square" lIns="0" tIns="0" rIns="0" bIns="0" rtlCol="0" anchor="ctr"/>
           <a:lstStyle/>
           <a:p>
             <a:pPr indent="0" marL="0">
               <a:buNone/>
             </a:pPr>
             <a:r>
-              <a:rPr lang="en-US" sz="850" b="1" spc="50" kern="0" dirty="0">
-                <a:solidFill>
-                  <a:srgbClr val="0071E3"/>
-                </a:solidFill>
-                <a:latin typeface="Arial" pitchFamily="34" charset="0"/>
-                <a:ea typeface="Arial" pitchFamily="34" charset="-122"/>
-                <a:cs typeface="Arial" pitchFamily="34" charset="-120"/>
-              </a:rPr>
-              <a:t>LEGAL, CONTACTOS Y SECTOR SALUD</a:t>
-            </a:r>
-            <a:endParaRPr lang="en-US" sz="850" dirty="0"/>
-          </a:p>
-        </p:txBody>
-      </p:sp>
-      <p:sp>
-        <p:nvSpPr>
-          <p:cNvPr id="26" name="Text 20"/>
-          <p:cNvSpPr/>
-          <p:nvPr/>
-        </p:nvSpPr>
-        <p:spPr>
-          <a:xfrm>
-            <a:off x="5532120" y="3538728"/>
-            <a:ext cx="2926080" cy="274320"/>
-          </a:xfrm>
-          <a:prstGeom prst="rect">
-            <a:avLst/>
-          </a:prstGeom>
-          <a:noFill/>
-          <a:ln/>
-        </p:spPr>
-        <p:txBody>
-          <a:bodyPr wrap="square" lIns="0" tIns="0" rIns="0" bIns="0" rtlCol="0" anchor="ctr"/>
-          <a:lstStyle/>
-          <a:p>
-            <a:pPr indent="0" marL="0">
-              <a:buNone/>
-            </a:pPr>
-            <a:r>
-              <a:rPr lang="en-US" sz="1300" b="1" dirty="0">
-                <a:solidFill>
-                  <a:srgbClr val="1D1D1F"/>
-                </a:solidFill>
-                <a:latin typeface="Arial" pitchFamily="34" charset="0"/>
-                <a:ea typeface="Arial" pitchFamily="34" charset="-122"/>
-                <a:cs typeface="Arial" pitchFamily="34" charset="-120"/>
-              </a:rPr>
-              <a:t>[Nombre]</a:t>
-            </a:r>
-            <a:endParaRPr lang="en-US" sz="1300" dirty="0"/>
-          </a:p>
-        </p:txBody>
-      </p:sp>
-      <p:sp>
-        <p:nvSpPr>
-          <p:cNvPr id="27" name="Text 21"/>
-          <p:cNvSpPr/>
-          <p:nvPr/>
-        </p:nvSpPr>
-        <p:spPr>
-          <a:xfrm>
-            <a:off x="5532120" y="3831336"/>
-            <a:ext cx="2926080" cy="274320"/>
-          </a:xfrm>
-          <a:prstGeom prst="rect">
-            <a:avLst/>
-          </a:prstGeom>
-          <a:noFill/>
-          <a:ln/>
-        </p:spPr>
-        <p:txBody>
-          <a:bodyPr wrap="square" lIns="0" tIns="0" rIns="0" bIns="0" rtlCol="0" anchor="ctr"/>
-          <a:lstStyle/>
-          <a:p>
-            <a:pPr indent="0" marL="0">
-              <a:buNone/>
-            </a:pPr>
-            <a:r>
-              <a:rPr lang="en-US" sz="1000" dirty="0">
-                <a:solidFill>
-                  <a:srgbClr val="6E6E73"/>
-                </a:solidFill>
-                <a:latin typeface="Arial" pitchFamily="34" charset="0"/>
-                <a:ea typeface="Arial" pitchFamily="34" charset="-122"/>
-                <a:cs typeface="Arial" pitchFamily="34" charset="-120"/>
-              </a:rPr>
-              <a:t>[Rol]</a:t>
-            </a:r>
-            <a:endParaRPr lang="en-US" sz="1000" dirty="0"/>
-          </a:p>
-        </p:txBody>
-      </p:sp>
-      <p:sp>
-        <p:nvSpPr>
-          <p:cNvPr id="28" name="Text 22"/>
-          <p:cNvSpPr/>
-          <p:nvPr/>
-        </p:nvSpPr>
-        <p:spPr>
-          <a:xfrm>
-            <a:off x="502920" y="4297680"/>
-            <a:ext cx="8138160" cy="457200"/>
-          </a:xfrm>
-          <a:prstGeom prst="rect">
-            <a:avLst/>
-          </a:prstGeom>
-          <a:noFill/>
-          <a:ln/>
-        </p:spPr>
-        <p:txBody>
-          <a:bodyPr wrap="square" lIns="0" tIns="0" rIns="0" bIns="0" rtlCol="0" anchor="ctr"/>
-          <a:lstStyle/>
-          <a:p>
-            <a:pPr indent="0" marL="0">
-              <a:buNone/>
-            </a:pPr>
-            <a:r>
-              <a:rPr lang="en-US" sz="1300" b="1" i="1" dirty="0">
+              <a:rPr lang="en-US" sz="1100" b="1" dirty="0">
                 <a:solidFill>
                   <a:srgbClr val="0A3D91"/>
                 </a:solidFill>
@@ -3248,9 +3117,9 @@
                 <a:ea typeface="Arial" pitchFamily="34" charset="-122"/>
                 <a:cs typeface="Arial" pitchFamily="34" charset="-120"/>
               </a:rPr>
-              <a:t>Tenemos la capacidad para construir, validar y vender la solución.</a:t>
-            </a:r>
-            <a:endParaRPr lang="en-US" sz="1300" dirty="0"/>
+              <a:t>Seguridad y protección de datos cubiertas desde el diseño, alineadas con la regulación colombiana para datos sensibles en salud.</a:t>
+            </a:r>
+            <a:endParaRPr lang="en-US" sz="1100" dirty="0"/>
           </a:p>
         </p:txBody>
       </p:sp>
@@ -3294,7 +3163,936 @@
         </p:nvSpPr>
         <p:spPr>
           <a:xfrm>
-            <a:off x="502920" y="365760"/>
+            <a:off x="502920" y="320040"/>
+            <a:ext cx="8138160" cy="274320"/>
+          </a:xfrm>
+          <a:prstGeom prst="rect">
+            <a:avLst/>
+          </a:prstGeom>
+          <a:noFill/>
+          <a:ln/>
+        </p:spPr>
+        <p:txBody>
+          <a:bodyPr wrap="square" lIns="0" tIns="0" rIns="0" bIns="0" rtlCol="0" anchor="ctr"/>
+          <a:lstStyle/>
+          <a:p>
+            <a:pPr indent="0" marL="0">
+              <a:buNone/>
+            </a:pPr>
+            <a:r>
+              <a:rPr lang="en-US" sz="1050" b="1" spc="200" kern="0" dirty="0">
+                <a:solidFill>
+                  <a:srgbClr val="0071E3"/>
+                </a:solidFill>
+                <a:latin typeface="Arial" pitchFamily="34" charset="0"/>
+                <a:ea typeface="Arial" pitchFamily="34" charset="-122"/>
+                <a:cs typeface="Arial" pitchFamily="34" charset="-120"/>
+              </a:rPr>
+              <a:t>EQUIPO</a:t>
+            </a:r>
+            <a:endParaRPr lang="en-US" sz="1050" dirty="0"/>
+          </a:p>
+        </p:txBody>
+      </p:sp>
+      <p:sp>
+        <p:nvSpPr>
+          <p:cNvPr id="3" name="Text 1"/>
+          <p:cNvSpPr/>
+          <p:nvPr/>
+        </p:nvSpPr>
+        <p:spPr>
+          <a:xfrm>
+            <a:off x="502920" y="685800"/>
+            <a:ext cx="8138160" cy="548640"/>
+          </a:xfrm>
+          <a:prstGeom prst="rect">
+            <a:avLst/>
+          </a:prstGeom>
+          <a:noFill/>
+          <a:ln/>
+        </p:spPr>
+        <p:txBody>
+          <a:bodyPr wrap="square" lIns="0" tIns="0" rIns="0" bIns="0" rtlCol="0" anchor="ctr"/>
+          <a:lstStyle/>
+          <a:p>
+            <a:pPr indent="0" marL="0">
+              <a:buNone/>
+            </a:pPr>
+            <a:r>
+              <a:rPr lang="en-US" sz="2300" b="1" dirty="0">
+                <a:solidFill>
+                  <a:srgbClr val="1D1D1F"/>
+                </a:solidFill>
+                <a:latin typeface="Arial" pitchFamily="34" charset="0"/>
+                <a:ea typeface="Arial" pitchFamily="34" charset="-122"/>
+                <a:cs typeface="Arial" pitchFamily="34" charset="-120"/>
+              </a:rPr>
+              <a:t>El equipo para construir, vender y validar en salud.</a:t>
+            </a:r>
+            <a:endParaRPr lang="en-US" sz="2300" dirty="0"/>
+          </a:p>
+        </p:txBody>
+      </p:sp>
+      <p:sp>
+        <p:nvSpPr>
+          <p:cNvPr id="4" name="Shape 2"/>
+          <p:cNvSpPr/>
+          <p:nvPr/>
+        </p:nvSpPr>
+        <p:spPr>
+          <a:xfrm>
+            <a:off x="502920" y="1463040"/>
+            <a:ext cx="3931920" cy="1234440"/>
+          </a:xfrm>
+          <a:prstGeom prst="roundRect">
+            <a:avLst>
+              <a:gd name="adj" fmla="val 6667"/>
+            </a:avLst>
+          </a:prstGeom>
+          <a:solidFill>
+            <a:srgbClr val="FFFFFF"/>
+          </a:solidFill>
+          <a:ln w="9525">
+            <a:solidFill>
+              <a:srgbClr val="E2E2E6"/>
+            </a:solidFill>
+            <a:prstDash val="solid"/>
+          </a:ln>
+          <a:effectLst>
+            <a:outerShdw sx="100000" sy="100000" kx="0" ky="0" algn="bl" rotWithShape="0" blurRad="101600" dist="25400" dir="5400000">
+              <a:srgbClr val="0A3D91">
+                <a:alpha val="7000"/>
+              </a:srgbClr>
+            </a:outerShdw>
+          </a:effectLst>
+        </p:spPr>
+      </p:sp>
+      <p:sp>
+        <p:nvSpPr>
+          <p:cNvPr id="5" name="Shape 3"/>
+          <p:cNvSpPr/>
+          <p:nvPr/>
+        </p:nvSpPr>
+        <p:spPr>
+          <a:xfrm>
+            <a:off x="704088" y="1664208"/>
+            <a:ext cx="502920" cy="502920"/>
+          </a:xfrm>
+          <a:prstGeom prst="ellipse">
+            <a:avLst/>
+          </a:prstGeom>
+          <a:solidFill>
+            <a:srgbClr val="EAF3FF"/>
+          </a:solidFill>
+          <a:ln/>
+        </p:spPr>
+      </p:sp>
+      <p:pic>
+        <p:nvPicPr>
+          <p:cNvPr id="6" name="Image 0" descr="preencoded.png">    </p:cNvPr>
+          <p:cNvPicPr>
+            <a:picLocks noChangeAspect="1"/>
+          </p:cNvPicPr>
+          <p:nvPr/>
+        </p:nvPicPr>
+        <p:blipFill>
+          <a:blip r:embed="rId1"/>
+          <a:stretch>
+            <a:fillRect/>
+          </a:stretch>
+        </p:blipFill>
+        <p:spPr>
+          <a:xfrm>
+            <a:off x="774497" y="1734617"/>
+            <a:ext cx="362102" cy="362102"/>
+          </a:xfrm>
+          <a:prstGeom prst="rect">
+            <a:avLst/>
+          </a:prstGeom>
+        </p:spPr>
+      </p:pic>
+      <p:sp>
+        <p:nvSpPr>
+          <p:cNvPr id="7" name="Text 4"/>
+          <p:cNvSpPr/>
+          <p:nvPr/>
+        </p:nvSpPr>
+        <p:spPr>
+          <a:xfrm>
+            <a:off x="1325880" y="1609344"/>
+            <a:ext cx="2926080" cy="365760"/>
+          </a:xfrm>
+          <a:prstGeom prst="rect">
+            <a:avLst/>
+          </a:prstGeom>
+          <a:noFill/>
+          <a:ln/>
+        </p:spPr>
+        <p:txBody>
+          <a:bodyPr wrap="square" lIns="0" tIns="0" rIns="0" bIns="0" rtlCol="0" anchor="t"/>
+          <a:lstStyle/>
+          <a:p>
+            <a:pPr indent="0" marL="0">
+              <a:buNone/>
+            </a:pPr>
+            <a:r>
+              <a:rPr lang="en-US" sz="850" b="1" spc="50" kern="0" dirty="0">
+                <a:solidFill>
+                  <a:srgbClr val="0071E3"/>
+                </a:solidFill>
+                <a:latin typeface="Arial" pitchFamily="34" charset="0"/>
+                <a:ea typeface="Arial" pitchFamily="34" charset="-122"/>
+                <a:cs typeface="Arial" pitchFamily="34" charset="-120"/>
+              </a:rPr>
+              <a:t>DESARROLLO DE SOFTWARE Y ARQUITECTURA</a:t>
+            </a:r>
+            <a:endParaRPr lang="en-US" sz="850" dirty="0"/>
+          </a:p>
+        </p:txBody>
+      </p:sp>
+      <p:sp>
+        <p:nvSpPr>
+          <p:cNvPr id="8" name="Text 5"/>
+          <p:cNvSpPr/>
+          <p:nvPr/>
+        </p:nvSpPr>
+        <p:spPr>
+          <a:xfrm>
+            <a:off x="1325880" y="2029968"/>
+            <a:ext cx="2926080" cy="274320"/>
+          </a:xfrm>
+          <a:prstGeom prst="rect">
+            <a:avLst/>
+          </a:prstGeom>
+          <a:noFill/>
+          <a:ln/>
+        </p:spPr>
+        <p:txBody>
+          <a:bodyPr wrap="square" lIns="0" tIns="0" rIns="0" bIns="0" rtlCol="0" anchor="ctr"/>
+          <a:lstStyle/>
+          <a:p>
+            <a:pPr indent="0" marL="0">
+              <a:buNone/>
+            </a:pPr>
+            <a:r>
+              <a:rPr lang="en-US" sz="1300" b="1" dirty="0">
+                <a:solidFill>
+                  <a:srgbClr val="1D1D1F"/>
+                </a:solidFill>
+                <a:latin typeface="Arial" pitchFamily="34" charset="0"/>
+                <a:ea typeface="Arial" pitchFamily="34" charset="-122"/>
+                <a:cs typeface="Arial" pitchFamily="34" charset="-120"/>
+              </a:rPr>
+              <a:t>[Nombre]</a:t>
+            </a:r>
+            <a:endParaRPr lang="en-US" sz="1300" dirty="0"/>
+          </a:p>
+        </p:txBody>
+      </p:sp>
+      <p:sp>
+        <p:nvSpPr>
+          <p:cNvPr id="9" name="Text 6"/>
+          <p:cNvSpPr/>
+          <p:nvPr/>
+        </p:nvSpPr>
+        <p:spPr>
+          <a:xfrm>
+            <a:off x="1325880" y="2322576"/>
+            <a:ext cx="2926080" cy="274320"/>
+          </a:xfrm>
+          <a:prstGeom prst="rect">
+            <a:avLst/>
+          </a:prstGeom>
+          <a:noFill/>
+          <a:ln/>
+        </p:spPr>
+        <p:txBody>
+          <a:bodyPr wrap="square" lIns="0" tIns="0" rIns="0" bIns="0" rtlCol="0" anchor="ctr"/>
+          <a:lstStyle/>
+          <a:p>
+            <a:pPr indent="0" marL="0">
+              <a:buNone/>
+            </a:pPr>
+            <a:r>
+              <a:rPr lang="en-US" sz="1000" dirty="0">
+                <a:solidFill>
+                  <a:srgbClr val="6E6E73"/>
+                </a:solidFill>
+                <a:latin typeface="Arial" pitchFamily="34" charset="0"/>
+                <a:ea typeface="Arial" pitchFamily="34" charset="-122"/>
+                <a:cs typeface="Arial" pitchFamily="34" charset="-120"/>
+              </a:rPr>
+              <a:t>[Rol]</a:t>
+            </a:r>
+            <a:endParaRPr lang="en-US" sz="1000" dirty="0"/>
+          </a:p>
+        </p:txBody>
+      </p:sp>
+      <p:sp>
+        <p:nvSpPr>
+          <p:cNvPr id="10" name="Shape 7"/>
+          <p:cNvSpPr/>
+          <p:nvPr/>
+        </p:nvSpPr>
+        <p:spPr>
+          <a:xfrm>
+            <a:off x="4709160" y="1463040"/>
+            <a:ext cx="3931920" cy="1234440"/>
+          </a:xfrm>
+          <a:prstGeom prst="roundRect">
+            <a:avLst>
+              <a:gd name="adj" fmla="val 6667"/>
+            </a:avLst>
+          </a:prstGeom>
+          <a:solidFill>
+            <a:srgbClr val="FFFFFF"/>
+          </a:solidFill>
+          <a:ln w="9525">
+            <a:solidFill>
+              <a:srgbClr val="E2E2E6"/>
+            </a:solidFill>
+            <a:prstDash val="solid"/>
+          </a:ln>
+          <a:effectLst>
+            <a:outerShdw sx="100000" sy="100000" kx="0" ky="0" algn="bl" rotWithShape="0" blurRad="101600" dist="25400" dir="5400000">
+              <a:srgbClr val="0A3D91">
+                <a:alpha val="7000"/>
+              </a:srgbClr>
+            </a:outerShdw>
+          </a:effectLst>
+        </p:spPr>
+      </p:sp>
+      <p:sp>
+        <p:nvSpPr>
+          <p:cNvPr id="11" name="Shape 8"/>
+          <p:cNvSpPr/>
+          <p:nvPr/>
+        </p:nvSpPr>
+        <p:spPr>
+          <a:xfrm>
+            <a:off x="4910328" y="1664208"/>
+            <a:ext cx="502920" cy="502920"/>
+          </a:xfrm>
+          <a:prstGeom prst="ellipse">
+            <a:avLst/>
+          </a:prstGeom>
+          <a:solidFill>
+            <a:srgbClr val="EAF3FF"/>
+          </a:solidFill>
+          <a:ln/>
+        </p:spPr>
+      </p:sp>
+      <p:pic>
+        <p:nvPicPr>
+          <p:cNvPr id="12" name="Image 1" descr="preencoded.png">    </p:cNvPr>
+          <p:cNvPicPr>
+            <a:picLocks noChangeAspect="1"/>
+          </p:cNvPicPr>
+          <p:nvPr/>
+        </p:nvPicPr>
+        <p:blipFill>
+          <a:blip r:embed="rId2"/>
+          <a:stretch>
+            <a:fillRect/>
+          </a:stretch>
+        </p:blipFill>
+        <p:spPr>
+          <a:xfrm>
+            <a:off x="4980737" y="1734617"/>
+            <a:ext cx="362102" cy="362102"/>
+          </a:xfrm>
+          <a:prstGeom prst="rect">
+            <a:avLst/>
+          </a:prstGeom>
+        </p:spPr>
+      </p:pic>
+      <p:sp>
+        <p:nvSpPr>
+          <p:cNvPr id="13" name="Text 9"/>
+          <p:cNvSpPr/>
+          <p:nvPr/>
+        </p:nvSpPr>
+        <p:spPr>
+          <a:xfrm>
+            <a:off x="5532120" y="1609344"/>
+            <a:ext cx="2926080" cy="365760"/>
+          </a:xfrm>
+          <a:prstGeom prst="rect">
+            <a:avLst/>
+          </a:prstGeom>
+          <a:noFill/>
+          <a:ln/>
+        </p:spPr>
+        <p:txBody>
+          <a:bodyPr wrap="square" lIns="0" tIns="0" rIns="0" bIns="0" rtlCol="0" anchor="t"/>
+          <a:lstStyle/>
+          <a:p>
+            <a:pPr indent="0" marL="0">
+              <a:buNone/>
+            </a:pPr>
+            <a:r>
+              <a:rPr lang="en-US" sz="850" b="1" spc="50" kern="0" dirty="0">
+                <a:solidFill>
+                  <a:srgbClr val="0071E3"/>
+                </a:solidFill>
+                <a:latin typeface="Arial" pitchFamily="34" charset="0"/>
+                <a:ea typeface="Arial" pitchFamily="34" charset="-122"/>
+                <a:cs typeface="Arial" pitchFamily="34" charset="-120"/>
+              </a:rPr>
+              <a:t>IA, AUTOMATIZACIÓN Y PRODUCTO</a:t>
+            </a:r>
+            <a:endParaRPr lang="en-US" sz="850" dirty="0"/>
+          </a:p>
+        </p:txBody>
+      </p:sp>
+      <p:sp>
+        <p:nvSpPr>
+          <p:cNvPr id="14" name="Text 10"/>
+          <p:cNvSpPr/>
+          <p:nvPr/>
+        </p:nvSpPr>
+        <p:spPr>
+          <a:xfrm>
+            <a:off x="5532120" y="2029968"/>
+            <a:ext cx="2926080" cy="274320"/>
+          </a:xfrm>
+          <a:prstGeom prst="rect">
+            <a:avLst/>
+          </a:prstGeom>
+          <a:noFill/>
+          <a:ln/>
+        </p:spPr>
+        <p:txBody>
+          <a:bodyPr wrap="square" lIns="0" tIns="0" rIns="0" bIns="0" rtlCol="0" anchor="ctr"/>
+          <a:lstStyle/>
+          <a:p>
+            <a:pPr indent="0" marL="0">
+              <a:buNone/>
+            </a:pPr>
+            <a:r>
+              <a:rPr lang="en-US" sz="1300" b="1" dirty="0">
+                <a:solidFill>
+                  <a:srgbClr val="1D1D1F"/>
+                </a:solidFill>
+                <a:latin typeface="Arial" pitchFamily="34" charset="0"/>
+                <a:ea typeface="Arial" pitchFamily="34" charset="-122"/>
+                <a:cs typeface="Arial" pitchFamily="34" charset="-120"/>
+              </a:rPr>
+              <a:t>[Nombre]</a:t>
+            </a:r>
+            <a:endParaRPr lang="en-US" sz="1300" dirty="0"/>
+          </a:p>
+        </p:txBody>
+      </p:sp>
+      <p:sp>
+        <p:nvSpPr>
+          <p:cNvPr id="15" name="Text 11"/>
+          <p:cNvSpPr/>
+          <p:nvPr/>
+        </p:nvSpPr>
+        <p:spPr>
+          <a:xfrm>
+            <a:off x="5532120" y="2322576"/>
+            <a:ext cx="2926080" cy="274320"/>
+          </a:xfrm>
+          <a:prstGeom prst="rect">
+            <a:avLst/>
+          </a:prstGeom>
+          <a:noFill/>
+          <a:ln/>
+        </p:spPr>
+        <p:txBody>
+          <a:bodyPr wrap="square" lIns="0" tIns="0" rIns="0" bIns="0" rtlCol="0" anchor="ctr"/>
+          <a:lstStyle/>
+          <a:p>
+            <a:pPr indent="0" marL="0">
+              <a:buNone/>
+            </a:pPr>
+            <a:r>
+              <a:rPr lang="en-US" sz="1000" dirty="0">
+                <a:solidFill>
+                  <a:srgbClr val="6E6E73"/>
+                </a:solidFill>
+                <a:latin typeface="Arial" pitchFamily="34" charset="0"/>
+                <a:ea typeface="Arial" pitchFamily="34" charset="-122"/>
+                <a:cs typeface="Arial" pitchFamily="34" charset="-120"/>
+              </a:rPr>
+              <a:t>[Rol]</a:t>
+            </a:r>
+            <a:endParaRPr lang="en-US" sz="1000" dirty="0"/>
+          </a:p>
+        </p:txBody>
+      </p:sp>
+      <p:sp>
+        <p:nvSpPr>
+          <p:cNvPr id="16" name="Shape 12"/>
+          <p:cNvSpPr/>
+          <p:nvPr/>
+        </p:nvSpPr>
+        <p:spPr>
+          <a:xfrm>
+            <a:off x="502920" y="2971800"/>
+            <a:ext cx="3931920" cy="1234440"/>
+          </a:xfrm>
+          <a:prstGeom prst="roundRect">
+            <a:avLst>
+              <a:gd name="adj" fmla="val 6667"/>
+            </a:avLst>
+          </a:prstGeom>
+          <a:solidFill>
+            <a:srgbClr val="FFFFFF"/>
+          </a:solidFill>
+          <a:ln w="9525">
+            <a:solidFill>
+              <a:srgbClr val="E2E2E6"/>
+            </a:solidFill>
+            <a:prstDash val="solid"/>
+          </a:ln>
+          <a:effectLst>
+            <a:outerShdw sx="100000" sy="100000" kx="0" ky="0" algn="bl" rotWithShape="0" blurRad="101600" dist="25400" dir="5400000">
+              <a:srgbClr val="0A3D91">
+                <a:alpha val="7000"/>
+              </a:srgbClr>
+            </a:outerShdw>
+          </a:effectLst>
+        </p:spPr>
+      </p:sp>
+      <p:sp>
+        <p:nvSpPr>
+          <p:cNvPr id="17" name="Shape 13"/>
+          <p:cNvSpPr/>
+          <p:nvPr/>
+        </p:nvSpPr>
+        <p:spPr>
+          <a:xfrm>
+            <a:off x="704088" y="3172968"/>
+            <a:ext cx="502920" cy="502920"/>
+          </a:xfrm>
+          <a:prstGeom prst="ellipse">
+            <a:avLst/>
+          </a:prstGeom>
+          <a:solidFill>
+            <a:srgbClr val="EAF3FF"/>
+          </a:solidFill>
+          <a:ln/>
+        </p:spPr>
+      </p:sp>
+      <p:pic>
+        <p:nvPicPr>
+          <p:cNvPr id="18" name="Image 2" descr="preencoded.png">    </p:cNvPr>
+          <p:cNvPicPr>
+            <a:picLocks noChangeAspect="1"/>
+          </p:cNvPicPr>
+          <p:nvPr/>
+        </p:nvPicPr>
+        <p:blipFill>
+          <a:blip r:embed="rId3"/>
+          <a:stretch>
+            <a:fillRect/>
+          </a:stretch>
+        </p:blipFill>
+        <p:spPr>
+          <a:xfrm>
+            <a:off x="774497" y="3243377"/>
+            <a:ext cx="362102" cy="362102"/>
+          </a:xfrm>
+          <a:prstGeom prst="rect">
+            <a:avLst/>
+          </a:prstGeom>
+        </p:spPr>
+      </p:pic>
+      <p:sp>
+        <p:nvSpPr>
+          <p:cNvPr id="19" name="Text 14"/>
+          <p:cNvSpPr/>
+          <p:nvPr/>
+        </p:nvSpPr>
+        <p:spPr>
+          <a:xfrm>
+            <a:off x="1325880" y="3118104"/>
+            <a:ext cx="2926080" cy="365760"/>
+          </a:xfrm>
+          <a:prstGeom prst="rect">
+            <a:avLst/>
+          </a:prstGeom>
+          <a:noFill/>
+          <a:ln/>
+        </p:spPr>
+        <p:txBody>
+          <a:bodyPr wrap="square" lIns="0" tIns="0" rIns="0" bIns="0" rtlCol="0" anchor="t"/>
+          <a:lstStyle/>
+          <a:p>
+            <a:pPr indent="0" marL="0">
+              <a:buNone/>
+            </a:pPr>
+            <a:r>
+              <a:rPr lang="en-US" sz="850" b="1" spc="50" kern="0" dirty="0">
+                <a:solidFill>
+                  <a:srgbClr val="0071E3"/>
+                </a:solidFill>
+                <a:latin typeface="Arial" pitchFamily="34" charset="0"/>
+                <a:ea typeface="Arial" pitchFamily="34" charset="-122"/>
+                <a:cs typeface="Arial" pitchFamily="34" charset="-120"/>
+              </a:rPr>
+              <a:t>ESTRATEGIA COMERCIAL, VENTAS Y VALIDACIÓN</a:t>
+            </a:r>
+            <a:endParaRPr lang="en-US" sz="850" dirty="0"/>
+          </a:p>
+        </p:txBody>
+      </p:sp>
+      <p:sp>
+        <p:nvSpPr>
+          <p:cNvPr id="20" name="Text 15"/>
+          <p:cNvSpPr/>
+          <p:nvPr/>
+        </p:nvSpPr>
+        <p:spPr>
+          <a:xfrm>
+            <a:off x="1325880" y="3538728"/>
+            <a:ext cx="2926080" cy="274320"/>
+          </a:xfrm>
+          <a:prstGeom prst="rect">
+            <a:avLst/>
+          </a:prstGeom>
+          <a:noFill/>
+          <a:ln/>
+        </p:spPr>
+        <p:txBody>
+          <a:bodyPr wrap="square" lIns="0" tIns="0" rIns="0" bIns="0" rtlCol="0" anchor="ctr"/>
+          <a:lstStyle/>
+          <a:p>
+            <a:pPr indent="0" marL="0">
+              <a:buNone/>
+            </a:pPr>
+            <a:r>
+              <a:rPr lang="en-US" sz="1300" b="1" dirty="0">
+                <a:solidFill>
+                  <a:srgbClr val="1D1D1F"/>
+                </a:solidFill>
+                <a:latin typeface="Arial" pitchFamily="34" charset="0"/>
+                <a:ea typeface="Arial" pitchFamily="34" charset="-122"/>
+                <a:cs typeface="Arial" pitchFamily="34" charset="-120"/>
+              </a:rPr>
+              <a:t>[Nombre]</a:t>
+            </a:r>
+            <a:endParaRPr lang="en-US" sz="1300" dirty="0"/>
+          </a:p>
+        </p:txBody>
+      </p:sp>
+      <p:sp>
+        <p:nvSpPr>
+          <p:cNvPr id="21" name="Text 16"/>
+          <p:cNvSpPr/>
+          <p:nvPr/>
+        </p:nvSpPr>
+        <p:spPr>
+          <a:xfrm>
+            <a:off x="1325880" y="3831336"/>
+            <a:ext cx="2926080" cy="274320"/>
+          </a:xfrm>
+          <a:prstGeom prst="rect">
+            <a:avLst/>
+          </a:prstGeom>
+          <a:noFill/>
+          <a:ln/>
+        </p:spPr>
+        <p:txBody>
+          <a:bodyPr wrap="square" lIns="0" tIns="0" rIns="0" bIns="0" rtlCol="0" anchor="ctr"/>
+          <a:lstStyle/>
+          <a:p>
+            <a:pPr indent="0" marL="0">
+              <a:buNone/>
+            </a:pPr>
+            <a:r>
+              <a:rPr lang="en-US" sz="1000" dirty="0">
+                <a:solidFill>
+                  <a:srgbClr val="6E6E73"/>
+                </a:solidFill>
+                <a:latin typeface="Arial" pitchFamily="34" charset="0"/>
+                <a:ea typeface="Arial" pitchFamily="34" charset="-122"/>
+                <a:cs typeface="Arial" pitchFamily="34" charset="-120"/>
+              </a:rPr>
+              <a:t>[Rol]</a:t>
+            </a:r>
+            <a:endParaRPr lang="en-US" sz="1000" dirty="0"/>
+          </a:p>
+        </p:txBody>
+      </p:sp>
+      <p:sp>
+        <p:nvSpPr>
+          <p:cNvPr id="22" name="Shape 17"/>
+          <p:cNvSpPr/>
+          <p:nvPr/>
+        </p:nvSpPr>
+        <p:spPr>
+          <a:xfrm>
+            <a:off x="4709160" y="2971800"/>
+            <a:ext cx="3931920" cy="1234440"/>
+          </a:xfrm>
+          <a:prstGeom prst="roundRect">
+            <a:avLst>
+              <a:gd name="adj" fmla="val 6667"/>
+            </a:avLst>
+          </a:prstGeom>
+          <a:solidFill>
+            <a:srgbClr val="FFFFFF"/>
+          </a:solidFill>
+          <a:ln w="9525">
+            <a:solidFill>
+              <a:srgbClr val="E2E2E6"/>
+            </a:solidFill>
+            <a:prstDash val="solid"/>
+          </a:ln>
+          <a:effectLst>
+            <a:outerShdw sx="100000" sy="100000" kx="0" ky="0" algn="bl" rotWithShape="0" blurRad="101600" dist="25400" dir="5400000">
+              <a:srgbClr val="0A3D91">
+                <a:alpha val="7000"/>
+              </a:srgbClr>
+            </a:outerShdw>
+          </a:effectLst>
+        </p:spPr>
+      </p:sp>
+      <p:sp>
+        <p:nvSpPr>
+          <p:cNvPr id="23" name="Shape 18"/>
+          <p:cNvSpPr/>
+          <p:nvPr/>
+        </p:nvSpPr>
+        <p:spPr>
+          <a:xfrm>
+            <a:off x="4910328" y="3172968"/>
+            <a:ext cx="502920" cy="502920"/>
+          </a:xfrm>
+          <a:prstGeom prst="ellipse">
+            <a:avLst/>
+          </a:prstGeom>
+          <a:solidFill>
+            <a:srgbClr val="EAF3FF"/>
+          </a:solidFill>
+          <a:ln/>
+        </p:spPr>
+      </p:sp>
+      <p:pic>
+        <p:nvPicPr>
+          <p:cNvPr id="24" name="Image 3" descr="preencoded.png">    </p:cNvPr>
+          <p:cNvPicPr>
+            <a:picLocks noChangeAspect="1"/>
+          </p:cNvPicPr>
+          <p:nvPr/>
+        </p:nvPicPr>
+        <p:blipFill>
+          <a:blip r:embed="rId4"/>
+          <a:stretch>
+            <a:fillRect/>
+          </a:stretch>
+        </p:blipFill>
+        <p:spPr>
+          <a:xfrm>
+            <a:off x="4980737" y="3243377"/>
+            <a:ext cx="362102" cy="362102"/>
+          </a:xfrm>
+          <a:prstGeom prst="rect">
+            <a:avLst/>
+          </a:prstGeom>
+        </p:spPr>
+      </p:pic>
+      <p:sp>
+        <p:nvSpPr>
+          <p:cNvPr id="25" name="Text 19"/>
+          <p:cNvSpPr/>
+          <p:nvPr/>
+        </p:nvSpPr>
+        <p:spPr>
+          <a:xfrm>
+            <a:off x="5532120" y="3118104"/>
+            <a:ext cx="2926080" cy="365760"/>
+          </a:xfrm>
+          <a:prstGeom prst="rect">
+            <a:avLst/>
+          </a:prstGeom>
+          <a:noFill/>
+          <a:ln/>
+        </p:spPr>
+        <p:txBody>
+          <a:bodyPr wrap="square" lIns="0" tIns="0" rIns="0" bIns="0" rtlCol="0" anchor="t"/>
+          <a:lstStyle/>
+          <a:p>
+            <a:pPr indent="0" marL="0">
+              <a:buNone/>
+            </a:pPr>
+            <a:r>
+              <a:rPr lang="en-US" sz="850" b="1" spc="50" kern="0" dirty="0">
+                <a:solidFill>
+                  <a:srgbClr val="0071E3"/>
+                </a:solidFill>
+                <a:latin typeface="Arial" pitchFamily="34" charset="0"/>
+                <a:ea typeface="Arial" pitchFamily="34" charset="-122"/>
+                <a:cs typeface="Arial" pitchFamily="34" charset="-120"/>
+              </a:rPr>
+              <a:t>LEGAL, CONTACTOS Y SECTOR SALUD</a:t>
+            </a:r>
+            <a:endParaRPr lang="en-US" sz="850" dirty="0"/>
+          </a:p>
+        </p:txBody>
+      </p:sp>
+      <p:sp>
+        <p:nvSpPr>
+          <p:cNvPr id="26" name="Text 20"/>
+          <p:cNvSpPr/>
+          <p:nvPr/>
+        </p:nvSpPr>
+        <p:spPr>
+          <a:xfrm>
+            <a:off x="5532120" y="3538728"/>
+            <a:ext cx="2926080" cy="274320"/>
+          </a:xfrm>
+          <a:prstGeom prst="rect">
+            <a:avLst/>
+          </a:prstGeom>
+          <a:noFill/>
+          <a:ln/>
+        </p:spPr>
+        <p:txBody>
+          <a:bodyPr wrap="square" lIns="0" tIns="0" rIns="0" bIns="0" rtlCol="0" anchor="ctr"/>
+          <a:lstStyle/>
+          <a:p>
+            <a:pPr indent="0" marL="0">
+              <a:buNone/>
+            </a:pPr>
+            <a:r>
+              <a:rPr lang="en-US" sz="1300" b="1" dirty="0">
+                <a:solidFill>
+                  <a:srgbClr val="1D1D1F"/>
+                </a:solidFill>
+                <a:latin typeface="Arial" pitchFamily="34" charset="0"/>
+                <a:ea typeface="Arial" pitchFamily="34" charset="-122"/>
+                <a:cs typeface="Arial" pitchFamily="34" charset="-120"/>
+              </a:rPr>
+              <a:t>[Nombre]</a:t>
+            </a:r>
+            <a:endParaRPr lang="en-US" sz="1300" dirty="0"/>
+          </a:p>
+        </p:txBody>
+      </p:sp>
+      <p:sp>
+        <p:nvSpPr>
+          <p:cNvPr id="27" name="Text 21"/>
+          <p:cNvSpPr/>
+          <p:nvPr/>
+        </p:nvSpPr>
+        <p:spPr>
+          <a:xfrm>
+            <a:off x="5532120" y="3831336"/>
+            <a:ext cx="2926080" cy="274320"/>
+          </a:xfrm>
+          <a:prstGeom prst="rect">
+            <a:avLst/>
+          </a:prstGeom>
+          <a:noFill/>
+          <a:ln/>
+        </p:spPr>
+        <p:txBody>
+          <a:bodyPr wrap="square" lIns="0" tIns="0" rIns="0" bIns="0" rtlCol="0" anchor="ctr"/>
+          <a:lstStyle/>
+          <a:p>
+            <a:pPr indent="0" marL="0">
+              <a:buNone/>
+            </a:pPr>
+            <a:r>
+              <a:rPr lang="en-US" sz="1000" dirty="0">
+                <a:solidFill>
+                  <a:srgbClr val="6E6E73"/>
+                </a:solidFill>
+                <a:latin typeface="Arial" pitchFamily="34" charset="0"/>
+                <a:ea typeface="Arial" pitchFamily="34" charset="-122"/>
+                <a:cs typeface="Arial" pitchFamily="34" charset="-120"/>
+              </a:rPr>
+              <a:t>[Rol]</a:t>
+            </a:r>
+            <a:endParaRPr lang="en-US" sz="1000" dirty="0"/>
+          </a:p>
+        </p:txBody>
+      </p:sp>
+      <p:sp>
+        <p:nvSpPr>
+          <p:cNvPr id="28" name="Text 22"/>
+          <p:cNvSpPr/>
+          <p:nvPr/>
+        </p:nvSpPr>
+        <p:spPr>
+          <a:xfrm>
+            <a:off x="502920" y="4297680"/>
+            <a:ext cx="8138160" cy="457200"/>
+          </a:xfrm>
+          <a:prstGeom prst="rect">
+            <a:avLst/>
+          </a:prstGeom>
+          <a:noFill/>
+          <a:ln/>
+        </p:spPr>
+        <p:txBody>
+          <a:bodyPr wrap="square" lIns="0" tIns="0" rIns="0" bIns="0" rtlCol="0" anchor="ctr"/>
+          <a:lstStyle/>
+          <a:p>
+            <a:pPr indent="0" marL="0">
+              <a:buNone/>
+            </a:pPr>
+            <a:r>
+              <a:rPr lang="en-US" sz="1300" b="1" i="1" dirty="0">
+                <a:solidFill>
+                  <a:srgbClr val="0A3D91"/>
+                </a:solidFill>
+                <a:latin typeface="Arial" pitchFamily="34" charset="0"/>
+                <a:ea typeface="Arial" pitchFamily="34" charset="-122"/>
+                <a:cs typeface="Arial" pitchFamily="34" charset="-120"/>
+              </a:rPr>
+              <a:t>Tenemos la capacidad para construir, validar y vender la solución.</a:t>
+            </a:r>
+            <a:endParaRPr lang="en-US" sz="1300" dirty="0"/>
+          </a:p>
+        </p:txBody>
+      </p:sp>
+    </p:spTree>
+  </p:cSld>
+  <p:clrMapOvr>
+    <a:masterClrMapping/>
+  </p:clrMapOvr>
+</p:sld>
+</file>
+
+<file path=ppt/slides/slide12.xml><?xml version="1.0" encoding="utf-8"?>
+<p:sld xmlns:a="http://schemas.openxmlformats.org/drawingml/2006/main" xmlns:r="http://schemas.openxmlformats.org/officeDocument/2006/relationships" xmlns:p="http://schemas.openxmlformats.org/presentationml/2006/main">
+  <p:cSld name="Slide 12">
+    <p:bg>
+      <p:bgPr>
+        <a:solidFill>
+          <a:srgbClr val="FFFFFF"/>
+        </a:solidFill>
+      </p:bgPr>
+    </p:bg>
+    <p:spTree>
+      <p:nvGrpSpPr>
+        <p:cNvPr id="1" name=""/>
+        <p:cNvGrpSpPr/>
+        <p:nvPr/>
+      </p:nvGrpSpPr>
+      <p:grpSpPr>
+        <a:xfrm>
+          <a:off x="0" y="0"/>
+          <a:ext cx="0" cy="0"/>
+          <a:chOff x="0" y="0"/>
+          <a:chExt cx="0" cy="0"/>
+        </a:xfrm>
+      </p:grpSpPr>
+      <p:sp>
+        <p:nvSpPr>
+          <p:cNvPr id="2" name="Text 0"/>
+          <p:cNvSpPr/>
+          <p:nvPr/>
+        </p:nvSpPr>
+        <p:spPr>
+          <a:xfrm>
+            <a:off x="502920" y="320040"/>
             <a:ext cx="8138160" cy="274320"/>
           </a:xfrm>
           <a:prstGeom prst="rect">
@@ -3366,7 +4164,7 @@
       </p:sp>
       <p:graphicFrame>
         <p:nvGraphicFramePr>
-          <p:cNvPr id="12" name="Table 0"/>
+          <p:cNvPr id="13" name="Table 0"/>
           <p:cNvGraphicFramePr>
             <a:graphicFrameLocks noGrp="1"/>
           </p:cNvGraphicFramePr>
@@ -4263,9 +5061,9 @@
 </p:sld>
 </file>
 
-<file path=ppt/slides/slide12.xml><?xml version="1.0" encoding="utf-8"?>
+<file path=ppt/slides/slide13.xml><?xml version="1.0" encoding="utf-8"?>
 <p:sld xmlns:a="http://schemas.openxmlformats.org/drawingml/2006/main" xmlns:r="http://schemas.openxmlformats.org/officeDocument/2006/relationships" xmlns:p="http://schemas.openxmlformats.org/presentationml/2006/main">
-  <p:cSld name="Slide 12">
+  <p:cSld name="Slide 13">
     <p:bg>
       <p:bgPr>
         <a:solidFill>
@@ -4295,7 +5093,7 @@
         </p:nvSpPr>
         <p:spPr>
           <a:xfrm>
-            <a:off x="4160520" y="457200"/>
+            <a:off x="4160520" y="411480"/>
             <a:ext cx="822960" cy="822960"/>
           </a:xfrm>
           <a:prstGeom prst="ellipse">
@@ -4323,7 +5121,7 @@
         </p:blipFill>
         <p:spPr>
           <a:xfrm>
-            <a:off x="4275734" y="572414"/>
+            <a:off x="4275734" y="526694"/>
             <a:ext cx="592531" cy="592531"/>
           </a:xfrm>
           <a:prstGeom prst="rect">
@@ -4339,7 +5137,7 @@
         </p:nvSpPr>
         <p:spPr>
           <a:xfrm>
-            <a:off x="0" y="1463040"/>
+            <a:off x="0" y="1371600"/>
             <a:ext cx="9144000" cy="274320"/>
           </a:xfrm>
           <a:prstGeom prst="rect">
@@ -4378,8 +5176,8 @@
         </p:nvSpPr>
         <p:spPr>
           <a:xfrm>
-            <a:off x="640080" y="1783080"/>
-            <a:ext cx="7863840" cy="731520"/>
+            <a:off x="457200" y="1691640"/>
+            <a:ext cx="8229600" cy="914400"/>
           </a:xfrm>
           <a:prstGeom prst="rect">
             <a:avLst/>
@@ -4395,7 +5193,7 @@
               <a:buNone/>
             </a:pPr>
             <a:r>
-              <a:rPr lang="en-US" sz="2600" b="1" dirty="0">
+              <a:rPr lang="en-US" sz="2100" b="1" dirty="0">
                 <a:solidFill>
                   <a:srgbClr val="1D1D1F"/>
                 </a:solidFill>
@@ -4403,9 +5201,37 @@
                 <a:ea typeface="Arial" pitchFamily="34" charset="-122"/>
                 <a:cs typeface="Arial" pitchFamily="34" charset="-120"/>
               </a:rPr>
-              <a:t>Queremos devolverle tiempo clínico al médico.</a:t>
-            </a:r>
-            <a:endParaRPr lang="en-US" sz="2600" dirty="0"/>
+              <a:t>Queremos ser la </a:t>
+            </a:r>
+            <a:pPr algn="ctr" indent="0" marL="0">
+              <a:buNone/>
+            </a:pPr>
+            <a:r>
+              <a:rPr lang="en-US" sz="2100" b="1" dirty="0">
+                <a:solidFill>
+                  <a:srgbClr val="0A3D91"/>
+                </a:solidFill>
+                <a:latin typeface="Arial" pitchFamily="34" charset="0"/>
+                <a:ea typeface="Arial" pitchFamily="34" charset="-122"/>
+                <a:cs typeface="Arial" pitchFamily="34" charset="-120"/>
+              </a:rPr>
+              <a:t>infraestructura de IA</a:t>
+            </a:r>
+            <a:pPr algn="ctr" indent="0" marL="0">
+              <a:buNone/>
+            </a:pPr>
+            <a:r>
+              <a:rPr lang="en-US" sz="2100" b="1" dirty="0">
+                <a:solidFill>
+                  <a:srgbClr val="1D1D1F"/>
+                </a:solidFill>
+                <a:latin typeface="Arial" pitchFamily="34" charset="0"/>
+                <a:ea typeface="Arial" pitchFamily="34" charset="-122"/>
+                <a:cs typeface="Arial" pitchFamily="34" charset="-120"/>
+              </a:rPr>
+              <a:t> para la documentación clínica en Latinoamérica.</a:t>
+            </a:r>
+            <a:endParaRPr lang="en-US" sz="2100" dirty="0"/>
           </a:p>
         </p:txBody>
       </p:sp>
@@ -4417,7 +5243,7 @@
         </p:nvSpPr>
         <p:spPr>
           <a:xfrm>
-            <a:off x="914400" y="2560320"/>
+            <a:off x="914400" y="2697480"/>
             <a:ext cx="7315200" cy="594360"/>
           </a:xfrm>
           <a:prstGeom prst="rect">
@@ -4434,7 +5260,7 @@
               <a:buNone/>
             </a:pPr>
             <a:r>
-              <a:rPr lang="en-US" sz="1250" i="1" dirty="0">
+              <a:rPr lang="en-US" sz="1200" i="1" dirty="0">
                 <a:solidFill>
                   <a:srgbClr val="48484A"/>
                 </a:solidFill>
@@ -4442,9 +5268,9 @@
                 <a:ea typeface="Arial" pitchFamily="34" charset="-122"/>
                 <a:cs typeface="Arial" pitchFamily="34" charset="-120"/>
               </a:rPr>
-              <a:t>Con Capital Semilla, Miracle puede avanzar de un PMV funcional a un piloto validado con usuarios reales del sector salud.</a:t>
-            </a:r>
-            <a:endParaRPr lang="en-US" sz="1250" dirty="0"/>
+              <a:t>Empezando por Medellín: con Capital Semilla, Miracle avanza de un PMV funcional a un piloto validado con médicos reales del sector salud.</a:t>
+            </a:r>
+            <a:endParaRPr lang="en-US" sz="1200" dirty="0"/>
           </a:p>
         </p:txBody>
       </p:sp>
@@ -4456,7 +5282,7 @@
         </p:nvSpPr>
         <p:spPr>
           <a:xfrm>
-            <a:off x="457200" y="3383280"/>
+            <a:off x="457200" y="3520440"/>
             <a:ext cx="8229600" cy="1005840"/>
           </a:xfrm>
           <a:prstGeom prst="rect">
@@ -4473,7 +5299,7 @@
               <a:buNone/>
             </a:pPr>
             <a:r>
-              <a:rPr lang="en-US" sz="1900" b="1" dirty="0">
+              <a:rPr lang="en-US" sz="1800" b="1" dirty="0">
                 <a:solidFill>
                   <a:srgbClr val="0A3D91"/>
                 </a:solidFill>
@@ -4483,14 +5309,14 @@
               </a:rPr>
               <a:t>Menos tiempo documentando.</a:t>
             </a:r>
-            <a:endParaRPr lang="en-US" sz="1900" dirty="0"/>
+            <a:endParaRPr lang="en-US" sz="1800" dirty="0"/>
           </a:p>
           <a:p>
             <a:pPr algn="ctr" indent="0" marL="0">
               <a:buNone/>
             </a:pPr>
             <a:r>
-              <a:rPr lang="en-US" sz="1900" b="1" dirty="0">
+              <a:rPr lang="en-US" sz="1800" b="1" dirty="0">
                 <a:solidFill>
                   <a:srgbClr val="0A3D91"/>
                 </a:solidFill>
@@ -4500,7 +5326,7 @@
               </a:rPr>
               <a:t>Más tiempo cuidando pacientes.</a:t>
             </a:r>
-            <a:endParaRPr lang="en-US" sz="1900" dirty="0"/>
+            <a:endParaRPr lang="en-US" sz="1800" dirty="0"/>
           </a:p>
         </p:txBody>
       </p:sp>
@@ -4544,7 +5370,7 @@
         </p:nvSpPr>
         <p:spPr>
           <a:xfrm>
-            <a:off x="502920" y="365760"/>
+            <a:off x="502920" y="320040"/>
             <a:ext cx="8138160" cy="274320"/>
           </a:xfrm>
           <a:prstGeom prst="rect">
@@ -4583,8 +5409,8 @@
         </p:nvSpPr>
         <p:spPr>
           <a:xfrm>
-            <a:off x="502920" y="685800"/>
-            <a:ext cx="8138160" cy="868680"/>
+            <a:off x="502920" y="658368"/>
+            <a:ext cx="8138160" cy="777240"/>
           </a:xfrm>
           <a:prstGeom prst="rect">
             <a:avLst/>
@@ -4600,7 +5426,7 @@
               <a:buNone/>
             </a:pPr>
             <a:r>
-              <a:rPr lang="en-US" sz="2600" b="1" dirty="0">
+              <a:rPr lang="en-US" sz="2400" b="1" dirty="0">
                 <a:solidFill>
                   <a:srgbClr val="1D1D1F"/>
                 </a:solidFill>
@@ -4608,9 +5434,9 @@
                 <a:ea typeface="Arial" pitchFamily="34" charset="-122"/>
                 <a:cs typeface="Arial" pitchFamily="34" charset="-120"/>
               </a:rPr>
-              <a:t>El problema no es solo del médico. También lo siente el paciente.</a:t>
-            </a:r>
-            <a:endParaRPr lang="en-US" sz="2600" dirty="0"/>
+              <a:t>No es solo el médico. El costo lo paga todo el sistema.</a:t>
+            </a:r>
+            <a:endParaRPr lang="en-US" sz="2400" dirty="0"/>
           </a:p>
         </p:txBody>
       </p:sp>
@@ -4622,12 +5448,12 @@
         </p:nvSpPr>
         <p:spPr>
           <a:xfrm>
-            <a:off x="502920" y="1783080"/>
-            <a:ext cx="2529840" cy="2880360"/>
+            <a:off x="502920" y="1508760"/>
+            <a:ext cx="2542032" cy="1965960"/>
           </a:xfrm>
           <a:prstGeom prst="roundRect">
             <a:avLst>
-              <a:gd name="adj" fmla="val 3253"/>
+              <a:gd name="adj" fmla="val 4186"/>
             </a:avLst>
           </a:prstGeom>
           <a:solidFill>
@@ -4656,8 +5482,8 @@
         </p:nvSpPr>
         <p:spPr>
           <a:xfrm>
-            <a:off x="758952" y="2039112"/>
-            <a:ext cx="502920" cy="502920"/>
+            <a:off x="704088" y="1691640"/>
+            <a:ext cx="384048" cy="384048"/>
           </a:xfrm>
           <a:prstGeom prst="ellipse">
             <a:avLst/>
@@ -4684,8 +5510,8 @@
         </p:blipFill>
         <p:spPr>
           <a:xfrm>
-            <a:off x="829361" y="2109521"/>
-            <a:ext cx="362102" cy="362102"/>
+            <a:off x="757855" y="1745407"/>
+            <a:ext cx="276515" cy="276515"/>
           </a:xfrm>
           <a:prstGeom prst="rect">
             <a:avLst/>
@@ -4700,8 +5526,8 @@
         </p:nvSpPr>
         <p:spPr>
           <a:xfrm>
-            <a:off x="758952" y="2697480"/>
-            <a:ext cx="2017776" cy="320040"/>
+            <a:off x="704088" y="2167128"/>
+            <a:ext cx="2139696" cy="274320"/>
           </a:xfrm>
           <a:prstGeom prst="rect">
             <a:avLst/>
@@ -4717,7 +5543,7 @@
               <a:buNone/>
             </a:pPr>
             <a:r>
-              <a:rPr lang="en-US" sz="1500" b="1" dirty="0">
+              <a:rPr lang="en-US" sz="1300" b="1" dirty="0">
                 <a:solidFill>
                   <a:srgbClr val="1D1D1F"/>
                 </a:solidFill>
@@ -4727,7 +5553,7 @@
               </a:rPr>
               <a:t>Médico</a:t>
             </a:r>
-            <a:endParaRPr lang="en-US" sz="1500" dirty="0"/>
+            <a:endParaRPr lang="en-US" sz="1300" dirty="0"/>
           </a:p>
         </p:txBody>
       </p:sp>
@@ -4739,8 +5565,8 @@
         </p:nvSpPr>
         <p:spPr>
           <a:xfrm>
-            <a:off x="758952" y="3063240"/>
-            <a:ext cx="2017776" cy="1417320"/>
+            <a:off x="704088" y="2468880"/>
+            <a:ext cx="2139696" cy="868680"/>
           </a:xfrm>
           <a:prstGeom prst="rect">
             <a:avLst/>
@@ -4754,13 +5580,13 @@
           <a:p>
             <a:pPr marL="342900" indent="-342900">
               <a:spcAft>
-                <a:spcPts val="600"/>
+                <a:spcPts val="400"/>
               </a:spcAft>
               <a:buSzPct val="100000"/>
               <a:buChar char="•"/>
             </a:pPr>
             <a:r>
-              <a:rPr lang="en-US" sz="1200" dirty="0">
+              <a:rPr lang="en-US" sz="1000" dirty="0">
                 <a:solidFill>
                   <a:srgbClr val="48484A"/>
                 </a:solidFill>
@@ -4770,18 +5596,18 @@
               </a:rPr>
               <a:t>Más carga administrativa</a:t>
             </a:r>
-            <a:endParaRPr lang="en-US" sz="1200" dirty="0"/>
+            <a:endParaRPr lang="en-US" sz="1000" dirty="0"/>
           </a:p>
           <a:p>
             <a:pPr marL="342900" indent="-342900">
               <a:spcAft>
-                <a:spcPts val="600"/>
+                <a:spcPts val="400"/>
               </a:spcAft>
               <a:buSzPct val="100000"/>
               <a:buChar char="•"/>
             </a:pPr>
             <a:r>
-              <a:rPr lang="en-US" sz="1200" dirty="0">
+              <a:rPr lang="en-US" sz="1000" dirty="0">
                 <a:solidFill>
                   <a:srgbClr val="48484A"/>
                 </a:solidFill>
@@ -4791,18 +5617,18 @@
               </a:rPr>
               <a:t>Menos tiempo clínico</a:t>
             </a:r>
-            <a:endParaRPr lang="en-US" sz="1200" dirty="0"/>
+            <a:endParaRPr lang="en-US" sz="1000" dirty="0"/>
           </a:p>
           <a:p>
             <a:pPr marL="342900" indent="-342900">
               <a:spcAft>
-                <a:spcPts val="600"/>
+                <a:spcPts val="400"/>
               </a:spcAft>
               <a:buSzPct val="100000"/>
               <a:buChar char="•"/>
             </a:pPr>
             <a:r>
-              <a:rPr lang="en-US" sz="1200" dirty="0">
+              <a:rPr lang="en-US" sz="1000" dirty="0">
                 <a:solidFill>
                   <a:srgbClr val="48484A"/>
                 </a:solidFill>
@@ -4812,7 +5638,7 @@
               </a:rPr>
               <a:t>Mayor agotamiento</a:t>
             </a:r>
-            <a:endParaRPr lang="en-US" sz="1200" dirty="0"/>
+            <a:endParaRPr lang="en-US" sz="1000" dirty="0"/>
           </a:p>
         </p:txBody>
       </p:sp>
@@ -4824,12 +5650,12 @@
         </p:nvSpPr>
         <p:spPr>
           <a:xfrm>
-            <a:off x="3307080" y="1783080"/>
-            <a:ext cx="2529840" cy="2880360"/>
+            <a:off x="3300984" y="1508760"/>
+            <a:ext cx="2542032" cy="1965960"/>
           </a:xfrm>
           <a:prstGeom prst="roundRect">
             <a:avLst>
-              <a:gd name="adj" fmla="val 3253"/>
+              <a:gd name="adj" fmla="val 4186"/>
             </a:avLst>
           </a:prstGeom>
           <a:solidFill>
@@ -4858,8 +5684,8 @@
         </p:nvSpPr>
         <p:spPr>
           <a:xfrm>
-            <a:off x="3563112" y="2039112"/>
-            <a:ext cx="502920" cy="502920"/>
+            <a:off x="3502152" y="1691640"/>
+            <a:ext cx="384048" cy="384048"/>
           </a:xfrm>
           <a:prstGeom prst="ellipse">
             <a:avLst/>
@@ -4886,8 +5712,8 @@
         </p:blipFill>
         <p:spPr>
           <a:xfrm>
-            <a:off x="3633521" y="2109521"/>
-            <a:ext cx="362102" cy="362102"/>
+            <a:off x="3555919" y="1745407"/>
+            <a:ext cx="276515" cy="276515"/>
           </a:xfrm>
           <a:prstGeom prst="rect">
             <a:avLst/>
@@ -4902,8 +5728,8 @@
         </p:nvSpPr>
         <p:spPr>
           <a:xfrm>
-            <a:off x="3563112" y="2697480"/>
-            <a:ext cx="2017776" cy="320040"/>
+            <a:off x="3502152" y="2167128"/>
+            <a:ext cx="2139696" cy="274320"/>
           </a:xfrm>
           <a:prstGeom prst="rect">
             <a:avLst/>
@@ -4919,7 +5745,7 @@
               <a:buNone/>
             </a:pPr>
             <a:r>
-              <a:rPr lang="en-US" sz="1500" b="1" dirty="0">
+              <a:rPr lang="en-US" sz="1300" b="1" dirty="0">
                 <a:solidFill>
                   <a:srgbClr val="1D1D1F"/>
                 </a:solidFill>
@@ -4929,7 +5755,7 @@
               </a:rPr>
               <a:t>Paciente</a:t>
             </a:r>
-            <a:endParaRPr lang="en-US" sz="1500" dirty="0"/>
+            <a:endParaRPr lang="en-US" sz="1300" dirty="0"/>
           </a:p>
         </p:txBody>
       </p:sp>
@@ -4941,8 +5767,8 @@
         </p:nvSpPr>
         <p:spPr>
           <a:xfrm>
-            <a:off x="3563112" y="3063240"/>
-            <a:ext cx="2017776" cy="1417320"/>
+            <a:off x="3502152" y="2468880"/>
+            <a:ext cx="2139696" cy="868680"/>
           </a:xfrm>
           <a:prstGeom prst="rect">
             <a:avLst/>
@@ -4956,13 +5782,13 @@
           <a:p>
             <a:pPr marL="342900" indent="-342900">
               <a:spcAft>
-                <a:spcPts val="600"/>
+                <a:spcPts val="400"/>
               </a:spcAft>
               <a:buSzPct val="100000"/>
               <a:buChar char="•"/>
             </a:pPr>
             <a:r>
-              <a:rPr lang="en-US" sz="1200" dirty="0">
+              <a:rPr lang="en-US" sz="1000" dirty="0">
                 <a:solidFill>
                   <a:srgbClr val="48484A"/>
                 </a:solidFill>
@@ -4972,18 +5798,18 @@
               </a:rPr>
               <a:t>Menos contacto visual</a:t>
             </a:r>
-            <a:endParaRPr lang="en-US" sz="1200" dirty="0"/>
+            <a:endParaRPr lang="en-US" sz="1000" dirty="0"/>
           </a:p>
           <a:p>
             <a:pPr marL="342900" indent="-342900">
               <a:spcAft>
-                <a:spcPts val="600"/>
+                <a:spcPts val="400"/>
               </a:spcAft>
               <a:buSzPct val="100000"/>
               <a:buChar char="•"/>
             </a:pPr>
             <a:r>
-              <a:rPr lang="en-US" sz="1200" dirty="0">
+              <a:rPr lang="en-US" sz="1000" dirty="0">
                 <a:solidFill>
                   <a:srgbClr val="48484A"/>
                 </a:solidFill>
@@ -4993,18 +5819,18 @@
               </a:rPr>
               <a:t>Consulta más fría</a:t>
             </a:r>
-            <a:endParaRPr lang="en-US" sz="1200" dirty="0"/>
+            <a:endParaRPr lang="en-US" sz="1000" dirty="0"/>
           </a:p>
           <a:p>
             <a:pPr marL="342900" indent="-342900">
               <a:spcAft>
-                <a:spcPts val="600"/>
+                <a:spcPts val="400"/>
               </a:spcAft>
               <a:buSzPct val="100000"/>
               <a:buChar char="•"/>
             </a:pPr>
             <a:r>
-              <a:rPr lang="en-US" sz="1200" dirty="0">
+              <a:rPr lang="en-US" sz="1000" dirty="0">
                 <a:solidFill>
                   <a:srgbClr val="48484A"/>
                 </a:solidFill>
@@ -5012,9 +5838,9 @@
                 <a:ea typeface="Arial" pitchFamily="34" charset="-122"/>
                 <a:cs typeface="Arial" pitchFamily="34" charset="-120"/>
               </a:rPr>
-              <a:t>Menos tiempo para explicar y escuchar</a:t>
-            </a:r>
-            <a:endParaRPr lang="en-US" sz="1200" dirty="0"/>
+              <a:t>Menos tiempo para explicar</a:t>
+            </a:r>
+            <a:endParaRPr lang="en-US" sz="1000" dirty="0"/>
           </a:p>
         </p:txBody>
       </p:sp>
@@ -5026,12 +5852,12 @@
         </p:nvSpPr>
         <p:spPr>
           <a:xfrm>
-            <a:off x="6111240" y="1783080"/>
-            <a:ext cx="2529840" cy="2880360"/>
+            <a:off x="6099048" y="1508760"/>
+            <a:ext cx="2542032" cy="1965960"/>
           </a:xfrm>
           <a:prstGeom prst="roundRect">
             <a:avLst>
-              <a:gd name="adj" fmla="val 3253"/>
+              <a:gd name="adj" fmla="val 4186"/>
             </a:avLst>
           </a:prstGeom>
           <a:solidFill>
@@ -5060,8 +5886,8 @@
         </p:nvSpPr>
         <p:spPr>
           <a:xfrm>
-            <a:off x="6367272" y="2039112"/>
-            <a:ext cx="502920" cy="502920"/>
+            <a:off x="6300216" y="1691640"/>
+            <a:ext cx="384048" cy="384048"/>
           </a:xfrm>
           <a:prstGeom prst="ellipse">
             <a:avLst/>
@@ -5088,8 +5914,8 @@
         </p:blipFill>
         <p:spPr>
           <a:xfrm>
-            <a:off x="6437681" y="2109521"/>
-            <a:ext cx="362102" cy="362102"/>
+            <a:off x="6353983" y="1745407"/>
+            <a:ext cx="276515" cy="276515"/>
           </a:xfrm>
           <a:prstGeom prst="rect">
             <a:avLst/>
@@ -5104,8 +5930,8 @@
         </p:nvSpPr>
         <p:spPr>
           <a:xfrm>
-            <a:off x="6367272" y="2697480"/>
-            <a:ext cx="2017776" cy="320040"/>
+            <a:off x="6300216" y="2167128"/>
+            <a:ext cx="2139696" cy="274320"/>
           </a:xfrm>
           <a:prstGeom prst="rect">
             <a:avLst/>
@@ -5121,7 +5947,7 @@
               <a:buNone/>
             </a:pPr>
             <a:r>
-              <a:rPr lang="en-US" sz="1500" b="1" dirty="0">
+              <a:rPr lang="en-US" sz="1300" b="1" dirty="0">
                 <a:solidFill>
                   <a:srgbClr val="1D1D1F"/>
                 </a:solidFill>
@@ -5131,7 +5957,7 @@
               </a:rPr>
               <a:t>Clínica</a:t>
             </a:r>
-            <a:endParaRPr lang="en-US" sz="1500" dirty="0"/>
+            <a:endParaRPr lang="en-US" sz="1300" dirty="0"/>
           </a:p>
         </p:txBody>
       </p:sp>
@@ -5143,8 +5969,8 @@
         </p:nvSpPr>
         <p:spPr>
           <a:xfrm>
-            <a:off x="6367272" y="3063240"/>
-            <a:ext cx="2017776" cy="1417320"/>
+            <a:off x="6300216" y="2468880"/>
+            <a:ext cx="2139696" cy="868680"/>
           </a:xfrm>
           <a:prstGeom prst="rect">
             <a:avLst/>
@@ -5158,13 +5984,13 @@
           <a:p>
             <a:pPr marL="342900" indent="-342900">
               <a:spcAft>
-                <a:spcPts val="600"/>
+                <a:spcPts val="400"/>
               </a:spcAft>
               <a:buSzPct val="100000"/>
               <a:buChar char="•"/>
             </a:pPr>
             <a:r>
-              <a:rPr lang="en-US" sz="1200" dirty="0">
+              <a:rPr lang="en-US" sz="1000" dirty="0">
                 <a:solidFill>
                   <a:srgbClr val="48484A"/>
                 </a:solidFill>
@@ -5174,18 +6000,18 @@
               </a:rPr>
               <a:t>Procesos lentos</a:t>
             </a:r>
-            <a:endParaRPr lang="en-US" sz="1200" dirty="0"/>
+            <a:endParaRPr lang="en-US" sz="1000" dirty="0"/>
           </a:p>
           <a:p>
             <a:pPr marL="342900" indent="-342900">
               <a:spcAft>
-                <a:spcPts val="600"/>
+                <a:spcPts val="400"/>
               </a:spcAft>
               <a:buSzPct val="100000"/>
               <a:buChar char="•"/>
             </a:pPr>
             <a:r>
-              <a:rPr lang="en-US" sz="1200" dirty="0">
+              <a:rPr lang="en-US" sz="1000" dirty="0">
                 <a:solidFill>
                   <a:srgbClr val="48484A"/>
                 </a:solidFill>
@@ -5195,18 +6021,18 @@
               </a:rPr>
               <a:t>Documentación variable</a:t>
             </a:r>
-            <a:endParaRPr lang="en-US" sz="1200" dirty="0"/>
+            <a:endParaRPr lang="en-US" sz="1000" dirty="0"/>
           </a:p>
           <a:p>
             <a:pPr marL="342900" indent="-342900">
               <a:spcAft>
-                <a:spcPts val="600"/>
+                <a:spcPts val="400"/>
               </a:spcAft>
               <a:buSzPct val="100000"/>
               <a:buChar char="•"/>
             </a:pPr>
             <a:r>
-              <a:rPr lang="en-US" sz="1200" dirty="0">
+              <a:rPr lang="en-US" sz="1000" dirty="0">
                 <a:solidFill>
                   <a:srgbClr val="48484A"/>
                 </a:solidFill>
@@ -5216,7 +6042,343 @@
               </a:rPr>
               <a:t>Menor productividad</a:t>
             </a:r>
-            <a:endParaRPr lang="en-US" sz="1200" dirty="0"/>
+            <a:endParaRPr lang="en-US" sz="1000" dirty="0"/>
+          </a:p>
+        </p:txBody>
+      </p:sp>
+      <p:sp>
+        <p:nvSpPr>
+          <p:cNvPr id="19" name="Shape 14"/>
+          <p:cNvSpPr/>
+          <p:nvPr/>
+        </p:nvSpPr>
+        <p:spPr>
+          <a:xfrm>
+            <a:off x="502920" y="3611880"/>
+            <a:ext cx="2560320" cy="1051560"/>
+          </a:xfrm>
+          <a:prstGeom prst="roundRect">
+            <a:avLst>
+              <a:gd name="adj" fmla="val 7826"/>
+            </a:avLst>
+          </a:prstGeom>
+          <a:solidFill>
+            <a:srgbClr val="EAF3FF"/>
+          </a:solidFill>
+          <a:ln w="9525">
+            <a:solidFill>
+              <a:srgbClr val="CFE4FB"/>
+            </a:solidFill>
+            <a:prstDash val="solid"/>
+          </a:ln>
+          <a:effectLst>
+            <a:outerShdw sx="100000" sy="100000" kx="0" ky="0" algn="bl" rotWithShape="0" blurRad="101600" dist="25400" dir="5400000">
+              <a:srgbClr val="0A3D91">
+                <a:alpha val="7000"/>
+              </a:srgbClr>
+            </a:outerShdw>
+          </a:effectLst>
+        </p:spPr>
+      </p:sp>
+      <p:sp>
+        <p:nvSpPr>
+          <p:cNvPr id="20" name="Text 15"/>
+          <p:cNvSpPr/>
+          <p:nvPr/>
+        </p:nvSpPr>
+        <p:spPr>
+          <a:xfrm>
+            <a:off x="594360" y="3721608"/>
+            <a:ext cx="2377440" cy="384048"/>
+          </a:xfrm>
+          <a:prstGeom prst="rect">
+            <a:avLst/>
+          </a:prstGeom>
+          <a:noFill/>
+          <a:ln/>
+        </p:spPr>
+        <p:txBody>
+          <a:bodyPr wrap="square" lIns="0" tIns="0" rIns="0" bIns="0" rtlCol="0" anchor="ctr"/>
+          <a:lstStyle/>
+          <a:p>
+            <a:pPr algn="ctr" indent="0" marL="0">
+              <a:buNone/>
+            </a:pPr>
+            <a:r>
+              <a:rPr lang="en-US" sz="2200" b="1" dirty="0">
+                <a:solidFill>
+                  <a:srgbClr val="0A3D91"/>
+                </a:solidFill>
+                <a:latin typeface="Arial" pitchFamily="34" charset="0"/>
+                <a:ea typeface="Arial" pitchFamily="34" charset="-122"/>
+                <a:cs typeface="Arial" pitchFamily="34" charset="-120"/>
+              </a:rPr>
+              <a:t>49,2%</a:t>
+            </a:r>
+            <a:endParaRPr lang="en-US" sz="2200" dirty="0"/>
+          </a:p>
+        </p:txBody>
+      </p:sp>
+      <p:sp>
+        <p:nvSpPr>
+          <p:cNvPr id="21" name="Text 16"/>
+          <p:cNvSpPr/>
+          <p:nvPr/>
+        </p:nvSpPr>
+        <p:spPr>
+          <a:xfrm>
+            <a:off x="612648" y="4123944"/>
+            <a:ext cx="2340864" cy="502920"/>
+          </a:xfrm>
+          <a:prstGeom prst="rect">
+            <a:avLst/>
+          </a:prstGeom>
+          <a:noFill/>
+          <a:ln/>
+        </p:spPr>
+        <p:txBody>
+          <a:bodyPr wrap="square" lIns="0" tIns="0" rIns="0" bIns="0" rtlCol="0" anchor="t"/>
+          <a:lstStyle/>
+          <a:p>
+            <a:pPr algn="ctr" indent="0" marL="0">
+              <a:buNone/>
+            </a:pPr>
+            <a:r>
+              <a:rPr lang="en-US" sz="850" dirty="0">
+                <a:solidFill>
+                  <a:srgbClr val="6E6E73"/>
+                </a:solidFill>
+                <a:latin typeface="Arial" pitchFamily="34" charset="0"/>
+                <a:ea typeface="Arial" pitchFamily="34" charset="-122"/>
+                <a:cs typeface="Arial" pitchFamily="34" charset="-120"/>
+              </a:rPr>
+              <a:t>del tiempo del médico se va en EHR y tareas de escritorio</a:t>
+            </a:r>
+            <a:endParaRPr lang="en-US" sz="850" dirty="0"/>
+          </a:p>
+        </p:txBody>
+      </p:sp>
+      <p:sp>
+        <p:nvSpPr>
+          <p:cNvPr id="22" name="Shape 17"/>
+          <p:cNvSpPr/>
+          <p:nvPr/>
+        </p:nvSpPr>
+        <p:spPr>
+          <a:xfrm>
+            <a:off x="3291840" y="3611880"/>
+            <a:ext cx="2560320" cy="1051560"/>
+          </a:xfrm>
+          <a:prstGeom prst="roundRect">
+            <a:avLst>
+              <a:gd name="adj" fmla="val 7826"/>
+            </a:avLst>
+          </a:prstGeom>
+          <a:solidFill>
+            <a:srgbClr val="EAF3FF"/>
+          </a:solidFill>
+          <a:ln w="9525">
+            <a:solidFill>
+              <a:srgbClr val="CFE4FB"/>
+            </a:solidFill>
+            <a:prstDash val="solid"/>
+          </a:ln>
+          <a:effectLst>
+            <a:outerShdw sx="100000" sy="100000" kx="0" ky="0" algn="bl" rotWithShape="0" blurRad="101600" dist="25400" dir="5400000">
+              <a:srgbClr val="0A3D91">
+                <a:alpha val="7000"/>
+              </a:srgbClr>
+            </a:outerShdw>
+          </a:effectLst>
+        </p:spPr>
+      </p:sp>
+      <p:sp>
+        <p:nvSpPr>
+          <p:cNvPr id="23" name="Text 18"/>
+          <p:cNvSpPr/>
+          <p:nvPr/>
+        </p:nvSpPr>
+        <p:spPr>
+          <a:xfrm>
+            <a:off x="3383280" y="3721608"/>
+            <a:ext cx="2377440" cy="384048"/>
+          </a:xfrm>
+          <a:prstGeom prst="rect">
+            <a:avLst/>
+          </a:prstGeom>
+          <a:noFill/>
+          <a:ln/>
+        </p:spPr>
+        <p:txBody>
+          <a:bodyPr wrap="square" lIns="0" tIns="0" rIns="0" bIns="0" rtlCol="0" anchor="ctr"/>
+          <a:lstStyle/>
+          <a:p>
+            <a:pPr algn="ctr" indent="0" marL="0">
+              <a:buNone/>
+            </a:pPr>
+            <a:r>
+              <a:rPr lang="en-US" sz="2200" b="1" dirty="0">
+                <a:solidFill>
+                  <a:srgbClr val="0A3D91"/>
+                </a:solidFill>
+                <a:latin typeface="Arial" pitchFamily="34" charset="0"/>
+                <a:ea typeface="Arial" pitchFamily="34" charset="-122"/>
+                <a:cs typeface="Arial" pitchFamily="34" charset="-120"/>
+              </a:rPr>
+              <a:t>1–2 h</a:t>
+            </a:r>
+            <a:endParaRPr lang="en-US" sz="2200" dirty="0"/>
+          </a:p>
+        </p:txBody>
+      </p:sp>
+      <p:sp>
+        <p:nvSpPr>
+          <p:cNvPr id="24" name="Text 19"/>
+          <p:cNvSpPr/>
+          <p:nvPr/>
+        </p:nvSpPr>
+        <p:spPr>
+          <a:xfrm>
+            <a:off x="3401568" y="4123944"/>
+            <a:ext cx="2340864" cy="502920"/>
+          </a:xfrm>
+          <a:prstGeom prst="rect">
+            <a:avLst/>
+          </a:prstGeom>
+          <a:noFill/>
+          <a:ln/>
+        </p:spPr>
+        <p:txBody>
+          <a:bodyPr wrap="square" lIns="0" tIns="0" rIns="0" bIns="0" rtlCol="0" anchor="t"/>
+          <a:lstStyle/>
+          <a:p>
+            <a:pPr algn="ctr" indent="0" marL="0">
+              <a:buNone/>
+            </a:pPr>
+            <a:r>
+              <a:rPr lang="en-US" sz="850" dirty="0">
+                <a:solidFill>
+                  <a:srgbClr val="6E6E73"/>
+                </a:solidFill>
+                <a:latin typeface="Arial" pitchFamily="34" charset="0"/>
+                <a:ea typeface="Arial" pitchFamily="34" charset="-122"/>
+                <a:cs typeface="Arial" pitchFamily="34" charset="-120"/>
+              </a:rPr>
+              <a:t>adicionales cada noche terminando documentación</a:t>
+            </a:r>
+            <a:endParaRPr lang="en-US" sz="850" dirty="0"/>
+          </a:p>
+        </p:txBody>
+      </p:sp>
+      <p:sp>
+        <p:nvSpPr>
+          <p:cNvPr id="25" name="Shape 20"/>
+          <p:cNvSpPr/>
+          <p:nvPr/>
+        </p:nvSpPr>
+        <p:spPr>
+          <a:xfrm>
+            <a:off x="6080760" y="3611880"/>
+            <a:ext cx="2560320" cy="1051560"/>
+          </a:xfrm>
+          <a:prstGeom prst="roundRect">
+            <a:avLst>
+              <a:gd name="adj" fmla="val 7826"/>
+            </a:avLst>
+          </a:prstGeom>
+          <a:solidFill>
+            <a:srgbClr val="EAF3FF"/>
+          </a:solidFill>
+          <a:ln w="9525">
+            <a:solidFill>
+              <a:srgbClr val="CFE4FB"/>
+            </a:solidFill>
+            <a:prstDash val="solid"/>
+          </a:ln>
+          <a:effectLst>
+            <a:outerShdw sx="100000" sy="100000" kx="0" ky="0" algn="bl" rotWithShape="0" blurRad="101600" dist="25400" dir="5400000">
+              <a:srgbClr val="0A3D91">
+                <a:alpha val="7000"/>
+              </a:srgbClr>
+            </a:outerShdw>
+          </a:effectLst>
+        </p:spPr>
+      </p:sp>
+      <p:sp>
+        <p:nvSpPr>
+          <p:cNvPr id="26" name="Text 21"/>
+          <p:cNvSpPr/>
+          <p:nvPr/>
+        </p:nvSpPr>
+        <p:spPr>
+          <a:xfrm>
+            <a:off x="6172200" y="3721608"/>
+            <a:ext cx="2377440" cy="384048"/>
+          </a:xfrm>
+          <a:prstGeom prst="rect">
+            <a:avLst/>
+          </a:prstGeom>
+          <a:noFill/>
+          <a:ln/>
+        </p:spPr>
+        <p:txBody>
+          <a:bodyPr wrap="square" lIns="0" tIns="0" rIns="0" bIns="0" rtlCol="0" anchor="ctr"/>
+          <a:lstStyle/>
+          <a:p>
+            <a:pPr algn="ctr" indent="0" marL="0">
+              <a:buNone/>
+            </a:pPr>
+            <a:r>
+              <a:rPr lang="en-US" sz="2200" b="1" dirty="0">
+                <a:solidFill>
+                  <a:srgbClr val="0A3D91"/>
+                </a:solidFill>
+                <a:latin typeface="Arial" pitchFamily="34" charset="0"/>
+                <a:ea typeface="Arial" pitchFamily="34" charset="-122"/>
+                <a:cs typeface="Arial" pitchFamily="34" charset="-120"/>
+              </a:rPr>
+              <a:t>≈ $2M</a:t>
+            </a:r>
+            <a:endParaRPr lang="en-US" sz="2200" dirty="0"/>
+          </a:p>
+        </p:txBody>
+      </p:sp>
+      <p:sp>
+        <p:nvSpPr>
+          <p:cNvPr id="27" name="Text 22"/>
+          <p:cNvSpPr/>
+          <p:nvPr/>
+        </p:nvSpPr>
+        <p:spPr>
+          <a:xfrm>
+            <a:off x="6190488" y="4123944"/>
+            <a:ext cx="2340864" cy="502920"/>
+          </a:xfrm>
+          <a:prstGeom prst="rect">
+            <a:avLst/>
+          </a:prstGeom>
+          <a:noFill/>
+          <a:ln/>
+        </p:spPr>
+        <p:txBody>
+          <a:bodyPr wrap="square" lIns="0" tIns="0" rIns="0" bIns="0" rtlCol="0" anchor="t"/>
+          <a:lstStyle/>
+          <a:p>
+            <a:pPr algn="ctr" indent="0" marL="0">
+              <a:buNone/>
+            </a:pPr>
+            <a:r>
+              <a:rPr lang="en-US" sz="850" dirty="0">
+                <a:solidFill>
+                  <a:srgbClr val="6E6E73"/>
+                </a:solidFill>
+                <a:latin typeface="Arial" pitchFamily="34" charset="0"/>
+                <a:ea typeface="Arial" pitchFamily="34" charset="-122"/>
+                <a:cs typeface="Arial" pitchFamily="34" charset="-120"/>
+              </a:rPr>
+              <a:t>COP/mes del salario de cada médico pagados a tiempo de documentación</a:t>
+            </a:r>
+            <a:endParaRPr lang="en-US" sz="850" dirty="0"/>
           </a:p>
         </p:txBody>
       </p:sp>
@@ -5260,7 +6422,7 @@
         </p:nvSpPr>
         <p:spPr>
           <a:xfrm>
-            <a:off x="502920" y="365760"/>
+            <a:off x="502920" y="320040"/>
             <a:ext cx="8138160" cy="274320"/>
           </a:xfrm>
           <a:prstGeom prst="rect">
@@ -5285,7 +6447,7 @@
                 <a:ea typeface="Arial" pitchFamily="34" charset="-122"/>
                 <a:cs typeface="Arial" pitchFamily="34" charset="-120"/>
               </a:rPr>
-              <a:t>LA OPORTUNIDAD</a:t>
+              <a:t>POR QUÉ AHORA</a:t>
             </a:r>
             <a:endParaRPr lang="en-US" sz="1050" dirty="0"/>
           </a:p>
@@ -5299,8 +6461,8 @@
         </p:nvSpPr>
         <p:spPr>
           <a:xfrm>
-            <a:off x="502920" y="685800"/>
-            <a:ext cx="8138160" cy="1051560"/>
+            <a:off x="502920" y="658368"/>
+            <a:ext cx="8138160" cy="548640"/>
           </a:xfrm>
           <a:prstGeom prst="rect">
             <a:avLst/>
@@ -5324,7 +6486,21 @@
                 <a:ea typeface="Arial" pitchFamily="34" charset="-122"/>
                 <a:cs typeface="Arial" pitchFamily="34" charset="-120"/>
               </a:rPr>
-              <a:t>La documentación clínica no va a desaparecer. Pero sí puede volverse más inteligente.</a:t>
+              <a:t>Tres fuerzas abrieron la ventana. </a:t>
+            </a:r>
+            <a:pPr indent="0" marL="0">
+              <a:buNone/>
+            </a:pPr>
+            <a:r>
+              <a:rPr lang="en-US" sz="2400" b="1" dirty="0">
+                <a:solidFill>
+                  <a:srgbClr val="0A3D91"/>
+                </a:solidFill>
+                <a:latin typeface="Arial" pitchFamily="34" charset="0"/>
+                <a:ea typeface="Arial" pitchFamily="34" charset="-122"/>
+                <a:cs typeface="Arial" pitchFamily="34" charset="-120"/>
+              </a:rPr>
+              <a:t>Ahora.</a:t>
             </a:r>
             <a:endParaRPr lang="en-US" sz="2400" dirty="0"/>
           </a:p>
@@ -5332,57 +6508,18 @@
       </p:sp>
       <p:sp>
         <p:nvSpPr>
-          <p:cNvPr id="4" name="Text 2"/>
-          <p:cNvSpPr/>
-          <p:nvPr/>
-        </p:nvSpPr>
-        <p:spPr>
-          <a:xfrm>
-            <a:off x="502920" y="1783080"/>
-            <a:ext cx="8138160" cy="640080"/>
-          </a:xfrm>
-          <a:prstGeom prst="rect">
-            <a:avLst/>
-          </a:prstGeom>
-          <a:noFill/>
-          <a:ln/>
-        </p:spPr>
-        <p:txBody>
-          <a:bodyPr wrap="square" lIns="0" tIns="0" rIns="0" bIns="0" rtlCol="0" anchor="ctr"/>
-          <a:lstStyle/>
-          <a:p>
-            <a:pPr indent="0" marL="0">
-              <a:buNone/>
-            </a:pPr>
-            <a:r>
-              <a:rPr lang="en-US" sz="1350" i="1" dirty="0">
-                <a:solidFill>
-                  <a:srgbClr val="48484A"/>
-                </a:solidFill>
-                <a:latin typeface="Arial" pitchFamily="34" charset="0"/>
-                <a:ea typeface="Arial" pitchFamily="34" charset="-122"/>
-                <a:cs typeface="Arial" pitchFamily="34" charset="-120"/>
-              </a:rPr>
-              <a:t>Si reducimos el tiempo repetitivo de documentación, liberamos tiempo para la atención médica y mejoramos la productividad institucional.</a:t>
-            </a:r>
-            <a:endParaRPr lang="en-US" sz="1350" dirty="0"/>
-          </a:p>
-        </p:txBody>
-      </p:sp>
-      <p:sp>
-        <p:nvSpPr>
-          <p:cNvPr id="5" name="Shape 3"/>
-          <p:cNvSpPr/>
-          <p:nvPr/>
-        </p:nvSpPr>
-        <p:spPr>
-          <a:xfrm>
-            <a:off x="502920" y="2651760"/>
-            <a:ext cx="3886200" cy="1965960"/>
+          <p:cNvPr id="4" name="Shape 2"/>
+          <p:cNvSpPr/>
+          <p:nvPr/>
+        </p:nvSpPr>
+        <p:spPr>
+          <a:xfrm>
+            <a:off x="502920" y="1371600"/>
+            <a:ext cx="2542032" cy="2331720"/>
           </a:xfrm>
           <a:prstGeom prst="roundRect">
             <a:avLst>
-              <a:gd name="adj" fmla="val 4186"/>
+              <a:gd name="adj" fmla="val 3529"/>
             </a:avLst>
           </a:prstGeom>
           <a:solidFill>
@@ -5405,14 +6542,14 @@
       </p:sp>
       <p:sp>
         <p:nvSpPr>
-          <p:cNvPr id="6" name="Text 4"/>
-          <p:cNvSpPr/>
-          <p:nvPr/>
-        </p:nvSpPr>
-        <p:spPr>
-          <a:xfrm>
-            <a:off x="777240" y="2880360"/>
-            <a:ext cx="3337560" cy="274320"/>
+          <p:cNvPr id="5" name="Text 3"/>
+          <p:cNvSpPr/>
+          <p:nvPr/>
+        </p:nvSpPr>
+        <p:spPr>
+          <a:xfrm>
+            <a:off x="685800" y="1499616"/>
+            <a:ext cx="822960" cy="365760"/>
           </a:xfrm>
           <a:prstGeom prst="rect">
             <a:avLst/>
@@ -5428,81 +6565,164 @@
               <a:buNone/>
             </a:pPr>
             <a:r>
-              <a:rPr lang="en-US" sz="1000" b="1" spc="150" kern="0" dirty="0">
-                <a:solidFill>
-                  <a:srgbClr val="6E6E73"/>
-                </a:solidFill>
-                <a:latin typeface="Arial" pitchFamily="34" charset="0"/>
-                <a:ea typeface="Arial" pitchFamily="34" charset="-122"/>
-                <a:cs typeface="Arial" pitchFamily="34" charset="-120"/>
-              </a:rPr>
-              <a:t>ANTES</a:t>
-            </a:r>
-            <a:endParaRPr lang="en-US" sz="1000" dirty="0"/>
-          </a:p>
-        </p:txBody>
-      </p:sp>
-      <p:sp>
-        <p:nvSpPr>
-          <p:cNvPr id="7" name="Text 5"/>
-          <p:cNvSpPr/>
-          <p:nvPr/>
-        </p:nvSpPr>
-        <p:spPr>
-          <a:xfrm>
-            <a:off x="777240" y="3246120"/>
-            <a:ext cx="3337560" cy="1143000"/>
-          </a:xfrm>
-          <a:prstGeom prst="rect">
-            <a:avLst/>
-          </a:prstGeom>
-          <a:noFill/>
-          <a:ln/>
-        </p:spPr>
-        <p:txBody>
-          <a:bodyPr wrap="square" lIns="0" tIns="0" rIns="0" bIns="0" rtlCol="0" anchor="ctr"/>
-          <a:lstStyle/>
-          <a:p>
-            <a:pPr indent="0" marL="0">
-              <a:buNone/>
-            </a:pPr>
-            <a:r>
-              <a:rPr lang="en-US" sz="1400" dirty="0">
-                <a:solidFill>
-                  <a:srgbClr val="48484A"/>
-                </a:solidFill>
-                <a:latin typeface="Arial" pitchFamily="34" charset="0"/>
-                <a:ea typeface="Arial" pitchFamily="34" charset="-122"/>
-                <a:cs typeface="Arial" pitchFamily="34" charset="-120"/>
-              </a:rPr>
-              <a:t>Consulta + escritura manual + revisión + formularios.</a:t>
-            </a:r>
-            <a:endParaRPr lang="en-US" sz="1400" dirty="0"/>
-          </a:p>
-        </p:txBody>
-      </p:sp>
-      <p:sp>
-        <p:nvSpPr>
-          <p:cNvPr id="8" name="Shape 6"/>
-          <p:cNvSpPr/>
-          <p:nvPr/>
-        </p:nvSpPr>
-        <p:spPr>
-          <a:xfrm>
-            <a:off x="4754880" y="2651760"/>
-            <a:ext cx="3886200" cy="1965960"/>
-          </a:xfrm>
-          <a:prstGeom prst="roundRect">
-            <a:avLst>
-              <a:gd name="adj" fmla="val 4186"/>
-            </a:avLst>
+              <a:rPr lang="en-US" sz="1800" dirty="0">
+                <a:solidFill>
+                  <a:srgbClr val="0071E3"/>
+                </a:solidFill>
+                <a:latin typeface="Arial" pitchFamily="34" charset="0"/>
+                <a:ea typeface="Arial" pitchFamily="34" charset="-122"/>
+                <a:cs typeface="Arial" pitchFamily="34" charset="-120"/>
+              </a:rPr>
+              <a:t>01</a:t>
+            </a:r>
+            <a:endParaRPr lang="en-US" sz="1800" dirty="0"/>
+          </a:p>
+        </p:txBody>
+      </p:sp>
+      <p:sp>
+        <p:nvSpPr>
+          <p:cNvPr id="6" name="Shape 4"/>
+          <p:cNvSpPr/>
+          <p:nvPr/>
+        </p:nvSpPr>
+        <p:spPr>
+          <a:xfrm>
+            <a:off x="2478024" y="1517904"/>
+            <a:ext cx="384048" cy="384048"/>
+          </a:xfrm>
+          <a:prstGeom prst="ellipse">
+            <a:avLst/>
           </a:prstGeom>
           <a:solidFill>
             <a:srgbClr val="EAF3FF"/>
           </a:solidFill>
+          <a:ln/>
+        </p:spPr>
+      </p:sp>
+      <p:pic>
+        <p:nvPicPr>
+          <p:cNvPr id="7" name="Image 0" descr="preencoded.png">    </p:cNvPr>
+          <p:cNvPicPr>
+            <a:picLocks noChangeAspect="1"/>
+          </p:cNvPicPr>
+          <p:nvPr/>
+        </p:nvPicPr>
+        <p:blipFill>
+          <a:blip r:embed="rId1"/>
+          <a:stretch>
+            <a:fillRect/>
+          </a:stretch>
+        </p:blipFill>
+        <p:spPr>
+          <a:xfrm>
+            <a:off x="2531791" y="1571671"/>
+            <a:ext cx="276515" cy="276515"/>
+          </a:xfrm>
+          <a:prstGeom prst="rect">
+            <a:avLst/>
+          </a:prstGeom>
+        </p:spPr>
+      </p:pic>
+      <p:sp>
+        <p:nvSpPr>
+          <p:cNvPr id="8" name="Text 5"/>
+          <p:cNvSpPr/>
+          <p:nvPr/>
+        </p:nvSpPr>
+        <p:spPr>
+          <a:xfrm>
+            <a:off x="685800" y="1993392"/>
+            <a:ext cx="2176272" cy="320040"/>
+          </a:xfrm>
+          <a:prstGeom prst="rect">
+            <a:avLst/>
+          </a:prstGeom>
+          <a:noFill/>
+          <a:ln/>
+        </p:spPr>
+        <p:txBody>
+          <a:bodyPr wrap="square" lIns="0" tIns="0" rIns="0" bIns="0" rtlCol="0" anchor="ctr"/>
+          <a:lstStyle/>
+          <a:p>
+            <a:pPr indent="0" marL="0">
+              <a:buNone/>
+            </a:pPr>
+            <a:r>
+              <a:rPr lang="en-US" sz="1250" b="1" dirty="0">
+                <a:solidFill>
+                  <a:srgbClr val="1D1D1F"/>
+                </a:solidFill>
+                <a:latin typeface="Arial" pitchFamily="34" charset="0"/>
+                <a:ea typeface="Arial" pitchFamily="34" charset="-122"/>
+                <a:cs typeface="Arial" pitchFamily="34" charset="-120"/>
+              </a:rPr>
+              <a:t>La regulación empuja</a:t>
+            </a:r>
+            <a:endParaRPr lang="en-US" sz="1250" dirty="0"/>
+          </a:p>
+        </p:txBody>
+      </p:sp>
+      <p:sp>
+        <p:nvSpPr>
+          <p:cNvPr id="9" name="Text 6"/>
+          <p:cNvSpPr/>
+          <p:nvPr/>
+        </p:nvSpPr>
+        <p:spPr>
+          <a:xfrm>
+            <a:off x="685800" y="2331720"/>
+            <a:ext cx="2176272" cy="1234440"/>
+          </a:xfrm>
+          <a:prstGeom prst="rect">
+            <a:avLst/>
+          </a:prstGeom>
+          <a:noFill/>
+          <a:ln/>
+        </p:spPr>
+        <p:txBody>
+          <a:bodyPr wrap="square" lIns="0" tIns="0" rIns="0" bIns="0" rtlCol="0" anchor="t"/>
+          <a:lstStyle/>
+          <a:p>
+            <a:pPr indent="0" marL="0">
+              <a:buNone/>
+            </a:pPr>
+            <a:r>
+              <a:rPr lang="en-US" sz="900" dirty="0">
+                <a:solidFill>
+                  <a:srgbClr val="48484A"/>
+                </a:solidFill>
+                <a:latin typeface="Arial" pitchFamily="34" charset="0"/>
+                <a:ea typeface="Arial" pitchFamily="34" charset="-122"/>
+                <a:cs typeface="Arial" pitchFamily="34" charset="-120"/>
+              </a:rPr>
+              <a:t>La Ley 2015 de 2020 creó la historia clínica electrónica interoperable en Colombia, con plazo máximo de 5 años: digitalizar bien ya no es opcional para las IPS.</a:t>
+            </a:r>
+            <a:endParaRPr lang="en-US" sz="900" dirty="0"/>
+          </a:p>
+        </p:txBody>
+      </p:sp>
+      <p:sp>
+        <p:nvSpPr>
+          <p:cNvPr id="10" name="Shape 7"/>
+          <p:cNvSpPr/>
+          <p:nvPr/>
+        </p:nvSpPr>
+        <p:spPr>
+          <a:xfrm>
+            <a:off x="3300984" y="1371600"/>
+            <a:ext cx="2542032" cy="2331720"/>
+          </a:xfrm>
+          <a:prstGeom prst="roundRect">
+            <a:avLst>
+              <a:gd name="adj" fmla="val 3529"/>
+            </a:avLst>
+          </a:prstGeom>
+          <a:solidFill>
+            <a:srgbClr val="FFFFFF"/>
+          </a:solidFill>
           <a:ln w="9525">
             <a:solidFill>
-              <a:srgbClr val="CFE4FB"/>
+              <a:srgbClr val="E2E2E6"/>
             </a:solidFill>
             <a:prstDash val="solid"/>
           </a:ln>
@@ -5517,14 +6737,14 @@
       </p:sp>
       <p:sp>
         <p:nvSpPr>
-          <p:cNvPr id="9" name="Text 7"/>
-          <p:cNvSpPr/>
-          <p:nvPr/>
-        </p:nvSpPr>
-        <p:spPr>
-          <a:xfrm>
-            <a:off x="5029200" y="2880360"/>
-            <a:ext cx="3337560" cy="274320"/>
+          <p:cNvPr id="11" name="Text 8"/>
+          <p:cNvSpPr/>
+          <p:nvPr/>
+        </p:nvSpPr>
+        <p:spPr>
+          <a:xfrm>
+            <a:off x="3483864" y="1499616"/>
+            <a:ext cx="822960" cy="365760"/>
           </a:xfrm>
           <a:prstGeom prst="rect">
             <a:avLst/>
@@ -5540,7 +6760,7 @@
               <a:buNone/>
             </a:pPr>
             <a:r>
-              <a:rPr lang="en-US" sz="1000" b="1" spc="150" kern="0" dirty="0">
+              <a:rPr lang="en-US" sz="1800" dirty="0">
                 <a:solidFill>
                   <a:srgbClr val="0071E3"/>
                 </a:solidFill>
@@ -5548,22 +6768,66 @@
                 <a:ea typeface="Arial" pitchFamily="34" charset="-122"/>
                 <a:cs typeface="Arial" pitchFamily="34" charset="-120"/>
               </a:rPr>
-              <a:t>DESPUÉS</a:t>
-            </a:r>
-            <a:endParaRPr lang="en-US" sz="1000" dirty="0"/>
-          </a:p>
-        </p:txBody>
-      </p:sp>
-      <p:sp>
-        <p:nvSpPr>
-          <p:cNvPr id="10" name="Text 8"/>
-          <p:cNvSpPr/>
-          <p:nvPr/>
-        </p:nvSpPr>
-        <p:spPr>
-          <a:xfrm>
-            <a:off x="5029200" y="3246120"/>
-            <a:ext cx="3337560" cy="1143000"/>
+              <a:t>02</a:t>
+            </a:r>
+            <a:endParaRPr lang="en-US" sz="1800" dirty="0"/>
+          </a:p>
+        </p:txBody>
+      </p:sp>
+      <p:sp>
+        <p:nvSpPr>
+          <p:cNvPr id="12" name="Shape 9"/>
+          <p:cNvSpPr/>
+          <p:nvPr/>
+        </p:nvSpPr>
+        <p:spPr>
+          <a:xfrm>
+            <a:off x="5276088" y="1517904"/>
+            <a:ext cx="384048" cy="384048"/>
+          </a:xfrm>
+          <a:prstGeom prst="ellipse">
+            <a:avLst/>
+          </a:prstGeom>
+          <a:solidFill>
+            <a:srgbClr val="EAF3FF"/>
+          </a:solidFill>
+          <a:ln/>
+        </p:spPr>
+      </p:sp>
+      <p:pic>
+        <p:nvPicPr>
+          <p:cNvPr id="13" name="Image 1" descr="preencoded.png">    </p:cNvPr>
+          <p:cNvPicPr>
+            <a:picLocks noChangeAspect="1"/>
+          </p:cNvPicPr>
+          <p:nvPr/>
+        </p:nvPicPr>
+        <p:blipFill>
+          <a:blip r:embed="rId2"/>
+          <a:stretch>
+            <a:fillRect/>
+          </a:stretch>
+        </p:blipFill>
+        <p:spPr>
+          <a:xfrm>
+            <a:off x="5329855" y="1571671"/>
+            <a:ext cx="276515" cy="276515"/>
+          </a:xfrm>
+          <a:prstGeom prst="rect">
+            <a:avLst/>
+          </a:prstGeom>
+        </p:spPr>
+      </p:pic>
+      <p:sp>
+        <p:nvSpPr>
+          <p:cNvPr id="14" name="Text 10"/>
+          <p:cNvSpPr/>
+          <p:nvPr/>
+        </p:nvSpPr>
+        <p:spPr>
+          <a:xfrm>
+            <a:off x="3483864" y="1993392"/>
+            <a:ext cx="2176272" cy="320040"/>
           </a:xfrm>
           <a:prstGeom prst="rect">
             <a:avLst/>
@@ -5579,7 +6843,280 @@
               <a:buNone/>
             </a:pPr>
             <a:r>
-              <a:rPr lang="en-US" sz="1400" b="1" dirty="0">
+              <a:rPr lang="en-US" sz="1250" b="1" dirty="0">
+                <a:solidFill>
+                  <a:srgbClr val="1D1D1F"/>
+                </a:solidFill>
+                <a:latin typeface="Arial" pitchFamily="34" charset="0"/>
+                <a:ea typeface="Arial" pitchFamily="34" charset="-122"/>
+                <a:cs typeface="Arial" pitchFamily="34" charset="-120"/>
+              </a:rPr>
+              <a:t>La tecnología maduró</a:t>
+            </a:r>
+            <a:endParaRPr lang="en-US" sz="1250" dirty="0"/>
+          </a:p>
+        </p:txBody>
+      </p:sp>
+      <p:sp>
+        <p:nvSpPr>
+          <p:cNvPr id="15" name="Text 11"/>
+          <p:cNvSpPr/>
+          <p:nvPr/>
+        </p:nvSpPr>
+        <p:spPr>
+          <a:xfrm>
+            <a:off x="3483864" y="2331720"/>
+            <a:ext cx="2176272" cy="1234440"/>
+          </a:xfrm>
+          <a:prstGeom prst="rect">
+            <a:avLst/>
+          </a:prstGeom>
+          <a:noFill/>
+          <a:ln/>
+        </p:spPr>
+        <p:txBody>
+          <a:bodyPr wrap="square" lIns="0" tIns="0" rIns="0" bIns="0" rtlCol="0" anchor="t"/>
+          <a:lstStyle/>
+          <a:p>
+            <a:pPr indent="0" marL="0">
+              <a:buNone/>
+            </a:pPr>
+            <a:r>
+              <a:rPr lang="en-US" sz="900" dirty="0">
+                <a:solidFill>
+                  <a:srgbClr val="48484A"/>
+                </a:solidFill>
+                <a:latin typeface="Arial" pitchFamily="34" charset="0"/>
+                <a:ea typeface="Arial" pitchFamily="34" charset="-122"/>
+                <a:cs typeface="Arial" pitchFamily="34" charset="-120"/>
+              </a:rPr>
+              <a:t>La IA de voz y lenguaje alcanzó calidad clínica en español, y su costo por consulta cae año tras año. Lo que era imposible en 2019 hoy corre en un consultorio.</a:t>
+            </a:r>
+            <a:endParaRPr lang="en-US" sz="900" dirty="0"/>
+          </a:p>
+        </p:txBody>
+      </p:sp>
+      <p:sp>
+        <p:nvSpPr>
+          <p:cNvPr id="16" name="Shape 12"/>
+          <p:cNvSpPr/>
+          <p:nvPr/>
+        </p:nvSpPr>
+        <p:spPr>
+          <a:xfrm>
+            <a:off x="6099048" y="1371600"/>
+            <a:ext cx="2542032" cy="2331720"/>
+          </a:xfrm>
+          <a:prstGeom prst="roundRect">
+            <a:avLst>
+              <a:gd name="adj" fmla="val 3529"/>
+            </a:avLst>
+          </a:prstGeom>
+          <a:solidFill>
+            <a:srgbClr val="FFFFFF"/>
+          </a:solidFill>
+          <a:ln w="9525">
+            <a:solidFill>
+              <a:srgbClr val="E2E2E6"/>
+            </a:solidFill>
+            <a:prstDash val="solid"/>
+          </a:ln>
+          <a:effectLst>
+            <a:outerShdw sx="100000" sy="100000" kx="0" ky="0" algn="bl" rotWithShape="0" blurRad="101600" dist="25400" dir="5400000">
+              <a:srgbClr val="0A3D91">
+                <a:alpha val="7000"/>
+              </a:srgbClr>
+            </a:outerShdw>
+          </a:effectLst>
+        </p:spPr>
+      </p:sp>
+      <p:sp>
+        <p:nvSpPr>
+          <p:cNvPr id="17" name="Text 13"/>
+          <p:cNvSpPr/>
+          <p:nvPr/>
+        </p:nvSpPr>
+        <p:spPr>
+          <a:xfrm>
+            <a:off x="6281928" y="1499616"/>
+            <a:ext cx="822960" cy="365760"/>
+          </a:xfrm>
+          <a:prstGeom prst="rect">
+            <a:avLst/>
+          </a:prstGeom>
+          <a:noFill/>
+          <a:ln/>
+        </p:spPr>
+        <p:txBody>
+          <a:bodyPr wrap="square" lIns="0" tIns="0" rIns="0" bIns="0" rtlCol="0" anchor="ctr"/>
+          <a:lstStyle/>
+          <a:p>
+            <a:pPr indent="0" marL="0">
+              <a:buNone/>
+            </a:pPr>
+            <a:r>
+              <a:rPr lang="en-US" sz="1800" dirty="0">
+                <a:solidFill>
+                  <a:srgbClr val="0071E3"/>
+                </a:solidFill>
+                <a:latin typeface="Arial" pitchFamily="34" charset="0"/>
+                <a:ea typeface="Arial" pitchFamily="34" charset="-122"/>
+                <a:cs typeface="Arial" pitchFamily="34" charset="-120"/>
+              </a:rPr>
+              <a:t>03</a:t>
+            </a:r>
+            <a:endParaRPr lang="en-US" sz="1800" dirty="0"/>
+          </a:p>
+        </p:txBody>
+      </p:sp>
+      <p:sp>
+        <p:nvSpPr>
+          <p:cNvPr id="18" name="Shape 14"/>
+          <p:cNvSpPr/>
+          <p:nvPr/>
+        </p:nvSpPr>
+        <p:spPr>
+          <a:xfrm>
+            <a:off x="8074152" y="1517904"/>
+            <a:ext cx="384048" cy="384048"/>
+          </a:xfrm>
+          <a:prstGeom prst="ellipse">
+            <a:avLst/>
+          </a:prstGeom>
+          <a:solidFill>
+            <a:srgbClr val="EAF3FF"/>
+          </a:solidFill>
+          <a:ln/>
+        </p:spPr>
+      </p:sp>
+      <p:pic>
+        <p:nvPicPr>
+          <p:cNvPr id="19" name="Image 2" descr="preencoded.png">    </p:cNvPr>
+          <p:cNvPicPr>
+            <a:picLocks noChangeAspect="1"/>
+          </p:cNvPicPr>
+          <p:nvPr/>
+        </p:nvPicPr>
+        <p:blipFill>
+          <a:blip r:embed="rId3"/>
+          <a:stretch>
+            <a:fillRect/>
+          </a:stretch>
+        </p:blipFill>
+        <p:spPr>
+          <a:xfrm>
+            <a:off x="8127919" y="1571671"/>
+            <a:ext cx="276515" cy="276515"/>
+          </a:xfrm>
+          <a:prstGeom prst="rect">
+            <a:avLst/>
+          </a:prstGeom>
+        </p:spPr>
+      </p:pic>
+      <p:sp>
+        <p:nvSpPr>
+          <p:cNvPr id="20" name="Text 15"/>
+          <p:cNvSpPr/>
+          <p:nvPr/>
+        </p:nvSpPr>
+        <p:spPr>
+          <a:xfrm>
+            <a:off x="6281928" y="1993392"/>
+            <a:ext cx="2176272" cy="320040"/>
+          </a:xfrm>
+          <a:prstGeom prst="rect">
+            <a:avLst/>
+          </a:prstGeom>
+          <a:noFill/>
+          <a:ln/>
+        </p:spPr>
+        <p:txBody>
+          <a:bodyPr wrap="square" lIns="0" tIns="0" rIns="0" bIns="0" rtlCol="0" anchor="ctr"/>
+          <a:lstStyle/>
+          <a:p>
+            <a:pPr indent="0" marL="0">
+              <a:buNone/>
+            </a:pPr>
+            <a:r>
+              <a:rPr lang="en-US" sz="1250" b="1" dirty="0">
+                <a:solidFill>
+                  <a:srgbClr val="1D1D1F"/>
+                </a:solidFill>
+                <a:latin typeface="Arial" pitchFamily="34" charset="0"/>
+                <a:ea typeface="Arial" pitchFamily="34" charset="-122"/>
+                <a:cs typeface="Arial" pitchFamily="34" charset="-120"/>
+              </a:rPr>
+              <a:t>El agotamiento es récord</a:t>
+            </a:r>
+            <a:endParaRPr lang="en-US" sz="1250" dirty="0"/>
+          </a:p>
+        </p:txBody>
+      </p:sp>
+      <p:sp>
+        <p:nvSpPr>
+          <p:cNvPr id="21" name="Text 16"/>
+          <p:cNvSpPr/>
+          <p:nvPr/>
+        </p:nvSpPr>
+        <p:spPr>
+          <a:xfrm>
+            <a:off x="6281928" y="2331720"/>
+            <a:ext cx="2176272" cy="1234440"/>
+          </a:xfrm>
+          <a:prstGeom prst="rect">
+            <a:avLst/>
+          </a:prstGeom>
+          <a:noFill/>
+          <a:ln/>
+        </p:spPr>
+        <p:txBody>
+          <a:bodyPr wrap="square" lIns="0" tIns="0" rIns="0" bIns="0" rtlCol="0" anchor="t"/>
+          <a:lstStyle/>
+          <a:p>
+            <a:pPr indent="0" marL="0">
+              <a:buNone/>
+            </a:pPr>
+            <a:r>
+              <a:rPr lang="en-US" sz="900" dirty="0">
+                <a:solidFill>
+                  <a:srgbClr val="48484A"/>
+                </a:solidFill>
+                <a:latin typeface="Arial" pitchFamily="34" charset="0"/>
+                <a:ea typeface="Arial" pitchFamily="34" charset="-122"/>
+                <a:cs typeface="Arial" pitchFamily="34" charset="-120"/>
+              </a:rPr>
+              <a:t>El 45,6% del personal médico en Colombia presenta síndrome de burnout. La carga documental es uno de sus motores principales.</a:t>
+            </a:r>
+            <a:endParaRPr lang="en-US" sz="900" dirty="0"/>
+          </a:p>
+        </p:txBody>
+      </p:sp>
+      <p:sp>
+        <p:nvSpPr>
+          <p:cNvPr id="22" name="Text 17"/>
+          <p:cNvSpPr/>
+          <p:nvPr/>
+        </p:nvSpPr>
+        <p:spPr>
+          <a:xfrm>
+            <a:off x="502920" y="3840480"/>
+            <a:ext cx="8138160" cy="457200"/>
+          </a:xfrm>
+          <a:prstGeom prst="rect">
+            <a:avLst/>
+          </a:prstGeom>
+          <a:noFill/>
+          <a:ln/>
+        </p:spPr>
+        <p:txBody>
+          <a:bodyPr wrap="square" lIns="0" tIns="0" rIns="0" bIns="0" rtlCol="0" anchor="ctr"/>
+          <a:lstStyle/>
+          <a:p>
+            <a:pPr indent="0" marL="0">
+              <a:buNone/>
+            </a:pPr>
+            <a:r>
+              <a:rPr lang="en-US" sz="1250" b="1" i="1" dirty="0">
                 <a:solidFill>
                   <a:srgbClr val="0A3D91"/>
                 </a:solidFill>
@@ -5587,9 +7124,48 @@
                 <a:ea typeface="Arial" pitchFamily="34" charset="-122"/>
                 <a:cs typeface="Arial" pitchFamily="34" charset="-120"/>
               </a:rPr>
-              <a:t>Consulta natural + IA + documentación estructurada revisable.</a:t>
-            </a:r>
-            <a:endParaRPr lang="en-US" sz="1400" dirty="0"/>
+              <a:t>La documentación clínica no va a desaparecer. Pero sí puede dejar de consumir al médico.</a:t>
+            </a:r>
+            <a:endParaRPr lang="en-US" sz="1250" dirty="0"/>
+          </a:p>
+        </p:txBody>
+      </p:sp>
+      <p:sp>
+        <p:nvSpPr>
+          <p:cNvPr id="23" name="Text 18"/>
+          <p:cNvSpPr/>
+          <p:nvPr/>
+        </p:nvSpPr>
+        <p:spPr>
+          <a:xfrm>
+            <a:off x="502920" y="4343400"/>
+            <a:ext cx="8138160" cy="457200"/>
+          </a:xfrm>
+          <a:prstGeom prst="rect">
+            <a:avLst/>
+          </a:prstGeom>
+          <a:noFill/>
+          <a:ln/>
+        </p:spPr>
+        <p:txBody>
+          <a:bodyPr wrap="square" lIns="0" tIns="0" rIns="0" bIns="0" rtlCol="0" anchor="ctr"/>
+          <a:lstStyle/>
+          <a:p>
+            <a:pPr indent="0" marL="0">
+              <a:buNone/>
+            </a:pPr>
+            <a:r>
+              <a:rPr lang="en-US" sz="750" dirty="0">
+                <a:solidFill>
+                  <a:srgbClr val="6E6E73"/>
+                </a:solidFill>
+                <a:latin typeface="Arial" pitchFamily="34" charset="0"/>
+                <a:ea typeface="Arial" pitchFamily="34" charset="-122"/>
+                <a:cs typeface="Arial" pitchFamily="34" charset="-120"/>
+              </a:rPr>
+              <a:t>Fuentes: Ley 2015 de 2020 (funcionpublica.gov.co); prevalencia de burnout en personal médico de Latinoamérica 2013–2023, revisión sistemática (Colombia: 45,6%).</a:t>
+            </a:r>
+            <a:endParaRPr lang="en-US" sz="750" dirty="0"/>
           </a:p>
         </p:txBody>
       </p:sp>
@@ -5633,7 +7209,7 @@
         </p:nvSpPr>
         <p:spPr>
           <a:xfrm>
-            <a:off x="502920" y="365760"/>
+            <a:off x="502920" y="320040"/>
             <a:ext cx="8138160" cy="274320"/>
           </a:xfrm>
           <a:prstGeom prst="rect">
@@ -5672,8 +7248,8 @@
         </p:nvSpPr>
         <p:spPr>
           <a:xfrm>
-            <a:off x="502920" y="685800"/>
-            <a:ext cx="8138160" cy="868680"/>
+            <a:off x="502920" y="658368"/>
+            <a:ext cx="8138160" cy="685800"/>
           </a:xfrm>
           <a:prstGeom prst="rect">
             <a:avLst/>
@@ -5689,7 +7265,7 @@
               <a:buNone/>
             </a:pPr>
             <a:r>
-              <a:rPr lang="en-US" sz="2600" b="1" dirty="0">
+              <a:rPr lang="en-US" sz="2200" b="1" dirty="0">
                 <a:solidFill>
                   <a:srgbClr val="1D1D1F"/>
                 </a:solidFill>
@@ -5697,9 +7273,37 @@
                 <a:ea typeface="Arial" pitchFamily="34" charset="-122"/>
                 <a:cs typeface="Arial" pitchFamily="34" charset="-120"/>
               </a:rPr>
-              <a:t>Miracle: IA para documentar consultas médicas desde la voz.</a:t>
-            </a:r>
-            <a:endParaRPr lang="en-US" sz="2600" dirty="0"/>
+              <a:t>Miracle documenta la consulta </a:t>
+            </a:r>
+            <a:pPr indent="0" marL="0">
+              <a:buNone/>
+            </a:pPr>
+            <a:r>
+              <a:rPr lang="en-US" sz="2200" b="1" dirty="0">
+                <a:solidFill>
+                  <a:srgbClr val="0A3D91"/>
+                </a:solidFill>
+                <a:latin typeface="Arial" pitchFamily="34" charset="0"/>
+                <a:ea typeface="Arial" pitchFamily="34" charset="-122"/>
+                <a:cs typeface="Arial" pitchFamily="34" charset="-120"/>
+              </a:rPr>
+              <a:t>mientras el médico atiende</a:t>
+            </a:r>
+            <a:pPr indent="0" marL="0">
+              <a:buNone/>
+            </a:pPr>
+            <a:r>
+              <a:rPr lang="en-US" sz="2200" b="1" dirty="0">
+                <a:solidFill>
+                  <a:srgbClr val="1D1D1F"/>
+                </a:solidFill>
+                <a:latin typeface="Arial" pitchFamily="34" charset="0"/>
+                <a:ea typeface="Arial" pitchFamily="34" charset="-122"/>
+                <a:cs typeface="Arial" pitchFamily="34" charset="-120"/>
+              </a:rPr>
+              <a:t>.</a:t>
+            </a:r>
+            <a:endParaRPr lang="en-US" sz="2200" dirty="0"/>
           </a:p>
         </p:txBody>
       </p:sp>
@@ -5711,8 +7315,8 @@
         </p:nvSpPr>
         <p:spPr>
           <a:xfrm>
-            <a:off x="502920" y="1691640"/>
-            <a:ext cx="8138160" cy="594360"/>
+            <a:off x="502920" y="1371600"/>
+            <a:ext cx="8138160" cy="502920"/>
           </a:xfrm>
           <a:prstGeom prst="rect">
             <a:avLst/>
@@ -5728,7 +7332,7 @@
               <a:buNone/>
             </a:pPr>
             <a:r>
-              <a:rPr lang="en-US" sz="1350" dirty="0">
+              <a:rPr lang="en-US" sz="1100" dirty="0">
                 <a:solidFill>
                   <a:srgbClr val="48484A"/>
                 </a:solidFill>
@@ -5736,9 +7340,9 @@
                 <a:ea typeface="Arial" pitchFamily="34" charset="-122"/>
                 <a:cs typeface="Arial" pitchFamily="34" charset="-120"/>
               </a:rPr>
-              <a:t>Miracle escucha la conversación médico-paciente y ayuda a convertirla en información clínica organizada, lista para ser revisada y utilizada por el médico.</a:t>
-            </a:r>
-            <a:endParaRPr lang="en-US" sz="1350" dirty="0"/>
+              <a:t>Escucha la conversación médico-paciente y la convierte en información clínica estructurada: notas SOAP, resúmenes y planes de tratamiento listos para revisar y aprobar.</a:t>
+            </a:r>
+            <a:endParaRPr lang="en-US" sz="1100" dirty="0"/>
           </a:p>
         </p:txBody>
       </p:sp>
@@ -5750,8 +7354,8 @@
         </p:nvSpPr>
         <p:spPr>
           <a:xfrm>
-            <a:off x="1107567" y="2788920"/>
-            <a:ext cx="585216" cy="585216"/>
+            <a:off x="1144143" y="2011680"/>
+            <a:ext cx="512064" cy="512064"/>
           </a:xfrm>
           <a:prstGeom prst="ellipse">
             <a:avLst/>
@@ -5778,8 +7382,8 @@
         </p:blipFill>
         <p:spPr>
           <a:xfrm>
-            <a:off x="1189497" y="2870850"/>
-            <a:ext cx="421356" cy="421356"/>
+            <a:off x="1215832" y="2083369"/>
+            <a:ext cx="368686" cy="368686"/>
           </a:xfrm>
           <a:prstGeom prst="rect">
             <a:avLst/>
@@ -5794,8 +7398,8 @@
         </p:nvSpPr>
         <p:spPr>
           <a:xfrm>
-            <a:off x="502920" y="3538728"/>
-            <a:ext cx="1794510" cy="457200"/>
+            <a:off x="502920" y="2651760"/>
+            <a:ext cx="1794510" cy="365760"/>
           </a:xfrm>
           <a:prstGeom prst="rect">
             <a:avLst/>
@@ -5811,7 +7415,7 @@
               <a:buNone/>
             </a:pPr>
             <a:r>
-              <a:rPr lang="en-US" sz="1200" b="1" dirty="0">
+              <a:rPr lang="en-US" sz="1050" b="1" dirty="0">
                 <a:solidFill>
                   <a:srgbClr val="1D1D1F"/>
                 </a:solidFill>
@@ -5821,7 +7425,7 @@
               </a:rPr>
               <a:t>Conversación</a:t>
             </a:r>
-            <a:endParaRPr lang="en-US" sz="1200" dirty="0"/>
+            <a:endParaRPr lang="en-US" sz="1050" dirty="0"/>
           </a:p>
         </p:txBody>
       </p:sp>
@@ -5833,8 +7437,8 @@
         </p:nvSpPr>
         <p:spPr>
           <a:xfrm>
-            <a:off x="2324862" y="3081528"/>
-            <a:ext cx="265176" cy="0"/>
+            <a:off x="2334006" y="2267712"/>
+            <a:ext cx="246888" cy="0"/>
           </a:xfrm>
           <a:prstGeom prst="line">
             <a:avLst/>
@@ -5856,8 +7460,8 @@
         </p:nvSpPr>
         <p:spPr>
           <a:xfrm>
-            <a:off x="3222117" y="2788920"/>
-            <a:ext cx="585216" cy="585216"/>
+            <a:off x="3258693" y="2011680"/>
+            <a:ext cx="512064" cy="512064"/>
           </a:xfrm>
           <a:prstGeom prst="ellipse">
             <a:avLst/>
@@ -5884,8 +7488,8 @@
         </p:blipFill>
         <p:spPr>
           <a:xfrm>
-            <a:off x="3304047" y="2870850"/>
-            <a:ext cx="421356" cy="421356"/>
+            <a:off x="3330382" y="2083369"/>
+            <a:ext cx="368686" cy="368686"/>
           </a:xfrm>
           <a:prstGeom prst="rect">
             <a:avLst/>
@@ -5900,8 +7504,8 @@
         </p:nvSpPr>
         <p:spPr>
           <a:xfrm>
-            <a:off x="2617470" y="3538728"/>
-            <a:ext cx="1794510" cy="457200"/>
+            <a:off x="2617470" y="2651760"/>
+            <a:ext cx="1794510" cy="365760"/>
           </a:xfrm>
           <a:prstGeom prst="rect">
             <a:avLst/>
@@ -5917,7 +7521,7 @@
               <a:buNone/>
             </a:pPr>
             <a:r>
-              <a:rPr lang="en-US" sz="1200" b="1" dirty="0">
+              <a:rPr lang="en-US" sz="1050" b="1" dirty="0">
                 <a:solidFill>
                   <a:srgbClr val="1D1D1F"/>
                 </a:solidFill>
@@ -5927,7 +7531,7 @@
               </a:rPr>
               <a:t>IA</a:t>
             </a:r>
-            <a:endParaRPr lang="en-US" sz="1200" dirty="0"/>
+            <a:endParaRPr lang="en-US" sz="1050" dirty="0"/>
           </a:p>
         </p:txBody>
       </p:sp>
@@ -5939,8 +7543,8 @@
         </p:nvSpPr>
         <p:spPr>
           <a:xfrm>
-            <a:off x="4439412" y="3081528"/>
-            <a:ext cx="265176" cy="0"/>
+            <a:off x="4448556" y="2267712"/>
+            <a:ext cx="246888" cy="0"/>
           </a:xfrm>
           <a:prstGeom prst="line">
             <a:avLst/>
@@ -5962,8 +7566,8 @@
         </p:nvSpPr>
         <p:spPr>
           <a:xfrm>
-            <a:off x="5336667" y="2788920"/>
-            <a:ext cx="585216" cy="585216"/>
+            <a:off x="5373243" y="2011680"/>
+            <a:ext cx="512064" cy="512064"/>
           </a:xfrm>
           <a:prstGeom prst="ellipse">
             <a:avLst/>
@@ -5990,8 +7594,8 @@
         </p:blipFill>
         <p:spPr>
           <a:xfrm>
-            <a:off x="5418597" y="2870850"/>
-            <a:ext cx="421356" cy="421356"/>
+            <a:off x="5444932" y="2083369"/>
+            <a:ext cx="368686" cy="368686"/>
           </a:xfrm>
           <a:prstGeom prst="rect">
             <a:avLst/>
@@ -6006,8 +7610,8 @@
         </p:nvSpPr>
         <p:spPr>
           <a:xfrm>
-            <a:off x="4732020" y="3538728"/>
-            <a:ext cx="1794510" cy="457200"/>
+            <a:off x="4732020" y="2651760"/>
+            <a:ext cx="1794510" cy="365760"/>
           </a:xfrm>
           <a:prstGeom prst="rect">
             <a:avLst/>
@@ -6023,7 +7627,7 @@
               <a:buNone/>
             </a:pPr>
             <a:r>
-              <a:rPr lang="en-US" sz="1200" b="1" dirty="0">
+              <a:rPr lang="en-US" sz="1050" b="1" dirty="0">
                 <a:solidFill>
                   <a:srgbClr val="1D1D1F"/>
                 </a:solidFill>
@@ -6031,9 +7635,9 @@
                 <a:ea typeface="Arial" pitchFamily="34" charset="-122"/>
                 <a:cs typeface="Arial" pitchFamily="34" charset="-120"/>
               </a:rPr>
-              <a:t>Resumen clínico</a:t>
-            </a:r>
-            <a:endParaRPr lang="en-US" sz="1200" dirty="0"/>
+              <a:t>Nota estructurada</a:t>
+            </a:r>
+            <a:endParaRPr lang="en-US" sz="1050" dirty="0"/>
           </a:p>
         </p:txBody>
       </p:sp>
@@ -6045,8 +7649,8 @@
         </p:nvSpPr>
         <p:spPr>
           <a:xfrm>
-            <a:off x="6553962" y="3081528"/>
-            <a:ext cx="265176" cy="0"/>
+            <a:off x="6563106" y="2267712"/>
+            <a:ext cx="246888" cy="0"/>
           </a:xfrm>
           <a:prstGeom prst="line">
             <a:avLst/>
@@ -6068,8 +7672,8 @@
         </p:nvSpPr>
         <p:spPr>
           <a:xfrm>
-            <a:off x="7451217" y="2788920"/>
-            <a:ext cx="585216" cy="585216"/>
+            <a:off x="7487793" y="2011680"/>
+            <a:ext cx="512064" cy="512064"/>
           </a:xfrm>
           <a:prstGeom prst="ellipse">
             <a:avLst/>
@@ -6096,8 +7700,8 @@
         </p:blipFill>
         <p:spPr>
           <a:xfrm>
-            <a:off x="7533147" y="2870850"/>
-            <a:ext cx="421356" cy="421356"/>
+            <a:off x="7559482" y="2083369"/>
+            <a:ext cx="368686" cy="368686"/>
           </a:xfrm>
           <a:prstGeom prst="rect">
             <a:avLst/>
@@ -6112,8 +7716,8 @@
         </p:nvSpPr>
         <p:spPr>
           <a:xfrm>
-            <a:off x="6846570" y="3538728"/>
-            <a:ext cx="1794510" cy="457200"/>
+            <a:off x="6846570" y="2651760"/>
+            <a:ext cx="1794510" cy="365760"/>
           </a:xfrm>
           <a:prstGeom prst="rect">
             <a:avLst/>
@@ -6129,7 +7733,7 @@
               <a:buNone/>
             </a:pPr>
             <a:r>
-              <a:rPr lang="en-US" sz="1200" b="1" dirty="0">
+              <a:rPr lang="en-US" sz="1050" b="1" dirty="0">
                 <a:solidFill>
                   <a:srgbClr val="1D1D1F"/>
                 </a:solidFill>
@@ -6137,9 +7741,233 @@
                 <a:ea typeface="Arial" pitchFamily="34" charset="-122"/>
                 <a:cs typeface="Arial" pitchFamily="34" charset="-120"/>
               </a:rPr>
-              <a:t>Documentación</a:t>
-            </a:r>
-            <a:endParaRPr lang="en-US" sz="1200" dirty="0"/>
+              <a:t>Historia clínica</a:t>
+            </a:r>
+            <a:endParaRPr lang="en-US" sz="1050" dirty="0"/>
+          </a:p>
+        </p:txBody>
+      </p:sp>
+      <p:sp>
+        <p:nvSpPr>
+          <p:cNvPr id="20" name="Shape 14"/>
+          <p:cNvSpPr/>
+          <p:nvPr/>
+        </p:nvSpPr>
+        <p:spPr>
+          <a:xfrm>
+            <a:off x="502920" y="3246120"/>
+            <a:ext cx="3909060" cy="1508760"/>
+          </a:xfrm>
+          <a:prstGeom prst="roundRect">
+            <a:avLst>
+              <a:gd name="adj" fmla="val 5455"/>
+            </a:avLst>
+          </a:prstGeom>
+          <a:solidFill>
+            <a:srgbClr val="FFFFFF"/>
+          </a:solidFill>
+          <a:ln w="9525">
+            <a:solidFill>
+              <a:srgbClr val="E2E2E6"/>
+            </a:solidFill>
+            <a:prstDash val="solid"/>
+          </a:ln>
+          <a:effectLst>
+            <a:outerShdw sx="100000" sy="100000" kx="0" ky="0" algn="bl" rotWithShape="0" blurRad="101600" dist="25400" dir="5400000">
+              <a:srgbClr val="0A3D91">
+                <a:alpha val="7000"/>
+              </a:srgbClr>
+            </a:outerShdw>
+          </a:effectLst>
+        </p:spPr>
+      </p:sp>
+      <p:sp>
+        <p:nvSpPr>
+          <p:cNvPr id="21" name="Text 15"/>
+          <p:cNvSpPr/>
+          <p:nvPr/>
+        </p:nvSpPr>
+        <p:spPr>
+          <a:xfrm>
+            <a:off x="731520" y="3410712"/>
+            <a:ext cx="3451860" cy="256032"/>
+          </a:xfrm>
+          <a:prstGeom prst="rect">
+            <a:avLst/>
+          </a:prstGeom>
+          <a:noFill/>
+          <a:ln/>
+        </p:spPr>
+        <p:txBody>
+          <a:bodyPr wrap="square" lIns="0" tIns="0" rIns="0" bIns="0" rtlCol="0" anchor="ctr"/>
+          <a:lstStyle/>
+          <a:p>
+            <a:pPr indent="0" marL="0">
+              <a:buNone/>
+            </a:pPr>
+            <a:r>
+              <a:rPr lang="en-US" sz="900" b="1" spc="150" kern="0" dirty="0">
+                <a:solidFill>
+                  <a:srgbClr val="6E6E73"/>
+                </a:solidFill>
+                <a:latin typeface="Arial" pitchFamily="34" charset="0"/>
+                <a:ea typeface="Arial" pitchFamily="34" charset="-122"/>
+                <a:cs typeface="Arial" pitchFamily="34" charset="-120"/>
+              </a:rPr>
+              <a:t>ANTES</a:t>
+            </a:r>
+            <a:endParaRPr lang="en-US" sz="900" dirty="0"/>
+          </a:p>
+        </p:txBody>
+      </p:sp>
+      <p:sp>
+        <p:nvSpPr>
+          <p:cNvPr id="22" name="Text 16"/>
+          <p:cNvSpPr/>
+          <p:nvPr/>
+        </p:nvSpPr>
+        <p:spPr>
+          <a:xfrm>
+            <a:off x="731520" y="3721608"/>
+            <a:ext cx="3451860" cy="868680"/>
+          </a:xfrm>
+          <a:prstGeom prst="rect">
+            <a:avLst/>
+          </a:prstGeom>
+          <a:noFill/>
+          <a:ln/>
+        </p:spPr>
+        <p:txBody>
+          <a:bodyPr wrap="square" lIns="0" tIns="0" rIns="0" bIns="0" rtlCol="0" anchor="ctr"/>
+          <a:lstStyle/>
+          <a:p>
+            <a:pPr indent="0" marL="0">
+              <a:buNone/>
+            </a:pPr>
+            <a:r>
+              <a:rPr lang="en-US" sz="1150" dirty="0">
+                <a:solidFill>
+                  <a:srgbClr val="48484A"/>
+                </a:solidFill>
+                <a:latin typeface="Arial" pitchFamily="34" charset="0"/>
+                <a:ea typeface="Arial" pitchFamily="34" charset="-122"/>
+                <a:cs typeface="Arial" pitchFamily="34" charset="-120"/>
+              </a:rPr>
+              <a:t>Consulta + escritura manual + revisión + formularios.</a:t>
+            </a:r>
+            <a:endParaRPr lang="en-US" sz="1150" dirty="0"/>
+          </a:p>
+        </p:txBody>
+      </p:sp>
+      <p:sp>
+        <p:nvSpPr>
+          <p:cNvPr id="23" name="Shape 17"/>
+          <p:cNvSpPr/>
+          <p:nvPr/>
+        </p:nvSpPr>
+        <p:spPr>
+          <a:xfrm>
+            <a:off x="4732020" y="3246120"/>
+            <a:ext cx="3909060" cy="1508760"/>
+          </a:xfrm>
+          <a:prstGeom prst="roundRect">
+            <a:avLst>
+              <a:gd name="adj" fmla="val 5455"/>
+            </a:avLst>
+          </a:prstGeom>
+          <a:solidFill>
+            <a:srgbClr val="EAF3FF"/>
+          </a:solidFill>
+          <a:ln w="9525">
+            <a:solidFill>
+              <a:srgbClr val="CFE4FB"/>
+            </a:solidFill>
+            <a:prstDash val="solid"/>
+          </a:ln>
+          <a:effectLst>
+            <a:outerShdw sx="100000" sy="100000" kx="0" ky="0" algn="bl" rotWithShape="0" blurRad="101600" dist="25400" dir="5400000">
+              <a:srgbClr val="0A3D91">
+                <a:alpha val="7000"/>
+              </a:srgbClr>
+            </a:outerShdw>
+          </a:effectLst>
+        </p:spPr>
+      </p:sp>
+      <p:sp>
+        <p:nvSpPr>
+          <p:cNvPr id="24" name="Text 18"/>
+          <p:cNvSpPr/>
+          <p:nvPr/>
+        </p:nvSpPr>
+        <p:spPr>
+          <a:xfrm>
+            <a:off x="4960620" y="3410712"/>
+            <a:ext cx="3451860" cy="256032"/>
+          </a:xfrm>
+          <a:prstGeom prst="rect">
+            <a:avLst/>
+          </a:prstGeom>
+          <a:noFill/>
+          <a:ln/>
+        </p:spPr>
+        <p:txBody>
+          <a:bodyPr wrap="square" lIns="0" tIns="0" rIns="0" bIns="0" rtlCol="0" anchor="ctr"/>
+          <a:lstStyle/>
+          <a:p>
+            <a:pPr indent="0" marL="0">
+              <a:buNone/>
+            </a:pPr>
+            <a:r>
+              <a:rPr lang="en-US" sz="900" b="1" spc="150" kern="0" dirty="0">
+                <a:solidFill>
+                  <a:srgbClr val="0071E3"/>
+                </a:solidFill>
+                <a:latin typeface="Arial" pitchFamily="34" charset="0"/>
+                <a:ea typeface="Arial" pitchFamily="34" charset="-122"/>
+                <a:cs typeface="Arial" pitchFamily="34" charset="-120"/>
+              </a:rPr>
+              <a:t>DESPUÉS</a:t>
+            </a:r>
+            <a:endParaRPr lang="en-US" sz="900" dirty="0"/>
+          </a:p>
+        </p:txBody>
+      </p:sp>
+      <p:sp>
+        <p:nvSpPr>
+          <p:cNvPr id="25" name="Text 19"/>
+          <p:cNvSpPr/>
+          <p:nvPr/>
+        </p:nvSpPr>
+        <p:spPr>
+          <a:xfrm>
+            <a:off x="4960620" y="3721608"/>
+            <a:ext cx="3451860" cy="868680"/>
+          </a:xfrm>
+          <a:prstGeom prst="rect">
+            <a:avLst/>
+          </a:prstGeom>
+          <a:noFill/>
+          <a:ln/>
+        </p:spPr>
+        <p:txBody>
+          <a:bodyPr wrap="square" lIns="0" tIns="0" rIns="0" bIns="0" rtlCol="0" anchor="ctr"/>
+          <a:lstStyle/>
+          <a:p>
+            <a:pPr indent="0" marL="0">
+              <a:buNone/>
+            </a:pPr>
+            <a:r>
+              <a:rPr lang="en-US" sz="1150" b="1" dirty="0">
+                <a:solidFill>
+                  <a:srgbClr val="0A3D91"/>
+                </a:solidFill>
+                <a:latin typeface="Arial" pitchFamily="34" charset="0"/>
+                <a:ea typeface="Arial" pitchFamily="34" charset="-122"/>
+                <a:cs typeface="Arial" pitchFamily="34" charset="-120"/>
+              </a:rPr>
+              <a:t>Consulta natural + IA + documentación estructurada revisable.</a:t>
+            </a:r>
+            <a:endParaRPr lang="en-US" sz="1150" dirty="0"/>
           </a:p>
         </p:txBody>
       </p:sp>
@@ -6183,7 +8011,7 @@
         </p:nvSpPr>
         <p:spPr>
           <a:xfrm>
-            <a:off x="502920" y="365760"/>
+            <a:off x="502920" y="320040"/>
             <a:ext cx="8138160" cy="274320"/>
           </a:xfrm>
           <a:prstGeom prst="rect">
@@ -6222,8 +8050,8 @@
         </p:nvSpPr>
         <p:spPr>
           <a:xfrm>
-            <a:off x="502920" y="685800"/>
-            <a:ext cx="8138160" cy="640080"/>
+            <a:off x="502920" y="658368"/>
+            <a:ext cx="8138160" cy="502920"/>
           </a:xfrm>
           <a:prstGeom prst="rect">
             <a:avLst/>
@@ -6239,7 +8067,7 @@
               <a:buNone/>
             </a:pPr>
             <a:r>
-              <a:rPr lang="en-US" sz="2600" b="1" dirty="0">
+              <a:rPr lang="en-US" sz="2200" b="1" dirty="0">
                 <a:solidFill>
                   <a:srgbClr val="1D1D1F"/>
                 </a:solidFill>
@@ -6247,9 +8075,37 @@
                 <a:ea typeface="Arial" pitchFamily="34" charset="-122"/>
                 <a:cs typeface="Arial" pitchFamily="34" charset="-120"/>
               </a:rPr>
-              <a:t>Del diálogo clínico a información estructurada.</a:t>
-            </a:r>
-            <a:endParaRPr lang="en-US" sz="2600" dirty="0"/>
+              <a:t>El médico deja de estar </a:t>
+            </a:r>
+            <a:pPr indent="0" marL="0">
+              <a:buNone/>
+            </a:pPr>
+            <a:r>
+              <a:rPr lang="en-US" sz="2200" b="1" dirty="0">
+                <a:solidFill>
+                  <a:srgbClr val="0A3D91"/>
+                </a:solidFill>
+                <a:latin typeface="Arial" pitchFamily="34" charset="0"/>
+                <a:ea typeface="Arial" pitchFamily="34" charset="-122"/>
+                <a:cs typeface="Arial" pitchFamily="34" charset="-120"/>
+              </a:rPr>
+              <a:t>pegado al computador</a:t>
+            </a:r>
+            <a:pPr indent="0" marL="0">
+              <a:buNone/>
+            </a:pPr>
+            <a:r>
+              <a:rPr lang="en-US" sz="2200" b="1" dirty="0">
+                <a:solidFill>
+                  <a:srgbClr val="1D1D1F"/>
+                </a:solidFill>
+                <a:latin typeface="Arial" pitchFamily="34" charset="0"/>
+                <a:ea typeface="Arial" pitchFamily="34" charset="-122"/>
+                <a:cs typeface="Arial" pitchFamily="34" charset="-120"/>
+              </a:rPr>
+              <a:t>.</a:t>
+            </a:r>
+            <a:endParaRPr lang="en-US" sz="2200" dirty="0"/>
           </a:p>
         </p:txBody>
       </p:sp>
@@ -6261,8 +8117,8 @@
         </p:nvSpPr>
         <p:spPr>
           <a:xfrm>
-            <a:off x="502920" y="1481328"/>
-            <a:ext cx="566928" cy="365760"/>
+            <a:off x="502920" y="1252728"/>
+            <a:ext cx="457200" cy="347472"/>
           </a:xfrm>
           <a:prstGeom prst="rect">
             <a:avLst/>
@@ -6278,7 +8134,7 @@
               <a:buNone/>
             </a:pPr>
             <a:r>
-              <a:rPr lang="en-US" sz="2000" dirty="0">
+              <a:rPr lang="en-US" sz="1700" dirty="0">
                 <a:solidFill>
                   <a:srgbClr val="0071E3"/>
                 </a:solidFill>
@@ -6286,9 +8142,9 @@
                 <a:ea typeface="Arial" pitchFamily="34" charset="-122"/>
                 <a:cs typeface="Arial" pitchFamily="34" charset="-120"/>
               </a:rPr>
-              <a:t>01</a:t>
-            </a:r>
-            <a:endParaRPr lang="en-US" sz="2000" dirty="0"/>
+              <a:t>1</a:t>
+            </a:r>
+            <a:endParaRPr lang="en-US" sz="1700" dirty="0"/>
           </a:p>
         </p:txBody>
       </p:sp>
@@ -6300,8 +8156,8 @@
         </p:nvSpPr>
         <p:spPr>
           <a:xfrm>
-            <a:off x="1188720" y="1508760"/>
-            <a:ext cx="7452360" cy="329184"/>
+            <a:off x="1069848" y="1252728"/>
+            <a:ext cx="7571232" cy="365760"/>
           </a:xfrm>
           <a:prstGeom prst="rect">
             <a:avLst/>
@@ -6317,7 +8173,7 @@
               <a:buNone/>
             </a:pPr>
             <a:r>
-              <a:rPr lang="en-US" sz="1350" dirty="0">
+              <a:rPr lang="en-US" sz="1000" dirty="0">
                 <a:solidFill>
                   <a:srgbClr val="1D1D1F"/>
                 </a:solidFill>
@@ -6325,9 +8181,9 @@
                 <a:ea typeface="Arial" pitchFamily="34" charset="-122"/>
                 <a:cs typeface="Arial" pitchFamily="34" charset="-120"/>
               </a:rPr>
-              <a:t>El médico conversa normalmente con el paciente.</a:t>
-            </a:r>
-            <a:endParaRPr lang="en-US" sz="1350" dirty="0"/>
+              <a:t>Un dispositivo con micrófono dedicado en el consultorio captura la conversación con calidad clínica.</a:t>
+            </a:r>
+            <a:endParaRPr lang="en-US" sz="1000" dirty="0"/>
           </a:p>
         </p:txBody>
       </p:sp>
@@ -6339,7 +8195,7 @@
         </p:nvSpPr>
         <p:spPr>
           <a:xfrm>
-            <a:off x="502920" y="1865376"/>
+            <a:off x="502920" y="1627632"/>
             <a:ext cx="8138160" cy="0"/>
           </a:xfrm>
           <a:prstGeom prst="line">
@@ -6362,8 +8218,8 @@
         </p:nvSpPr>
         <p:spPr>
           <a:xfrm>
-            <a:off x="502920" y="1901952"/>
-            <a:ext cx="566928" cy="365760"/>
+            <a:off x="502920" y="1655064"/>
+            <a:ext cx="457200" cy="347472"/>
           </a:xfrm>
           <a:prstGeom prst="rect">
             <a:avLst/>
@@ -6379,7 +8235,7 @@
               <a:buNone/>
             </a:pPr>
             <a:r>
-              <a:rPr lang="en-US" sz="2000" dirty="0">
+              <a:rPr lang="en-US" sz="1700" dirty="0">
                 <a:solidFill>
                   <a:srgbClr val="0071E3"/>
                 </a:solidFill>
@@ -6387,9 +8243,9 @@
                 <a:ea typeface="Arial" pitchFamily="34" charset="-122"/>
                 <a:cs typeface="Arial" pitchFamily="34" charset="-120"/>
               </a:rPr>
-              <a:t>02</a:t>
-            </a:r>
-            <a:endParaRPr lang="en-US" sz="2000" dirty="0"/>
+              <a:t>2</a:t>
+            </a:r>
+            <a:endParaRPr lang="en-US" sz="1700" dirty="0"/>
           </a:p>
         </p:txBody>
       </p:sp>
@@ -6401,8 +8257,8 @@
         </p:nvSpPr>
         <p:spPr>
           <a:xfrm>
-            <a:off x="1188720" y="1929384"/>
-            <a:ext cx="7452360" cy="329184"/>
+            <a:off x="1069848" y="1655064"/>
+            <a:ext cx="7571232" cy="365760"/>
           </a:xfrm>
           <a:prstGeom prst="rect">
             <a:avLst/>
@@ -6418,7 +8274,7 @@
               <a:buNone/>
             </a:pPr>
             <a:r>
-              <a:rPr lang="en-US" sz="1350" dirty="0">
+              <a:rPr lang="en-US" sz="1000" dirty="0">
                 <a:solidFill>
                   <a:srgbClr val="1D1D1F"/>
                 </a:solidFill>
@@ -6426,9 +8282,9 @@
                 <a:ea typeface="Arial" pitchFamily="34" charset="-122"/>
                 <a:cs typeface="Arial" pitchFamily="34" charset="-120"/>
               </a:rPr>
-              <a:t>Miracle captura la voz.</a:t>
-            </a:r>
-            <a:endParaRPr lang="en-US" sz="1350" dirty="0"/>
+              <a:t>La IA comprende la consulta y la estructura como información clínica: SOAP, resumen, plan.</a:t>
+            </a:r>
+            <a:endParaRPr lang="en-US" sz="1000" dirty="0"/>
           </a:p>
         </p:txBody>
       </p:sp>
@@ -6440,7 +8296,7 @@
         </p:nvSpPr>
         <p:spPr>
           <a:xfrm>
-            <a:off x="502920" y="2286000"/>
+            <a:off x="502920" y="2029968"/>
             <a:ext cx="8138160" cy="0"/>
           </a:xfrm>
           <a:prstGeom prst="line">
@@ -6463,8 +8319,8 @@
         </p:nvSpPr>
         <p:spPr>
           <a:xfrm>
-            <a:off x="502920" y="2322576"/>
-            <a:ext cx="566928" cy="365760"/>
+            <a:off x="502920" y="2057400"/>
+            <a:ext cx="457200" cy="347472"/>
           </a:xfrm>
           <a:prstGeom prst="rect">
             <a:avLst/>
@@ -6480,7 +8336,7 @@
               <a:buNone/>
             </a:pPr>
             <a:r>
-              <a:rPr lang="en-US" sz="2000" dirty="0">
+              <a:rPr lang="en-US" sz="1700" dirty="0">
                 <a:solidFill>
                   <a:srgbClr val="0071E3"/>
                 </a:solidFill>
@@ -6488,9 +8344,9 @@
                 <a:ea typeface="Arial" pitchFamily="34" charset="-122"/>
                 <a:cs typeface="Arial" pitchFamily="34" charset="-120"/>
               </a:rPr>
-              <a:t>03</a:t>
-            </a:r>
-            <a:endParaRPr lang="en-US" sz="2000" dirty="0"/>
+              <a:t>3</a:t>
+            </a:r>
+            <a:endParaRPr lang="en-US" sz="1700" dirty="0"/>
           </a:p>
         </p:txBody>
       </p:sp>
@@ -6502,8 +8358,8 @@
         </p:nvSpPr>
         <p:spPr>
           <a:xfrm>
-            <a:off x="1188720" y="2350008"/>
-            <a:ext cx="7452360" cy="329184"/>
+            <a:off x="1069848" y="2057400"/>
+            <a:ext cx="7571232" cy="365760"/>
           </a:xfrm>
           <a:prstGeom prst="rect">
             <a:avLst/>
@@ -6519,7 +8375,7 @@
               <a:buNone/>
             </a:pPr>
             <a:r>
-              <a:rPr lang="en-US" sz="1350" dirty="0">
+              <a:rPr lang="en-US" sz="1000" dirty="0">
                 <a:solidFill>
                   <a:srgbClr val="1D1D1F"/>
                 </a:solidFill>
@@ -6527,9 +8383,9 @@
                 <a:ea typeface="Arial" pitchFamily="34" charset="-122"/>
                 <a:cs typeface="Arial" pitchFamily="34" charset="-120"/>
               </a:rPr>
-              <a:t>La IA identifica datos clínicos relevantes.</a:t>
-            </a:r>
-            <a:endParaRPr lang="en-US" sz="1350" dirty="0"/>
+              <a:t>Miracle opera el computador del médico: navega el sistema de historia clínica y diligencia los campos — sin integraciones.</a:t>
+            </a:r>
+            <a:endParaRPr lang="en-US" sz="1000" dirty="0"/>
           </a:p>
         </p:txBody>
       </p:sp>
@@ -6541,7 +8397,7 @@
         </p:nvSpPr>
         <p:spPr>
           <a:xfrm>
-            <a:off x="502920" y="2706624"/>
+            <a:off x="502920" y="2432304"/>
             <a:ext cx="8138160" cy="0"/>
           </a:xfrm>
           <a:prstGeom prst="line">
@@ -6564,8 +8420,8 @@
         </p:nvSpPr>
         <p:spPr>
           <a:xfrm>
-            <a:off x="502920" y="2743200"/>
-            <a:ext cx="566928" cy="365760"/>
+            <a:off x="502920" y="2459736"/>
+            <a:ext cx="457200" cy="347472"/>
           </a:xfrm>
           <a:prstGeom prst="rect">
             <a:avLst/>
@@ -6581,7 +8437,7 @@
               <a:buNone/>
             </a:pPr>
             <a:r>
-              <a:rPr lang="en-US" sz="2000" dirty="0">
+              <a:rPr lang="en-US" sz="1700" dirty="0">
                 <a:solidFill>
                   <a:srgbClr val="0071E3"/>
                 </a:solidFill>
@@ -6589,9 +8445,9 @@
                 <a:ea typeface="Arial" pitchFamily="34" charset="-122"/>
                 <a:cs typeface="Arial" pitchFamily="34" charset="-120"/>
               </a:rPr>
-              <a:t>04</a:t>
-            </a:r>
-            <a:endParaRPr lang="en-US" sz="2000" dirty="0"/>
+              <a:t>4</a:t>
+            </a:r>
+            <a:endParaRPr lang="en-US" sz="1700" dirty="0"/>
           </a:p>
         </p:txBody>
       </p:sp>
@@ -6603,8 +8459,8 @@
         </p:nvSpPr>
         <p:spPr>
           <a:xfrm>
-            <a:off x="1188720" y="2770632"/>
-            <a:ext cx="7452360" cy="329184"/>
+            <a:off x="1069848" y="2459736"/>
+            <a:ext cx="7571232" cy="365760"/>
           </a:xfrm>
           <a:prstGeom prst="rect">
             <a:avLst/>
@@ -6620,7 +8476,7 @@
               <a:buNone/>
             </a:pPr>
             <a:r>
-              <a:rPr lang="en-US" sz="1350" dirty="0">
+              <a:rPr lang="en-US" sz="1000" dirty="0">
                 <a:solidFill>
                   <a:srgbClr val="1D1D1F"/>
                 </a:solidFill>
@@ -6628,9 +8484,9 @@
                 <a:ea typeface="Arial" pitchFamily="34" charset="-122"/>
                 <a:cs typeface="Arial" pitchFamily="34" charset="-120"/>
               </a:rPr>
-              <a:t>Organiza la información en formato útil.</a:t>
-            </a:r>
-            <a:endParaRPr lang="en-US" sz="1350" dirty="0"/>
+              <a:t>El médico revisa y aprueba. La decisión clínica siempre es suya.</a:t>
+            </a:r>
+            <a:endParaRPr lang="en-US" sz="1000" dirty="0"/>
           </a:p>
         </p:txBody>
       </p:sp>
@@ -6642,19 +8498,30 @@
         </p:nvSpPr>
         <p:spPr>
           <a:xfrm>
-            <a:off x="502920" y="3127248"/>
-            <a:ext cx="8138160" cy="0"/>
-          </a:xfrm>
-          <a:prstGeom prst="line">
-            <a:avLst/>
-          </a:prstGeom>
-          <a:noFill/>
+            <a:off x="502920" y="3063240"/>
+            <a:ext cx="2784897" cy="1691640"/>
+          </a:xfrm>
+          <a:prstGeom prst="roundRect">
+            <a:avLst>
+              <a:gd name="adj" fmla="val 4865"/>
+            </a:avLst>
+          </a:prstGeom>
+          <a:solidFill>
+            <a:srgbClr val="FFFFFF"/>
+          </a:solidFill>
           <a:ln w="9525">
             <a:solidFill>
               <a:srgbClr val="E2E2E6"/>
             </a:solidFill>
             <a:prstDash val="solid"/>
           </a:ln>
+          <a:effectLst>
+            <a:outerShdw sx="100000" sy="100000" kx="0" ky="0" algn="bl" rotWithShape="0" blurRad="101600" dist="25400" dir="5400000">
+              <a:srgbClr val="0A3D91">
+                <a:alpha val="7000"/>
+              </a:srgbClr>
+            </a:outerShdw>
+          </a:effectLst>
         </p:spPr>
       </p:sp>
       <p:sp>
@@ -6665,8 +8532,8 @@
         </p:nvSpPr>
         <p:spPr>
           <a:xfrm>
-            <a:off x="502920" y="3163824"/>
-            <a:ext cx="566928" cy="365760"/>
+            <a:off x="640080" y="3154680"/>
+            <a:ext cx="2510577" cy="201168"/>
           </a:xfrm>
           <a:prstGeom prst="rect">
             <a:avLst/>
@@ -6682,7 +8549,7 @@
               <a:buNone/>
             </a:pPr>
             <a:r>
-              <a:rPr lang="en-US" sz="2000" dirty="0">
+              <a:rPr lang="en-US" sz="650" b="1" spc="50" kern="0" dirty="0">
                 <a:solidFill>
                   <a:srgbClr val="0071E3"/>
                 </a:solidFill>
@@ -6690,9 +8557,9 @@
                 <a:ea typeface="Arial" pitchFamily="34" charset="-122"/>
                 <a:cs typeface="Arial" pitchFamily="34" charset="-120"/>
               </a:rPr>
-              <a:t>05</a:t>
-            </a:r>
-            <a:endParaRPr lang="en-US" sz="2000" dirty="0"/>
+              <a:t>NOTA GENERADA · EJEMPLO</a:t>
+            </a:r>
+            <a:endParaRPr lang="en-US" sz="650" dirty="0"/>
           </a:p>
         </p:txBody>
       </p:sp>
@@ -6704,8 +8571,247 @@
         </p:nvSpPr>
         <p:spPr>
           <a:xfrm>
-            <a:off x="1188720" y="3191256"/>
-            <a:ext cx="7452360" cy="329184"/>
+            <a:off x="640080" y="3392424"/>
+            <a:ext cx="2510577" cy="274320"/>
+          </a:xfrm>
+          <a:prstGeom prst="rect">
+            <a:avLst/>
+          </a:prstGeom>
+          <a:noFill/>
+          <a:ln/>
+        </p:spPr>
+        <p:txBody>
+          <a:bodyPr wrap="square" lIns="0" tIns="0" rIns="0" bIns="0" rtlCol="0" anchor="t"/>
+          <a:lstStyle/>
+          <a:p>
+            <a:pPr indent="0" marL="0">
+              <a:buNone/>
+            </a:pPr>
+            <a:r>
+              <a:rPr lang="en-US" sz="780" b="1" dirty="0">
+                <a:solidFill>
+                  <a:srgbClr val="0A3D91"/>
+                </a:solidFill>
+                <a:latin typeface="Arial" pitchFamily="34" charset="0"/>
+                <a:ea typeface="Arial" pitchFamily="34" charset="-122"/>
+                <a:cs typeface="Arial" pitchFamily="34" charset="-120"/>
+              </a:rPr>
+              <a:t>S  </a:t>
+            </a:r>
+            <a:pPr indent="0" marL="0">
+              <a:buNone/>
+            </a:pPr>
+            <a:r>
+              <a:rPr lang="en-US" sz="780" dirty="0">
+                <a:solidFill>
+                  <a:srgbClr val="48484A"/>
+                </a:solidFill>
+                <a:latin typeface="Arial" pitchFamily="34" charset="0"/>
+                <a:ea typeface="Arial" pitchFamily="34" charset="-122"/>
+                <a:cs typeface="Arial" pitchFamily="34" charset="-120"/>
+              </a:rPr>
+              <a:t>Cefalea de 3 días, pulsátil, sin fiebre</a:t>
+            </a:r>
+            <a:endParaRPr lang="en-US" sz="780" dirty="0"/>
+          </a:p>
+        </p:txBody>
+      </p:sp>
+      <p:sp>
+        <p:nvSpPr>
+          <p:cNvPr id="18" name="Text 16"/>
+          <p:cNvSpPr/>
+          <p:nvPr/>
+        </p:nvSpPr>
+        <p:spPr>
+          <a:xfrm>
+            <a:off x="640080" y="3685032"/>
+            <a:ext cx="2510577" cy="274320"/>
+          </a:xfrm>
+          <a:prstGeom prst="rect">
+            <a:avLst/>
+          </a:prstGeom>
+          <a:noFill/>
+          <a:ln/>
+        </p:spPr>
+        <p:txBody>
+          <a:bodyPr wrap="square" lIns="0" tIns="0" rIns="0" bIns="0" rtlCol="0" anchor="t"/>
+          <a:lstStyle/>
+          <a:p>
+            <a:pPr indent="0" marL="0">
+              <a:buNone/>
+            </a:pPr>
+            <a:r>
+              <a:rPr lang="en-US" sz="780" b="1" dirty="0">
+                <a:solidFill>
+                  <a:srgbClr val="0A3D91"/>
+                </a:solidFill>
+                <a:latin typeface="Arial" pitchFamily="34" charset="0"/>
+                <a:ea typeface="Arial" pitchFamily="34" charset="-122"/>
+                <a:cs typeface="Arial" pitchFamily="34" charset="-120"/>
+              </a:rPr>
+              <a:t>O  </a:t>
+            </a:r>
+            <a:pPr indent="0" marL="0">
+              <a:buNone/>
+            </a:pPr>
+            <a:r>
+              <a:rPr lang="en-US" sz="780" dirty="0">
+                <a:solidFill>
+                  <a:srgbClr val="48484A"/>
+                </a:solidFill>
+                <a:latin typeface="Arial" pitchFamily="34" charset="0"/>
+                <a:ea typeface="Arial" pitchFamily="34" charset="-122"/>
+                <a:cs typeface="Arial" pitchFamily="34" charset="-120"/>
+              </a:rPr>
+              <a:t>TA 118/76 · FC 72 · afebril</a:t>
+            </a:r>
+            <a:endParaRPr lang="en-US" sz="780" dirty="0"/>
+          </a:p>
+        </p:txBody>
+      </p:sp>
+      <p:sp>
+        <p:nvSpPr>
+          <p:cNvPr id="19" name="Text 17"/>
+          <p:cNvSpPr/>
+          <p:nvPr/>
+        </p:nvSpPr>
+        <p:spPr>
+          <a:xfrm>
+            <a:off x="640080" y="3977640"/>
+            <a:ext cx="2510577" cy="274320"/>
+          </a:xfrm>
+          <a:prstGeom prst="rect">
+            <a:avLst/>
+          </a:prstGeom>
+          <a:noFill/>
+          <a:ln/>
+        </p:spPr>
+        <p:txBody>
+          <a:bodyPr wrap="square" lIns="0" tIns="0" rIns="0" bIns="0" rtlCol="0" anchor="t"/>
+          <a:lstStyle/>
+          <a:p>
+            <a:pPr indent="0" marL="0">
+              <a:buNone/>
+            </a:pPr>
+            <a:r>
+              <a:rPr lang="en-US" sz="780" b="1" dirty="0">
+                <a:solidFill>
+                  <a:srgbClr val="0A3D91"/>
+                </a:solidFill>
+                <a:latin typeface="Arial" pitchFamily="34" charset="0"/>
+                <a:ea typeface="Arial" pitchFamily="34" charset="-122"/>
+                <a:cs typeface="Arial" pitchFamily="34" charset="-120"/>
+              </a:rPr>
+              <a:t>A  </a:t>
+            </a:r>
+            <a:pPr indent="0" marL="0">
+              <a:buNone/>
+            </a:pPr>
+            <a:r>
+              <a:rPr lang="en-US" sz="780" dirty="0">
+                <a:solidFill>
+                  <a:srgbClr val="48484A"/>
+                </a:solidFill>
+                <a:latin typeface="Arial" pitchFamily="34" charset="0"/>
+                <a:ea typeface="Arial" pitchFamily="34" charset="-122"/>
+                <a:cs typeface="Arial" pitchFamily="34" charset="-120"/>
+              </a:rPr>
+              <a:t>Cefalea tensional. Sin alarma</a:t>
+            </a:r>
+            <a:endParaRPr lang="en-US" sz="780" dirty="0"/>
+          </a:p>
+        </p:txBody>
+      </p:sp>
+      <p:sp>
+        <p:nvSpPr>
+          <p:cNvPr id="20" name="Text 18"/>
+          <p:cNvSpPr/>
+          <p:nvPr/>
+        </p:nvSpPr>
+        <p:spPr>
+          <a:xfrm>
+            <a:off x="640080" y="4270248"/>
+            <a:ext cx="2510577" cy="274320"/>
+          </a:xfrm>
+          <a:prstGeom prst="rect">
+            <a:avLst/>
+          </a:prstGeom>
+          <a:noFill/>
+          <a:ln/>
+        </p:spPr>
+        <p:txBody>
+          <a:bodyPr wrap="square" lIns="0" tIns="0" rIns="0" bIns="0" rtlCol="0" anchor="t"/>
+          <a:lstStyle/>
+          <a:p>
+            <a:pPr indent="0" marL="0">
+              <a:buNone/>
+            </a:pPr>
+            <a:r>
+              <a:rPr lang="en-US" sz="780" b="1" dirty="0">
+                <a:solidFill>
+                  <a:srgbClr val="0A3D91"/>
+                </a:solidFill>
+                <a:latin typeface="Arial" pitchFamily="34" charset="0"/>
+                <a:ea typeface="Arial" pitchFamily="34" charset="-122"/>
+                <a:cs typeface="Arial" pitchFamily="34" charset="-120"/>
+              </a:rPr>
+              <a:t>P  </a:t>
+            </a:r>
+            <a:pPr indent="0" marL="0">
+              <a:buNone/>
+            </a:pPr>
+            <a:r>
+              <a:rPr lang="en-US" sz="780" dirty="0">
+                <a:solidFill>
+                  <a:srgbClr val="48484A"/>
+                </a:solidFill>
+                <a:latin typeface="Arial" pitchFamily="34" charset="0"/>
+                <a:ea typeface="Arial" pitchFamily="34" charset="-122"/>
+                <a:cs typeface="Arial" pitchFamily="34" charset="-120"/>
+              </a:rPr>
+              <a:t>Analgesia, control en 7 días</a:t>
+            </a:r>
+            <a:endParaRPr lang="en-US" sz="780" dirty="0"/>
+          </a:p>
+        </p:txBody>
+      </p:sp>
+      <p:sp>
+        <p:nvSpPr>
+          <p:cNvPr id="21" name="Shape 19"/>
+          <p:cNvSpPr/>
+          <p:nvPr/>
+        </p:nvSpPr>
+        <p:spPr>
+          <a:xfrm>
+            <a:off x="3488985" y="3063240"/>
+            <a:ext cx="2320747" cy="1691640"/>
+          </a:xfrm>
+          <a:prstGeom prst="roundRect">
+            <a:avLst>
+              <a:gd name="adj" fmla="val 4865"/>
+            </a:avLst>
+          </a:prstGeom>
+          <a:solidFill>
+            <a:srgbClr val="EAF3FF"/>
+          </a:solidFill>
+          <a:ln w="12700">
+            <a:solidFill>
+              <a:srgbClr val="0071E3"/>
+            </a:solidFill>
+            <a:prstDash val="dash"/>
+          </a:ln>
+        </p:spPr>
+      </p:sp>
+      <p:sp>
+        <p:nvSpPr>
+          <p:cNvPr id="22" name="Text 20"/>
+          <p:cNvSpPr/>
+          <p:nvPr/>
+        </p:nvSpPr>
+        <p:spPr>
+          <a:xfrm>
+            <a:off x="3580425" y="3063240"/>
+            <a:ext cx="2137867" cy="1691640"/>
           </a:xfrm>
           <a:prstGeom prst="rect">
             <a:avLst/>
@@ -6717,73 +8823,138 @@
           <a:bodyPr wrap="square" lIns="0" tIns="0" rIns="0" bIns="0" rtlCol="0" anchor="ctr"/>
           <a:lstStyle/>
           <a:p>
-            <a:pPr indent="0" marL="0">
-              <a:buNone/>
-            </a:pPr>
-            <a:r>
-              <a:rPr lang="en-US" sz="1350" dirty="0">
-                <a:solidFill>
-                  <a:srgbClr val="1D1D1F"/>
-                </a:solidFill>
-                <a:latin typeface="Arial" pitchFamily="34" charset="0"/>
-                <a:ea typeface="Arial" pitchFamily="34" charset="-122"/>
-                <a:cs typeface="Arial" pitchFamily="34" charset="-120"/>
-              </a:rPr>
-              <a:t>El médico revisa, edita y aprueba.</a:t>
-            </a:r>
-            <a:endParaRPr lang="en-US" sz="1350" dirty="0"/>
-          </a:p>
-        </p:txBody>
-      </p:sp>
-      <p:sp>
-        <p:nvSpPr>
-          <p:cNvPr id="18" name="Shape 16"/>
-          <p:cNvSpPr/>
-          <p:nvPr/>
-        </p:nvSpPr>
-        <p:spPr>
-          <a:xfrm>
-            <a:off x="502920" y="3794760"/>
-            <a:ext cx="8138160" cy="0"/>
-          </a:xfrm>
-          <a:prstGeom prst="line">
-            <a:avLst/>
-          </a:prstGeom>
-          <a:noFill/>
-          <a:ln w="9525">
+            <a:pPr algn="ctr" indent="0" marL="0">
+              <a:buNone/>
+            </a:pPr>
+            <a:r>
+              <a:rPr lang="en-US" sz="900" dirty="0">
+                <a:solidFill>
+                  <a:srgbClr val="0A3D91"/>
+                </a:solidFill>
+                <a:latin typeface="Arial" pitchFamily="34" charset="0"/>
+                <a:ea typeface="Arial" pitchFamily="34" charset="-122"/>
+                <a:cs typeface="Arial" pitchFamily="34" charset="-120"/>
+              </a:rPr>
+              <a:t>Captura del PMV</a:t>
+            </a:r>
+            <a:endParaRPr lang="en-US" sz="900" dirty="0"/>
+          </a:p>
+          <a:p>
+            <a:pPr algn="ctr" indent="0" marL="0">
+              <a:buNone/>
+            </a:pPr>
+            <a:r>
+              <a:rPr lang="en-US" sz="900" dirty="0">
+                <a:solidFill>
+                  <a:srgbClr val="0A3D91"/>
+                </a:solidFill>
+                <a:latin typeface="Arial" pitchFamily="34" charset="0"/>
+                <a:ea typeface="Arial" pitchFamily="34" charset="-122"/>
+                <a:cs typeface="Arial" pitchFamily="34" charset="-120"/>
+              </a:rPr>
+              <a:t>· pantalla de nota generada ·</a:t>
+            </a:r>
+            <a:endParaRPr lang="en-US" sz="900" dirty="0"/>
+          </a:p>
+        </p:txBody>
+      </p:sp>
+      <p:sp>
+        <p:nvSpPr>
+          <p:cNvPr id="23" name="Shape 21"/>
+          <p:cNvSpPr/>
+          <p:nvPr/>
+        </p:nvSpPr>
+        <p:spPr>
+          <a:xfrm>
+            <a:off x="6010900" y="3063240"/>
+            <a:ext cx="2630180" cy="1691640"/>
+          </a:xfrm>
+          <a:prstGeom prst="roundRect">
+            <a:avLst>
+              <a:gd name="adj" fmla="val 4865"/>
+            </a:avLst>
+          </a:prstGeom>
+          <a:solidFill>
+            <a:srgbClr val="EAF3FF"/>
+          </a:solidFill>
+          <a:ln w="12700">
             <a:solidFill>
-              <a:srgbClr val="E2E2E6"/>
+              <a:srgbClr val="0071E3"/>
             </a:solidFill>
-            <a:prstDash val="solid"/>
+            <a:prstDash val="dash"/>
           </a:ln>
         </p:spPr>
       </p:sp>
       <p:sp>
         <p:nvSpPr>
-          <p:cNvPr id="19" name="Text 17"/>
-          <p:cNvSpPr/>
-          <p:nvPr/>
-        </p:nvSpPr>
-        <p:spPr>
-          <a:xfrm>
-            <a:off x="502920" y="3977640"/>
-            <a:ext cx="8138160" cy="548640"/>
-          </a:xfrm>
-          <a:prstGeom prst="rect">
-            <a:avLst/>
-          </a:prstGeom>
-          <a:noFill/>
-          <a:ln/>
-        </p:spPr>
-        <p:txBody>
-          <a:bodyPr wrap="square" lIns="0" tIns="0" rIns="0" bIns="0" rtlCol="0" anchor="ctr"/>
-          <a:lstStyle/>
-          <a:p>
-            <a:pPr indent="0" marL="0">
-              <a:buNone/>
-            </a:pPr>
-            <a:r>
-              <a:rPr lang="en-US" sz="1600" b="1" i="1" dirty="0">
+          <p:cNvPr id="24" name="Shape 22"/>
+          <p:cNvSpPr/>
+          <p:nvPr/>
+        </p:nvSpPr>
+        <p:spPr>
+          <a:xfrm>
+            <a:off x="7088246" y="3319272"/>
+            <a:ext cx="475488" cy="475488"/>
+          </a:xfrm>
+          <a:prstGeom prst="ellipse">
+            <a:avLst/>
+          </a:prstGeom>
+          <a:solidFill>
+            <a:srgbClr val="FFFFFF"/>
+          </a:solidFill>
+          <a:ln/>
+        </p:spPr>
+      </p:sp>
+      <p:pic>
+        <p:nvPicPr>
+          <p:cNvPr id="25" name="Image 0" descr="preencoded.png">    </p:cNvPr>
+          <p:cNvPicPr>
+            <a:picLocks noChangeAspect="1"/>
+          </p:cNvPicPr>
+          <p:nvPr/>
+        </p:nvPicPr>
+        <p:blipFill>
+          <a:blip r:embed="rId1"/>
+          <a:stretch>
+            <a:fillRect/>
+          </a:stretch>
+        </p:blipFill>
+        <p:spPr>
+          <a:xfrm>
+            <a:off x="7154814" y="3385840"/>
+            <a:ext cx="342351" cy="342351"/>
+          </a:xfrm>
+          <a:prstGeom prst="rect">
+            <a:avLst/>
+          </a:prstGeom>
+        </p:spPr>
+      </p:pic>
+      <p:sp>
+        <p:nvSpPr>
+          <p:cNvPr id="26" name="Text 23"/>
+          <p:cNvSpPr/>
+          <p:nvPr/>
+        </p:nvSpPr>
+        <p:spPr>
+          <a:xfrm>
+            <a:off x="6102340" y="3931920"/>
+            <a:ext cx="2447300" cy="777240"/>
+          </a:xfrm>
+          <a:prstGeom prst="rect">
+            <a:avLst/>
+          </a:prstGeom>
+          <a:noFill/>
+          <a:ln/>
+        </p:spPr>
+        <p:txBody>
+          <a:bodyPr wrap="square" lIns="0" tIns="0" rIns="0" bIns="0" rtlCol="0" anchor="t"/>
+          <a:lstStyle/>
+          <a:p>
+            <a:pPr algn="ctr" indent="0" marL="0">
+              <a:buNone/>
+            </a:pPr>
+            <a:r>
+              <a:rPr lang="en-US" sz="850" b="1" dirty="0">
                 <a:solidFill>
                   <a:srgbClr val="0A3D91"/>
                 </a:solidFill>
@@ -6791,9 +8962,9 @@
                 <a:ea typeface="Arial" pitchFamily="34" charset="-122"/>
                 <a:cs typeface="Arial" pitchFamily="34" charset="-120"/>
               </a:rPr>
-              <a:t>El médico siempre mantiene el control.</a:t>
-            </a:r>
-            <a:endParaRPr lang="en-US" sz="1600" dirty="0"/>
+              <a:t>Video demo — Miracle diligenciando la historia clínica en vivo</a:t>
+            </a:r>
+            <a:endParaRPr lang="en-US" sz="850" dirty="0"/>
           </a:p>
         </p:txBody>
       </p:sp>
@@ -6837,7 +9008,7 @@
         </p:nvSpPr>
         <p:spPr>
           <a:xfrm>
-            <a:off x="502920" y="365760"/>
+            <a:off x="502920" y="320040"/>
             <a:ext cx="8138160" cy="274320"/>
           </a:xfrm>
           <a:prstGeom prst="rect">
@@ -6862,7 +9033,7 @@
                 <a:ea typeface="Arial" pitchFamily="34" charset="-122"/>
                 <a:cs typeface="Arial" pitchFamily="34" charset="-120"/>
               </a:rPr>
-              <a:t>DIFERENCIAL</a:t>
+              <a:t>COMPETENCIA</a:t>
             </a:r>
             <a:endParaRPr lang="en-US" sz="1050" dirty="0"/>
           </a:p>
@@ -6876,8 +9047,8 @@
         </p:nvSpPr>
         <p:spPr>
           <a:xfrm>
-            <a:off x="502920" y="685800"/>
-            <a:ext cx="8138160" cy="868680"/>
+            <a:off x="502920" y="566928"/>
+            <a:ext cx="8138160" cy="502920"/>
           </a:xfrm>
           <a:prstGeom prst="rect">
             <a:avLst/>
@@ -6893,7 +9064,7 @@
               <a:buNone/>
             </a:pPr>
             <a:r>
-              <a:rPr lang="en-US" sz="2400" b="1" dirty="0">
+              <a:rPr lang="en-US" sz="1900" b="1" dirty="0">
                 <a:solidFill>
                   <a:srgbClr val="1D1D1F"/>
                 </a:solidFill>
@@ -6901,9 +9072,37 @@
                 <a:ea typeface="Arial" pitchFamily="34" charset="-122"/>
                 <a:cs typeface="Arial" pitchFamily="34" charset="-120"/>
               </a:rPr>
-              <a:t>No somos un transcriptor. Somos documentación clínica inteligente.</a:t>
-            </a:r>
-            <a:endParaRPr lang="en-US" sz="2400" dirty="0"/>
+              <a:t>Una categoría validada — con un ángulo que </a:t>
+            </a:r>
+            <a:pPr indent="0" marL="0">
+              <a:buNone/>
+            </a:pPr>
+            <a:r>
+              <a:rPr lang="en-US" sz="1900" b="1" dirty="0">
+                <a:solidFill>
+                  <a:srgbClr val="0A3D91"/>
+                </a:solidFill>
+                <a:latin typeface="Arial" pitchFamily="34" charset="0"/>
+                <a:ea typeface="Arial" pitchFamily="34" charset="-122"/>
+                <a:cs typeface="Arial" pitchFamily="34" charset="-120"/>
+              </a:rPr>
+              <a:t>nadie cubre</a:t>
+            </a:r>
+            <a:pPr indent="0" marL="0">
+              <a:buNone/>
+            </a:pPr>
+            <a:r>
+              <a:rPr lang="en-US" sz="1900" b="1" dirty="0">
+                <a:solidFill>
+                  <a:srgbClr val="1D1D1F"/>
+                </a:solidFill>
+                <a:latin typeface="Arial" pitchFamily="34" charset="0"/>
+                <a:ea typeface="Arial" pitchFamily="34" charset="-122"/>
+                <a:cs typeface="Arial" pitchFamily="34" charset="-120"/>
+              </a:rPr>
+              <a:t>.</a:t>
+            </a:r>
+            <a:endParaRPr lang="en-US" sz="1900" dirty="0"/>
           </a:p>
         </p:txBody>
       </p:sp>
@@ -6922,7 +9121,7 @@
           </p:nvPr>
         </p:nvGraphicFramePr>
         <p:xfrm>
-          <a:off x="502920" y="1737360"/>
+          <a:off x="502920" y="1188720"/>
           <a:ext cx="8138160" cy="914400"/>
         </p:xfrm>
         <a:graphic>
@@ -6930,10 +9129,13 @@
             <a:tbl>
               <a:tblPr/>
               <a:tblGrid>
-                <a:gridCol w="3662172"/>
-                <a:gridCol w="4475988"/>
+                <a:gridCol w="1417320"/>
+                <a:gridCol w="1691640"/>
+                <a:gridCol w="1143000"/>
+                <a:gridCol w="1874520"/>
+                <a:gridCol w="2011680"/>
               </a:tblGrid>
-              <a:tr h="384048">
+              <a:tr h="512064">
                 <a:tc>
                   <a:txBody>
                     <a:bodyPr/>
@@ -6942,18 +9144,10 @@
                       <a:pPr indent="0" marL="0">
                         <a:buNone/>
                       </a:pPr>
-                      <a:r>
-                        <a:rPr lang="en-US" sz="1050" b="1" dirty="0">
-                          <a:solidFill>
-                            <a:srgbClr val="6E6E73"/>
-                          </a:solidFill>
-                        </a:rPr>
-                        <a:t>Transcriptor común</a:t>
-                      </a:r>
-                      <a:endParaRPr lang="en-US" sz="1050" dirty="0"/>
+                      <a:endParaRPr lang="en-US" sz="800" dirty="0"/>
                     </a:p>
                   </a:txBody>
-                  <a:tcPr marL="127000" marR="127000" marT="76200" marB="76200" anchor="ctr">
+                  <a:tcPr marL="76200" marR="76200" marT="50800" marB="50800" anchor="ctr">
                     <a:lnL w="0" cap="flat" cmpd="sng" algn="ctr">
                       <a:noFill/>
                     </a:lnL>
@@ -6986,17 +9180,17 @@
                         <a:buNone/>
                       </a:pPr>
                       <a:r>
-                        <a:rPr lang="en-US" sz="1050" b="1" dirty="0">
+                        <a:rPr lang="en-US" sz="800" b="1" dirty="0">
                           <a:solidFill>
-                            <a:srgbClr val="6E6E73"/>
+                            <a:srgbClr val="0071E3"/>
                           </a:solidFill>
                         </a:rPr>
                         <a:t>Miracle</a:t>
                       </a:r>
-                      <a:endParaRPr lang="en-US" sz="1050" dirty="0"/>
+                      <a:endParaRPr lang="en-US" sz="800" dirty="0"/>
                     </a:p>
                   </a:txBody>
-                  <a:tcPr marL="127000" marR="127000" marT="76200" marB="76200" anchor="ctr">
+                  <a:tcPr marL="76200" marR="76200" marT="50800" marB="50800" anchor="ctr">
                     <a:lnL w="0" cap="flat" cmpd="sng" algn="ctr">
                       <a:noFill/>
                     </a:lnL>
@@ -7016,12 +9210,10 @@
                       <a:tailEnd type="none" w="med" len="med"/>
                     </a:lnB>
                     <a:solidFill>
-                      <a:srgbClr val="FFFFFF"/>
+                      <a:srgbClr val="EAF3FF"/>
                     </a:solidFill>
                   </a:tcPr>
                 </a:tc>
-              </a:tr>
-              <a:tr h="384048">
                 <a:tc>
                   <a:txBody>
                     <a:bodyPr/>
@@ -7031,17 +9223,17 @@
                         <a:buNone/>
                       </a:pPr>
                       <a:r>
-                        <a:rPr lang="en-US" sz="1250" dirty="0">
+                        <a:rPr lang="en-US" sz="800" b="1" dirty="0">
                           <a:solidFill>
                             <a:srgbClr val="6E6E73"/>
                           </a:solidFill>
                         </a:rPr>
-                        <a:t>Convierte voz en texto</a:t>
+                        <a:t>Telepatía</a:t>
                       </a:r>
-                      <a:endParaRPr lang="en-US" sz="1250" dirty="0"/>
+                      <a:endParaRPr lang="en-US" sz="800" dirty="0"/>
                     </a:p>
                   </a:txBody>
-                  <a:tcPr marL="127000" marR="127000" marT="76200" marB="76200" anchor="ctr">
+                  <a:tcPr marL="76200" marR="76200" marT="50800" marB="50800" anchor="ctr">
                     <a:lnL w="0" cap="flat" cmpd="sng" algn="ctr">
                       <a:noFill/>
                     </a:lnL>
@@ -7074,62 +9266,17 @@
                         <a:buNone/>
                       </a:pPr>
                       <a:r>
-                        <a:rPr lang="en-US" sz="1250" b="1" dirty="0">
-                          <a:solidFill>
-                            <a:srgbClr val="0A3D91"/>
-                          </a:solidFill>
-                        </a:rPr>
-                        <a:t>Convierte consulta en información estructurada</a:t>
-                      </a:r>
-                      <a:endParaRPr lang="en-US" sz="1250" dirty="0"/>
-                    </a:p>
-                  </a:txBody>
-                  <a:tcPr marL="127000" marR="127000" marT="76200" marB="76200" anchor="ctr">
-                    <a:lnL w="0" cap="flat" cmpd="sng" algn="ctr">
-                      <a:noFill/>
-                    </a:lnL>
-                    <a:lnR w="0" cap="flat" cmpd="sng" algn="ctr">
-                      <a:noFill/>
-                    </a:lnR>
-                    <a:lnT w="0" cap="flat" cmpd="sng" algn="ctr">
-                      <a:noFill/>
-                    </a:lnT>
-                    <a:lnB w="9525" cap="flat" cmpd="sng" algn="ctr">
-                      <a:solidFill>
-                        <a:srgbClr val="E2E2E6"/>
-                      </a:solidFill>
-                      <a:prstDash val="solid"/>
-                      <a:round/>
-                      <a:headEnd type="none" w="med" len="med"/>
-                      <a:tailEnd type="none" w="med" len="med"/>
-                    </a:lnB>
-                    <a:solidFill>
-                      <a:srgbClr val="FFFFFF"/>
-                    </a:solidFill>
-                  </a:tcPr>
-                </a:tc>
-              </a:tr>
-              <a:tr h="384048">
-                <a:tc>
-                  <a:txBody>
-                    <a:bodyPr/>
-                    <a:lstStyle/>
-                    <a:p>
-                      <a:pPr indent="0" marL="0">
-                        <a:buNone/>
-                      </a:pPr>
-                      <a:r>
-                        <a:rPr lang="en-US" sz="1250" dirty="0">
+                        <a:rPr lang="en-US" sz="800" b="1" dirty="0">
                           <a:solidFill>
                             <a:srgbClr val="6E6E73"/>
                           </a:solidFill>
                         </a:rPr>
-                        <a:t>Texto plano</a:t>
+                        <a:t>Dragon Copilot (Microsoft)</a:t>
                       </a:r>
-                      <a:endParaRPr lang="en-US" sz="1250" dirty="0"/>
+                      <a:endParaRPr lang="en-US" sz="800" dirty="0"/>
                     </a:p>
                   </a:txBody>
-                  <a:tcPr marL="127000" marR="127000" marT="76200" marB="76200" anchor="ctr">
+                  <a:tcPr marL="76200" marR="76200" marT="50800" marB="50800" anchor="ctr">
                     <a:lnL w="0" cap="flat" cmpd="sng" algn="ctr">
                       <a:noFill/>
                     </a:lnL>
@@ -7162,17 +9309,17 @@
                         <a:buNone/>
                       </a:pPr>
                       <a:r>
-                        <a:rPr lang="en-US" sz="1250" b="1" dirty="0">
+                        <a:rPr lang="en-US" sz="800" b="1" dirty="0">
                           <a:solidFill>
-                            <a:srgbClr val="0A3D91"/>
+                            <a:srgbClr val="6E6E73"/>
                           </a:solidFill>
                         </a:rPr>
-                        <a:t>Datos clínicos organizados</a:t>
+                        <a:t>Scribes globales (Abridge · Nabla · Suki)</a:t>
                       </a:r>
-                      <a:endParaRPr lang="en-US" sz="1250" dirty="0"/>
+                      <a:endParaRPr lang="en-US" sz="800" dirty="0"/>
                     </a:p>
                   </a:txBody>
-                  <a:tcPr marL="127000" marR="127000" marT="76200" marB="76200" anchor="ctr">
+                  <a:tcPr marL="76200" marR="76200" marT="50800" marB="50800" anchor="ctr">
                     <a:lnL w="0" cap="flat" cmpd="sng" algn="ctr">
                       <a:noFill/>
                     </a:lnL>
@@ -7197,7 +9344,7 @@
                   </a:tcPr>
                 </a:tc>
               </a:tr>
-              <a:tr h="384048">
+              <a:tr h="512064">
                 <a:tc>
                   <a:txBody>
                     <a:bodyPr/>
@@ -7207,17 +9354,17 @@
                         <a:buNone/>
                       </a:pPr>
                       <a:r>
-                        <a:rPr lang="en-US" sz="1250" dirty="0">
+                        <a:rPr lang="en-US" sz="800" dirty="0">
                           <a:solidFill>
                             <a:srgbClr val="6E6E73"/>
                           </a:solidFill>
                         </a:rPr>
-                        <a:t>Requiere edición manual</a:t>
+                        <a:t>Español clínico LatAm</a:t>
                       </a:r>
-                      <a:endParaRPr lang="en-US" sz="1250" dirty="0"/>
+                      <a:endParaRPr lang="en-US" sz="800" dirty="0"/>
                     </a:p>
                   </a:txBody>
-                  <a:tcPr marL="127000" marR="127000" marT="76200" marB="76200" anchor="ctr">
+                  <a:tcPr marL="76200" marR="76200" marT="50800" marB="50800" anchor="ctr">
                     <a:lnL w="0" cap="flat" cmpd="sng" algn="ctr">
                       <a:noFill/>
                     </a:lnL>
@@ -7250,17 +9397,17 @@
                         <a:buNone/>
                       </a:pPr>
                       <a:r>
-                        <a:rPr lang="en-US" sz="1250" b="1" dirty="0">
+                        <a:rPr lang="en-US" sz="800" b="1" dirty="0">
                           <a:solidFill>
                             <a:srgbClr val="0A3D91"/>
                           </a:solidFill>
                         </a:rPr>
-                        <a:t>Reduce trabajo repetitivo</a:t>
+                        <a:t>✓ Nativo</a:t>
                       </a:r>
-                      <a:endParaRPr lang="en-US" sz="1250" dirty="0"/>
+                      <a:endParaRPr lang="en-US" sz="800" dirty="0"/>
                     </a:p>
                   </a:txBody>
-                  <a:tcPr marL="127000" marR="127000" marT="76200" marB="76200" anchor="ctr">
+                  <a:tcPr marL="76200" marR="76200" marT="50800" marB="50800" anchor="ctr">
                     <a:lnL w="0" cap="flat" cmpd="sng" algn="ctr">
                       <a:noFill/>
                     </a:lnL>
@@ -7280,12 +9427,10 @@
                       <a:tailEnd type="none" w="med" len="med"/>
                     </a:lnB>
                     <a:solidFill>
-                      <a:srgbClr val="FFFFFF"/>
+                      <a:srgbClr val="EAF3FF"/>
                     </a:solidFill>
                   </a:tcPr>
                 </a:tc>
-              </a:tr>
-              <a:tr h="384048">
                 <a:tc>
                   <a:txBody>
                     <a:bodyPr/>
@@ -7295,17 +9440,17 @@
                         <a:buNone/>
                       </a:pPr>
                       <a:r>
-                        <a:rPr lang="en-US" sz="1250" dirty="0">
+                        <a:rPr lang="en-US" sz="800" dirty="0">
                           <a:solidFill>
-                            <a:srgbClr val="6E6E73"/>
+                            <a:srgbClr val="48484A"/>
                           </a:solidFill>
                         </a:rPr>
-                        <a:t>Genérico</a:t>
+                        <a:t>✓ Sí</a:t>
                       </a:r>
-                      <a:endParaRPr lang="en-US" sz="1250" dirty="0"/>
+                      <a:endParaRPr lang="en-US" sz="800" dirty="0"/>
                     </a:p>
                   </a:txBody>
-                  <a:tcPr marL="127000" marR="127000" marT="76200" marB="76200" anchor="ctr">
+                  <a:tcPr marL="76200" marR="76200" marT="50800" marB="50800" anchor="ctr">
                     <a:lnL w="0" cap="flat" cmpd="sng" algn="ctr">
                       <a:noFill/>
                     </a:lnL>
@@ -7338,62 +9483,17 @@
                         <a:buNone/>
                       </a:pPr>
                       <a:r>
-                        <a:rPr lang="en-US" sz="1250" b="1" dirty="0">
+                        <a:rPr lang="en-US" sz="800" dirty="0">
                           <a:solidFill>
-                            <a:srgbClr val="0A3D91"/>
+                            <a:srgbClr val="48484A"/>
                           </a:solidFill>
                         </a:rPr>
-                        <a:t>Diseñado para flujo médico</a:t>
+                        <a:t>Notas en inglés</a:t>
                       </a:r>
-                      <a:endParaRPr lang="en-US" sz="1250" dirty="0"/>
+                      <a:endParaRPr lang="en-US" sz="800" dirty="0"/>
                     </a:p>
                   </a:txBody>
-                  <a:tcPr marL="127000" marR="127000" marT="76200" marB="76200" anchor="ctr">
-                    <a:lnL w="0" cap="flat" cmpd="sng" algn="ctr">
-                      <a:noFill/>
-                    </a:lnL>
-                    <a:lnR w="0" cap="flat" cmpd="sng" algn="ctr">
-                      <a:noFill/>
-                    </a:lnR>
-                    <a:lnT w="0" cap="flat" cmpd="sng" algn="ctr">
-                      <a:noFill/>
-                    </a:lnT>
-                    <a:lnB w="9525" cap="flat" cmpd="sng" algn="ctr">
-                      <a:solidFill>
-                        <a:srgbClr val="E2E2E6"/>
-                      </a:solidFill>
-                      <a:prstDash val="solid"/>
-                      <a:round/>
-                      <a:headEnd type="none" w="med" len="med"/>
-                      <a:tailEnd type="none" w="med" len="med"/>
-                    </a:lnB>
-                    <a:solidFill>
-                      <a:srgbClr val="FFFFFF"/>
-                    </a:solidFill>
-                  </a:tcPr>
-                </a:tc>
-              </a:tr>
-              <a:tr h="384048">
-                <a:tc>
-                  <a:txBody>
-                    <a:bodyPr/>
-                    <a:lstStyle/>
-                    <a:p>
-                      <a:pPr indent="0" marL="0">
-                        <a:buNone/>
-                      </a:pPr>
-                      <a:r>
-                        <a:rPr lang="en-US" sz="1250" dirty="0">
-                          <a:solidFill>
-                            <a:srgbClr val="6E6E73"/>
-                          </a:solidFill>
-                        </a:rPr>
-                        <a:t>Se queda en la nota</a:t>
-                      </a:r>
-                      <a:endParaRPr lang="en-US" sz="1250" dirty="0"/>
-                    </a:p>
-                  </a:txBody>
-                  <a:tcPr marL="127000" marR="127000" marT="76200" marB="76200" anchor="ctr">
+                  <a:tcPr marL="76200" marR="76200" marT="50800" marB="50800" anchor="ctr">
                     <a:lnL w="0" cap="flat" cmpd="sng" algn="ctr">
                       <a:noFill/>
                     </a:lnL>
@@ -7426,17 +9526,885 @@
                         <a:buNone/>
                       </a:pPr>
                       <a:r>
-                        <a:rPr lang="en-US" sz="1250" b="1" dirty="0">
+                        <a:rPr lang="en-US" sz="800" dirty="0">
+                          <a:solidFill>
+                            <a:srgbClr val="48484A"/>
+                          </a:solidFill>
+                        </a:rPr>
+                        <a:t>Inglés primero</a:t>
+                      </a:r>
+                      <a:endParaRPr lang="en-US" sz="800" dirty="0"/>
+                    </a:p>
+                  </a:txBody>
+                  <a:tcPr marL="76200" marR="76200" marT="50800" marB="50800" anchor="ctr">
+                    <a:lnL w="0" cap="flat" cmpd="sng" algn="ctr">
+                      <a:noFill/>
+                    </a:lnL>
+                    <a:lnR w="0" cap="flat" cmpd="sng" algn="ctr">
+                      <a:noFill/>
+                    </a:lnR>
+                    <a:lnT w="0" cap="flat" cmpd="sng" algn="ctr">
+                      <a:noFill/>
+                    </a:lnT>
+                    <a:lnB w="9525" cap="flat" cmpd="sng" algn="ctr">
+                      <a:solidFill>
+                        <a:srgbClr val="E2E2E6"/>
+                      </a:solidFill>
+                      <a:prstDash val="solid"/>
+                      <a:round/>
+                      <a:headEnd type="none" w="med" len="med"/>
+                      <a:tailEnd type="none" w="med" len="med"/>
+                    </a:lnB>
+                    <a:solidFill>
+                      <a:srgbClr val="FFFFFF"/>
+                    </a:solidFill>
+                  </a:tcPr>
+                </a:tc>
+              </a:tr>
+              <a:tr h="512064">
+                <a:tc>
+                  <a:txBody>
+                    <a:bodyPr/>
+                    <a:lstStyle/>
+                    <a:p>
+                      <a:pPr indent="0" marL="0">
+                        <a:buNone/>
+                      </a:pPr>
+                      <a:r>
+                        <a:rPr lang="en-US" sz="800" dirty="0">
+                          <a:solidFill>
+                            <a:srgbClr val="6E6E73"/>
+                          </a:solidFill>
+                        </a:rPr>
+                        <a:t>Dispositivo de captura dedicado</a:t>
+                      </a:r>
+                      <a:endParaRPr lang="en-US" sz="800" dirty="0"/>
+                    </a:p>
+                  </a:txBody>
+                  <a:tcPr marL="76200" marR="76200" marT="50800" marB="50800" anchor="ctr">
+                    <a:lnL w="0" cap="flat" cmpd="sng" algn="ctr">
+                      <a:noFill/>
+                    </a:lnL>
+                    <a:lnR w="0" cap="flat" cmpd="sng" algn="ctr">
+                      <a:noFill/>
+                    </a:lnR>
+                    <a:lnT w="0" cap="flat" cmpd="sng" algn="ctr">
+                      <a:noFill/>
+                    </a:lnT>
+                    <a:lnB w="9525" cap="flat" cmpd="sng" algn="ctr">
+                      <a:solidFill>
+                        <a:srgbClr val="E2E2E6"/>
+                      </a:solidFill>
+                      <a:prstDash val="solid"/>
+                      <a:round/>
+                      <a:headEnd type="none" w="med" len="med"/>
+                      <a:tailEnd type="none" w="med" len="med"/>
+                    </a:lnB>
+                    <a:solidFill>
+                      <a:srgbClr val="FFFFFF"/>
+                    </a:solidFill>
+                  </a:tcPr>
+                </a:tc>
+                <a:tc>
+                  <a:txBody>
+                    <a:bodyPr/>
+                    <a:lstStyle/>
+                    <a:p>
+                      <a:pPr indent="0" marL="0">
+                        <a:buNone/>
+                      </a:pPr>
+                      <a:r>
+                        <a:rPr lang="en-US" sz="800" b="1" dirty="0">
                           <a:solidFill>
                             <a:srgbClr val="0A3D91"/>
                           </a:solidFill>
                         </a:rPr>
-                        <a:t>Puede apoyar campos y documentación clínica</a:t>
+                        <a:t>✓ Uno por médico</a:t>
                       </a:r>
-                      <a:endParaRPr lang="en-US" sz="1250" dirty="0"/>
+                      <a:endParaRPr lang="en-US" sz="800" dirty="0"/>
                     </a:p>
                   </a:txBody>
-                  <a:tcPr marL="127000" marR="127000" marT="76200" marB="76200" anchor="ctr">
+                  <a:tcPr marL="76200" marR="76200" marT="50800" marB="50800" anchor="ctr">
+                    <a:lnL w="0" cap="flat" cmpd="sng" algn="ctr">
+                      <a:noFill/>
+                    </a:lnL>
+                    <a:lnR w="0" cap="flat" cmpd="sng" algn="ctr">
+                      <a:noFill/>
+                    </a:lnR>
+                    <a:lnT w="0" cap="flat" cmpd="sng" algn="ctr">
+                      <a:noFill/>
+                    </a:lnT>
+                    <a:lnB w="9525" cap="flat" cmpd="sng" algn="ctr">
+                      <a:solidFill>
+                        <a:srgbClr val="E2E2E6"/>
+                      </a:solidFill>
+                      <a:prstDash val="solid"/>
+                      <a:round/>
+                      <a:headEnd type="none" w="med" len="med"/>
+                      <a:tailEnd type="none" w="med" len="med"/>
+                    </a:lnB>
+                    <a:solidFill>
+                      <a:srgbClr val="EAF3FF"/>
+                    </a:solidFill>
+                  </a:tcPr>
+                </a:tc>
+                <a:tc>
+                  <a:txBody>
+                    <a:bodyPr/>
+                    <a:lstStyle/>
+                    <a:p>
+                      <a:pPr indent="0" marL="0">
+                        <a:buNone/>
+                      </a:pPr>
+                      <a:r>
+                        <a:rPr lang="en-US" sz="800" dirty="0">
+                          <a:solidFill>
+                            <a:srgbClr val="48484A"/>
+                          </a:solidFill>
+                        </a:rPr>
+                        <a:t>—</a:t>
+                      </a:r>
+                      <a:endParaRPr lang="en-US" sz="800" dirty="0"/>
+                    </a:p>
+                  </a:txBody>
+                  <a:tcPr marL="76200" marR="76200" marT="50800" marB="50800" anchor="ctr">
+                    <a:lnL w="0" cap="flat" cmpd="sng" algn="ctr">
+                      <a:noFill/>
+                    </a:lnL>
+                    <a:lnR w="0" cap="flat" cmpd="sng" algn="ctr">
+                      <a:noFill/>
+                    </a:lnR>
+                    <a:lnT w="0" cap="flat" cmpd="sng" algn="ctr">
+                      <a:noFill/>
+                    </a:lnT>
+                    <a:lnB w="9525" cap="flat" cmpd="sng" algn="ctr">
+                      <a:solidFill>
+                        <a:srgbClr val="E2E2E6"/>
+                      </a:solidFill>
+                      <a:prstDash val="solid"/>
+                      <a:round/>
+                      <a:headEnd type="none" w="med" len="med"/>
+                      <a:tailEnd type="none" w="med" len="med"/>
+                    </a:lnB>
+                    <a:solidFill>
+                      <a:srgbClr val="FFFFFF"/>
+                    </a:solidFill>
+                  </a:tcPr>
+                </a:tc>
+                <a:tc>
+                  <a:txBody>
+                    <a:bodyPr/>
+                    <a:lstStyle/>
+                    <a:p>
+                      <a:pPr indent="0" marL="0">
+                        <a:buNone/>
+                      </a:pPr>
+                      <a:r>
+                        <a:rPr lang="en-US" sz="800" dirty="0">
+                          <a:solidFill>
+                            <a:srgbClr val="48484A"/>
+                          </a:solidFill>
+                        </a:rPr>
+                        <a:t>—</a:t>
+                      </a:r>
+                      <a:endParaRPr lang="en-US" sz="800" dirty="0"/>
+                    </a:p>
+                  </a:txBody>
+                  <a:tcPr marL="76200" marR="76200" marT="50800" marB="50800" anchor="ctr">
+                    <a:lnL w="0" cap="flat" cmpd="sng" algn="ctr">
+                      <a:noFill/>
+                    </a:lnL>
+                    <a:lnR w="0" cap="flat" cmpd="sng" algn="ctr">
+                      <a:noFill/>
+                    </a:lnR>
+                    <a:lnT w="0" cap="flat" cmpd="sng" algn="ctr">
+                      <a:noFill/>
+                    </a:lnT>
+                    <a:lnB w="9525" cap="flat" cmpd="sng" algn="ctr">
+                      <a:solidFill>
+                        <a:srgbClr val="E2E2E6"/>
+                      </a:solidFill>
+                      <a:prstDash val="solid"/>
+                      <a:round/>
+                      <a:headEnd type="none" w="med" len="med"/>
+                      <a:tailEnd type="none" w="med" len="med"/>
+                    </a:lnB>
+                    <a:solidFill>
+                      <a:srgbClr val="FFFFFF"/>
+                    </a:solidFill>
+                  </a:tcPr>
+                </a:tc>
+                <a:tc>
+                  <a:txBody>
+                    <a:bodyPr/>
+                    <a:lstStyle/>
+                    <a:p>
+                      <a:pPr indent="0" marL="0">
+                        <a:buNone/>
+                      </a:pPr>
+                      <a:r>
+                        <a:rPr lang="en-US" sz="800" dirty="0">
+                          <a:solidFill>
+                            <a:srgbClr val="48484A"/>
+                          </a:solidFill>
+                        </a:rPr>
+                        <a:t>—</a:t>
+                      </a:r>
+                      <a:endParaRPr lang="en-US" sz="800" dirty="0"/>
+                    </a:p>
+                  </a:txBody>
+                  <a:tcPr marL="76200" marR="76200" marT="50800" marB="50800" anchor="ctr">
+                    <a:lnL w="0" cap="flat" cmpd="sng" algn="ctr">
+                      <a:noFill/>
+                    </a:lnL>
+                    <a:lnR w="0" cap="flat" cmpd="sng" algn="ctr">
+                      <a:noFill/>
+                    </a:lnR>
+                    <a:lnT w="0" cap="flat" cmpd="sng" algn="ctr">
+                      <a:noFill/>
+                    </a:lnT>
+                    <a:lnB w="9525" cap="flat" cmpd="sng" algn="ctr">
+                      <a:solidFill>
+                        <a:srgbClr val="E2E2E6"/>
+                      </a:solidFill>
+                      <a:prstDash val="solid"/>
+                      <a:round/>
+                      <a:headEnd type="none" w="med" len="med"/>
+                      <a:tailEnd type="none" w="med" len="med"/>
+                    </a:lnB>
+                    <a:solidFill>
+                      <a:srgbClr val="FFFFFF"/>
+                    </a:solidFill>
+                  </a:tcPr>
+                </a:tc>
+              </a:tr>
+              <a:tr h="512064">
+                <a:tc>
+                  <a:txBody>
+                    <a:bodyPr/>
+                    <a:lstStyle/>
+                    <a:p>
+                      <a:pPr indent="0" marL="0">
+                        <a:buNone/>
+                      </a:pPr>
+                      <a:r>
+                        <a:rPr lang="en-US" sz="800" dirty="0">
+                          <a:solidFill>
+                            <a:srgbClr val="6E6E73"/>
+                          </a:solidFill>
+                        </a:rPr>
+                        <a:t>Cómo llega la nota al sistema</a:t>
+                      </a:r>
+                      <a:endParaRPr lang="en-US" sz="800" dirty="0"/>
+                    </a:p>
+                  </a:txBody>
+                  <a:tcPr marL="76200" marR="76200" marT="50800" marB="50800" anchor="ctr">
+                    <a:lnL w="0" cap="flat" cmpd="sng" algn="ctr">
+                      <a:noFill/>
+                    </a:lnL>
+                    <a:lnR w="0" cap="flat" cmpd="sng" algn="ctr">
+                      <a:noFill/>
+                    </a:lnR>
+                    <a:lnT w="0" cap="flat" cmpd="sng" algn="ctr">
+                      <a:noFill/>
+                    </a:lnT>
+                    <a:lnB w="9525" cap="flat" cmpd="sng" algn="ctr">
+                      <a:solidFill>
+                        <a:srgbClr val="E2E2E6"/>
+                      </a:solidFill>
+                      <a:prstDash val="solid"/>
+                      <a:round/>
+                      <a:headEnd type="none" w="med" len="med"/>
+                      <a:tailEnd type="none" w="med" len="med"/>
+                    </a:lnB>
+                    <a:solidFill>
+                      <a:srgbClr val="FFFFFF"/>
+                    </a:solidFill>
+                  </a:tcPr>
+                </a:tc>
+                <a:tc>
+                  <a:txBody>
+                    <a:bodyPr/>
+                    <a:lstStyle/>
+                    <a:p>
+                      <a:pPr indent="0" marL="0">
+                        <a:buNone/>
+                      </a:pPr>
+                      <a:r>
+                        <a:rPr lang="en-US" sz="800" b="1" dirty="0">
+                          <a:solidFill>
+                            <a:srgbClr val="0A3D91"/>
+                          </a:solidFill>
+                        </a:rPr>
+                        <a:t>✓ Opera el HIS directo, sin integración</a:t>
+                      </a:r>
+                      <a:endParaRPr lang="en-US" sz="800" dirty="0"/>
+                    </a:p>
+                  </a:txBody>
+                  <a:tcPr marL="76200" marR="76200" marT="50800" marB="50800" anchor="ctr">
+                    <a:lnL w="0" cap="flat" cmpd="sng" algn="ctr">
+                      <a:noFill/>
+                    </a:lnL>
+                    <a:lnR w="0" cap="flat" cmpd="sng" algn="ctr">
+                      <a:noFill/>
+                    </a:lnR>
+                    <a:lnT w="0" cap="flat" cmpd="sng" algn="ctr">
+                      <a:noFill/>
+                    </a:lnT>
+                    <a:lnB w="9525" cap="flat" cmpd="sng" algn="ctr">
+                      <a:solidFill>
+                        <a:srgbClr val="E2E2E6"/>
+                      </a:solidFill>
+                      <a:prstDash val="solid"/>
+                      <a:round/>
+                      <a:headEnd type="none" w="med" len="med"/>
+                      <a:tailEnd type="none" w="med" len="med"/>
+                    </a:lnB>
+                    <a:solidFill>
+                      <a:srgbClr val="EAF3FF"/>
+                    </a:solidFill>
+                  </a:tcPr>
+                </a:tc>
+                <a:tc>
+                  <a:txBody>
+                    <a:bodyPr/>
+                    <a:lstStyle/>
+                    <a:p>
+                      <a:pPr indent="0" marL="0">
+                        <a:buNone/>
+                      </a:pPr>
+                      <a:r>
+                        <a:rPr lang="en-US" sz="800" dirty="0">
+                          <a:solidFill>
+                            <a:srgbClr val="48484A"/>
+                          </a:solidFill>
+                        </a:rPr>
+                        <a:t>App / copiloto clínico</a:t>
+                      </a:r>
+                      <a:endParaRPr lang="en-US" sz="800" dirty="0"/>
+                    </a:p>
+                  </a:txBody>
+                  <a:tcPr marL="76200" marR="76200" marT="50800" marB="50800" anchor="ctr">
+                    <a:lnL w="0" cap="flat" cmpd="sng" algn="ctr">
+                      <a:noFill/>
+                    </a:lnL>
+                    <a:lnR w="0" cap="flat" cmpd="sng" algn="ctr">
+                      <a:noFill/>
+                    </a:lnR>
+                    <a:lnT w="0" cap="flat" cmpd="sng" algn="ctr">
+                      <a:noFill/>
+                    </a:lnT>
+                    <a:lnB w="9525" cap="flat" cmpd="sng" algn="ctr">
+                      <a:solidFill>
+                        <a:srgbClr val="E2E2E6"/>
+                      </a:solidFill>
+                      <a:prstDash val="solid"/>
+                      <a:round/>
+                      <a:headEnd type="none" w="med" len="med"/>
+                      <a:tailEnd type="none" w="med" len="med"/>
+                    </a:lnB>
+                    <a:solidFill>
+                      <a:srgbClr val="FFFFFF"/>
+                    </a:solidFill>
+                  </a:tcPr>
+                </a:tc>
+                <a:tc>
+                  <a:txBody>
+                    <a:bodyPr/>
+                    <a:lstStyle/>
+                    <a:p>
+                      <a:pPr indent="0" marL="0">
+                        <a:buNone/>
+                      </a:pPr>
+                      <a:r>
+                        <a:rPr lang="en-US" sz="800" dirty="0">
+                          <a:solidFill>
+                            <a:srgbClr val="48484A"/>
+                          </a:solidFill>
+                        </a:rPr>
+                        <a:t>Integración con EHRs de EE. UU.</a:t>
+                      </a:r>
+                      <a:endParaRPr lang="en-US" sz="800" dirty="0"/>
+                    </a:p>
+                  </a:txBody>
+                  <a:tcPr marL="76200" marR="76200" marT="50800" marB="50800" anchor="ctr">
+                    <a:lnL w="0" cap="flat" cmpd="sng" algn="ctr">
+                      <a:noFill/>
+                    </a:lnL>
+                    <a:lnR w="0" cap="flat" cmpd="sng" algn="ctr">
+                      <a:noFill/>
+                    </a:lnR>
+                    <a:lnT w="0" cap="flat" cmpd="sng" algn="ctr">
+                      <a:noFill/>
+                    </a:lnT>
+                    <a:lnB w="9525" cap="flat" cmpd="sng" algn="ctr">
+                      <a:solidFill>
+                        <a:srgbClr val="E2E2E6"/>
+                      </a:solidFill>
+                      <a:prstDash val="solid"/>
+                      <a:round/>
+                      <a:headEnd type="none" w="med" len="med"/>
+                      <a:tailEnd type="none" w="med" len="med"/>
+                    </a:lnB>
+                    <a:solidFill>
+                      <a:srgbClr val="FFFFFF"/>
+                    </a:solidFill>
+                  </a:tcPr>
+                </a:tc>
+                <a:tc>
+                  <a:txBody>
+                    <a:bodyPr/>
+                    <a:lstStyle/>
+                    <a:p>
+                      <a:pPr indent="0" marL="0">
+                        <a:buNone/>
+                      </a:pPr>
+                      <a:r>
+                        <a:rPr lang="en-US" sz="800" dirty="0">
+                          <a:solidFill>
+                            <a:srgbClr val="48484A"/>
+                          </a:solidFill>
+                        </a:rPr>
+                        <a:t>Integración Epic / EHRs de EE. UU.</a:t>
+                      </a:r>
+                      <a:endParaRPr lang="en-US" sz="800" dirty="0"/>
+                    </a:p>
+                  </a:txBody>
+                  <a:tcPr marL="76200" marR="76200" marT="50800" marB="50800" anchor="ctr">
+                    <a:lnL w="0" cap="flat" cmpd="sng" algn="ctr">
+                      <a:noFill/>
+                    </a:lnL>
+                    <a:lnR w="0" cap="flat" cmpd="sng" algn="ctr">
+                      <a:noFill/>
+                    </a:lnR>
+                    <a:lnT w="0" cap="flat" cmpd="sng" algn="ctr">
+                      <a:noFill/>
+                    </a:lnT>
+                    <a:lnB w="9525" cap="flat" cmpd="sng" algn="ctr">
+                      <a:solidFill>
+                        <a:srgbClr val="E2E2E6"/>
+                      </a:solidFill>
+                      <a:prstDash val="solid"/>
+                      <a:round/>
+                      <a:headEnd type="none" w="med" len="med"/>
+                      <a:tailEnd type="none" w="med" len="med"/>
+                    </a:lnB>
+                    <a:solidFill>
+                      <a:srgbClr val="FFFFFF"/>
+                    </a:solidFill>
+                  </a:tcPr>
+                </a:tc>
+              </a:tr>
+              <a:tr h="512064">
+                <a:tc>
+                  <a:txBody>
+                    <a:bodyPr/>
+                    <a:lstStyle/>
+                    <a:p>
+                      <a:pPr indent="0" marL="0">
+                        <a:buNone/>
+                      </a:pPr>
+                      <a:r>
+                        <a:rPr lang="en-US" sz="800" dirty="0">
+                          <a:solidFill>
+                            <a:srgbClr val="6E6E73"/>
+                          </a:solidFill>
+                        </a:rPr>
+                        <a:t>Precio pensado para</a:t>
+                      </a:r>
+                      <a:endParaRPr lang="en-US" sz="800" dirty="0"/>
+                    </a:p>
+                  </a:txBody>
+                  <a:tcPr marL="76200" marR="76200" marT="50800" marB="50800" anchor="ctr">
+                    <a:lnL w="0" cap="flat" cmpd="sng" algn="ctr">
+                      <a:noFill/>
+                    </a:lnL>
+                    <a:lnR w="0" cap="flat" cmpd="sng" algn="ctr">
+                      <a:noFill/>
+                    </a:lnR>
+                    <a:lnT w="0" cap="flat" cmpd="sng" algn="ctr">
+                      <a:noFill/>
+                    </a:lnT>
+                    <a:lnB w="9525" cap="flat" cmpd="sng" algn="ctr">
+                      <a:solidFill>
+                        <a:srgbClr val="E2E2E6"/>
+                      </a:solidFill>
+                      <a:prstDash val="solid"/>
+                      <a:round/>
+                      <a:headEnd type="none" w="med" len="med"/>
+                      <a:tailEnd type="none" w="med" len="med"/>
+                    </a:lnB>
+                    <a:solidFill>
+                      <a:srgbClr val="FFFFFF"/>
+                    </a:solidFill>
+                  </a:tcPr>
+                </a:tc>
+                <a:tc>
+                  <a:txBody>
+                    <a:bodyPr/>
+                    <a:lstStyle/>
+                    <a:p>
+                      <a:pPr indent="0" marL="0">
+                        <a:buNone/>
+                      </a:pPr>
+                      <a:r>
+                        <a:rPr lang="en-US" sz="800" b="1" dirty="0">
+                          <a:solidFill>
+                            <a:srgbClr val="0A3D91"/>
+                          </a:solidFill>
+                        </a:rPr>
+                        <a:t>✓ Clínicas e IPS de LatAm</a:t>
+                      </a:r>
+                      <a:endParaRPr lang="en-US" sz="800" dirty="0"/>
+                    </a:p>
+                  </a:txBody>
+                  <a:tcPr marL="76200" marR="76200" marT="50800" marB="50800" anchor="ctr">
+                    <a:lnL w="0" cap="flat" cmpd="sng" algn="ctr">
+                      <a:noFill/>
+                    </a:lnL>
+                    <a:lnR w="0" cap="flat" cmpd="sng" algn="ctr">
+                      <a:noFill/>
+                    </a:lnR>
+                    <a:lnT w="0" cap="flat" cmpd="sng" algn="ctr">
+                      <a:noFill/>
+                    </a:lnT>
+                    <a:lnB w="9525" cap="flat" cmpd="sng" algn="ctr">
+                      <a:solidFill>
+                        <a:srgbClr val="E2E2E6"/>
+                      </a:solidFill>
+                      <a:prstDash val="solid"/>
+                      <a:round/>
+                      <a:headEnd type="none" w="med" len="med"/>
+                      <a:tailEnd type="none" w="med" len="med"/>
+                    </a:lnB>
+                    <a:solidFill>
+                      <a:srgbClr val="EAF3FF"/>
+                    </a:solidFill>
+                  </a:tcPr>
+                </a:tc>
+                <a:tc>
+                  <a:txBody>
+                    <a:bodyPr/>
+                    <a:lstStyle/>
+                    <a:p>
+                      <a:pPr indent="0" marL="0">
+                        <a:buNone/>
+                      </a:pPr>
+                      <a:r>
+                        <a:rPr lang="en-US" sz="800" dirty="0">
+                          <a:solidFill>
+                            <a:srgbClr val="48484A"/>
+                          </a:solidFill>
+                        </a:rPr>
+                        <a:t>LatAm</a:t>
+                      </a:r>
+                      <a:endParaRPr lang="en-US" sz="800" dirty="0"/>
+                    </a:p>
+                  </a:txBody>
+                  <a:tcPr marL="76200" marR="76200" marT="50800" marB="50800" anchor="ctr">
+                    <a:lnL w="0" cap="flat" cmpd="sng" algn="ctr">
+                      <a:noFill/>
+                    </a:lnL>
+                    <a:lnR w="0" cap="flat" cmpd="sng" algn="ctr">
+                      <a:noFill/>
+                    </a:lnR>
+                    <a:lnT w="0" cap="flat" cmpd="sng" algn="ctr">
+                      <a:noFill/>
+                    </a:lnT>
+                    <a:lnB w="9525" cap="flat" cmpd="sng" algn="ctr">
+                      <a:solidFill>
+                        <a:srgbClr val="E2E2E6"/>
+                      </a:solidFill>
+                      <a:prstDash val="solid"/>
+                      <a:round/>
+                      <a:headEnd type="none" w="med" len="med"/>
+                      <a:tailEnd type="none" w="med" len="med"/>
+                    </a:lnB>
+                    <a:solidFill>
+                      <a:srgbClr val="FFFFFF"/>
+                    </a:solidFill>
+                  </a:tcPr>
+                </a:tc>
+                <a:tc>
+                  <a:txBody>
+                    <a:bodyPr/>
+                    <a:lstStyle/>
+                    <a:p>
+                      <a:pPr indent="0" marL="0">
+                        <a:buNone/>
+                      </a:pPr>
+                      <a:r>
+                        <a:rPr lang="en-US" sz="800" dirty="0">
+                          <a:solidFill>
+                            <a:srgbClr val="48484A"/>
+                          </a:solidFill>
+                        </a:rPr>
+                        <a:t>USD 369/mes + 700 de implementación</a:t>
+                      </a:r>
+                      <a:endParaRPr lang="en-US" sz="800" dirty="0"/>
+                    </a:p>
+                  </a:txBody>
+                  <a:tcPr marL="76200" marR="76200" marT="50800" marB="50800" anchor="ctr">
+                    <a:lnL w="0" cap="flat" cmpd="sng" algn="ctr">
+                      <a:noFill/>
+                    </a:lnL>
+                    <a:lnR w="0" cap="flat" cmpd="sng" algn="ctr">
+                      <a:noFill/>
+                    </a:lnR>
+                    <a:lnT w="0" cap="flat" cmpd="sng" algn="ctr">
+                      <a:noFill/>
+                    </a:lnT>
+                    <a:lnB w="9525" cap="flat" cmpd="sng" algn="ctr">
+                      <a:solidFill>
+                        <a:srgbClr val="E2E2E6"/>
+                      </a:solidFill>
+                      <a:prstDash val="solid"/>
+                      <a:round/>
+                      <a:headEnd type="none" w="med" len="med"/>
+                      <a:tailEnd type="none" w="med" len="med"/>
+                    </a:lnB>
+                    <a:solidFill>
+                      <a:srgbClr val="FFFFFF"/>
+                    </a:solidFill>
+                  </a:tcPr>
+                </a:tc>
+                <a:tc>
+                  <a:txBody>
+                    <a:bodyPr/>
+                    <a:lstStyle/>
+                    <a:p>
+                      <a:pPr indent="0" marL="0">
+                        <a:buNone/>
+                      </a:pPr>
+                      <a:r>
+                        <a:rPr lang="en-US" sz="800" dirty="0">
+                          <a:solidFill>
+                            <a:srgbClr val="48484A"/>
+                          </a:solidFill>
+                        </a:rPr>
+                        <a:t>Contratos enterprise en EE. UU.</a:t>
+                      </a:r>
+                      <a:endParaRPr lang="en-US" sz="800" dirty="0"/>
+                    </a:p>
+                  </a:txBody>
+                  <a:tcPr marL="76200" marR="76200" marT="50800" marB="50800" anchor="ctr">
+                    <a:lnL w="0" cap="flat" cmpd="sng" algn="ctr">
+                      <a:noFill/>
+                    </a:lnL>
+                    <a:lnR w="0" cap="flat" cmpd="sng" algn="ctr">
+                      <a:noFill/>
+                    </a:lnR>
+                    <a:lnT w="0" cap="flat" cmpd="sng" algn="ctr">
+                      <a:noFill/>
+                    </a:lnT>
+                    <a:lnB w="9525" cap="flat" cmpd="sng" algn="ctr">
+                      <a:solidFill>
+                        <a:srgbClr val="E2E2E6"/>
+                      </a:solidFill>
+                      <a:prstDash val="solid"/>
+                      <a:round/>
+                      <a:headEnd type="none" w="med" len="med"/>
+                      <a:tailEnd type="none" w="med" len="med"/>
+                    </a:lnB>
+                    <a:solidFill>
+                      <a:srgbClr val="FFFFFF"/>
+                    </a:solidFill>
+                  </a:tcPr>
+                </a:tc>
+              </a:tr>
+              <a:tr h="512064">
+                <a:tc>
+                  <a:txBody>
+                    <a:bodyPr/>
+                    <a:lstStyle/>
+                    <a:p>
+                      <a:pPr indent="0" marL="0">
+                        <a:buNone/>
+                      </a:pPr>
+                      <a:r>
+                        <a:rPr lang="en-US" sz="800" dirty="0">
+                          <a:solidFill>
+                            <a:srgbClr val="6E6E73"/>
+                          </a:solidFill>
+                        </a:rPr>
+                        <a:t>Foco</a:t>
+                      </a:r>
+                      <a:endParaRPr lang="en-US" sz="800" dirty="0"/>
+                    </a:p>
+                  </a:txBody>
+                  <a:tcPr marL="76200" marR="76200" marT="50800" marB="50800" anchor="ctr">
+                    <a:lnL w="0" cap="flat" cmpd="sng" algn="ctr">
+                      <a:noFill/>
+                    </a:lnL>
+                    <a:lnR w="0" cap="flat" cmpd="sng" algn="ctr">
+                      <a:noFill/>
+                    </a:lnR>
+                    <a:lnT w="0" cap="flat" cmpd="sng" algn="ctr">
+                      <a:noFill/>
+                    </a:lnT>
+                    <a:lnB w="9525" cap="flat" cmpd="sng" algn="ctr">
+                      <a:solidFill>
+                        <a:srgbClr val="E2E2E6"/>
+                      </a:solidFill>
+                      <a:prstDash val="solid"/>
+                      <a:round/>
+                      <a:headEnd type="none" w="med" len="med"/>
+                      <a:tailEnd type="none" w="med" len="med"/>
+                    </a:lnB>
+                    <a:solidFill>
+                      <a:srgbClr val="FFFFFF"/>
+                    </a:solidFill>
+                  </a:tcPr>
+                </a:tc>
+                <a:tc>
+                  <a:txBody>
+                    <a:bodyPr/>
+                    <a:lstStyle/>
+                    <a:p>
+                      <a:pPr indent="0" marL="0">
+                        <a:buNone/>
+                      </a:pPr>
+                      <a:r>
+                        <a:rPr lang="en-US" sz="800" b="1" dirty="0">
+                          <a:solidFill>
+                            <a:srgbClr val="0A3D91"/>
+                          </a:solidFill>
+                        </a:rPr>
+                        <a:t>Consultorio, clínicas e IPS de LatAm</a:t>
+                      </a:r>
+                      <a:endParaRPr lang="en-US" sz="800" dirty="0"/>
+                    </a:p>
+                  </a:txBody>
+                  <a:tcPr marL="76200" marR="76200" marT="50800" marB="50800" anchor="ctr">
+                    <a:lnL w="0" cap="flat" cmpd="sng" algn="ctr">
+                      <a:noFill/>
+                    </a:lnL>
+                    <a:lnR w="0" cap="flat" cmpd="sng" algn="ctr">
+                      <a:noFill/>
+                    </a:lnR>
+                    <a:lnT w="0" cap="flat" cmpd="sng" algn="ctr">
+                      <a:noFill/>
+                    </a:lnT>
+                    <a:lnB w="9525" cap="flat" cmpd="sng" algn="ctr">
+                      <a:solidFill>
+                        <a:srgbClr val="E2E2E6"/>
+                      </a:solidFill>
+                      <a:prstDash val="solid"/>
+                      <a:round/>
+                      <a:headEnd type="none" w="med" len="med"/>
+                      <a:tailEnd type="none" w="med" len="med"/>
+                    </a:lnB>
+                    <a:solidFill>
+                      <a:srgbClr val="EAF3FF"/>
+                    </a:solidFill>
+                  </a:tcPr>
+                </a:tc>
+                <a:tc>
+                  <a:txBody>
+                    <a:bodyPr/>
+                    <a:lstStyle/>
+                    <a:p>
+                      <a:pPr indent="0" marL="0">
+                        <a:buNone/>
+                      </a:pPr>
+                      <a:r>
+                        <a:rPr lang="en-US" sz="800" dirty="0">
+                          <a:solidFill>
+                            <a:srgbClr val="48484A"/>
+                          </a:solidFill>
+                        </a:rPr>
+                        <a:t>LatAm (5 países)</a:t>
+                      </a:r>
+                      <a:endParaRPr lang="en-US" sz="800" dirty="0"/>
+                    </a:p>
+                  </a:txBody>
+                  <a:tcPr marL="76200" marR="76200" marT="50800" marB="50800" anchor="ctr">
+                    <a:lnL w="0" cap="flat" cmpd="sng" algn="ctr">
+                      <a:noFill/>
+                    </a:lnL>
+                    <a:lnR w="0" cap="flat" cmpd="sng" algn="ctr">
+                      <a:noFill/>
+                    </a:lnR>
+                    <a:lnT w="0" cap="flat" cmpd="sng" algn="ctr">
+                      <a:noFill/>
+                    </a:lnT>
+                    <a:lnB w="9525" cap="flat" cmpd="sng" algn="ctr">
+                      <a:solidFill>
+                        <a:srgbClr val="E2E2E6"/>
+                      </a:solidFill>
+                      <a:prstDash val="solid"/>
+                      <a:round/>
+                      <a:headEnd type="none" w="med" len="med"/>
+                      <a:tailEnd type="none" w="med" len="med"/>
+                    </a:lnB>
+                    <a:solidFill>
+                      <a:srgbClr val="FFFFFF"/>
+                    </a:solidFill>
+                  </a:tcPr>
+                </a:tc>
+                <a:tc>
+                  <a:txBody>
+                    <a:bodyPr/>
+                    <a:lstStyle/>
+                    <a:p>
+                      <a:pPr indent="0" marL="0">
+                        <a:buNone/>
+                      </a:pPr>
+                      <a:r>
+                        <a:rPr lang="en-US" sz="800" dirty="0">
+                          <a:solidFill>
+                            <a:srgbClr val="48484A"/>
+                          </a:solidFill>
+                        </a:rPr>
+                        <a:t>Hospitales de EE. UU.</a:t>
+                      </a:r>
+                      <a:endParaRPr lang="en-US" sz="800" dirty="0"/>
+                    </a:p>
+                  </a:txBody>
+                  <a:tcPr marL="76200" marR="76200" marT="50800" marB="50800" anchor="ctr">
+                    <a:lnL w="0" cap="flat" cmpd="sng" algn="ctr">
+                      <a:noFill/>
+                    </a:lnL>
+                    <a:lnR w="0" cap="flat" cmpd="sng" algn="ctr">
+                      <a:noFill/>
+                    </a:lnR>
+                    <a:lnT w="0" cap="flat" cmpd="sng" algn="ctr">
+                      <a:noFill/>
+                    </a:lnT>
+                    <a:lnB w="9525" cap="flat" cmpd="sng" algn="ctr">
+                      <a:solidFill>
+                        <a:srgbClr val="E2E2E6"/>
+                      </a:solidFill>
+                      <a:prstDash val="solid"/>
+                      <a:round/>
+                      <a:headEnd type="none" w="med" len="med"/>
+                      <a:tailEnd type="none" w="med" len="med"/>
+                    </a:lnB>
+                    <a:solidFill>
+                      <a:srgbClr val="FFFFFF"/>
+                    </a:solidFill>
+                  </a:tcPr>
+                </a:tc>
+                <a:tc>
+                  <a:txBody>
+                    <a:bodyPr/>
+                    <a:lstStyle/>
+                    <a:p>
+                      <a:pPr indent="0" marL="0">
+                        <a:buNone/>
+                      </a:pPr>
+                      <a:r>
+                        <a:rPr lang="en-US" sz="800" dirty="0">
+                          <a:solidFill>
+                            <a:srgbClr val="48484A"/>
+                          </a:solidFill>
+                        </a:rPr>
+                        <a:t>Sistemas de salud de EE. UU.</a:t>
+                      </a:r>
+                      <a:endParaRPr lang="en-US" sz="800" dirty="0"/>
+                    </a:p>
+                  </a:txBody>
+                  <a:tcPr marL="76200" marR="76200" marT="50800" marB="50800" anchor="ctr">
                     <a:lnL w="0" cap="flat" cmpd="sng" algn="ctr">
                       <a:noFill/>
                     </a:lnL>
@@ -7473,8 +10441,8 @@
         </p:nvSpPr>
         <p:spPr>
           <a:xfrm>
-            <a:off x="502920" y="4434840"/>
-            <a:ext cx="8138160" cy="548640"/>
+            <a:off x="502920" y="4343400"/>
+            <a:ext cx="8138160" cy="365760"/>
           </a:xfrm>
           <a:prstGeom prst="rect">
             <a:avLst/>
@@ -7490,7 +10458,7 @@
               <a:buNone/>
             </a:pPr>
             <a:r>
-              <a:rPr lang="en-US" sz="1300" b="1" i="1" dirty="0">
+              <a:rPr lang="en-US" sz="1050" b="1" i="1" dirty="0">
                 <a:solidFill>
                   <a:srgbClr val="0A3D91"/>
                 </a:solidFill>
@@ -7498,9 +10466,48 @@
                 <a:ea typeface="Arial" pitchFamily="34" charset="-122"/>
                 <a:cs typeface="Arial" pitchFamily="34" charset="-120"/>
               </a:rPr>
-              <a:t>Mientras otros convierten voz en texto, Miracle convierte una consulta en información clínica accionable.</a:t>
-            </a:r>
-            <a:endParaRPr lang="en-US" sz="1300" dirty="0"/>
+              <a:t>Abridge vale USD 5.300M. Telepatía —aquí en Medellín— levantó USD 42M. Nosotros entramos donde ellos no están.</a:t>
+            </a:r>
+            <a:endParaRPr lang="en-US" sz="1050" dirty="0"/>
+          </a:p>
+        </p:txBody>
+      </p:sp>
+      <p:sp>
+        <p:nvSpPr>
+          <p:cNvPr id="6" name="Text 3"/>
+          <p:cNvSpPr/>
+          <p:nvPr/>
+        </p:nvSpPr>
+        <p:spPr>
+          <a:xfrm>
+            <a:off x="502920" y="4736592"/>
+            <a:ext cx="8138160" cy="320040"/>
+          </a:xfrm>
+          <a:prstGeom prst="rect">
+            <a:avLst/>
+          </a:prstGeom>
+          <a:noFill/>
+          <a:ln/>
+        </p:spPr>
+        <p:txBody>
+          <a:bodyPr wrap="square" lIns="0" tIns="0" rIns="0" bIns="0" rtlCol="0" anchor="ctr"/>
+          <a:lstStyle/>
+          <a:p>
+            <a:pPr indent="0" marL="0">
+              <a:buNone/>
+            </a:pPr>
+            <a:r>
+              <a:rPr lang="en-US" sz="700" dirty="0">
+                <a:solidFill>
+                  <a:srgbClr val="6E6E73"/>
+                </a:solidFill>
+                <a:latin typeface="Arial" pitchFamily="34" charset="0"/>
+                <a:ea typeface="Arial" pitchFamily="34" charset="-122"/>
+                <a:cs typeface="Arial" pitchFamily="34" charset="-120"/>
+              </a:rPr>
+              <a:t>Comparación con información pública a julio de 2026 — TechCrunch (Abridge, jun 2025); El Colombiano (Telepatía/a16z, jul 2026); trydax.com y Lime Health (Dragon Copilot).</a:t>
+            </a:r>
+            <a:endParaRPr lang="en-US" sz="700" dirty="0"/>
           </a:p>
         </p:txBody>
       </p:sp>
@@ -7544,7 +10551,7 @@
         </p:nvSpPr>
         <p:spPr>
           <a:xfrm>
-            <a:off x="502920" y="365760"/>
+            <a:off x="502920" y="320040"/>
             <a:ext cx="8138160" cy="274320"/>
           </a:xfrm>
           <a:prstGeom prst="rect">
@@ -7569,7 +10576,7 @@
                 <a:ea typeface="Arial" pitchFamily="34" charset="-122"/>
                 <a:cs typeface="Arial" pitchFamily="34" charset="-120"/>
               </a:rPr>
-              <a:t>PRODUCTO MÍNIMO VIABLE</a:t>
+              <a:t>MERCADO</a:t>
             </a:r>
             <a:endParaRPr lang="en-US" sz="1050" dirty="0"/>
           </a:p>
@@ -7583,7 +10590,7 @@
         </p:nvSpPr>
         <p:spPr>
           <a:xfrm>
-            <a:off x="502920" y="685800"/>
+            <a:off x="502920" y="658368"/>
             <a:ext cx="8138160" cy="548640"/>
           </a:xfrm>
           <a:prstGeom prst="rect">
@@ -7600,7 +10607,7 @@
               <a:buNone/>
             </a:pPr>
             <a:r>
-              <a:rPr lang="en-US" sz="2600" b="1" dirty="0">
+              <a:rPr lang="en-US" sz="2000" b="1" dirty="0">
                 <a:solidFill>
                   <a:srgbClr val="1D1D1F"/>
                 </a:solidFill>
@@ -7608,88 +10615,464 @@
                 <a:ea typeface="Arial" pitchFamily="34" charset="-122"/>
                 <a:cs typeface="Arial" pitchFamily="34" charset="-120"/>
               </a:rPr>
-              <a:t>Ya tenemos un PMV funcional en desarrollo.</a:t>
-            </a:r>
-            <a:endParaRPr lang="en-US" sz="2600" dirty="0"/>
-          </a:p>
-        </p:txBody>
-      </p:sp>
-      <p:sp>
-        <p:nvSpPr>
-          <p:cNvPr id="4" name="Text 2"/>
-          <p:cNvSpPr/>
-          <p:nvPr/>
-        </p:nvSpPr>
-        <p:spPr>
-          <a:xfrm>
-            <a:off x="502920" y="1280160"/>
-            <a:ext cx="8138160" cy="502920"/>
-          </a:xfrm>
-          <a:prstGeom prst="rect">
-            <a:avLst/>
-          </a:prstGeom>
-          <a:noFill/>
-          <a:ln/>
-        </p:spPr>
-        <p:txBody>
-          <a:bodyPr wrap="square" lIns="0" tIns="0" rIns="0" bIns="0" rtlCol="0" anchor="ctr"/>
-          <a:lstStyle/>
-          <a:p>
+              <a:t>Un mercado gigante — y la puerta de entrada está </a:t>
+            </a:r>
             <a:pPr indent="0" marL="0">
               <a:buNone/>
             </a:pPr>
             <a:r>
-              <a:rPr lang="en-US" sz="1300" i="1" dirty="0">
-                <a:solidFill>
-                  <a:srgbClr val="48484A"/>
-                </a:solidFill>
-                <a:latin typeface="Arial" pitchFamily="34" charset="0"/>
-                <a:ea typeface="Arial" pitchFamily="34" charset="-122"/>
-                <a:cs typeface="Arial" pitchFamily="34" charset="-120"/>
-              </a:rPr>
-              <a:t>Nuestro PMV ya demuestra el flujo principal: captura de voz, procesamiento con IA y organización de información clínica.</a:t>
-            </a:r>
-            <a:endParaRPr lang="en-US" sz="1300" dirty="0"/>
-          </a:p>
-        </p:txBody>
-      </p:sp>
-      <p:sp>
-        <p:nvSpPr>
-          <p:cNvPr id="5" name="Shape 3"/>
-          <p:cNvSpPr/>
-          <p:nvPr/>
-        </p:nvSpPr>
-        <p:spPr>
-          <a:xfrm>
-            <a:off x="502920" y="1965960"/>
-            <a:ext cx="2059046" cy="2743200"/>
+              <a:rPr lang="en-US" sz="2000" b="1" dirty="0">
+                <a:solidFill>
+                  <a:srgbClr val="0A3D91"/>
+                </a:solidFill>
+                <a:latin typeface="Arial" pitchFamily="34" charset="0"/>
+                <a:ea typeface="Arial" pitchFamily="34" charset="-122"/>
+                <a:cs typeface="Arial" pitchFamily="34" charset="-120"/>
+              </a:rPr>
+              <a:t>en casa</a:t>
+            </a:r>
+            <a:pPr indent="0" marL="0">
+              <a:buNone/>
+            </a:pPr>
+            <a:r>
+              <a:rPr lang="en-US" sz="2000" b="1" dirty="0">
+                <a:solidFill>
+                  <a:srgbClr val="1D1D1F"/>
+                </a:solidFill>
+                <a:latin typeface="Arial" pitchFamily="34" charset="0"/>
+                <a:ea typeface="Arial" pitchFamily="34" charset="-122"/>
+                <a:cs typeface="Arial" pitchFamily="34" charset="-120"/>
+              </a:rPr>
+              <a:t>.</a:t>
+            </a:r>
+            <a:endParaRPr lang="en-US" sz="2000" dirty="0"/>
+          </a:p>
+        </p:txBody>
+      </p:sp>
+      <p:sp>
+        <p:nvSpPr>
+          <p:cNvPr id="4" name="Shape 2"/>
+          <p:cNvSpPr/>
+          <p:nvPr/>
+        </p:nvSpPr>
+        <p:spPr>
+          <a:xfrm>
+            <a:off x="502920" y="1371600"/>
+            <a:ext cx="8138160" cy="960120"/>
           </a:xfrm>
           <a:prstGeom prst="roundRect">
             <a:avLst>
-              <a:gd name="adj" fmla="val 3997"/>
+              <a:gd name="adj" fmla="val 8571"/>
+            </a:avLst>
+          </a:prstGeom>
+          <a:solidFill>
+            <a:srgbClr val="FFFFFF"/>
+          </a:solidFill>
+          <a:ln w="9525">
+            <a:solidFill>
+              <a:srgbClr val="E2E2E6"/>
+            </a:solidFill>
+            <a:prstDash val="solid"/>
+          </a:ln>
+          <a:effectLst>
+            <a:outerShdw sx="100000" sy="100000" kx="0" ky="0" algn="bl" rotWithShape="0" blurRad="101600" dist="25400" dir="5400000">
+              <a:srgbClr val="0A3D91">
+                <a:alpha val="7000"/>
+              </a:srgbClr>
+            </a:outerShdw>
+          </a:effectLst>
+        </p:spPr>
+      </p:sp>
+      <p:sp>
+        <p:nvSpPr>
+          <p:cNvPr id="5" name="Text 3"/>
+          <p:cNvSpPr/>
+          <p:nvPr/>
+        </p:nvSpPr>
+        <p:spPr>
+          <a:xfrm>
+            <a:off x="731520" y="1463040"/>
+            <a:ext cx="4475988" cy="201168"/>
+          </a:xfrm>
+          <a:prstGeom prst="rect">
+            <a:avLst/>
+          </a:prstGeom>
+          <a:noFill/>
+          <a:ln/>
+        </p:spPr>
+        <p:txBody>
+          <a:bodyPr wrap="square" lIns="0" tIns="0" rIns="0" bIns="0" rtlCol="0" anchor="ctr"/>
+          <a:lstStyle/>
+          <a:p>
+            <a:pPr indent="0" marL="0">
+              <a:buNone/>
+            </a:pPr>
+            <a:r>
+              <a:rPr lang="en-US" sz="800" b="1" spc="100" kern="0" dirty="0">
+                <a:solidFill>
+                  <a:srgbClr val="0071E3"/>
+                </a:solidFill>
+                <a:latin typeface="Arial" pitchFamily="34" charset="0"/>
+                <a:ea typeface="Arial" pitchFamily="34" charset="-122"/>
+                <a:cs typeface="Arial" pitchFamily="34" charset="-120"/>
+              </a:rPr>
+              <a:t>TAM · LATINOAMÉRICA</a:t>
+            </a:r>
+            <a:endParaRPr lang="en-US" sz="800" dirty="0"/>
+          </a:p>
+        </p:txBody>
+      </p:sp>
+      <p:sp>
+        <p:nvSpPr>
+          <p:cNvPr id="6" name="Text 4"/>
+          <p:cNvSpPr/>
+          <p:nvPr/>
+        </p:nvSpPr>
+        <p:spPr>
+          <a:xfrm>
+            <a:off x="731520" y="1664208"/>
+            <a:ext cx="4475988" cy="347472"/>
+          </a:xfrm>
+          <a:prstGeom prst="rect">
+            <a:avLst/>
+          </a:prstGeom>
+          <a:noFill/>
+          <a:ln/>
+        </p:spPr>
+        <p:txBody>
+          <a:bodyPr wrap="square" lIns="0" tIns="0" rIns="0" bIns="0" rtlCol="0" anchor="t"/>
+          <a:lstStyle/>
+          <a:p>
+            <a:pPr indent="0" marL="0">
+              <a:buNone/>
+            </a:pPr>
+            <a:r>
+              <a:rPr lang="en-US" sz="950" b="1" dirty="0">
+                <a:solidFill>
+                  <a:srgbClr val="1D1D1F"/>
+                </a:solidFill>
+                <a:latin typeface="Arial" pitchFamily="34" charset="0"/>
+                <a:ea typeface="Arial" pitchFamily="34" charset="-122"/>
+                <a:cs typeface="Arial" pitchFamily="34" charset="-120"/>
+              </a:rPr>
+              <a:t>Salud digital en LatAm</a:t>
+            </a:r>
+            <a:endParaRPr lang="en-US" sz="950" dirty="0"/>
+          </a:p>
+        </p:txBody>
+      </p:sp>
+      <p:sp>
+        <p:nvSpPr>
+          <p:cNvPr id="7" name="Text 5"/>
+          <p:cNvSpPr/>
+          <p:nvPr/>
+        </p:nvSpPr>
+        <p:spPr>
+          <a:xfrm>
+            <a:off x="731520" y="2029968"/>
+            <a:ext cx="7680960" cy="256032"/>
+          </a:xfrm>
+          <a:prstGeom prst="rect">
+            <a:avLst/>
+          </a:prstGeom>
+          <a:noFill/>
+          <a:ln/>
+        </p:spPr>
+        <p:txBody>
+          <a:bodyPr wrap="square" lIns="0" tIns="0" rIns="0" bIns="0" rtlCol="0" anchor="ctr"/>
+          <a:lstStyle/>
+          <a:p>
+            <a:pPr indent="0" marL="0">
+              <a:buNone/>
+            </a:pPr>
+            <a:r>
+              <a:rPr lang="en-US" sz="1250" b="1" dirty="0">
+                <a:solidFill>
+                  <a:srgbClr val="0A3D91"/>
+                </a:solidFill>
+                <a:latin typeface="Arial" pitchFamily="34" charset="0"/>
+                <a:ea typeface="Arial" pitchFamily="34" charset="-122"/>
+                <a:cs typeface="Arial" pitchFamily="34" charset="-120"/>
+              </a:rPr>
+              <a:t>USD 12.800M → 66.400M</a:t>
+            </a:r>
+            <a:endParaRPr lang="en-US" sz="1250" dirty="0"/>
+          </a:p>
+        </p:txBody>
+      </p:sp>
+      <p:sp>
+        <p:nvSpPr>
+          <p:cNvPr id="8" name="Text 6"/>
+          <p:cNvSpPr/>
+          <p:nvPr/>
+        </p:nvSpPr>
+        <p:spPr>
+          <a:xfrm>
+            <a:off x="4978908" y="1463040"/>
+            <a:ext cx="3418027" cy="777240"/>
+          </a:xfrm>
+          <a:prstGeom prst="rect">
+            <a:avLst/>
+          </a:prstGeom>
+          <a:noFill/>
+          <a:ln/>
+        </p:spPr>
+        <p:txBody>
+          <a:bodyPr wrap="square" lIns="0" tIns="0" rIns="0" bIns="0" rtlCol="0" anchor="ctr"/>
+          <a:lstStyle/>
+          <a:p>
+            <a:pPr algn="r" indent="0" marL="0">
+              <a:buNone/>
+            </a:pPr>
+            <a:r>
+              <a:rPr lang="en-US" sz="750" dirty="0">
+                <a:solidFill>
+                  <a:srgbClr val="6E6E73"/>
+                </a:solidFill>
+                <a:latin typeface="Arial" pitchFamily="34" charset="0"/>
+                <a:ea typeface="Arial" pitchFamily="34" charset="-122"/>
+                <a:cs typeface="Arial" pitchFamily="34" charset="-120"/>
+              </a:rPr>
+              <a:t>Tamaño 2024 y proyección 2033 · CAGR ≈ 20% anual</a:t>
+            </a:r>
+            <a:endParaRPr lang="en-US" sz="750" dirty="0"/>
+          </a:p>
+        </p:txBody>
+      </p:sp>
+      <p:sp>
+        <p:nvSpPr>
+          <p:cNvPr id="9" name="Shape 7"/>
+          <p:cNvSpPr/>
+          <p:nvPr/>
+        </p:nvSpPr>
+        <p:spPr>
+          <a:xfrm>
+            <a:off x="1398118" y="2459736"/>
+            <a:ext cx="6347765" cy="960120"/>
+          </a:xfrm>
+          <a:prstGeom prst="roundRect">
+            <a:avLst>
+              <a:gd name="adj" fmla="val 8571"/>
             </a:avLst>
           </a:prstGeom>
           <a:solidFill>
             <a:srgbClr val="EAF3FF"/>
           </a:solidFill>
-          <a:ln w="12700">
+          <a:ln w="9525">
+            <a:solidFill>
+              <a:srgbClr val="CFE4FB"/>
+            </a:solidFill>
+            <a:prstDash val="solid"/>
+          </a:ln>
+          <a:effectLst>
+            <a:outerShdw sx="100000" sy="100000" kx="0" ky="0" algn="bl" rotWithShape="0" blurRad="101600" dist="25400" dir="5400000">
+              <a:srgbClr val="0A3D91">
+                <a:alpha val="7000"/>
+              </a:srgbClr>
+            </a:outerShdw>
+          </a:effectLst>
+        </p:spPr>
+      </p:sp>
+      <p:sp>
+        <p:nvSpPr>
+          <p:cNvPr id="10" name="Text 8"/>
+          <p:cNvSpPr/>
+          <p:nvPr/>
+        </p:nvSpPr>
+        <p:spPr>
+          <a:xfrm>
+            <a:off x="1626718" y="2551176"/>
+            <a:ext cx="3491271" cy="201168"/>
+          </a:xfrm>
+          <a:prstGeom prst="rect">
+            <a:avLst/>
+          </a:prstGeom>
+          <a:noFill/>
+          <a:ln/>
+        </p:spPr>
+        <p:txBody>
+          <a:bodyPr wrap="square" lIns="0" tIns="0" rIns="0" bIns="0" rtlCol="0" anchor="ctr"/>
+          <a:lstStyle/>
+          <a:p>
+            <a:pPr indent="0" marL="0">
+              <a:buNone/>
+            </a:pPr>
+            <a:r>
+              <a:rPr lang="en-US" sz="800" b="1" spc="100" kern="0" dirty="0">
+                <a:solidFill>
+                  <a:srgbClr val="0071E3"/>
+                </a:solidFill>
+                <a:latin typeface="Arial" pitchFamily="34" charset="0"/>
+                <a:ea typeface="Arial" pitchFamily="34" charset="-122"/>
+                <a:cs typeface="Arial" pitchFamily="34" charset="-120"/>
+              </a:rPr>
+              <a:t>SAM · COLOMBIA</a:t>
+            </a:r>
+            <a:endParaRPr lang="en-US" sz="800" dirty="0"/>
+          </a:p>
+        </p:txBody>
+      </p:sp>
+      <p:sp>
+        <p:nvSpPr>
+          <p:cNvPr id="11" name="Text 9"/>
+          <p:cNvSpPr/>
+          <p:nvPr/>
+        </p:nvSpPr>
+        <p:spPr>
+          <a:xfrm>
+            <a:off x="1626718" y="2752344"/>
+            <a:ext cx="3491271" cy="347472"/>
+          </a:xfrm>
+          <a:prstGeom prst="rect">
+            <a:avLst/>
+          </a:prstGeom>
+          <a:noFill/>
+          <a:ln/>
+        </p:spPr>
+        <p:txBody>
+          <a:bodyPr wrap="square" lIns="0" tIns="0" rIns="0" bIns="0" rtlCol="0" anchor="t"/>
+          <a:lstStyle/>
+          <a:p>
+            <a:pPr indent="0" marL="0">
+              <a:buNone/>
+            </a:pPr>
+            <a:r>
+              <a:rPr lang="en-US" sz="950" b="1" dirty="0">
+                <a:solidFill>
+                  <a:srgbClr val="1D1D1F"/>
+                </a:solidFill>
+                <a:latin typeface="Arial" pitchFamily="34" charset="0"/>
+                <a:ea typeface="Arial" pitchFamily="34" charset="-122"/>
+                <a:cs typeface="Arial" pitchFamily="34" charset="-120"/>
+              </a:rPr>
+              <a:t>Documentación clínica asistida por IA</a:t>
+            </a:r>
+            <a:endParaRPr lang="en-US" sz="950" dirty="0"/>
+          </a:p>
+        </p:txBody>
+      </p:sp>
+      <p:sp>
+        <p:nvSpPr>
+          <p:cNvPr id="12" name="Text 10"/>
+          <p:cNvSpPr/>
+          <p:nvPr/>
+        </p:nvSpPr>
+        <p:spPr>
+          <a:xfrm>
+            <a:off x="1626718" y="3118104"/>
+            <a:ext cx="5890565" cy="256032"/>
+          </a:xfrm>
+          <a:prstGeom prst="rect">
+            <a:avLst/>
+          </a:prstGeom>
+          <a:noFill/>
+          <a:ln/>
+        </p:spPr>
+        <p:txBody>
+          <a:bodyPr wrap="square" lIns="0" tIns="0" rIns="0" bIns="0" rtlCol="0" anchor="ctr"/>
+          <a:lstStyle/>
+          <a:p>
+            <a:pPr indent="0" marL="0">
+              <a:buNone/>
+            </a:pPr>
+            <a:r>
+              <a:rPr lang="en-US" sz="1250" b="1" dirty="0">
+                <a:solidFill>
+                  <a:srgbClr val="0A3D91"/>
+                </a:solidFill>
+                <a:latin typeface="Arial" pitchFamily="34" charset="0"/>
+                <a:ea typeface="Arial" pitchFamily="34" charset="-122"/>
+                <a:cs typeface="Arial" pitchFamily="34" charset="-120"/>
+              </a:rPr>
+              <a:t>137.700+ médicos · 10.839 IPS</a:t>
+            </a:r>
+            <a:endParaRPr lang="en-US" sz="1250" dirty="0"/>
+          </a:p>
+        </p:txBody>
+      </p:sp>
+      <p:sp>
+        <p:nvSpPr>
+          <p:cNvPr id="13" name="Text 11"/>
+          <p:cNvSpPr/>
+          <p:nvPr/>
+        </p:nvSpPr>
+        <p:spPr>
+          <a:xfrm>
+            <a:off x="4889388" y="2551176"/>
+            <a:ext cx="2666061" cy="777240"/>
+          </a:xfrm>
+          <a:prstGeom prst="rect">
+            <a:avLst/>
+          </a:prstGeom>
+          <a:noFill/>
+          <a:ln/>
+        </p:spPr>
+        <p:txBody>
+          <a:bodyPr wrap="square" lIns="0" tIns="0" rIns="0" bIns="0" rtlCol="0" anchor="ctr"/>
+          <a:lstStyle/>
+          <a:p>
+            <a:pPr algn="r" indent="0" marL="0">
+              <a:buNone/>
+            </a:pPr>
+            <a:r>
+              <a:rPr lang="en-US" sz="750" dirty="0">
+                <a:solidFill>
+                  <a:srgbClr val="6E6E73"/>
+                </a:solidFill>
+                <a:latin typeface="Arial" pitchFamily="34" charset="0"/>
+                <a:ea typeface="Arial" pitchFamily="34" charset="-122"/>
+                <a:cs typeface="Arial" pitchFamily="34" charset="-120"/>
+              </a:rPr>
+              <a:t>Médicos activos (2023) e IPS habilitadas (91% privadas, jun 2025)</a:t>
+            </a:r>
+            <a:endParaRPr lang="en-US" sz="750" dirty="0"/>
+          </a:p>
+        </p:txBody>
+      </p:sp>
+      <p:sp>
+        <p:nvSpPr>
+          <p:cNvPr id="14" name="Shape 12"/>
+          <p:cNvSpPr/>
+          <p:nvPr/>
+        </p:nvSpPr>
+        <p:spPr>
+          <a:xfrm>
+            <a:off x="2293315" y="3547872"/>
+            <a:ext cx="4557370" cy="960120"/>
+          </a:xfrm>
+          <a:prstGeom prst="roundRect">
+            <a:avLst>
+              <a:gd name="adj" fmla="val 8571"/>
+            </a:avLst>
+          </a:prstGeom>
+          <a:solidFill>
+            <a:srgbClr val="D7E9FC"/>
+          </a:solidFill>
+          <a:ln w="9525">
             <a:solidFill>
               <a:srgbClr val="0071E3"/>
             </a:solidFill>
-            <a:prstDash val="dash"/>
+            <a:prstDash val="solid"/>
           </a:ln>
-        </p:spPr>
-      </p:sp>
-      <p:sp>
-        <p:nvSpPr>
-          <p:cNvPr id="6" name="Text 4"/>
-          <p:cNvSpPr/>
-          <p:nvPr/>
-        </p:nvSpPr>
-        <p:spPr>
-          <a:xfrm>
-            <a:off x="502920" y="1965960"/>
-            <a:ext cx="2059046" cy="2743200"/>
+          <a:effectLst>
+            <a:outerShdw sx="100000" sy="100000" kx="0" ky="0" algn="bl" rotWithShape="0" blurRad="101600" dist="25400" dir="5400000">
+              <a:srgbClr val="0A3D91">
+                <a:alpha val="7000"/>
+              </a:srgbClr>
+            </a:outerShdw>
+          </a:effectLst>
+        </p:spPr>
+      </p:sp>
+      <p:sp>
+        <p:nvSpPr>
+          <p:cNvPr id="15" name="Text 13"/>
+          <p:cNvSpPr/>
+          <p:nvPr/>
+        </p:nvSpPr>
+        <p:spPr>
+          <a:xfrm>
+            <a:off x="2521915" y="3639312"/>
+            <a:ext cx="2506553" cy="201168"/>
           </a:xfrm>
           <a:prstGeom prst="rect">
             <a:avLst/>
@@ -7701,11 +11084,89 @@
           <a:bodyPr wrap="square" lIns="0" tIns="0" rIns="0" bIns="0" rtlCol="0" anchor="ctr"/>
           <a:lstStyle/>
           <a:p>
-            <a:pPr algn="ctr" indent="0" marL="0">
-              <a:buNone/>
-            </a:pPr>
-            <a:r>
-              <a:rPr lang="en-US" sz="1200" dirty="0">
+            <a:pPr indent="0" marL="0">
+              <a:buNone/>
+            </a:pPr>
+            <a:r>
+              <a:rPr lang="en-US" sz="800" b="1" spc="100" kern="0" dirty="0">
+                <a:solidFill>
+                  <a:srgbClr val="0071E3"/>
+                </a:solidFill>
+                <a:latin typeface="Arial" pitchFamily="34" charset="0"/>
+                <a:ea typeface="Arial" pitchFamily="34" charset="-122"/>
+                <a:cs typeface="Arial" pitchFamily="34" charset="-120"/>
+              </a:rPr>
+              <a:t>SOM · ANTIOQUIA PRIMERO</a:t>
+            </a:r>
+            <a:endParaRPr lang="en-US" sz="800" dirty="0"/>
+          </a:p>
+        </p:txBody>
+      </p:sp>
+      <p:sp>
+        <p:nvSpPr>
+          <p:cNvPr id="16" name="Text 14"/>
+          <p:cNvSpPr/>
+          <p:nvPr/>
+        </p:nvSpPr>
+        <p:spPr>
+          <a:xfrm>
+            <a:off x="2521915" y="3840480"/>
+            <a:ext cx="2506553" cy="347472"/>
+          </a:xfrm>
+          <a:prstGeom prst="rect">
+            <a:avLst/>
+          </a:prstGeom>
+          <a:noFill/>
+          <a:ln/>
+        </p:spPr>
+        <p:txBody>
+          <a:bodyPr wrap="square" lIns="0" tIns="0" rIns="0" bIns="0" rtlCol="0" anchor="t"/>
+          <a:lstStyle/>
+          <a:p>
+            <a:pPr indent="0" marL="0">
+              <a:buNone/>
+            </a:pPr>
+            <a:r>
+              <a:rPr lang="en-US" sz="950" b="1" dirty="0">
+                <a:solidFill>
+                  <a:srgbClr val="1D1D1F"/>
+                </a:solidFill>
+                <a:latin typeface="Arial" pitchFamily="34" charset="0"/>
+                <a:ea typeface="Arial" pitchFamily="34" charset="-122"/>
+                <a:cs typeface="Arial" pitchFamily="34" charset="-120"/>
+              </a:rPr>
+              <a:t>Pilotos en Medellín y área metropolitana</a:t>
+            </a:r>
+            <a:endParaRPr lang="en-US" sz="950" dirty="0"/>
+          </a:p>
+        </p:txBody>
+      </p:sp>
+      <p:sp>
+        <p:nvSpPr>
+          <p:cNvPr id="17" name="Text 15"/>
+          <p:cNvSpPr/>
+          <p:nvPr/>
+        </p:nvSpPr>
+        <p:spPr>
+          <a:xfrm>
+            <a:off x="2521915" y="4206240"/>
+            <a:ext cx="4100170" cy="256032"/>
+          </a:xfrm>
+          <a:prstGeom prst="rect">
+            <a:avLst/>
+          </a:prstGeom>
+          <a:noFill/>
+          <a:ln/>
+        </p:spPr>
+        <p:txBody>
+          <a:bodyPr wrap="square" lIns="0" tIns="0" rIns="0" bIns="0" rtlCol="0" anchor="ctr"/>
+          <a:lstStyle/>
+          <a:p>
+            <a:pPr indent="0" marL="0">
+              <a:buNone/>
+            </a:pPr>
+            <a:r>
+              <a:rPr lang="en-US" sz="1250" b="1" dirty="0">
                 <a:solidFill>
                   <a:srgbClr val="0A3D91"/>
                 </a:solidFill>
@@ -7713,66 +11174,22 @@
                 <a:ea typeface="Arial" pitchFamily="34" charset="-122"/>
                 <a:cs typeface="Arial" pitchFamily="34" charset="-120"/>
               </a:rPr>
-              <a:t>Captura 1</a:t>
-            </a:r>
-            <a:endParaRPr lang="en-US" sz="1200" dirty="0"/>
-          </a:p>
-          <a:p>
-            <a:pPr algn="ctr" indent="0" marL="0">
-              <a:buNone/>
-            </a:pPr>
-            <a:r>
-              <a:rPr lang="en-US" sz="1200" dirty="0">
-                <a:solidFill>
-                  <a:srgbClr val="0A3D91"/>
-                </a:solidFill>
-                <a:latin typeface="Arial" pitchFamily="34" charset="0"/>
-                <a:ea typeface="Arial" pitchFamily="34" charset="-122"/>
-                <a:cs typeface="Arial" pitchFamily="34" charset="-120"/>
-              </a:rPr>
-              <a:t>del prototipo</a:t>
-            </a:r>
-            <a:endParaRPr lang="en-US" sz="1200" dirty="0"/>
-          </a:p>
-        </p:txBody>
-      </p:sp>
-      <p:sp>
-        <p:nvSpPr>
-          <p:cNvPr id="7" name="Shape 5"/>
-          <p:cNvSpPr/>
-          <p:nvPr/>
-        </p:nvSpPr>
-        <p:spPr>
-          <a:xfrm>
-            <a:off x="2817998" y="1965960"/>
-            <a:ext cx="2059046" cy="2743200"/>
-          </a:xfrm>
-          <a:prstGeom prst="roundRect">
-            <a:avLst>
-              <a:gd name="adj" fmla="val 3997"/>
-            </a:avLst>
-          </a:prstGeom>
-          <a:solidFill>
-            <a:srgbClr val="EAF3FF"/>
-          </a:solidFill>
-          <a:ln w="12700">
-            <a:solidFill>
-              <a:srgbClr val="0071E3"/>
-            </a:solidFill>
-            <a:prstDash val="dash"/>
-          </a:ln>
-        </p:spPr>
-      </p:sp>
-      <p:sp>
-        <p:nvSpPr>
-          <p:cNvPr id="8" name="Text 6"/>
-          <p:cNvSpPr/>
-          <p:nvPr/>
-        </p:nvSpPr>
-        <p:spPr>
-          <a:xfrm>
-            <a:off x="2817998" y="1965960"/>
-            <a:ext cx="2059046" cy="2743200"/>
+              <a:t>≈ 940 IPS</a:t>
+            </a:r>
+            <a:endParaRPr lang="en-US" sz="1250" dirty="0"/>
+          </a:p>
+        </p:txBody>
+      </p:sp>
+      <p:sp>
+        <p:nvSpPr>
+          <p:cNvPr id="18" name="Text 16"/>
+          <p:cNvSpPr/>
+          <p:nvPr/>
+        </p:nvSpPr>
+        <p:spPr>
+          <a:xfrm>
+            <a:off x="4799868" y="3639312"/>
+            <a:ext cx="1914095" cy="777240"/>
           </a:xfrm>
           <a:prstGeom prst="rect">
             <a:avLst/>
@@ -7784,122 +11201,34 @@
           <a:bodyPr wrap="square" lIns="0" tIns="0" rIns="0" bIns="0" rtlCol="0" anchor="ctr"/>
           <a:lstStyle/>
           <a:p>
-            <a:pPr algn="ctr" indent="0" marL="0">
-              <a:buNone/>
-            </a:pPr>
-            <a:r>
-              <a:rPr lang="en-US" sz="1200" dirty="0">
-                <a:solidFill>
-                  <a:srgbClr val="0A3D91"/>
-                </a:solidFill>
-                <a:latin typeface="Arial" pitchFamily="34" charset="0"/>
-                <a:ea typeface="Arial" pitchFamily="34" charset="-122"/>
-                <a:cs typeface="Arial" pitchFamily="34" charset="-120"/>
-              </a:rPr>
-              <a:t>Captura 2</a:t>
-            </a:r>
-            <a:endParaRPr lang="en-US" sz="1200" dirty="0"/>
-          </a:p>
-          <a:p>
-            <a:pPr algn="ctr" indent="0" marL="0">
-              <a:buNone/>
-            </a:pPr>
-            <a:r>
-              <a:rPr lang="en-US" sz="1200" dirty="0">
-                <a:solidFill>
-                  <a:srgbClr val="0A3D91"/>
-                </a:solidFill>
-                <a:latin typeface="Arial" pitchFamily="34" charset="0"/>
-                <a:ea typeface="Arial" pitchFamily="34" charset="-122"/>
-                <a:cs typeface="Arial" pitchFamily="34" charset="-120"/>
-              </a:rPr>
-              <a:t>del prototipo</a:t>
-            </a:r>
-            <a:endParaRPr lang="en-US" sz="1200" dirty="0"/>
-          </a:p>
-        </p:txBody>
-      </p:sp>
-      <p:sp>
-        <p:nvSpPr>
-          <p:cNvPr id="9" name="Shape 7"/>
-          <p:cNvSpPr/>
-          <p:nvPr/>
-        </p:nvSpPr>
-        <p:spPr>
-          <a:xfrm>
-            <a:off x="5133076" y="1965960"/>
-            <a:ext cx="3508004" cy="2743200"/>
-          </a:xfrm>
-          <a:prstGeom prst="roundRect">
-            <a:avLst>
-              <a:gd name="adj" fmla="val 3000"/>
-            </a:avLst>
-          </a:prstGeom>
-          <a:solidFill>
-            <a:srgbClr val="EAF3FF"/>
-          </a:solidFill>
-          <a:ln w="12700">
-            <a:solidFill>
-              <a:srgbClr val="0071E3"/>
-            </a:solidFill>
-            <a:prstDash val="dash"/>
-          </a:ln>
-        </p:spPr>
-      </p:sp>
-      <p:sp>
-        <p:nvSpPr>
-          <p:cNvPr id="10" name="Shape 8"/>
-          <p:cNvSpPr/>
-          <p:nvPr/>
-        </p:nvSpPr>
-        <p:spPr>
-          <a:xfrm>
-            <a:off x="6576182" y="2606040"/>
-            <a:ext cx="621792" cy="621792"/>
-          </a:xfrm>
-          <a:prstGeom prst="ellipse">
-            <a:avLst/>
-          </a:prstGeom>
-          <a:solidFill>
-            <a:srgbClr val="FFFFFF"/>
-          </a:solidFill>
-          <a:ln/>
-        </p:spPr>
-      </p:sp>
-      <p:pic>
-        <p:nvPicPr>
-          <p:cNvPr id="11" name="Image 0" descr="preencoded.png">    </p:cNvPr>
-          <p:cNvPicPr>
-            <a:picLocks noChangeAspect="1"/>
-          </p:cNvPicPr>
-          <p:nvPr/>
-        </p:nvPicPr>
-        <p:blipFill>
-          <a:blip r:embed="rId1"/>
-          <a:stretch>
-            <a:fillRect/>
-          </a:stretch>
-        </p:blipFill>
-        <p:spPr>
-          <a:xfrm>
-            <a:off x="6663233" y="2693091"/>
-            <a:ext cx="447690" cy="447690"/>
-          </a:xfrm>
-          <a:prstGeom prst="rect">
-            <a:avLst/>
-          </a:prstGeom>
-        </p:spPr>
-      </p:pic>
-      <p:sp>
-        <p:nvSpPr>
-          <p:cNvPr id="12" name="Text 9"/>
-          <p:cNvSpPr/>
-          <p:nvPr/>
-        </p:nvSpPr>
-        <p:spPr>
-          <a:xfrm>
-            <a:off x="5133076" y="3520440"/>
-            <a:ext cx="3508004" cy="365760"/>
+            <a:pPr algn="r" indent="0" marL="0">
+              <a:buNone/>
+            </a:pPr>
+            <a:r>
+              <a:rPr lang="en-US" sz="750" dirty="0">
+                <a:solidFill>
+                  <a:srgbClr val="6E6E73"/>
+                </a:solidFill>
+                <a:latin typeface="Arial" pitchFamily="34" charset="0"/>
+                <a:ea typeface="Arial" pitchFamily="34" charset="-122"/>
+                <a:cs typeface="Arial" pitchFamily="34" charset="-120"/>
+              </a:rPr>
+              <a:t>Consultorios, clínicas e IPS de alto volumen</a:t>
+            </a:r>
+            <a:endParaRPr lang="en-US" sz="750" dirty="0"/>
+          </a:p>
+        </p:txBody>
+      </p:sp>
+      <p:sp>
+        <p:nvSpPr>
+          <p:cNvPr id="19" name="Text 17"/>
+          <p:cNvSpPr/>
+          <p:nvPr/>
+        </p:nvSpPr>
+        <p:spPr>
+          <a:xfrm>
+            <a:off x="502920" y="4727448"/>
+            <a:ext cx="8138160" cy="457200"/>
           </a:xfrm>
           <a:prstGeom prst="rect">
             <a:avLst/>
@@ -7911,21 +11240,21 @@
           <a:bodyPr wrap="square" lIns="0" tIns="0" rIns="0" bIns="0" rtlCol="0" anchor="ctr"/>
           <a:lstStyle/>
           <a:p>
-            <a:pPr algn="ctr" indent="0" marL="0">
-              <a:buNone/>
-            </a:pPr>
-            <a:r>
-              <a:rPr lang="en-US" sz="1250" b="1" dirty="0">
-                <a:solidFill>
-                  <a:srgbClr val="0A3D91"/>
-                </a:solidFill>
-                <a:latin typeface="Arial" pitchFamily="34" charset="0"/>
-                <a:ea typeface="Arial" pitchFamily="34" charset="-122"/>
-                <a:cs typeface="Arial" pitchFamily="34" charset="-120"/>
-              </a:rPr>
-              <a:t>Video demo (30–40 seg)</a:t>
-            </a:r>
-            <a:endParaRPr lang="en-US" sz="1250" dirty="0"/>
+            <a:pPr indent="0" marL="0">
+              <a:buNone/>
+            </a:pPr>
+            <a:r>
+              <a:rPr lang="en-US" sz="700" dirty="0">
+                <a:solidFill>
+                  <a:srgbClr val="6E6E73"/>
+                </a:solidFill>
+                <a:latin typeface="Arial" pitchFamily="34" charset="0"/>
+                <a:ea typeface="Arial" pitchFamily="34" charset="-122"/>
+                <a:cs typeface="Arial" pitchFamily="34" charset="-120"/>
+              </a:rPr>
+              <a:t>Fuentes: Market Data Forecast — LatAm Digital Health (USD 12,82 mil M en 2024 → USD 66,4 mil M en 2033, CAGR 20,05%); MinSalud 2023 (137.700+ médicos); REPS jun 2025 vía Consultorsalud/UNIPS (10.839 IPS); datos.gov.co — Prestadores de Salud Antioquia.</a:t>
+            </a:r>
+            <a:endParaRPr lang="en-US" sz="700" dirty="0"/>
           </a:p>
         </p:txBody>
       </p:sp>
@@ -7969,7 +11298,7 @@
         </p:nvSpPr>
         <p:spPr>
           <a:xfrm>
-            <a:off x="502920" y="365760"/>
+            <a:off x="502920" y="320040"/>
             <a:ext cx="8138160" cy="274320"/>
           </a:xfrm>
           <a:prstGeom prst="rect">
@@ -7994,7 +11323,7 @@
                 <a:ea typeface="Arial" pitchFamily="34" charset="-122"/>
                 <a:cs typeface="Arial" pitchFamily="34" charset="-120"/>
               </a:rPr>
-              <a:t>CLIENTE Y MERCADO</a:t>
+              <a:t>NUESTROS CLIENTES</a:t>
             </a:r>
             <a:endParaRPr lang="en-US" sz="1050" dirty="0"/>
           </a:p>
@@ -8008,8 +11337,8 @@
         </p:nvSpPr>
         <p:spPr>
           <a:xfrm>
-            <a:off x="502920" y="685800"/>
-            <a:ext cx="8138160" cy="868680"/>
+            <a:off x="502920" y="658368"/>
+            <a:ext cx="8138160" cy="548640"/>
           </a:xfrm>
           <a:prstGeom prst="rect">
             <a:avLst/>
@@ -8025,7 +11354,7 @@
               <a:buNone/>
             </a:pPr>
             <a:r>
-              <a:rPr lang="en-US" sz="2200" b="1" dirty="0">
+              <a:rPr lang="en-US" sz="2400" b="1" dirty="0">
                 <a:solidFill>
                   <a:srgbClr val="1D1D1F"/>
                 </a:solidFill>
@@ -8033,9 +11362,37 @@
                 <a:ea typeface="Arial" pitchFamily="34" charset="-122"/>
                 <a:cs typeface="Arial" pitchFamily="34" charset="-120"/>
               </a:rPr>
-              <a:t>Nuestro primer mercado: médicos y clínicas con alta carga documental.</a:t>
-            </a:r>
-            <a:endParaRPr lang="en-US" sz="2200" dirty="0"/>
+              <a:t>Un solo producto. </a:t>
+            </a:r>
+            <a:pPr indent="0" marL="0">
+              <a:buNone/>
+            </a:pPr>
+            <a:r>
+              <a:rPr lang="en-US" sz="2400" b="1" dirty="0">
+                <a:solidFill>
+                  <a:srgbClr val="0A3D91"/>
+                </a:solidFill>
+                <a:latin typeface="Arial" pitchFamily="34" charset="0"/>
+                <a:ea typeface="Arial" pitchFamily="34" charset="-122"/>
+                <a:cs typeface="Arial" pitchFamily="34" charset="-120"/>
+              </a:rPr>
+              <a:t>Dos motores</a:t>
+            </a:r>
+            <a:pPr indent="0" marL="0">
+              <a:buNone/>
+            </a:pPr>
+            <a:r>
+              <a:rPr lang="en-US" sz="2400" b="1" dirty="0">
+                <a:solidFill>
+                  <a:srgbClr val="1D1D1F"/>
+                </a:solidFill>
+                <a:latin typeface="Arial" pitchFamily="34" charset="0"/>
+                <a:ea typeface="Arial" pitchFamily="34" charset="-122"/>
+                <a:cs typeface="Arial" pitchFamily="34" charset="-120"/>
+              </a:rPr>
+              <a:t> de crecimiento.</a:t>
+            </a:r>
+            <a:endParaRPr lang="en-US" sz="2400" dirty="0"/>
           </a:p>
         </p:txBody>
       </p:sp>
@@ -8047,12 +11404,12 @@
         </p:nvSpPr>
         <p:spPr>
           <a:xfrm>
-            <a:off x="502920" y="1691640"/>
-            <a:ext cx="3931920" cy="1371600"/>
+            <a:off x="502920" y="1463040"/>
+            <a:ext cx="3931920" cy="1965960"/>
           </a:xfrm>
           <a:prstGeom prst="roundRect">
             <a:avLst>
-              <a:gd name="adj" fmla="val 6000"/>
+              <a:gd name="adj" fmla="val 4186"/>
             </a:avLst>
           </a:prstGeom>
           <a:solidFill>
@@ -8081,8 +11438,8 @@
         </p:nvSpPr>
         <p:spPr>
           <a:xfrm>
-            <a:off x="731520" y="1920240"/>
-            <a:ext cx="457200" cy="457200"/>
+            <a:off x="731520" y="1664208"/>
+            <a:ext cx="411480" cy="411480"/>
           </a:xfrm>
           <a:prstGeom prst="ellipse">
             <a:avLst/>
@@ -8109,8 +11466,8 @@
         </p:blipFill>
         <p:spPr>
           <a:xfrm>
-            <a:off x="795528" y="1984248"/>
-            <a:ext cx="329184" cy="329184"/>
+            <a:off x="789127" y="1721815"/>
+            <a:ext cx="296266" cy="296266"/>
           </a:xfrm>
           <a:prstGeom prst="rect">
             <a:avLst/>
@@ -8119,96 +11476,200 @@
       </p:pic>
       <p:sp>
         <p:nvSpPr>
-          <p:cNvPr id="7" name="Text 4"/>
-          <p:cNvSpPr/>
-          <p:nvPr/>
-        </p:nvSpPr>
-        <p:spPr>
-          <a:xfrm>
-            <a:off x="1325880" y="1892808"/>
-            <a:ext cx="2926080" cy="274320"/>
-          </a:xfrm>
-          <a:prstGeom prst="rect">
-            <a:avLst/>
-          </a:prstGeom>
-          <a:noFill/>
-          <a:ln/>
-        </p:spPr>
-        <p:txBody>
-          <a:bodyPr wrap="square" lIns="0" tIns="0" rIns="0" bIns="0" rtlCol="0" anchor="ctr"/>
-          <a:lstStyle/>
-          <a:p>
-            <a:pPr indent="0" marL="0">
-              <a:buNone/>
-            </a:pPr>
-            <a:r>
-              <a:rPr lang="en-US" sz="1350" b="1" dirty="0">
-                <a:solidFill>
-                  <a:srgbClr val="1D1D1F"/>
-                </a:solidFill>
-                <a:latin typeface="Arial" pitchFamily="34" charset="0"/>
-                <a:ea typeface="Arial" pitchFamily="34" charset="-122"/>
-                <a:cs typeface="Arial" pitchFamily="34" charset="-120"/>
-              </a:rPr>
-              <a:t>Usuario</a:t>
-            </a:r>
-            <a:endParaRPr lang="en-US" sz="1350" dirty="0"/>
-          </a:p>
-        </p:txBody>
-      </p:sp>
-      <p:sp>
-        <p:nvSpPr>
-          <p:cNvPr id="8" name="Text 5"/>
-          <p:cNvSpPr/>
-          <p:nvPr/>
-        </p:nvSpPr>
-        <p:spPr>
-          <a:xfrm>
-            <a:off x="1325880" y="2194560"/>
-            <a:ext cx="2926080" cy="777240"/>
-          </a:xfrm>
-          <a:prstGeom prst="rect">
-            <a:avLst/>
-          </a:prstGeom>
-          <a:noFill/>
-          <a:ln/>
-        </p:spPr>
-        <p:txBody>
-          <a:bodyPr wrap="square" lIns="0" tIns="0" rIns="0" bIns="0" rtlCol="0" anchor="t"/>
-          <a:lstStyle/>
-          <a:p>
-            <a:pPr indent="0" marL="0">
-              <a:buNone/>
-            </a:pPr>
-            <a:r>
-              <a:rPr lang="en-US" sz="1200" dirty="0">
-                <a:solidFill>
-                  <a:srgbClr val="48484A"/>
-                </a:solidFill>
-                <a:latin typeface="Arial" pitchFamily="34" charset="0"/>
-                <a:ea typeface="Arial" pitchFamily="34" charset="-122"/>
-                <a:cs typeface="Arial" pitchFamily="34" charset="-120"/>
-              </a:rPr>
-              <a:t>Médicos y profesionales de salud.</a:t>
-            </a:r>
-            <a:endParaRPr lang="en-US" sz="1200" dirty="0"/>
-          </a:p>
-        </p:txBody>
-      </p:sp>
-      <p:sp>
-        <p:nvSpPr>
-          <p:cNvPr id="9" name="Shape 6"/>
-          <p:cNvSpPr/>
-          <p:nvPr/>
-        </p:nvSpPr>
-        <p:spPr>
-          <a:xfrm>
-            <a:off x="4709160" y="1691640"/>
-            <a:ext cx="3931920" cy="1371600"/>
+          <p:cNvPr id="7" name="Shape 4"/>
+          <p:cNvSpPr/>
+          <p:nvPr/>
+        </p:nvSpPr>
+        <p:spPr>
+          <a:xfrm>
+            <a:off x="1280160" y="1737360"/>
+            <a:ext cx="1737360" cy="274320"/>
           </a:xfrm>
           <a:prstGeom prst="roundRect">
             <a:avLst>
-              <a:gd name="adj" fmla="val 6000"/>
+              <a:gd name="adj" fmla="val 50000"/>
+            </a:avLst>
+          </a:prstGeom>
+          <a:solidFill>
+            <a:srgbClr val="EAF3FF"/>
+          </a:solidFill>
+          <a:ln/>
+        </p:spPr>
+      </p:sp>
+      <p:sp>
+        <p:nvSpPr>
+          <p:cNvPr id="8" name="Text 5"/>
+          <p:cNvSpPr/>
+          <p:nvPr/>
+        </p:nvSpPr>
+        <p:spPr>
+          <a:xfrm>
+            <a:off x="1280160" y="1737360"/>
+            <a:ext cx="1737360" cy="274320"/>
+          </a:xfrm>
+          <a:prstGeom prst="rect">
+            <a:avLst/>
+          </a:prstGeom>
+          <a:noFill/>
+          <a:ln/>
+        </p:spPr>
+        <p:txBody>
+          <a:bodyPr wrap="square" lIns="0" tIns="0" rIns="0" bIns="0" rtlCol="0" anchor="ctr"/>
+          <a:lstStyle/>
+          <a:p>
+            <a:pPr algn="ctr" indent="0" marL="0">
+              <a:buNone/>
+            </a:pPr>
+            <a:r>
+              <a:rPr lang="en-US" sz="650" b="1" spc="50" kern="0" dirty="0">
+                <a:solidFill>
+                  <a:srgbClr val="0071E3"/>
+                </a:solidFill>
+                <a:latin typeface="Arial" pitchFamily="34" charset="0"/>
+                <a:ea typeface="Arial" pitchFamily="34" charset="-122"/>
+                <a:cs typeface="Arial" pitchFamily="34" charset="-120"/>
+              </a:rPr>
+              <a:t>B2C · LA PUERTA DE ENTRADA</a:t>
+            </a:r>
+            <a:endParaRPr lang="en-US" sz="650" dirty="0"/>
+          </a:p>
+        </p:txBody>
+      </p:sp>
+      <p:sp>
+        <p:nvSpPr>
+          <p:cNvPr id="9" name="Text 6"/>
+          <p:cNvSpPr/>
+          <p:nvPr/>
+        </p:nvSpPr>
+        <p:spPr>
+          <a:xfrm>
+            <a:off x="731520" y="2212848"/>
+            <a:ext cx="3474720" cy="274320"/>
+          </a:xfrm>
+          <a:prstGeom prst="rect">
+            <a:avLst/>
+          </a:prstGeom>
+          <a:noFill/>
+          <a:ln/>
+        </p:spPr>
+        <p:txBody>
+          <a:bodyPr wrap="square" lIns="0" tIns="0" rIns="0" bIns="0" rtlCol="0" anchor="ctr"/>
+          <a:lstStyle/>
+          <a:p>
+            <a:pPr indent="0" marL="0">
+              <a:buNone/>
+            </a:pPr>
+            <a:r>
+              <a:rPr lang="en-US" sz="1350" b="1" dirty="0">
+                <a:solidFill>
+                  <a:srgbClr val="1D1D1F"/>
+                </a:solidFill>
+                <a:latin typeface="Arial" pitchFamily="34" charset="0"/>
+                <a:ea typeface="Arial" pitchFamily="34" charset="-122"/>
+                <a:cs typeface="Arial" pitchFamily="34" charset="-120"/>
+              </a:rPr>
+              <a:t>El médico adopta</a:t>
+            </a:r>
+            <a:endParaRPr lang="en-US" sz="1350" dirty="0"/>
+          </a:p>
+        </p:txBody>
+      </p:sp>
+      <p:sp>
+        <p:nvSpPr>
+          <p:cNvPr id="10" name="Text 7"/>
+          <p:cNvSpPr/>
+          <p:nvPr/>
+        </p:nvSpPr>
+        <p:spPr>
+          <a:xfrm>
+            <a:off x="731520" y="2542032"/>
+            <a:ext cx="3474720" cy="777240"/>
+          </a:xfrm>
+          <a:prstGeom prst="rect">
+            <a:avLst/>
+          </a:prstGeom>
+          <a:noFill/>
+          <a:ln/>
+        </p:spPr>
+        <p:txBody>
+          <a:bodyPr wrap="square" lIns="0" tIns="0" rIns="0" bIns="0" rtlCol="0" anchor="t"/>
+          <a:lstStyle/>
+          <a:p>
+            <a:pPr marL="342900" indent="-342900">
+              <a:spcAft>
+                <a:spcPts val="500"/>
+              </a:spcAft>
+              <a:buSzPct val="100000"/>
+              <a:buChar char="•"/>
+            </a:pPr>
+            <a:r>
+              <a:rPr lang="en-US" sz="1050" dirty="0">
+                <a:solidFill>
+                  <a:srgbClr val="48484A"/>
+                </a:solidFill>
+                <a:latin typeface="Arial" pitchFamily="34" charset="0"/>
+                <a:ea typeface="Arial" pitchFamily="34" charset="-122"/>
+                <a:cs typeface="Arial" pitchFamily="34" charset="-120"/>
+              </a:rPr>
+              <a:t>Médicos y especialistas independientes</a:t>
+            </a:r>
+            <a:endParaRPr lang="en-US" sz="1050" dirty="0"/>
+          </a:p>
+          <a:p>
+            <a:pPr marL="342900" indent="-342900">
+              <a:spcAft>
+                <a:spcPts val="500"/>
+              </a:spcAft>
+              <a:buSzPct val="100000"/>
+              <a:buChar char="•"/>
+            </a:pPr>
+            <a:r>
+              <a:rPr lang="en-US" sz="1050" dirty="0">
+                <a:solidFill>
+                  <a:srgbClr val="48484A"/>
+                </a:solidFill>
+                <a:latin typeface="Arial" pitchFamily="34" charset="0"/>
+                <a:ea typeface="Arial" pitchFamily="34" charset="-122"/>
+                <a:cs typeface="Arial" pitchFamily="34" charset="-120"/>
+              </a:rPr>
+              <a:t>Consultorios propios</a:t>
+            </a:r>
+            <a:endParaRPr lang="en-US" sz="1050" dirty="0"/>
+          </a:p>
+          <a:p>
+            <a:pPr marL="342900" indent="-342900">
+              <a:buSzPct val="100000"/>
+              <a:buChar char="•"/>
+            </a:pPr>
+            <a:r>
+              <a:rPr lang="en-US" sz="1050" dirty="0">
+                <a:solidFill>
+                  <a:srgbClr val="48484A"/>
+                </a:solidFill>
+                <a:latin typeface="Arial" pitchFamily="34" charset="0"/>
+                <a:ea typeface="Arial" pitchFamily="34" charset="-122"/>
+                <a:cs typeface="Arial" pitchFamily="34" charset="-120"/>
+              </a:rPr>
+              <a:t>Suscripción individual por médico</a:t>
+            </a:r>
+            <a:endParaRPr lang="en-US" sz="1050" dirty="0"/>
+          </a:p>
+        </p:txBody>
+      </p:sp>
+      <p:sp>
+        <p:nvSpPr>
+          <p:cNvPr id="11" name="Shape 8"/>
+          <p:cNvSpPr/>
+          <p:nvPr/>
+        </p:nvSpPr>
+        <p:spPr>
+          <a:xfrm>
+            <a:off x="4709160" y="1463040"/>
+            <a:ext cx="3931920" cy="1965960"/>
+          </a:xfrm>
+          <a:prstGeom prst="roundRect">
+            <a:avLst>
+              <a:gd name="adj" fmla="val 4186"/>
             </a:avLst>
           </a:prstGeom>
           <a:solidFill>
@@ -8231,14 +11692,14 @@
       </p:sp>
       <p:sp>
         <p:nvSpPr>
-          <p:cNvPr id="10" name="Shape 7"/>
-          <p:cNvSpPr/>
-          <p:nvPr/>
-        </p:nvSpPr>
-        <p:spPr>
-          <a:xfrm>
-            <a:off x="4937760" y="1920240"/>
-            <a:ext cx="457200" cy="457200"/>
+          <p:cNvPr id="12" name="Shape 9"/>
+          <p:cNvSpPr/>
+          <p:nvPr/>
+        </p:nvSpPr>
+        <p:spPr>
+          <a:xfrm>
+            <a:off x="4937760" y="1664208"/>
+            <a:ext cx="411480" cy="411480"/>
           </a:xfrm>
           <a:prstGeom prst="ellipse">
             <a:avLst/>
@@ -8251,7 +11712,7 @@
       </p:sp>
       <p:pic>
         <p:nvPicPr>
-          <p:cNvPr id="11" name="Image 1" descr="preencoded.png">    </p:cNvPr>
+          <p:cNvPr id="13" name="Image 1" descr="preencoded.png">    </p:cNvPr>
           <p:cNvPicPr>
             <a:picLocks noChangeAspect="1"/>
           </p:cNvPicPr>
@@ -8265,8 +11726,8 @@
         </p:blipFill>
         <p:spPr>
           <a:xfrm>
-            <a:off x="5001768" y="1984248"/>
-            <a:ext cx="329184" cy="329184"/>
+            <a:off x="4995367" y="1721815"/>
+            <a:ext cx="296266" cy="296266"/>
           </a:xfrm>
           <a:prstGeom prst="rect">
             <a:avLst/>
@@ -8275,14 +11736,36 @@
       </p:pic>
       <p:sp>
         <p:nvSpPr>
-          <p:cNvPr id="12" name="Text 8"/>
-          <p:cNvSpPr/>
-          <p:nvPr/>
-        </p:nvSpPr>
-        <p:spPr>
-          <a:xfrm>
-            <a:off x="5532120" y="1892808"/>
-            <a:ext cx="2926080" cy="274320"/>
+          <p:cNvPr id="14" name="Shape 10"/>
+          <p:cNvSpPr/>
+          <p:nvPr/>
+        </p:nvSpPr>
+        <p:spPr>
+          <a:xfrm>
+            <a:off x="5486400" y="1737360"/>
+            <a:ext cx="1965960" cy="274320"/>
+          </a:xfrm>
+          <a:prstGeom prst="roundRect">
+            <a:avLst>
+              <a:gd name="adj" fmla="val 50000"/>
+            </a:avLst>
+          </a:prstGeom>
+          <a:solidFill>
+            <a:srgbClr val="EAF3FF"/>
+          </a:solidFill>
+          <a:ln/>
+        </p:spPr>
+      </p:sp>
+      <p:sp>
+        <p:nvSpPr>
+          <p:cNvPr id="15" name="Text 11"/>
+          <p:cNvSpPr/>
+          <p:nvPr/>
+        </p:nvSpPr>
+        <p:spPr>
+          <a:xfrm>
+            <a:off x="5486400" y="1737360"/>
+            <a:ext cx="1965960" cy="274320"/>
           </a:xfrm>
           <a:prstGeom prst="rect">
             <a:avLst/>
@@ -8294,6 +11777,45 @@
           <a:bodyPr wrap="square" lIns="0" tIns="0" rIns="0" bIns="0" rtlCol="0" anchor="ctr"/>
           <a:lstStyle/>
           <a:p>
+            <a:pPr algn="ctr" indent="0" marL="0">
+              <a:buNone/>
+            </a:pPr>
+            <a:r>
+              <a:rPr lang="en-US" sz="650" b="1" spc="50" kern="0" dirty="0">
+                <a:solidFill>
+                  <a:srgbClr val="0071E3"/>
+                </a:solidFill>
+                <a:latin typeface="Arial" pitchFamily="34" charset="0"/>
+                <a:ea typeface="Arial" pitchFamily="34" charset="-122"/>
+                <a:cs typeface="Arial" pitchFamily="34" charset="-120"/>
+              </a:rPr>
+              <a:t>B2B · EL MOTOR DE EXPANSIÓN</a:t>
+            </a:r>
+            <a:endParaRPr lang="en-US" sz="650" dirty="0"/>
+          </a:p>
+        </p:txBody>
+      </p:sp>
+      <p:sp>
+        <p:nvSpPr>
+          <p:cNvPr id="16" name="Text 12"/>
+          <p:cNvSpPr/>
+          <p:nvPr/>
+        </p:nvSpPr>
+        <p:spPr>
+          <a:xfrm>
+            <a:off x="4937760" y="2212848"/>
+            <a:ext cx="3474720" cy="274320"/>
+          </a:xfrm>
+          <a:prstGeom prst="rect">
+            <a:avLst/>
+          </a:prstGeom>
+          <a:noFill/>
+          <a:ln/>
+        </p:spPr>
+        <p:txBody>
+          <a:bodyPr wrap="square" lIns="0" tIns="0" rIns="0" bIns="0" rtlCol="0" anchor="ctr"/>
+          <a:lstStyle/>
+          <a:p>
             <a:pPr indent="0" marL="0">
               <a:buNone/>
             </a:pPr>
@@ -8306,7 +11828,7 @@
                 <a:ea typeface="Arial" pitchFamily="34" charset="-122"/>
                 <a:cs typeface="Arial" pitchFamily="34" charset="-120"/>
               </a:rPr>
-              <a:t>Comprador</a:t>
+              <a:t>La institución escala</a:t>
             </a:r>
             <a:endParaRPr lang="en-US" sz="1350" dirty="0"/>
           </a:p>
@@ -8314,14 +11836,14 @@
       </p:sp>
       <p:sp>
         <p:nvSpPr>
-          <p:cNvPr id="13" name="Text 9"/>
-          <p:cNvSpPr/>
-          <p:nvPr/>
-        </p:nvSpPr>
-        <p:spPr>
-          <a:xfrm>
-            <a:off x="5532120" y="2194560"/>
-            <a:ext cx="2926080" cy="777240"/>
+          <p:cNvPr id="17" name="Text 13"/>
+          <p:cNvSpPr/>
+          <p:nvPr/>
+        </p:nvSpPr>
+        <p:spPr>
+          <a:xfrm>
+            <a:off x="4937760" y="2542032"/>
+            <a:ext cx="3474720" cy="777240"/>
           </a:xfrm>
           <a:prstGeom prst="rect">
             <a:avLst/>
@@ -8333,11 +11855,15 @@
           <a:bodyPr wrap="square" lIns="0" tIns="0" rIns="0" bIns="0" rtlCol="0" anchor="t"/>
           <a:lstStyle/>
           <a:p>
-            <a:pPr indent="0" marL="0">
-              <a:buNone/>
-            </a:pPr>
-            <a:r>
-              <a:rPr lang="en-US" sz="1200" dirty="0">
+            <a:pPr marL="342900" indent="-342900">
+              <a:spcAft>
+                <a:spcPts val="500"/>
+              </a:spcAft>
+              <a:buSzPct val="100000"/>
+              <a:buChar char="•"/>
+            </a:pPr>
+            <a:r>
+              <a:rPr lang="en-US" sz="1050" dirty="0">
                 <a:solidFill>
                   <a:srgbClr val="48484A"/>
                 </a:solidFill>
@@ -8345,61 +11871,61 @@
                 <a:ea typeface="Arial" pitchFamily="34" charset="-122"/>
                 <a:cs typeface="Arial" pitchFamily="34" charset="-120"/>
               </a:rPr>
-              <a:t>Clínicas, IPS, consultorios, directores médicos y gerentes administrativos.</a:t>
-            </a:r>
-            <a:endParaRPr lang="en-US" sz="1200" dirty="0"/>
-          </a:p>
-        </p:txBody>
-      </p:sp>
-      <p:sp>
-        <p:nvSpPr>
-          <p:cNvPr id="14" name="Text 10"/>
-          <p:cNvSpPr/>
-          <p:nvPr/>
-        </p:nvSpPr>
-        <p:spPr>
-          <a:xfrm>
-            <a:off x="502920" y="3337560"/>
-            <a:ext cx="8138160" cy="274320"/>
-          </a:xfrm>
-          <a:prstGeom prst="rect">
-            <a:avLst/>
-          </a:prstGeom>
-          <a:noFill/>
-          <a:ln/>
-        </p:spPr>
-        <p:txBody>
-          <a:bodyPr wrap="square" lIns="0" tIns="0" rIns="0" bIns="0" rtlCol="0" anchor="ctr"/>
-          <a:lstStyle/>
-          <a:p>
-            <a:pPr indent="0" marL="0">
-              <a:buNone/>
-            </a:pPr>
-            <a:r>
-              <a:rPr lang="en-US" sz="1000" b="1" spc="150" kern="0" dirty="0">
-                <a:solidFill>
-                  <a:srgbClr val="6E6E73"/>
-                </a:solidFill>
-                <a:latin typeface="Arial" pitchFamily="34" charset="0"/>
-                <a:ea typeface="Arial" pitchFamily="34" charset="-122"/>
-                <a:cs typeface="Arial" pitchFamily="34" charset="-120"/>
-              </a:rPr>
-              <a:t>PRIMEROS SEGMENTOS</a:t>
-            </a:r>
-            <a:endParaRPr lang="en-US" sz="1000" dirty="0"/>
-          </a:p>
-        </p:txBody>
-      </p:sp>
-      <p:sp>
-        <p:nvSpPr>
-          <p:cNvPr id="15" name="Shape 11"/>
-          <p:cNvSpPr/>
-          <p:nvPr/>
-        </p:nvSpPr>
-        <p:spPr>
-          <a:xfrm>
-            <a:off x="502920" y="3657600"/>
-            <a:ext cx="1805940" cy="384048"/>
+              <a:t>Clínicas, IPS y centros médicos</a:t>
+            </a:r>
+            <a:endParaRPr lang="en-US" sz="1050" dirty="0"/>
+          </a:p>
+          <a:p>
+            <a:pPr marL="342900" indent="-342900">
+              <a:spcAft>
+                <a:spcPts val="500"/>
+              </a:spcAft>
+              <a:buSzPct val="100000"/>
+              <a:buChar char="•"/>
+            </a:pPr>
+            <a:r>
+              <a:rPr lang="en-US" sz="1050" dirty="0">
+                <a:solidFill>
+                  <a:srgbClr val="48484A"/>
+                </a:solidFill>
+                <a:latin typeface="Arial" pitchFamily="34" charset="0"/>
+                <a:ea typeface="Arial" pitchFamily="34" charset="-122"/>
+                <a:cs typeface="Arial" pitchFamily="34" charset="-120"/>
+              </a:rPr>
+              <a:t>Administración de equipos y visibilidad de la documentación</a:t>
+            </a:r>
+            <a:endParaRPr lang="en-US" sz="1050" dirty="0"/>
+          </a:p>
+          <a:p>
+            <a:pPr marL="342900" indent="-342900">
+              <a:buSzPct val="100000"/>
+              <a:buChar char="•"/>
+            </a:pPr>
+            <a:r>
+              <a:rPr lang="en-US" sz="1050" dirty="0">
+                <a:solidFill>
+                  <a:srgbClr val="48484A"/>
+                </a:solidFill>
+                <a:latin typeface="Arial" pitchFamily="34" charset="0"/>
+                <a:ea typeface="Arial" pitchFamily="34" charset="-122"/>
+                <a:cs typeface="Arial" pitchFamily="34" charset="-120"/>
+              </a:rPr>
+              <a:t>Directores médicos y gerentes aprueban la compra</a:t>
+            </a:r>
+            <a:endParaRPr lang="en-US" sz="1050" dirty="0"/>
+          </a:p>
+        </p:txBody>
+      </p:sp>
+      <p:sp>
+        <p:nvSpPr>
+          <p:cNvPr id="18" name="Shape 14"/>
+          <p:cNvSpPr/>
+          <p:nvPr/>
+        </p:nvSpPr>
+        <p:spPr>
+          <a:xfrm>
+            <a:off x="502920" y="3639312"/>
+            <a:ext cx="1748333" cy="365760"/>
           </a:xfrm>
           <a:prstGeom prst="roundRect">
             <a:avLst>
@@ -8419,14 +11945,14 @@
       </p:sp>
       <p:sp>
         <p:nvSpPr>
-          <p:cNvPr id="16" name="Text 12"/>
-          <p:cNvSpPr/>
-          <p:nvPr/>
-        </p:nvSpPr>
-        <p:spPr>
-          <a:xfrm>
-            <a:off x="502920" y="3657600"/>
-            <a:ext cx="1805940" cy="384048"/>
+          <p:cNvPr id="19" name="Text 15"/>
+          <p:cNvSpPr/>
+          <p:nvPr/>
+        </p:nvSpPr>
+        <p:spPr>
+          <a:xfrm>
+            <a:off x="502920" y="3639312"/>
+            <a:ext cx="1748333" cy="365760"/>
           </a:xfrm>
           <a:prstGeom prst="rect">
             <a:avLst/>
@@ -8442,7 +11968,7 @@
               <a:buNone/>
             </a:pPr>
             <a:r>
-              <a:rPr lang="en-US" sz="1050" b="1" dirty="0">
+              <a:rPr lang="en-US" sz="950" b="1" dirty="0">
                 <a:solidFill>
                   <a:srgbClr val="0A3D91"/>
                 </a:solidFill>
@@ -8452,20 +11978,20 @@
               </a:rPr>
               <a:t>Consultorios privados</a:t>
             </a:r>
-            <a:endParaRPr lang="en-US" sz="1050" dirty="0"/>
-          </a:p>
-        </p:txBody>
-      </p:sp>
-      <p:sp>
-        <p:nvSpPr>
-          <p:cNvPr id="17" name="Shape 13"/>
-          <p:cNvSpPr/>
-          <p:nvPr/>
-        </p:nvSpPr>
-        <p:spPr>
-          <a:xfrm>
-            <a:off x="2473452" y="3657600"/>
-            <a:ext cx="2286000" cy="384048"/>
+            <a:endParaRPr lang="en-US" sz="950" dirty="0"/>
+          </a:p>
+        </p:txBody>
+      </p:sp>
+      <p:sp>
+        <p:nvSpPr>
+          <p:cNvPr id="20" name="Shape 16"/>
+          <p:cNvSpPr/>
+          <p:nvPr/>
+        </p:nvSpPr>
+        <p:spPr>
+          <a:xfrm>
+            <a:off x="2397557" y="3639312"/>
+            <a:ext cx="2209190" cy="365760"/>
           </a:xfrm>
           <a:prstGeom prst="roundRect">
             <a:avLst>
@@ -8485,14 +12011,14 @@
       </p:sp>
       <p:sp>
         <p:nvSpPr>
-          <p:cNvPr id="18" name="Text 14"/>
-          <p:cNvSpPr/>
-          <p:nvPr/>
-        </p:nvSpPr>
-        <p:spPr>
-          <a:xfrm>
-            <a:off x="2473452" y="3657600"/>
-            <a:ext cx="2286000" cy="384048"/>
+          <p:cNvPr id="21" name="Text 17"/>
+          <p:cNvSpPr/>
+          <p:nvPr/>
+        </p:nvSpPr>
+        <p:spPr>
+          <a:xfrm>
+            <a:off x="2397557" y="3639312"/>
+            <a:ext cx="2209190" cy="365760"/>
           </a:xfrm>
           <a:prstGeom prst="rect">
             <a:avLst/>
@@ -8508,7 +12034,7 @@
               <a:buNone/>
             </a:pPr>
             <a:r>
-              <a:rPr lang="en-US" sz="1050" b="1" dirty="0">
+              <a:rPr lang="en-US" sz="950" b="1" dirty="0">
                 <a:solidFill>
                   <a:srgbClr val="0A3D91"/>
                 </a:solidFill>
@@ -8518,20 +12044,20 @@
               </a:rPr>
               <a:t>Clínicas pequeñas y medianas</a:t>
             </a:r>
-            <a:endParaRPr lang="en-US" sz="1050" dirty="0"/>
-          </a:p>
-        </p:txBody>
-      </p:sp>
-      <p:sp>
-        <p:nvSpPr>
-          <p:cNvPr id="19" name="Shape 15"/>
-          <p:cNvSpPr/>
-          <p:nvPr/>
-        </p:nvSpPr>
-        <p:spPr>
-          <a:xfrm>
-            <a:off x="4924044" y="3657600"/>
-            <a:ext cx="1668780" cy="384048"/>
+            <a:endParaRPr lang="en-US" sz="950" dirty="0"/>
+          </a:p>
+        </p:txBody>
+      </p:sp>
+      <p:sp>
+        <p:nvSpPr>
+          <p:cNvPr id="22" name="Shape 18"/>
+          <p:cNvSpPr/>
+          <p:nvPr/>
+        </p:nvSpPr>
+        <p:spPr>
+          <a:xfrm>
+            <a:off x="4753051" y="3639312"/>
+            <a:ext cx="1616659" cy="365760"/>
           </a:xfrm>
           <a:prstGeom prst="roundRect">
             <a:avLst>
@@ -8551,14 +12077,14 @@
       </p:sp>
       <p:sp>
         <p:nvSpPr>
-          <p:cNvPr id="20" name="Text 16"/>
-          <p:cNvSpPr/>
-          <p:nvPr/>
-        </p:nvSpPr>
-        <p:spPr>
-          <a:xfrm>
-            <a:off x="4924044" y="3657600"/>
-            <a:ext cx="1668780" cy="384048"/>
+          <p:cNvPr id="23" name="Text 19"/>
+          <p:cNvSpPr/>
+          <p:nvPr/>
+        </p:nvSpPr>
+        <p:spPr>
+          <a:xfrm>
+            <a:off x="4753051" y="3639312"/>
+            <a:ext cx="1616659" cy="365760"/>
           </a:xfrm>
           <a:prstGeom prst="rect">
             <a:avLst/>
@@ -8574,7 +12100,7 @@
               <a:buNone/>
             </a:pPr>
             <a:r>
-              <a:rPr lang="en-US" sz="1050" b="1" dirty="0">
+              <a:rPr lang="en-US" sz="950" b="1" dirty="0">
                 <a:solidFill>
                   <a:srgbClr val="0A3D91"/>
                 </a:solidFill>
@@ -8584,20 +12110,20 @@
               </a:rPr>
               <a:t>IPS de alto volumen</a:t>
             </a:r>
-            <a:endParaRPr lang="en-US" sz="1050" dirty="0"/>
-          </a:p>
-        </p:txBody>
-      </p:sp>
-      <p:sp>
-        <p:nvSpPr>
-          <p:cNvPr id="21" name="Shape 17"/>
-          <p:cNvSpPr/>
-          <p:nvPr/>
-        </p:nvSpPr>
-        <p:spPr>
-          <a:xfrm>
-            <a:off x="502920" y="4178808"/>
-            <a:ext cx="3246120" cy="384048"/>
+            <a:endParaRPr lang="en-US" sz="950" dirty="0"/>
+          </a:p>
+        </p:txBody>
+      </p:sp>
+      <p:sp>
+        <p:nvSpPr>
+          <p:cNvPr id="24" name="Shape 20"/>
+          <p:cNvSpPr/>
+          <p:nvPr/>
+        </p:nvSpPr>
+        <p:spPr>
+          <a:xfrm>
+            <a:off x="502920" y="4133088"/>
+            <a:ext cx="3130906" cy="365760"/>
           </a:xfrm>
           <a:prstGeom prst="roundRect">
             <a:avLst>
@@ -8617,14 +12143,14 @@
       </p:sp>
       <p:sp>
         <p:nvSpPr>
-          <p:cNvPr id="22" name="Text 18"/>
-          <p:cNvSpPr/>
-          <p:nvPr/>
-        </p:nvSpPr>
-        <p:spPr>
-          <a:xfrm>
-            <a:off x="502920" y="4178808"/>
-            <a:ext cx="3246120" cy="384048"/>
+          <p:cNvPr id="25" name="Text 21"/>
+          <p:cNvSpPr/>
+          <p:nvPr/>
+        </p:nvSpPr>
+        <p:spPr>
+          <a:xfrm>
+            <a:off x="502920" y="4133088"/>
+            <a:ext cx="3130906" cy="365760"/>
           </a:xfrm>
           <a:prstGeom prst="rect">
             <a:avLst/>
@@ -8640,7 +12166,7 @@
               <a:buNone/>
             </a:pPr>
             <a:r>
-              <a:rPr lang="en-US" sz="1050" b="1" dirty="0">
+              <a:rPr lang="en-US" sz="950" b="1" dirty="0">
                 <a:solidFill>
                   <a:srgbClr val="0A3D91"/>
                 </a:solidFill>
@@ -8650,7 +12176,46 @@
               </a:rPr>
               <a:t>Especialistas con documentación repetitiva</a:t>
             </a:r>
-            <a:endParaRPr lang="en-US" sz="1050" dirty="0"/>
+            <a:endParaRPr lang="en-US" sz="950" dirty="0"/>
+          </a:p>
+        </p:txBody>
+      </p:sp>
+      <p:sp>
+        <p:nvSpPr>
+          <p:cNvPr id="26" name="Text 22"/>
+          <p:cNvSpPr/>
+          <p:nvPr/>
+        </p:nvSpPr>
+        <p:spPr>
+          <a:xfrm>
+            <a:off x="502920" y="4434840"/>
+            <a:ext cx="8138160" cy="457200"/>
+          </a:xfrm>
+          <a:prstGeom prst="rect">
+            <a:avLst/>
+          </a:prstGeom>
+          <a:noFill/>
+          <a:ln/>
+        </p:spPr>
+        <p:txBody>
+          <a:bodyPr wrap="square" lIns="0" tIns="0" rIns="0" bIns="0" rtlCol="0" anchor="ctr"/>
+          <a:lstStyle/>
+          <a:p>
+            <a:pPr indent="0" marL="0">
+              <a:buNone/>
+            </a:pPr>
+            <a:r>
+              <a:rPr lang="en-US" sz="1250" b="1" i="1" dirty="0">
+                <a:solidFill>
+                  <a:srgbClr val="0A3D91"/>
+                </a:solidFill>
+                <a:latin typeface="Arial" pitchFamily="34" charset="0"/>
+                <a:ea typeface="Arial" pitchFamily="34" charset="-122"/>
+                <a:cs typeface="Arial" pitchFamily="34" charset="-120"/>
+              </a:rPr>
+              <a:t>La adopción individual abre la puerta. El contrato institucional escala el ingreso.</a:t>
+            </a:r>
+            <a:endParaRPr lang="en-US" sz="1250" dirty="0"/>
           </a:p>
         </p:txBody>
       </p:sp>
@@ -8694,7 +12259,7 @@
         </p:nvSpPr>
         <p:spPr>
           <a:xfrm>
-            <a:off x="502920" y="365760"/>
+            <a:off x="502920" y="320040"/>
             <a:ext cx="8138160" cy="274320"/>
           </a:xfrm>
           <a:prstGeom prst="rect">
@@ -8758,7 +12323,35 @@
                 <a:ea typeface="Arial" pitchFamily="34" charset="-122"/>
                 <a:cs typeface="Arial" pitchFamily="34" charset="-120"/>
               </a:rPr>
-              <a:t>Ingresos recurrentes por uso médico e institucional.</a:t>
+              <a:t>Cada médico y cada clínica generan </a:t>
+            </a:r>
+            <a:pPr indent="0" marL="0">
+              <a:buNone/>
+            </a:pPr>
+            <a:r>
+              <a:rPr lang="en-US" sz="2100" b="1" dirty="0">
+                <a:solidFill>
+                  <a:srgbClr val="0A3D91"/>
+                </a:solidFill>
+                <a:latin typeface="Arial" pitchFamily="34" charset="0"/>
+                <a:ea typeface="Arial" pitchFamily="34" charset="-122"/>
+                <a:cs typeface="Arial" pitchFamily="34" charset="-120"/>
+              </a:rPr>
+              <a:t>ingreso recurrente</a:t>
+            </a:r>
+            <a:pPr indent="0" marL="0">
+              <a:buNone/>
+            </a:pPr>
+            <a:r>
+              <a:rPr lang="en-US" sz="2100" b="1" dirty="0">
+                <a:solidFill>
+                  <a:srgbClr val="1D1D1F"/>
+                </a:solidFill>
+                <a:latin typeface="Arial" pitchFamily="34" charset="0"/>
+                <a:ea typeface="Arial" pitchFamily="34" charset="-122"/>
+                <a:cs typeface="Arial" pitchFamily="34" charset="-120"/>
+              </a:rPr>
+              <a:t>.</a:t>
             </a:r>
             <a:endParaRPr lang="en-US" sz="2100" dirty="0"/>
           </a:p>
@@ -8772,12 +12365,12 @@
         </p:nvSpPr>
         <p:spPr>
           <a:xfrm>
-            <a:off x="502920" y="1600200"/>
-            <a:ext cx="1863090" cy="2011680"/>
+            <a:off x="502920" y="1691640"/>
+            <a:ext cx="2529840" cy="2011680"/>
           </a:xfrm>
           <a:prstGeom prst="roundRect">
             <a:avLst>
-              <a:gd name="adj" fmla="val 4417"/>
+              <a:gd name="adj" fmla="val 4091"/>
             </a:avLst>
           </a:prstGeom>
           <a:solidFill>
@@ -8806,8 +12399,8 @@
         </p:nvSpPr>
         <p:spPr>
           <a:xfrm>
-            <a:off x="1160145" y="1828800"/>
-            <a:ext cx="548640" cy="548640"/>
+            <a:off x="1475232" y="1947672"/>
+            <a:ext cx="585216" cy="585216"/>
           </a:xfrm>
           <a:prstGeom prst="ellipse">
             <a:avLst/>
@@ -8834,8 +12427,8 @@
         </p:blipFill>
         <p:spPr>
           <a:xfrm>
-            <a:off x="1236955" y="1905610"/>
-            <a:ext cx="395021" cy="395021"/>
+            <a:off x="1557162" y="2029602"/>
+            <a:ext cx="421356" cy="421356"/>
           </a:xfrm>
           <a:prstGeom prst="rect">
             <a:avLst/>
@@ -8850,8 +12443,8 @@
         </p:nvSpPr>
         <p:spPr>
           <a:xfrm>
-            <a:off x="612648" y="2514600"/>
-            <a:ext cx="1643634" cy="502920"/>
+            <a:off x="612648" y="2679192"/>
+            <a:ext cx="2310384" cy="365760"/>
           </a:xfrm>
           <a:prstGeom prst="rect">
             <a:avLst/>
@@ -8867,7 +12460,7 @@
               <a:buNone/>
             </a:pPr>
             <a:r>
-              <a:rPr lang="en-US" sz="1150" b="1" dirty="0">
+              <a:rPr lang="en-US" sz="1300" b="1" dirty="0">
                 <a:solidFill>
                   <a:srgbClr val="1D1D1F"/>
                 </a:solidFill>
@@ -8877,7 +12470,7 @@
               </a:rPr>
               <a:t>Piloto pago</a:t>
             </a:r>
-            <a:endParaRPr lang="en-US" sz="1150" dirty="0"/>
+            <a:endParaRPr lang="en-US" sz="1300" dirty="0"/>
           </a:p>
         </p:txBody>
       </p:sp>
@@ -8889,8 +12482,8 @@
         </p:nvSpPr>
         <p:spPr>
           <a:xfrm>
-            <a:off x="612648" y="3017520"/>
-            <a:ext cx="1643634" cy="502920"/>
+            <a:off x="612648" y="3063240"/>
+            <a:ext cx="2310384" cy="365760"/>
           </a:xfrm>
           <a:prstGeom prst="rect">
             <a:avLst/>
@@ -8906,7 +12499,7 @@
               <a:buNone/>
             </a:pPr>
             <a:r>
-              <a:rPr lang="en-US" sz="1000" dirty="0">
+              <a:rPr lang="en-US" sz="1050" dirty="0">
                 <a:solidFill>
                   <a:srgbClr val="6E6E73"/>
                 </a:solidFill>
@@ -8916,7 +12509,7 @@
               </a:rPr>
               <a:t>Por clínica o consultorio.</a:t>
             </a:r>
-            <a:endParaRPr lang="en-US" sz="1000" dirty="0"/>
+            <a:endParaRPr lang="en-US" sz="1050" dirty="0"/>
           </a:p>
         </p:txBody>
       </p:sp>
@@ -8928,12 +12521,12 @@
         </p:nvSpPr>
         <p:spPr>
           <a:xfrm>
-            <a:off x="2594610" y="1600200"/>
-            <a:ext cx="1863090" cy="2011680"/>
+            <a:off x="3307080" y="1691640"/>
+            <a:ext cx="2529840" cy="2011680"/>
           </a:xfrm>
           <a:prstGeom prst="roundRect">
             <a:avLst>
-              <a:gd name="adj" fmla="val 4417"/>
+              <a:gd name="adj" fmla="val 4091"/>
             </a:avLst>
           </a:prstGeom>
           <a:solidFill>
@@ -8962,8 +12555,8 @@
         </p:nvSpPr>
         <p:spPr>
           <a:xfrm>
-            <a:off x="3251835" y="1828800"/>
-            <a:ext cx="548640" cy="548640"/>
+            <a:off x="4279392" y="1947672"/>
+            <a:ext cx="585216" cy="585216"/>
           </a:xfrm>
           <a:prstGeom prst="ellipse">
             <a:avLst/>
@@ -8990,8 +12583,8 @@
         </p:blipFill>
         <p:spPr>
           <a:xfrm>
-            <a:off x="3328645" y="1905610"/>
-            <a:ext cx="395021" cy="395021"/>
+            <a:off x="4361322" y="2029602"/>
+            <a:ext cx="421356" cy="421356"/>
           </a:xfrm>
           <a:prstGeom prst="rect">
             <a:avLst/>
@@ -9006,8 +12599,8 @@
         </p:nvSpPr>
         <p:spPr>
           <a:xfrm>
-            <a:off x="2704338" y="2514600"/>
-            <a:ext cx="1643634" cy="502920"/>
+            <a:off x="3416808" y="2679192"/>
+            <a:ext cx="2310384" cy="365760"/>
           </a:xfrm>
           <a:prstGeom prst="rect">
             <a:avLst/>
@@ -9023,7 +12616,7 @@
               <a:buNone/>
             </a:pPr>
             <a:r>
-              <a:rPr lang="en-US" sz="1150" b="1" dirty="0">
+              <a:rPr lang="en-US" sz="1300" b="1" dirty="0">
                 <a:solidFill>
                   <a:srgbClr val="1D1D1F"/>
                 </a:solidFill>
@@ -9033,7 +12626,7 @@
               </a:rPr>
               <a:t>Suscripción mensual</a:t>
             </a:r>
-            <a:endParaRPr lang="en-US" sz="1150" dirty="0"/>
+            <a:endParaRPr lang="en-US" sz="1300" dirty="0"/>
           </a:p>
         </p:txBody>
       </p:sp>
@@ -9045,8 +12638,8 @@
         </p:nvSpPr>
         <p:spPr>
           <a:xfrm>
-            <a:off x="2704338" y="3017520"/>
-            <a:ext cx="1643634" cy="502920"/>
+            <a:off x="3416808" y="3063240"/>
+            <a:ext cx="2310384" cy="365760"/>
           </a:xfrm>
           <a:prstGeom prst="rect">
             <a:avLst/>
@@ -9062,7 +12655,7 @@
               <a:buNone/>
             </a:pPr>
             <a:r>
-              <a:rPr lang="en-US" sz="1000" dirty="0">
+              <a:rPr lang="en-US" sz="1050" dirty="0">
                 <a:solidFill>
                   <a:srgbClr val="6E6E73"/>
                 </a:solidFill>
@@ -9072,7 +12665,7 @@
               </a:rPr>
               <a:t>Por médico.</a:t>
             </a:r>
-            <a:endParaRPr lang="en-US" sz="1000" dirty="0"/>
+            <a:endParaRPr lang="en-US" sz="1050" dirty="0"/>
           </a:p>
         </p:txBody>
       </p:sp>
@@ -9084,12 +12677,12 @@
         </p:nvSpPr>
         <p:spPr>
           <a:xfrm>
-            <a:off x="4686300" y="1600200"/>
-            <a:ext cx="1863090" cy="2011680"/>
+            <a:off x="6111240" y="1691640"/>
+            <a:ext cx="2529840" cy="2011680"/>
           </a:xfrm>
           <a:prstGeom prst="roundRect">
             <a:avLst>
-              <a:gd name="adj" fmla="val 4417"/>
+              <a:gd name="adj" fmla="val 4091"/>
             </a:avLst>
           </a:prstGeom>
           <a:solidFill>
@@ -9118,8 +12711,8 @@
         </p:nvSpPr>
         <p:spPr>
           <a:xfrm>
-            <a:off x="5343525" y="1828800"/>
-            <a:ext cx="548640" cy="548640"/>
+            <a:off x="7083552" y="1947672"/>
+            <a:ext cx="585216" cy="585216"/>
           </a:xfrm>
           <a:prstGeom prst="ellipse">
             <a:avLst/>
@@ -9146,8 +12739,8 @@
         </p:blipFill>
         <p:spPr>
           <a:xfrm>
-            <a:off x="5420335" y="1905610"/>
-            <a:ext cx="395021" cy="395021"/>
+            <a:off x="7165482" y="2029602"/>
+            <a:ext cx="421356" cy="421356"/>
           </a:xfrm>
           <a:prstGeom prst="rect">
             <a:avLst/>
@@ -9162,8 +12755,8 @@
         </p:nvSpPr>
         <p:spPr>
           <a:xfrm>
-            <a:off x="4796028" y="2514600"/>
-            <a:ext cx="1643634" cy="502920"/>
+            <a:off x="6220968" y="2679192"/>
+            <a:ext cx="2310384" cy="365760"/>
           </a:xfrm>
           <a:prstGeom prst="rect">
             <a:avLst/>
@@ -9179,7 +12772,7 @@
               <a:buNone/>
             </a:pPr>
             <a:r>
-              <a:rPr lang="en-US" sz="1150" b="1" dirty="0">
+              <a:rPr lang="en-US" sz="1300" b="1" dirty="0">
                 <a:solidFill>
                   <a:srgbClr val="1D1D1F"/>
                 </a:solidFill>
@@ -9189,7 +12782,7 @@
               </a:rPr>
               <a:t>Plan institucional</a:t>
             </a:r>
-            <a:endParaRPr lang="en-US" sz="1150" dirty="0"/>
+            <a:endParaRPr lang="en-US" sz="1300" dirty="0"/>
           </a:p>
         </p:txBody>
       </p:sp>
@@ -9201,8 +12794,8 @@
         </p:nvSpPr>
         <p:spPr>
           <a:xfrm>
-            <a:off x="4796028" y="3017520"/>
-            <a:ext cx="1643634" cy="502920"/>
+            <a:off x="6220968" y="3063240"/>
+            <a:ext cx="2310384" cy="365760"/>
           </a:xfrm>
           <a:prstGeom prst="rect">
             <a:avLst/>
@@ -9218,7 +12811,7 @@
               <a:buNone/>
             </a:pPr>
             <a:r>
-              <a:rPr lang="en-US" sz="1000" dirty="0">
+              <a:rPr lang="en-US" sz="1050" dirty="0">
                 <a:solidFill>
                   <a:srgbClr val="6E6E73"/>
                 </a:solidFill>
@@ -9228,169 +12821,13 @@
               </a:rPr>
               <a:t>Por número de usuarios.</a:t>
             </a:r>
-            <a:endParaRPr lang="en-US" sz="1000" dirty="0"/>
-          </a:p>
-        </p:txBody>
-      </p:sp>
-      <p:sp>
-        <p:nvSpPr>
-          <p:cNvPr id="19" name="Shape 14"/>
-          <p:cNvSpPr/>
-          <p:nvPr/>
-        </p:nvSpPr>
-        <p:spPr>
-          <a:xfrm>
-            <a:off x="6777990" y="1600200"/>
-            <a:ext cx="1863090" cy="2011680"/>
-          </a:xfrm>
-          <a:prstGeom prst="roundRect">
-            <a:avLst>
-              <a:gd name="adj" fmla="val 4417"/>
-            </a:avLst>
-          </a:prstGeom>
-          <a:solidFill>
-            <a:srgbClr val="FFFFFF"/>
-          </a:solidFill>
-          <a:ln w="9525">
-            <a:solidFill>
-              <a:srgbClr val="E2E2E6"/>
-            </a:solidFill>
-            <a:prstDash val="solid"/>
-          </a:ln>
-          <a:effectLst>
-            <a:outerShdw sx="100000" sy="100000" kx="0" ky="0" algn="bl" rotWithShape="0" blurRad="101600" dist="25400" dir="5400000">
-              <a:srgbClr val="0A3D91">
-                <a:alpha val="7000"/>
-              </a:srgbClr>
-            </a:outerShdw>
-          </a:effectLst>
-        </p:spPr>
-      </p:sp>
-      <p:sp>
-        <p:nvSpPr>
-          <p:cNvPr id="20" name="Shape 15"/>
-          <p:cNvSpPr/>
-          <p:nvPr/>
-        </p:nvSpPr>
-        <p:spPr>
-          <a:xfrm>
-            <a:off x="7435215" y="1828800"/>
-            <a:ext cx="548640" cy="548640"/>
-          </a:xfrm>
-          <a:prstGeom prst="ellipse">
-            <a:avLst/>
-          </a:prstGeom>
-          <a:solidFill>
-            <a:srgbClr val="EAF3FF"/>
-          </a:solidFill>
-          <a:ln/>
-        </p:spPr>
-      </p:sp>
-      <p:pic>
-        <p:nvPicPr>
-          <p:cNvPr id="21" name="Image 3" descr="preencoded.png">    </p:cNvPr>
-          <p:cNvPicPr>
-            <a:picLocks noChangeAspect="1"/>
-          </p:cNvPicPr>
-          <p:nvPr/>
-        </p:nvPicPr>
-        <p:blipFill>
-          <a:blip r:embed="rId4"/>
-          <a:stretch>
-            <a:fillRect/>
-          </a:stretch>
-        </p:blipFill>
-        <p:spPr>
-          <a:xfrm>
-            <a:off x="7512025" y="1905610"/>
-            <a:ext cx="395021" cy="395021"/>
-          </a:xfrm>
-          <a:prstGeom prst="rect">
-            <a:avLst/>
-          </a:prstGeom>
-        </p:spPr>
-      </p:pic>
-      <p:sp>
-        <p:nvSpPr>
-          <p:cNvPr id="22" name="Text 16"/>
-          <p:cNvSpPr/>
-          <p:nvPr/>
-        </p:nvSpPr>
-        <p:spPr>
-          <a:xfrm>
-            <a:off x="6887718" y="2514600"/>
-            <a:ext cx="1643634" cy="502920"/>
-          </a:xfrm>
-          <a:prstGeom prst="rect">
-            <a:avLst/>
-          </a:prstGeom>
-          <a:noFill/>
-          <a:ln/>
-        </p:spPr>
-        <p:txBody>
-          <a:bodyPr wrap="square" lIns="0" tIns="0" rIns="0" bIns="0" rtlCol="0" anchor="t"/>
-          <a:lstStyle/>
-          <a:p>
-            <a:pPr algn="ctr" indent="0" marL="0">
-              <a:buNone/>
-            </a:pPr>
-            <a:r>
-              <a:rPr lang="en-US" sz="1150" b="1" dirty="0">
-                <a:solidFill>
-                  <a:srgbClr val="1D1D1F"/>
-                </a:solidFill>
-                <a:latin typeface="Arial" pitchFamily="34" charset="0"/>
-                <a:ea typeface="Arial" pitchFamily="34" charset="-122"/>
-                <a:cs typeface="Arial" pitchFamily="34" charset="-120"/>
-              </a:rPr>
-              <a:t>Implementación y soporte</a:t>
-            </a:r>
-            <a:endParaRPr lang="en-US" sz="1150" dirty="0"/>
-          </a:p>
-        </p:txBody>
-      </p:sp>
-      <p:sp>
-        <p:nvSpPr>
-          <p:cNvPr id="23" name="Text 17"/>
-          <p:cNvSpPr/>
-          <p:nvPr/>
-        </p:nvSpPr>
-        <p:spPr>
-          <a:xfrm>
-            <a:off x="6887718" y="3017520"/>
-            <a:ext cx="1643634" cy="502920"/>
-          </a:xfrm>
-          <a:prstGeom prst="rect">
-            <a:avLst/>
-          </a:prstGeom>
-          <a:noFill/>
-          <a:ln/>
-        </p:spPr>
-        <p:txBody>
-          <a:bodyPr wrap="square" lIns="0" tIns="0" rIns="0" bIns="0" rtlCol="0" anchor="t"/>
-          <a:lstStyle/>
-          <a:p>
-            <a:pPr algn="ctr" indent="0" marL="0">
-              <a:buNone/>
-            </a:pPr>
-            <a:r>
-              <a:rPr lang="en-US" sz="1000" dirty="0">
-                <a:solidFill>
-                  <a:srgbClr val="6E6E73"/>
-                </a:solidFill>
-                <a:latin typeface="Arial" pitchFamily="34" charset="0"/>
-                <a:ea typeface="Arial" pitchFamily="34" charset="-122"/>
-                <a:cs typeface="Arial" pitchFamily="34" charset="-120"/>
-              </a:rPr>
-              <a:t>Para clínicas.</a:t>
-            </a:r>
-            <a:endParaRPr lang="en-US" sz="1000" dirty="0"/>
-          </a:p>
-        </p:txBody>
-      </p:sp>
-      <p:sp>
-        <p:nvSpPr>
-          <p:cNvPr id="24" name="Text 18"/>
+            <a:endParaRPr lang="en-US" sz="1050" dirty="0"/>
+          </a:p>
+        </p:txBody>
+      </p:sp>
+      <p:sp>
+        <p:nvSpPr>
+          <p:cNvPr id="19" name="Text 14"/>
           <p:cNvSpPr/>
           <p:nvPr/>
         </p:nvSpPr>

--- a/miracle_capital_semilla_pitch.pptx
+++ b/miracle_capital_semilla_pitch.pptx
@@ -4177,7 +4177,7 @@
           </p:nvPr>
         </p:nvGraphicFramePr>
         <p:xfrm>
-          <a:off x="502920" y="1554480"/>
+          <a:off x="502920" y="1481328"/>
           <a:ext cx="8138160" cy="914400"/>
         </p:xfrm>
         <a:graphic>
@@ -4189,7 +4189,7 @@
                 <a:gridCol w="1464869"/>
                 <a:gridCol w="3255264"/>
               </a:tblGrid>
-              <a:tr h="384048">
+              <a:tr h="333756">
                 <a:tc>
                   <a:txBody>
                     <a:bodyPr/>
@@ -4199,17 +4199,148 @@
                         <a:buNone/>
                       </a:pPr>
                       <a:r>
-                        <a:rPr lang="en-US" sz="950" b="1" dirty="0">
+                        <a:rPr lang="en-US" sz="850" b="1" dirty="0">
                           <a:solidFill>
                             <a:srgbClr val="6E6E73"/>
                           </a:solidFill>
                         </a:rPr>
                         <a:t>Inversión</a:t>
                       </a:r>
+                      <a:endParaRPr lang="en-US" sz="850" dirty="0"/>
+                    </a:p>
+                  </a:txBody>
+                  <a:tcPr marL="101600" marR="101600" marT="50800" marB="50800" anchor="ctr">
+                    <a:lnL w="0" cap="flat" cmpd="sng" algn="ctr">
+                      <a:noFill/>
+                    </a:lnL>
+                    <a:lnR w="0" cap="flat" cmpd="sng" algn="ctr">
+                      <a:noFill/>
+                    </a:lnR>
+                    <a:lnT w="0" cap="flat" cmpd="sng" algn="ctr">
+                      <a:noFill/>
+                    </a:lnT>
+                    <a:lnB w="9525" cap="flat" cmpd="sng" algn="ctr">
+                      <a:solidFill>
+                        <a:srgbClr val="E2E2E6"/>
+                      </a:solidFill>
+                      <a:prstDash val="solid"/>
+                      <a:round/>
+                      <a:headEnd type="none" w="med" len="med"/>
+                      <a:tailEnd type="none" w="med" len="med"/>
+                    </a:lnB>
+                    <a:solidFill>
+                      <a:srgbClr val="FFFFFF"/>
+                    </a:solidFill>
+                  </a:tcPr>
+                </a:tc>
+                <a:tc>
+                  <a:txBody>
+                    <a:bodyPr/>
+                    <a:lstStyle/>
+                    <a:p>
+                      <a:pPr indent="0" marL="0">
+                        <a:buNone/>
+                      </a:pPr>
+                      <a:r>
+                        <a:rPr lang="en-US" sz="850" b="1" dirty="0">
+                          <a:solidFill>
+                            <a:srgbClr val="6E6E73"/>
+                          </a:solidFill>
+                        </a:rPr>
+                        <a:t>Monto aprobado</a:t>
+                      </a:r>
+                      <a:endParaRPr lang="en-US" sz="850" dirty="0"/>
+                    </a:p>
+                  </a:txBody>
+                  <a:tcPr marL="101600" marR="101600" marT="50800" marB="50800" anchor="ctr">
+                    <a:lnL w="0" cap="flat" cmpd="sng" algn="ctr">
+                      <a:noFill/>
+                    </a:lnL>
+                    <a:lnR w="0" cap="flat" cmpd="sng" algn="ctr">
+                      <a:noFill/>
+                    </a:lnR>
+                    <a:lnT w="0" cap="flat" cmpd="sng" algn="ctr">
+                      <a:noFill/>
+                    </a:lnT>
+                    <a:lnB w="9525" cap="flat" cmpd="sng" algn="ctr">
+                      <a:solidFill>
+                        <a:srgbClr val="E2E2E6"/>
+                      </a:solidFill>
+                      <a:prstDash val="solid"/>
+                      <a:round/>
+                      <a:headEnd type="none" w="med" len="med"/>
+                      <a:tailEnd type="none" w="med" len="med"/>
+                    </a:lnB>
+                    <a:solidFill>
+                      <a:srgbClr val="FFFFFF"/>
+                    </a:solidFill>
+                  </a:tcPr>
+                </a:tc>
+                <a:tc>
+                  <a:txBody>
+                    <a:bodyPr/>
+                    <a:lstStyle/>
+                    <a:p>
+                      <a:pPr indent="0" marL="0">
+                        <a:buNone/>
+                      </a:pPr>
+                      <a:r>
+                        <a:rPr lang="en-US" sz="850" b="1" dirty="0">
+                          <a:solidFill>
+                            <a:srgbClr val="6E6E73"/>
+                          </a:solidFill>
+                        </a:rPr>
+                        <a:t>Objetivo</a:t>
+                      </a:r>
+                      <a:endParaRPr lang="en-US" sz="850" dirty="0"/>
+                    </a:p>
+                  </a:txBody>
+                  <a:tcPr marL="101600" marR="101600" marT="50800" marB="50800" anchor="ctr">
+                    <a:lnL w="0" cap="flat" cmpd="sng" algn="ctr">
+                      <a:noFill/>
+                    </a:lnL>
+                    <a:lnR w="0" cap="flat" cmpd="sng" algn="ctr">
+                      <a:noFill/>
+                    </a:lnR>
+                    <a:lnT w="0" cap="flat" cmpd="sng" algn="ctr">
+                      <a:noFill/>
+                    </a:lnT>
+                    <a:lnB w="9525" cap="flat" cmpd="sng" algn="ctr">
+                      <a:solidFill>
+                        <a:srgbClr val="E2E2E6"/>
+                      </a:solidFill>
+                      <a:prstDash val="solid"/>
+                      <a:round/>
+                      <a:headEnd type="none" w="med" len="med"/>
+                      <a:tailEnd type="none" w="med" len="med"/>
+                    </a:lnB>
+                    <a:solidFill>
+                      <a:srgbClr val="FFFFFF"/>
+                    </a:solidFill>
+                  </a:tcPr>
+                </a:tc>
+              </a:tr>
+              <a:tr h="333756">
+                <a:tc>
+                  <a:txBody>
+                    <a:bodyPr/>
+                    <a:lstStyle/>
+                    <a:p>
+                      <a:pPr indent="0" marL="0">
+                        <a:buNone/>
+                      </a:pPr>
+                      <a:r>
+                        <a:rPr lang="en-US" sz="950" dirty="0">
+                          <a:solidFill>
+                            <a:srgbClr val="1D1D1F"/>
+                          </a:solidFill>
+                        </a:rPr>
+                        <a:t>Asesoría técnica DevOps, escalabilidad y despliegue cloud</a:t>
+                      </a:r>
                       <a:endParaRPr lang="en-US" sz="950" dirty="0"/>
                     </a:p>
                   </a:txBody>
-                  <a:tcPr marL="127000" marR="127000" marT="63500" marB="63500" anchor="ctr">
+                  <a:tcPr marL="101600" marR="101600" marT="50800" marB="50800" anchor="ctr">
                     <a:lnL w="0" cap="flat" cmpd="sng" algn="ctr">
                       <a:noFill/>
                     </a:lnL>
@@ -4244,15 +4375,110 @@
                       <a:r>
                         <a:rPr lang="en-US" sz="950" b="1" dirty="0">
                           <a:solidFill>
-                            <a:srgbClr val="6E6E73"/>
+                            <a:srgbClr val="0071E3"/>
+                          </a:solidFill>
+                          <a:latin typeface="Arial" pitchFamily="34" charset="0"/>
+                          <a:ea typeface="Arial" pitchFamily="34" charset="-122"/>
+                          <a:cs typeface="Arial" pitchFamily="34" charset="-120"/>
+                        </a:rPr>
+                        <a:t>$4.000.000</a:t>
+                      </a:r>
+                      <a:endParaRPr lang="en-US" sz="950" dirty="0">
+                        <a:latin typeface="Arial" charset="0"/>
+                        <a:ea typeface="Arial" charset="0"/>
+                        <a:cs typeface="Arial" charset="0"/>
+                      </a:endParaRPr>
+                    </a:p>
+                  </a:txBody>
+                  <a:tcPr marL="101600" marR="101600" marT="50800" marB="50800" anchor="ctr">
+                    <a:lnL w="0" cap="flat" cmpd="sng" algn="ctr">
+                      <a:noFill/>
+                    </a:lnL>
+                    <a:lnR w="0" cap="flat" cmpd="sng" algn="ctr">
+                      <a:noFill/>
+                    </a:lnR>
+                    <a:lnT w="0" cap="flat" cmpd="sng" algn="ctr">
+                      <a:noFill/>
+                    </a:lnT>
+                    <a:lnB w="9525" cap="flat" cmpd="sng" algn="ctr">
+                      <a:solidFill>
+                        <a:srgbClr val="E2E2E6"/>
+                      </a:solidFill>
+                      <a:prstDash val="solid"/>
+                      <a:round/>
+                      <a:headEnd type="none" w="med" len="med"/>
+                      <a:tailEnd type="none" w="med" len="med"/>
+                    </a:lnB>
+                    <a:solidFill>
+                      <a:srgbClr val="FFFFFF"/>
+                    </a:solidFill>
+                  </a:tcPr>
+                </a:tc>
+                <a:tc>
+                  <a:txBody>
+                    <a:bodyPr/>
+                    <a:lstStyle/>
+                    <a:p>
+                      <a:pPr indent="0" marL="0">
+                        <a:buNone/>
+                      </a:pPr>
+                      <a:r>
+                        <a:rPr lang="en-US" sz="950" dirty="0">
+                          <a:solidFill>
+                            <a:srgbClr val="48484A"/>
                           </a:solidFill>
                         </a:rPr>
-                        <a:t>Monto sugerido</a:t>
+                        <a:t>Estabilidad y disponibilidad del PMV para pruebas reales</a:t>
                       </a:r>
                       <a:endParaRPr lang="en-US" sz="950" dirty="0"/>
                     </a:p>
                   </a:txBody>
-                  <a:tcPr marL="127000" marR="127000" marT="63500" marB="63500" anchor="ctr">
+                  <a:tcPr marL="101600" marR="101600" marT="50800" marB="50800" anchor="ctr">
+                    <a:lnL w="0" cap="flat" cmpd="sng" algn="ctr">
+                      <a:noFill/>
+                    </a:lnL>
+                    <a:lnR w="0" cap="flat" cmpd="sng" algn="ctr">
+                      <a:noFill/>
+                    </a:lnR>
+                    <a:lnT w="0" cap="flat" cmpd="sng" algn="ctr">
+                      <a:noFill/>
+                    </a:lnT>
+                    <a:lnB w="9525" cap="flat" cmpd="sng" algn="ctr">
+                      <a:solidFill>
+                        <a:srgbClr val="E2E2E6"/>
+                      </a:solidFill>
+                      <a:prstDash val="solid"/>
+                      <a:round/>
+                      <a:headEnd type="none" w="med" len="med"/>
+                      <a:tailEnd type="none" w="med" len="med"/>
+                    </a:lnB>
+                    <a:solidFill>
+                      <a:srgbClr val="FFFFFF"/>
+                    </a:solidFill>
+                  </a:tcPr>
+                </a:tc>
+              </a:tr>
+              <a:tr h="333756">
+                <a:tc>
+                  <a:txBody>
+                    <a:bodyPr/>
+                    <a:lstStyle/>
+                    <a:p>
+                      <a:pPr indent="0" marL="0">
+                        <a:buNone/>
+                      </a:pPr>
+                      <a:r>
+                        <a:rPr lang="en-US" sz="950" dirty="0">
+                          <a:solidFill>
+                            <a:srgbClr val="1D1D1F"/>
+                          </a:solidFill>
+                        </a:rPr>
+                        <a:t>Licencia mensual de herramienta de IA</a:t>
+                      </a:r>
+                      <a:endParaRPr lang="en-US" sz="950" dirty="0"/>
+                    </a:p>
+                  </a:txBody>
+                  <a:tcPr marL="101600" marR="101600" marT="50800" marB="50800" anchor="ctr">
                     <a:lnL w="0" cap="flat" cmpd="sng" algn="ctr">
                       <a:noFill/>
                     </a:lnL>
@@ -4287,60 +4513,22 @@
                       <a:r>
                         <a:rPr lang="en-US" sz="950" b="1" dirty="0">
                           <a:solidFill>
-                            <a:srgbClr val="6E6E73"/>
+                            <a:srgbClr val="0071E3"/>
                           </a:solidFill>
+                          <a:latin typeface="Arial" pitchFamily="34" charset="0"/>
+                          <a:ea typeface="Arial" pitchFamily="34" charset="-122"/>
+                          <a:cs typeface="Arial" pitchFamily="34" charset="-120"/>
                         </a:rPr>
-                        <a:t>Objetivo</a:t>
+                        <a:t>$400.000</a:t>
                       </a:r>
-                      <a:endParaRPr lang="en-US" sz="950" dirty="0"/>
+                      <a:endParaRPr lang="en-US" sz="950" dirty="0">
+                        <a:latin typeface="Arial" charset="0"/>
+                        <a:ea typeface="Arial" charset="0"/>
+                        <a:cs typeface="Arial" charset="0"/>
+                      </a:endParaRPr>
                     </a:p>
                   </a:txBody>
-                  <a:tcPr marL="127000" marR="127000" marT="63500" marB="63500" anchor="ctr">
-                    <a:lnL w="0" cap="flat" cmpd="sng" algn="ctr">
-                      <a:noFill/>
-                    </a:lnL>
-                    <a:lnR w="0" cap="flat" cmpd="sng" algn="ctr">
-                      <a:noFill/>
-                    </a:lnR>
-                    <a:lnT w="0" cap="flat" cmpd="sng" algn="ctr">
-                      <a:noFill/>
-                    </a:lnT>
-                    <a:lnB w="9525" cap="flat" cmpd="sng" algn="ctr">
-                      <a:solidFill>
-                        <a:srgbClr val="E2E2E6"/>
-                      </a:solidFill>
-                      <a:prstDash val="solid"/>
-                      <a:round/>
-                      <a:headEnd type="none" w="med" len="med"/>
-                      <a:tailEnd type="none" w="med" len="med"/>
-                    </a:lnB>
-                    <a:solidFill>
-                      <a:srgbClr val="FFFFFF"/>
-                    </a:solidFill>
-                  </a:tcPr>
-                </a:tc>
-              </a:tr>
-              <a:tr h="384048">
-                <a:tc>
-                  <a:txBody>
-                    <a:bodyPr/>
-                    <a:lstStyle/>
-                    <a:p>
-                      <a:pPr indent="0" marL="0">
-                        <a:buNone/>
-                      </a:pPr>
-                      <a:r>
-                        <a:rPr lang="en-US" sz="1150" dirty="0">
-                          <a:solidFill>
-                            <a:srgbClr val="1D1D1F"/>
-                          </a:solidFill>
-                        </a:rPr>
-                        <a:t>Infraestructura, APIs y licencias IA</a:t>
-                      </a:r>
-                      <a:endParaRPr lang="en-US" sz="1150" dirty="0"/>
-                    </a:p>
-                  </a:txBody>
-                  <a:tcPr marL="127000" marR="127000" marT="63500" marB="63500" anchor="ctr">
+                  <a:tcPr marL="101600" marR="101600" marT="50800" marB="50800" anchor="ctr">
                     <a:lnL w="0" cap="flat" cmpd="sng" algn="ctr">
                       <a:noFill/>
                     </a:lnL>
@@ -4373,24 +4561,62 @@
                         <a:buNone/>
                       </a:pPr>
                       <a:r>
-                        <a:rPr lang="en-US" sz="1150" b="1" dirty="0">
+                        <a:rPr lang="en-US" sz="950" dirty="0">
                           <a:solidFill>
-                            <a:srgbClr val="0071E3"/>
+                            <a:srgbClr val="48484A"/>
                           </a:solidFill>
-                          <a:latin typeface="Arial" pitchFamily="34" charset="0"/>
-                          <a:ea typeface="Arial" pitchFamily="34" charset="-122"/>
-                          <a:cs typeface="Arial" pitchFamily="34" charset="-120"/>
                         </a:rPr>
-                        <a:t>$4M–$5M</a:t>
+                        <a:t>Acelerar documentación técnica y pruebas</a:t>
                       </a:r>
-                      <a:endParaRPr lang="en-US" sz="1150" dirty="0">
-                        <a:latin typeface="Arial" charset="0"/>
-                        <a:ea typeface="Arial" charset="0"/>
-                        <a:cs typeface="Arial" charset="0"/>
-                      </a:endParaRPr>
+                      <a:endParaRPr lang="en-US" sz="950" dirty="0"/>
                     </a:p>
                   </a:txBody>
-                  <a:tcPr marL="127000" marR="127000" marT="63500" marB="63500" anchor="ctr">
+                  <a:tcPr marL="101600" marR="101600" marT="50800" marB="50800" anchor="ctr">
+                    <a:lnL w="0" cap="flat" cmpd="sng" algn="ctr">
+                      <a:noFill/>
+                    </a:lnL>
+                    <a:lnR w="0" cap="flat" cmpd="sng" algn="ctr">
+                      <a:noFill/>
+                    </a:lnR>
+                    <a:lnT w="0" cap="flat" cmpd="sng" algn="ctr">
+                      <a:noFill/>
+                    </a:lnT>
+                    <a:lnB w="9525" cap="flat" cmpd="sng" algn="ctr">
+                      <a:solidFill>
+                        <a:srgbClr val="E2E2E6"/>
+                      </a:solidFill>
+                      <a:prstDash val="solid"/>
+                      <a:round/>
+                      <a:headEnd type="none" w="med" len="med"/>
+                      <a:tailEnd type="none" w="med" len="med"/>
+                    </a:lnB>
+                    <a:solidFill>
+                      <a:srgbClr val="FFFFFF"/>
+                    </a:solidFill>
+                  </a:tcPr>
+                </a:tc>
+              </a:tr>
+              <a:tr h="333756">
+                <a:tc>
+                  <a:txBody>
+                    <a:bodyPr/>
+                    <a:lstStyle/>
+                    <a:p>
+                      <a:pPr indent="0" marL="0">
+                        <a:buNone/>
+                      </a:pPr>
+                      <a:r>
+                        <a:rPr lang="en-US" sz="950" dirty="0">
+                          <a:solidFill>
+                            <a:srgbClr val="1D1D1F"/>
+                          </a:solidFill>
+                        </a:rPr>
+                        <a:t>Créditos de API de IA para pruebas del PMV</a:t>
+                      </a:r>
+                      <a:endParaRPr lang="en-US" sz="950" dirty="0"/>
+                    </a:p>
+                  </a:txBody>
+                  <a:tcPr marL="101600" marR="101600" marT="50800" marB="50800" anchor="ctr">
                     <a:lnL w="0" cap="flat" cmpd="sng" algn="ctr">
                       <a:noFill/>
                     </a:lnL>
@@ -4423,62 +4649,24 @@
                         <a:buNone/>
                       </a:pPr>
                       <a:r>
-                        <a:rPr lang="en-US" sz="1150" dirty="0">
+                        <a:rPr lang="en-US" sz="950" b="1" dirty="0">
                           <a:solidFill>
-                            <a:srgbClr val="48484A"/>
+                            <a:srgbClr val="0071E3"/>
                           </a:solidFill>
+                          <a:latin typeface="Arial" pitchFamily="34" charset="0"/>
+                          <a:ea typeface="Arial" pitchFamily="34" charset="-122"/>
+                          <a:cs typeface="Arial" pitchFamily="34" charset="-120"/>
                         </a:rPr>
-                        <a:t>Mejorar estabilidad y precisión</a:t>
+                        <a:t>$600.000</a:t>
                       </a:r>
-                      <a:endParaRPr lang="en-US" sz="1150" dirty="0"/>
+                      <a:endParaRPr lang="en-US" sz="950" dirty="0">
+                        <a:latin typeface="Arial" charset="0"/>
+                        <a:ea typeface="Arial" charset="0"/>
+                        <a:cs typeface="Arial" charset="0"/>
+                      </a:endParaRPr>
                     </a:p>
                   </a:txBody>
-                  <a:tcPr marL="127000" marR="127000" marT="63500" marB="63500" anchor="ctr">
-                    <a:lnL w="0" cap="flat" cmpd="sng" algn="ctr">
-                      <a:noFill/>
-                    </a:lnL>
-                    <a:lnR w="0" cap="flat" cmpd="sng" algn="ctr">
-                      <a:noFill/>
-                    </a:lnR>
-                    <a:lnT w="0" cap="flat" cmpd="sng" algn="ctr">
-                      <a:noFill/>
-                    </a:lnT>
-                    <a:lnB w="9525" cap="flat" cmpd="sng" algn="ctr">
-                      <a:solidFill>
-                        <a:srgbClr val="E2E2E6"/>
-                      </a:solidFill>
-                      <a:prstDash val="solid"/>
-                      <a:round/>
-                      <a:headEnd type="none" w="med" len="med"/>
-                      <a:tailEnd type="none" w="med" len="med"/>
-                    </a:lnB>
-                    <a:solidFill>
-                      <a:srgbClr val="FFFFFF"/>
-                    </a:solidFill>
-                  </a:tcPr>
-                </a:tc>
-              </a:tr>
-              <a:tr h="384048">
-                <a:tc>
-                  <a:txBody>
-                    <a:bodyPr/>
-                    <a:lstStyle/>
-                    <a:p>
-                      <a:pPr indent="0" marL="0">
-                        <a:buNone/>
-                      </a:pPr>
-                      <a:r>
-                        <a:rPr lang="en-US" sz="1150" dirty="0">
-                          <a:solidFill>
-                            <a:srgbClr val="1D1D1F"/>
-                          </a:solidFill>
-                        </a:rPr>
-                        <a:t>Desarrollo técnico puntual</a:t>
-                      </a:r>
-                      <a:endParaRPr lang="en-US" sz="1150" dirty="0"/>
-                    </a:p>
-                  </a:txBody>
-                  <a:tcPr marL="127000" marR="127000" marT="63500" marB="63500" anchor="ctr">
+                  <a:tcPr marL="101600" marR="101600" marT="50800" marB="50800" anchor="ctr">
                     <a:lnL w="0" cap="flat" cmpd="sng" algn="ctr">
                       <a:noFill/>
                     </a:lnL>
@@ -4511,24 +4699,62 @@
                         <a:buNone/>
                       </a:pPr>
                       <a:r>
-                        <a:rPr lang="en-US" sz="1150" b="1" dirty="0">
+                        <a:rPr lang="en-US" sz="950" dirty="0">
                           <a:solidFill>
-                            <a:srgbClr val="0071E3"/>
+                            <a:srgbClr val="48484A"/>
                           </a:solidFill>
-                          <a:latin typeface="Arial" pitchFamily="34" charset="0"/>
-                          <a:ea typeface="Arial" pitchFamily="34" charset="-122"/>
-                          <a:cs typeface="Arial" pitchFamily="34" charset="-120"/>
                         </a:rPr>
-                        <a:t>$4M–$5M</a:t>
+                        <a:t>Validar precisión del flujo voz → IA → nota clínica</a:t>
                       </a:r>
-                      <a:endParaRPr lang="en-US" sz="1150" dirty="0">
-                        <a:latin typeface="Arial" charset="0"/>
-                        <a:ea typeface="Arial" charset="0"/>
-                        <a:cs typeface="Arial" charset="0"/>
-                      </a:endParaRPr>
+                      <a:endParaRPr lang="en-US" sz="950" dirty="0"/>
                     </a:p>
                   </a:txBody>
-                  <a:tcPr marL="127000" marR="127000" marT="63500" marB="63500" anchor="ctr">
+                  <a:tcPr marL="101600" marR="101600" marT="50800" marB="50800" anchor="ctr">
+                    <a:lnL w="0" cap="flat" cmpd="sng" algn="ctr">
+                      <a:noFill/>
+                    </a:lnL>
+                    <a:lnR w="0" cap="flat" cmpd="sng" algn="ctr">
+                      <a:noFill/>
+                    </a:lnR>
+                    <a:lnT w="0" cap="flat" cmpd="sng" algn="ctr">
+                      <a:noFill/>
+                    </a:lnT>
+                    <a:lnB w="9525" cap="flat" cmpd="sng" algn="ctr">
+                      <a:solidFill>
+                        <a:srgbClr val="E2E2E6"/>
+                      </a:solidFill>
+                      <a:prstDash val="solid"/>
+                      <a:round/>
+                      <a:headEnd type="none" w="med" len="med"/>
+                      <a:tailEnd type="none" w="med" len="med"/>
+                    </a:lnB>
+                    <a:solidFill>
+                      <a:srgbClr val="FFFFFF"/>
+                    </a:solidFill>
+                  </a:tcPr>
+                </a:tc>
+              </a:tr>
+              <a:tr h="333756">
+                <a:tc>
+                  <a:txBody>
+                    <a:bodyPr/>
+                    <a:lstStyle/>
+                    <a:p>
+                      <a:pPr indent="0" marL="0">
+                        <a:buNone/>
+                      </a:pPr>
+                      <a:r>
+                        <a:rPr lang="en-US" sz="950" dirty="0">
+                          <a:solidFill>
+                            <a:srgbClr val="1D1D1F"/>
+                          </a:solidFill>
+                        </a:rPr>
+                        <a:t>14 dispositivos de captura de audio (tipo Omi)</a:t>
+                      </a:r>
+                      <a:endParaRPr lang="en-US" sz="950" dirty="0"/>
+                    </a:p>
+                  </a:txBody>
+                  <a:tcPr marL="101600" marR="101600" marT="50800" marB="50800" anchor="ctr">
                     <a:lnL w="0" cap="flat" cmpd="sng" algn="ctr">
                       <a:noFill/>
                     </a:lnL>
@@ -4561,62 +4787,24 @@
                         <a:buNone/>
                       </a:pPr>
                       <a:r>
-                        <a:rPr lang="en-US" sz="1150" dirty="0">
+                        <a:rPr lang="en-US" sz="950" b="1" dirty="0">
                           <a:solidFill>
-                            <a:srgbClr val="48484A"/>
+                            <a:srgbClr val="0071E3"/>
                           </a:solidFill>
+                          <a:latin typeface="Arial" pitchFamily="34" charset="0"/>
+                          <a:ea typeface="Arial" pitchFamily="34" charset="-122"/>
+                          <a:cs typeface="Arial" pitchFamily="34" charset="-120"/>
                         </a:rPr>
-                        <a:t>Robustecer la versión piloto</a:t>
+                        <a:t>$5.000.000</a:t>
                       </a:r>
-                      <a:endParaRPr lang="en-US" sz="1150" dirty="0"/>
+                      <a:endParaRPr lang="en-US" sz="950" dirty="0">
+                        <a:latin typeface="Arial" charset="0"/>
+                        <a:ea typeface="Arial" charset="0"/>
+                        <a:cs typeface="Arial" charset="0"/>
+                      </a:endParaRPr>
                     </a:p>
                   </a:txBody>
-                  <a:tcPr marL="127000" marR="127000" marT="63500" marB="63500" anchor="ctr">
-                    <a:lnL w="0" cap="flat" cmpd="sng" algn="ctr">
-                      <a:noFill/>
-                    </a:lnL>
-                    <a:lnR w="0" cap="flat" cmpd="sng" algn="ctr">
-                      <a:noFill/>
-                    </a:lnR>
-                    <a:lnT w="0" cap="flat" cmpd="sng" algn="ctr">
-                      <a:noFill/>
-                    </a:lnT>
-                    <a:lnB w="9525" cap="flat" cmpd="sng" algn="ctr">
-                      <a:solidFill>
-                        <a:srgbClr val="E2E2E6"/>
-                      </a:solidFill>
-                      <a:prstDash val="solid"/>
-                      <a:round/>
-                      <a:headEnd type="none" w="med" len="med"/>
-                      <a:tailEnd type="none" w="med" len="med"/>
-                    </a:lnB>
-                    <a:solidFill>
-                      <a:srgbClr val="FFFFFF"/>
-                    </a:solidFill>
-                  </a:tcPr>
-                </a:tc>
-              </a:tr>
-              <a:tr h="384048">
-                <a:tc>
-                  <a:txBody>
-                    <a:bodyPr/>
-                    <a:lstStyle/>
-                    <a:p>
-                      <a:pPr indent="0" marL="0">
-                        <a:buNone/>
-                      </a:pPr>
-                      <a:r>
-                        <a:rPr lang="en-US" sz="1150" dirty="0">
-                          <a:solidFill>
-                            <a:srgbClr val="1D1D1F"/>
-                          </a:solidFill>
-                        </a:rPr>
-                        <a:t>Pruebas técnicas y seguridad</a:t>
-                      </a:r>
-                      <a:endParaRPr lang="en-US" sz="1150" dirty="0"/>
-                    </a:p>
-                  </a:txBody>
-                  <a:tcPr marL="127000" marR="127000" marT="63500" marB="63500" anchor="ctr">
+                  <a:tcPr marL="101600" marR="101600" marT="50800" marB="50800" anchor="ctr">
                     <a:lnL w="0" cap="flat" cmpd="sng" algn="ctr">
                       <a:noFill/>
                     </a:lnL>
@@ -4649,24 +4837,62 @@
                         <a:buNone/>
                       </a:pPr>
                       <a:r>
-                        <a:rPr lang="en-US" sz="1150" b="1" dirty="0">
+                        <a:rPr lang="en-US" sz="950" dirty="0">
                           <a:solidFill>
-                            <a:srgbClr val="0071E3"/>
+                            <a:srgbClr val="48484A"/>
                           </a:solidFill>
-                          <a:latin typeface="Arial" pitchFamily="34" charset="0"/>
-                          <a:ea typeface="Arial" pitchFamily="34" charset="-122"/>
-                          <a:cs typeface="Arial" pitchFamily="34" charset="-120"/>
                         </a:rPr>
-                        <a:t>$2M–$3M</a:t>
+                        <a:t>Validar calidad de voz en escenarios reales</a:t>
                       </a:r>
-                      <a:endParaRPr lang="en-US" sz="1150" dirty="0">
-                        <a:latin typeface="Arial" charset="0"/>
-                        <a:ea typeface="Arial" charset="0"/>
-                        <a:cs typeface="Arial" charset="0"/>
-                      </a:endParaRPr>
+                      <a:endParaRPr lang="en-US" sz="950" dirty="0"/>
                     </a:p>
                   </a:txBody>
-                  <a:tcPr marL="127000" marR="127000" marT="63500" marB="63500" anchor="ctr">
+                  <a:tcPr marL="101600" marR="101600" marT="50800" marB="50800" anchor="ctr">
+                    <a:lnL w="0" cap="flat" cmpd="sng" algn="ctr">
+                      <a:noFill/>
+                    </a:lnL>
+                    <a:lnR w="0" cap="flat" cmpd="sng" algn="ctr">
+                      <a:noFill/>
+                    </a:lnR>
+                    <a:lnT w="0" cap="flat" cmpd="sng" algn="ctr">
+                      <a:noFill/>
+                    </a:lnT>
+                    <a:lnB w="9525" cap="flat" cmpd="sng" algn="ctr">
+                      <a:solidFill>
+                        <a:srgbClr val="E2E2E6"/>
+                      </a:solidFill>
+                      <a:prstDash val="solid"/>
+                      <a:round/>
+                      <a:headEnd type="none" w="med" len="med"/>
+                      <a:tailEnd type="none" w="med" len="med"/>
+                    </a:lnB>
+                    <a:solidFill>
+                      <a:srgbClr val="FFFFFF"/>
+                    </a:solidFill>
+                  </a:tcPr>
+                </a:tc>
+              </a:tr>
+              <a:tr h="333756">
+                <a:tc>
+                  <a:txBody>
+                    <a:bodyPr/>
+                    <a:lstStyle/>
+                    <a:p>
+                      <a:pPr indent="0" marL="0">
+                        <a:buNone/>
+                      </a:pPr>
+                      <a:r>
+                        <a:rPr lang="en-US" sz="950" dirty="0">
+                          <a:solidFill>
+                            <a:srgbClr val="1D1D1F"/>
+                          </a:solidFill>
+                        </a:rPr>
+                        <a:t>Marketing, branding y producción audiovisual</a:t>
+                      </a:r>
+                      <a:endParaRPr lang="en-US" sz="950" dirty="0"/>
+                    </a:p>
+                  </a:txBody>
+                  <a:tcPr marL="101600" marR="101600" marT="50800" marB="50800" anchor="ctr">
                     <a:lnL w="0" cap="flat" cmpd="sng" algn="ctr">
                       <a:noFill/>
                     </a:lnL>
@@ -4699,62 +4925,24 @@
                         <a:buNone/>
                       </a:pPr>
                       <a:r>
-                        <a:rPr lang="en-US" sz="1150" dirty="0">
+                        <a:rPr lang="en-US" sz="950" b="1" dirty="0">
                           <a:solidFill>
-                            <a:srgbClr val="48484A"/>
+                            <a:srgbClr val="0071E3"/>
                           </a:solidFill>
+                          <a:latin typeface="Arial" pitchFamily="34" charset="0"/>
+                          <a:ea typeface="Arial" pitchFamily="34" charset="-122"/>
+                          <a:cs typeface="Arial" pitchFamily="34" charset="-120"/>
                         </a:rPr>
-                        <a:t>Preparar validación en entorno médico</a:t>
+                        <a:t>$4.000.000</a:t>
                       </a:r>
-                      <a:endParaRPr lang="en-US" sz="1150" dirty="0"/>
+                      <a:endParaRPr lang="en-US" sz="950" dirty="0">
+                        <a:latin typeface="Arial" charset="0"/>
+                        <a:ea typeface="Arial" charset="0"/>
+                        <a:cs typeface="Arial" charset="0"/>
+                      </a:endParaRPr>
                     </a:p>
                   </a:txBody>
-                  <a:tcPr marL="127000" marR="127000" marT="63500" marB="63500" anchor="ctr">
-                    <a:lnL w="0" cap="flat" cmpd="sng" algn="ctr">
-                      <a:noFill/>
-                    </a:lnL>
-                    <a:lnR w="0" cap="flat" cmpd="sng" algn="ctr">
-                      <a:noFill/>
-                    </a:lnR>
-                    <a:lnT w="0" cap="flat" cmpd="sng" algn="ctr">
-                      <a:noFill/>
-                    </a:lnT>
-                    <a:lnB w="9525" cap="flat" cmpd="sng" algn="ctr">
-                      <a:solidFill>
-                        <a:srgbClr val="E2E2E6"/>
-                      </a:solidFill>
-                      <a:prstDash val="solid"/>
-                      <a:round/>
-                      <a:headEnd type="none" w="med" len="med"/>
-                      <a:tailEnd type="none" w="med" len="med"/>
-                    </a:lnB>
-                    <a:solidFill>
-                      <a:srgbClr val="FFFFFF"/>
-                    </a:solidFill>
-                  </a:tcPr>
-                </a:tc>
-              </a:tr>
-              <a:tr h="384048">
-                <a:tc>
-                  <a:txBody>
-                    <a:bodyPr/>
-                    <a:lstStyle/>
-                    <a:p>
-                      <a:pPr indent="0" marL="0">
-                        <a:buNone/>
-                      </a:pPr>
-                      <a:r>
-                        <a:rPr lang="en-US" sz="1150" dirty="0">
-                          <a:solidFill>
-                            <a:srgbClr val="1D1D1F"/>
-                          </a:solidFill>
-                        </a:rPr>
-                        <a:t>Captura de audio / hardware asociado</a:t>
-                      </a:r>
-                      <a:endParaRPr lang="en-US" sz="1150" dirty="0"/>
-                    </a:p>
-                  </a:txBody>
-                  <a:tcPr marL="127000" marR="127000" marT="63500" marB="63500" anchor="ctr">
+                  <a:tcPr marL="101600" marR="101600" marT="50800" marB="50800" anchor="ctr">
                     <a:lnL w="0" cap="flat" cmpd="sng" algn="ctr">
                       <a:noFill/>
                     </a:lnL>
@@ -4787,24 +4975,62 @@
                         <a:buNone/>
                       </a:pPr>
                       <a:r>
-                        <a:rPr lang="en-US" sz="1150" b="1" dirty="0">
+                        <a:rPr lang="en-US" sz="950" dirty="0">
                           <a:solidFill>
-                            <a:srgbClr val="0071E3"/>
+                            <a:srgbClr val="48484A"/>
                           </a:solidFill>
-                          <a:latin typeface="Arial" pitchFamily="34" charset="0"/>
-                          <a:ea typeface="Arial" pitchFamily="34" charset="-122"/>
-                          <a:cs typeface="Arial" pitchFamily="34" charset="-120"/>
                         </a:rPr>
-                        <a:t>$2M</a:t>
+                        <a:t>Video demo y piezas para validar con médicos y clínicas</a:t>
                       </a:r>
-                      <a:endParaRPr lang="en-US" sz="1150" dirty="0">
-                        <a:latin typeface="Arial" charset="0"/>
-                        <a:ea typeface="Arial" charset="0"/>
-                        <a:cs typeface="Arial" charset="0"/>
-                      </a:endParaRPr>
+                      <a:endParaRPr lang="en-US" sz="950" dirty="0"/>
                     </a:p>
                   </a:txBody>
-                  <a:tcPr marL="127000" marR="127000" marT="63500" marB="63500" anchor="ctr">
+                  <a:tcPr marL="101600" marR="101600" marT="50800" marB="50800" anchor="ctr">
+                    <a:lnL w="0" cap="flat" cmpd="sng" algn="ctr">
+                      <a:noFill/>
+                    </a:lnL>
+                    <a:lnR w="0" cap="flat" cmpd="sng" algn="ctr">
+                      <a:noFill/>
+                    </a:lnR>
+                    <a:lnT w="0" cap="flat" cmpd="sng" algn="ctr">
+                      <a:noFill/>
+                    </a:lnT>
+                    <a:lnB w="9525" cap="flat" cmpd="sng" algn="ctr">
+                      <a:solidFill>
+                        <a:srgbClr val="E2E2E6"/>
+                      </a:solidFill>
+                      <a:prstDash val="solid"/>
+                      <a:round/>
+                      <a:headEnd type="none" w="med" len="med"/>
+                      <a:tailEnd type="none" w="med" len="med"/>
+                    </a:lnB>
+                    <a:solidFill>
+                      <a:srgbClr val="FFFFFF"/>
+                    </a:solidFill>
+                  </a:tcPr>
+                </a:tc>
+              </a:tr>
+              <a:tr h="333756">
+                <a:tc>
+                  <a:txBody>
+                    <a:bodyPr/>
+                    <a:lstStyle/>
+                    <a:p>
+                      <a:pPr indent="0" marL="0">
+                        <a:buNone/>
+                      </a:pPr>
+                      <a:r>
+                        <a:rPr lang="en-US" sz="950" dirty="0">
+                          <a:solidFill>
+                            <a:srgbClr val="1D1D1F"/>
+                          </a:solidFill>
+                        </a:rPr>
+                        <a:t>Registro y protección de la marca Miracle</a:t>
+                      </a:r>
+                      <a:endParaRPr lang="en-US" sz="950" dirty="0"/>
+                    </a:p>
+                  </a:txBody>
+                  <a:tcPr marL="101600" marR="101600" marT="50800" marB="50800" anchor="ctr">
                     <a:lnL w="0" cap="flat" cmpd="sng" algn="ctr">
                       <a:noFill/>
                     </a:lnL>
@@ -4837,62 +5063,24 @@
                         <a:buNone/>
                       </a:pPr>
                       <a:r>
-                        <a:rPr lang="en-US" sz="1150" dirty="0">
+                        <a:rPr lang="en-US" sz="950" b="1" dirty="0">
                           <a:solidFill>
-                            <a:srgbClr val="48484A"/>
+                            <a:srgbClr val="0071E3"/>
                           </a:solidFill>
+                          <a:latin typeface="Arial" pitchFamily="34" charset="0"/>
+                          <a:ea typeface="Arial" pitchFamily="34" charset="-122"/>
+                          <a:cs typeface="Arial" pitchFamily="34" charset="-120"/>
                         </a:rPr>
-                        <a:t>Mejorar calidad de entrada de audio</a:t>
+                        <a:t>$1.000.000</a:t>
                       </a:r>
-                      <a:endParaRPr lang="en-US" sz="1150" dirty="0"/>
+                      <a:endParaRPr lang="en-US" sz="950" dirty="0">
+                        <a:latin typeface="Arial" charset="0"/>
+                        <a:ea typeface="Arial" charset="0"/>
+                        <a:cs typeface="Arial" charset="0"/>
+                      </a:endParaRPr>
                     </a:p>
                   </a:txBody>
-                  <a:tcPr marL="127000" marR="127000" marT="63500" marB="63500" anchor="ctr">
-                    <a:lnL w="0" cap="flat" cmpd="sng" algn="ctr">
-                      <a:noFill/>
-                    </a:lnL>
-                    <a:lnR w="0" cap="flat" cmpd="sng" algn="ctr">
-                      <a:noFill/>
-                    </a:lnR>
-                    <a:lnT w="0" cap="flat" cmpd="sng" algn="ctr">
-                      <a:noFill/>
-                    </a:lnT>
-                    <a:lnB w="9525" cap="flat" cmpd="sng" algn="ctr">
-                      <a:solidFill>
-                        <a:srgbClr val="E2E2E6"/>
-                      </a:solidFill>
-                      <a:prstDash val="solid"/>
-                      <a:round/>
-                      <a:headEnd type="none" w="med" len="med"/>
-                      <a:tailEnd type="none" w="med" len="med"/>
-                    </a:lnB>
-                    <a:solidFill>
-                      <a:srgbClr val="FFFFFF"/>
-                    </a:solidFill>
-                  </a:tcPr>
-                </a:tc>
-              </a:tr>
-              <a:tr h="384048">
-                <a:tc>
-                  <a:txBody>
-                    <a:bodyPr/>
-                    <a:lstStyle/>
-                    <a:p>
-                      <a:pPr indent="0" marL="0">
-                        <a:buNone/>
-                      </a:pPr>
-                      <a:r>
-                        <a:rPr lang="en-US" sz="1150" dirty="0">
-                          <a:solidFill>
-                            <a:srgbClr val="1D1D1F"/>
-                          </a:solidFill>
-                        </a:rPr>
-                        <a:t>Material comercial y demo</a:t>
-                      </a:r>
-                      <a:endParaRPr lang="en-US" sz="1150" dirty="0"/>
-                    </a:p>
-                  </a:txBody>
-                  <a:tcPr marL="127000" marR="127000" marT="63500" marB="63500" anchor="ctr">
+                  <a:tcPr marL="101600" marR="101600" marT="50800" marB="50800" anchor="ctr">
                     <a:lnL w="0" cap="flat" cmpd="sng" algn="ctr">
                       <a:noFill/>
                     </a:lnL>
@@ -4925,24 +5113,62 @@
                         <a:buNone/>
                       </a:pPr>
                       <a:r>
-                        <a:rPr lang="en-US" sz="1150" b="1" dirty="0">
+                        <a:rPr lang="en-US" sz="950" dirty="0">
                           <a:solidFill>
-                            <a:srgbClr val="0071E3"/>
+                            <a:srgbClr val="48484A"/>
                           </a:solidFill>
-                          <a:latin typeface="Arial" pitchFamily="34" charset="0"/>
-                          <a:ea typeface="Arial" pitchFamily="34" charset="-122"/>
-                          <a:cs typeface="Arial" pitchFamily="34" charset="-120"/>
                         </a:rPr>
-                        <a:t>Hasta $3M</a:t>
+                        <a:t>Proteger el nombre y los activos intangibles</a:t>
                       </a:r>
-                      <a:endParaRPr lang="en-US" sz="1150" dirty="0">
-                        <a:latin typeface="Arial" charset="0"/>
-                        <a:ea typeface="Arial" charset="0"/>
-                        <a:cs typeface="Arial" charset="0"/>
-                      </a:endParaRPr>
+                      <a:endParaRPr lang="en-US" sz="950" dirty="0"/>
                     </a:p>
                   </a:txBody>
-                  <a:tcPr marL="127000" marR="127000" marT="63500" marB="63500" anchor="ctr">
+                  <a:tcPr marL="101600" marR="101600" marT="50800" marB="50800" anchor="ctr">
+                    <a:lnL w="0" cap="flat" cmpd="sng" algn="ctr">
+                      <a:noFill/>
+                    </a:lnL>
+                    <a:lnR w="0" cap="flat" cmpd="sng" algn="ctr">
+                      <a:noFill/>
+                    </a:lnR>
+                    <a:lnT w="0" cap="flat" cmpd="sng" algn="ctr">
+                      <a:noFill/>
+                    </a:lnT>
+                    <a:lnB w="9525" cap="flat" cmpd="sng" algn="ctr">
+                      <a:solidFill>
+                        <a:srgbClr val="E2E2E6"/>
+                      </a:solidFill>
+                      <a:prstDash val="solid"/>
+                      <a:round/>
+                      <a:headEnd type="none" w="med" len="med"/>
+                      <a:tailEnd type="none" w="med" len="med"/>
+                    </a:lnB>
+                    <a:solidFill>
+                      <a:srgbClr val="FFFFFF"/>
+                    </a:solidFill>
+                  </a:tcPr>
+                </a:tc>
+              </a:tr>
+              <a:tr h="333756">
+                <a:tc>
+                  <a:txBody>
+                    <a:bodyPr/>
+                    <a:lstStyle/>
+                    <a:p>
+                      <a:pPr indent="0" marL="0">
+                        <a:buNone/>
+                      </a:pPr>
+                      <a:r>
+                        <a:rPr lang="en-US" sz="1050" b="1" dirty="0">
+                          <a:solidFill>
+                            <a:srgbClr val="1D1D1F"/>
+                          </a:solidFill>
+                        </a:rPr>
+                        <a:t>Total</a:t>
+                      </a:r>
+                      <a:endParaRPr lang="en-US" sz="1050" dirty="0"/>
+                    </a:p>
+                  </a:txBody>
+                  <a:tcPr marL="101600" marR="101600" marT="50800" marB="50800" anchor="ctr">
                     <a:lnL w="0" cap="flat" cmpd="sng" algn="ctr">
                       <a:noFill/>
                     </a:lnL>
@@ -4975,17 +5201,59 @@
                         <a:buNone/>
                       </a:pPr>
                       <a:r>
-                        <a:rPr lang="en-US" sz="1150" dirty="0">
+                        <a:rPr lang="en-US" sz="1050" b="1" dirty="0">
                           <a:solidFill>
-                            <a:srgbClr val="48484A"/>
+                            <a:srgbClr val="0A3D91"/>
                           </a:solidFill>
+                          <a:latin typeface="Arial" pitchFamily="34" charset="0"/>
+                          <a:ea typeface="Arial" pitchFamily="34" charset="-122"/>
+                          <a:cs typeface="Arial" pitchFamily="34" charset="-120"/>
                         </a:rPr>
-                        <a:t>Conseguir pilotos y validación comercial</a:t>
+                        <a:t>$15.000.000</a:t>
                       </a:r>
-                      <a:endParaRPr lang="en-US" sz="1150" dirty="0"/>
+                      <a:endParaRPr lang="en-US" sz="1050" dirty="0">
+                        <a:latin typeface="Arial" charset="0"/>
+                        <a:ea typeface="Arial" charset="0"/>
+                        <a:cs typeface="Arial" charset="0"/>
+                      </a:endParaRPr>
                     </a:p>
                   </a:txBody>
-                  <a:tcPr marL="127000" marR="127000" marT="63500" marB="63500" anchor="ctr">
+                  <a:tcPr marL="101600" marR="101600" marT="50800" marB="50800" anchor="ctr">
+                    <a:lnL w="0" cap="flat" cmpd="sng" algn="ctr">
+                      <a:noFill/>
+                    </a:lnL>
+                    <a:lnR w="0" cap="flat" cmpd="sng" algn="ctr">
+                      <a:noFill/>
+                    </a:lnR>
+                    <a:lnT w="0" cap="flat" cmpd="sng" algn="ctr">
+                      <a:noFill/>
+                    </a:lnT>
+                    <a:lnB w="9525" cap="flat" cmpd="sng" algn="ctr">
+                      <a:solidFill>
+                        <a:srgbClr val="E2E2E6"/>
+                      </a:solidFill>
+                      <a:prstDash val="solid"/>
+                      <a:round/>
+                      <a:headEnd type="none" w="med" len="med"/>
+                      <a:tailEnd type="none" w="med" len="med"/>
+                    </a:lnB>
+                    <a:solidFill>
+                      <a:srgbClr val="FFFFFF"/>
+                    </a:solidFill>
+                  </a:tcPr>
+                </a:tc>
+                <a:tc>
+                  <a:txBody>
+                    <a:bodyPr/>
+                    <a:lstStyle/>
+                    <a:p>
+                      <a:pPr indent="0" marL="0">
+                        <a:buNone/>
+                      </a:pPr>
+                      <a:endParaRPr lang="en-US" sz="1200" dirty="0"/>
+                    </a:p>
+                  </a:txBody>
+                  <a:tcPr marL="101600" marR="101600" marT="50800" marB="50800" anchor="ctr">
                     <a:lnL w="0" cap="flat" cmpd="sng" algn="ctr">
                       <a:noFill/>
                     </a:lnL>
@@ -5022,8 +5290,8 @@
         </p:nvSpPr>
         <p:spPr>
           <a:xfrm>
-            <a:off x="502920" y="4526280"/>
-            <a:ext cx="8138160" cy="457200"/>
+            <a:off x="502920" y="4370832"/>
+            <a:ext cx="8138160" cy="347472"/>
           </a:xfrm>
           <a:prstGeom prst="rect">
             <a:avLst/>
@@ -5039,7 +5307,7 @@
               <a:buNone/>
             </a:pPr>
             <a:r>
-              <a:rPr lang="en-US" sz="1250" b="1" i="1" dirty="0">
+              <a:rPr lang="en-US" sz="1100" b="1" i="1" dirty="0">
                 <a:solidFill>
                   <a:srgbClr val="0A3D91"/>
                 </a:solidFill>
@@ -5049,7 +5317,46 @@
               </a:rPr>
               <a:t>El incentivo no es para iniciar desde cero; es para acelerar una solución que ya está en desarrollo.</a:t>
             </a:r>
-            <a:endParaRPr lang="en-US" sz="1250" dirty="0"/>
+            <a:endParaRPr lang="en-US" sz="1100" dirty="0"/>
+          </a:p>
+        </p:txBody>
+      </p:sp>
+      <p:sp>
+        <p:nvSpPr>
+          <p:cNvPr id="6" name="Text 3"/>
+          <p:cNvSpPr/>
+          <p:nvPr/>
+        </p:nvSpPr>
+        <p:spPr>
+          <a:xfrm>
+            <a:off x="502920" y="4736592"/>
+            <a:ext cx="8138160" cy="274320"/>
+          </a:xfrm>
+          <a:prstGeom prst="rect">
+            <a:avLst/>
+          </a:prstGeom>
+          <a:noFill/>
+          <a:ln/>
+        </p:spPr>
+        <p:txBody>
+          <a:bodyPr wrap="square" lIns="0" tIns="0" rIns="0" bIns="0" rtlCol="0" anchor="ctr"/>
+          <a:lstStyle/>
+          <a:p>
+            <a:pPr indent="0" marL="0">
+              <a:buNone/>
+            </a:pPr>
+            <a:r>
+              <a:rPr lang="en-US" sz="750" dirty="0">
+                <a:solidFill>
+                  <a:srgbClr val="6E6E73"/>
+                </a:solidFill>
+                <a:latin typeface="Arial" pitchFamily="34" charset="0"/>
+                <a:ea typeface="Arial" pitchFamily="34" charset="-122"/>
+                <a:cs typeface="Arial" pitchFamily="34" charset="-120"/>
+              </a:rPr>
+              <a:t>Cifras del Plan de Inversión aprobado — Contrato interadministrativo #4600107420 de 2026.</a:t>
+            </a:r>
+            <a:endParaRPr lang="en-US" sz="750" dirty="0"/>
           </a:p>
         </p:txBody>
       </p:sp>

--- a/miracle_capital_semilla_pitch.pptx
+++ b/miracle_capital_semilla_pitch.pptx
@@ -3383,7 +3383,7 @@
                 <a:ea typeface="Arial" pitchFamily="34" charset="-122"/>
                 <a:cs typeface="Arial" pitchFamily="34" charset="-120"/>
               </a:rPr>
-              <a:t>[Nombre]</a:t>
+              <a:t>José David Jaramillo Cortés</a:t>
             </a:r>
             <a:endParaRPr lang="en-US" sz="1300" dirty="0"/>
           </a:p>
@@ -3422,7 +3422,7 @@
                 <a:ea typeface="Arial" pitchFamily="34" charset="-122"/>
                 <a:cs typeface="Arial" pitchFamily="34" charset="-120"/>
               </a:rPr>
-              <a:t>[Rol]</a:t>
+              <a:t>CTO</a:t>
             </a:r>
             <a:endParaRPr lang="en-US" sz="1000" dirty="0"/>
           </a:p>
@@ -3578,7 +3578,7 @@
                 <a:ea typeface="Arial" pitchFamily="34" charset="-122"/>
                 <a:cs typeface="Arial" pitchFamily="34" charset="-120"/>
               </a:rPr>
-              <a:t>[Nombre]</a:t>
+              <a:t>Christian Felipe Maldonado Ortiz</a:t>
             </a:r>
             <a:endParaRPr lang="en-US" sz="1300" dirty="0"/>
           </a:p>
@@ -3617,7 +3617,7 @@
                 <a:ea typeface="Arial" pitchFamily="34" charset="-122"/>
                 <a:cs typeface="Arial" pitchFamily="34" charset="-120"/>
               </a:rPr>
-              <a:t>[Rol]</a:t>
+              <a:t>CEO</a:t>
             </a:r>
             <a:endParaRPr lang="en-US" sz="1000" dirty="0"/>
           </a:p>
@@ -3773,7 +3773,7 @@
                 <a:ea typeface="Arial" pitchFamily="34" charset="-122"/>
                 <a:cs typeface="Arial" pitchFamily="34" charset="-120"/>
               </a:rPr>
-              <a:t>[Nombre]</a:t>
+              <a:t>Juan Pablo Arteaga</a:t>
             </a:r>
             <a:endParaRPr lang="en-US" sz="1300" dirty="0"/>
           </a:p>
@@ -3812,7 +3812,7 @@
                 <a:ea typeface="Arial" pitchFamily="34" charset="-122"/>
                 <a:cs typeface="Arial" pitchFamily="34" charset="-120"/>
               </a:rPr>
-              <a:t>[Rol]</a:t>
+              <a:t>CCO</a:t>
             </a:r>
             <a:endParaRPr lang="en-US" sz="1000" dirty="0"/>
           </a:p>
@@ -3968,7 +3968,7 @@
                 <a:ea typeface="Arial" pitchFamily="34" charset="-122"/>
                 <a:cs typeface="Arial" pitchFamily="34" charset="-120"/>
               </a:rPr>
-              <a:t>[Nombre]</a:t>
+              <a:t>Isabel Sofía García</a:t>
             </a:r>
             <a:endParaRPr lang="en-US" sz="1300" dirty="0"/>
           </a:p>
@@ -4007,7 +4007,7 @@
                 <a:ea typeface="Arial" pitchFamily="34" charset="-122"/>
                 <a:cs typeface="Arial" pitchFamily="34" charset="-120"/>
               </a:rPr>
-              <a:t>[Rol]</a:t>
+              <a:t>CFO</a:t>
             </a:r>
             <a:endParaRPr lang="en-US" sz="1000" dirty="0"/>
           </a:p>

--- a/miracle_capital_semilla_pitch.pptx
+++ b/miracle_capital_semilla_pitch.pptx
@@ -10964,12 +10964,12 @@
         </p:nvSpPr>
         <p:spPr>
           <a:xfrm>
-            <a:off x="502920" y="1371600"/>
-            <a:ext cx="8138160" cy="960120"/>
+            <a:off x="502920" y="1417320"/>
+            <a:ext cx="2542032" cy="1965960"/>
           </a:xfrm>
           <a:prstGeom prst="roundRect">
             <a:avLst>
-              <a:gd name="adj" fmla="val 8571"/>
+              <a:gd name="adj" fmla="val 4186"/>
             </a:avLst>
           </a:prstGeom>
           <a:solidFill>
@@ -10992,14 +10992,58 @@
       </p:sp>
       <p:sp>
         <p:nvSpPr>
-          <p:cNvPr id="5" name="Text 3"/>
-          <p:cNvSpPr/>
-          <p:nvPr/>
-        </p:nvSpPr>
-        <p:spPr>
-          <a:xfrm>
-            <a:off x="731520" y="1463040"/>
-            <a:ext cx="4475988" cy="201168"/>
+          <p:cNvPr id="5" name="Shape 3"/>
+          <p:cNvSpPr/>
+          <p:nvPr/>
+        </p:nvSpPr>
+        <p:spPr>
+          <a:xfrm>
+            <a:off x="1517904" y="1618488"/>
+            <a:ext cx="512064" cy="512064"/>
+          </a:xfrm>
+          <a:prstGeom prst="ellipse">
+            <a:avLst/>
+          </a:prstGeom>
+          <a:solidFill>
+            <a:srgbClr val="FFFFFF"/>
+          </a:solidFill>
+          <a:ln/>
+        </p:spPr>
+      </p:sp>
+      <p:pic>
+        <p:nvPicPr>
+          <p:cNvPr id="6" name="Image 0" descr="preencoded.png">    </p:cNvPr>
+          <p:cNvPicPr>
+            <a:picLocks noChangeAspect="1"/>
+          </p:cNvPicPr>
+          <p:nvPr/>
+        </p:nvPicPr>
+        <p:blipFill>
+          <a:blip r:embed="rId1"/>
+          <a:stretch>
+            <a:fillRect/>
+          </a:stretch>
+        </p:blipFill>
+        <p:spPr>
+          <a:xfrm>
+            <a:off x="1589593" y="1690177"/>
+            <a:ext cx="368686" cy="368686"/>
+          </a:xfrm>
+          <a:prstGeom prst="rect">
+            <a:avLst/>
+          </a:prstGeom>
+        </p:spPr>
+      </p:pic>
+      <p:sp>
+        <p:nvSpPr>
+          <p:cNvPr id="7" name="Text 4"/>
+          <p:cNvSpPr/>
+          <p:nvPr/>
+        </p:nvSpPr>
+        <p:spPr>
+          <a:xfrm>
+            <a:off x="640080" y="2240280"/>
+            <a:ext cx="2267712" cy="219456"/>
           </a:xfrm>
           <a:prstGeom prst="rect">
             <a:avLst/>
@@ -11011,11 +11055,11 @@
           <a:bodyPr wrap="square" lIns="0" tIns="0" rIns="0" bIns="0" rtlCol="0" anchor="ctr"/>
           <a:lstStyle/>
           <a:p>
-            <a:pPr indent="0" marL="0">
-              <a:buNone/>
-            </a:pPr>
-            <a:r>
-              <a:rPr lang="en-US" sz="800" b="1" spc="100" kern="0" dirty="0">
+            <a:pPr algn="ctr" indent="0" marL="0">
+              <a:buNone/>
+            </a:pPr>
+            <a:r>
+              <a:rPr lang="en-US" sz="850" b="1" spc="100" kern="0" dirty="0">
                 <a:solidFill>
                   <a:srgbClr val="0071E3"/>
                 </a:solidFill>
@@ -11023,22 +11067,61 @@
                 <a:ea typeface="Arial" pitchFamily="34" charset="-122"/>
                 <a:cs typeface="Arial" pitchFamily="34" charset="-120"/>
               </a:rPr>
-              <a:t>TAM · LATINOAMÉRICA</a:t>
-            </a:r>
-            <a:endParaRPr lang="en-US" sz="800" dirty="0"/>
-          </a:p>
-        </p:txBody>
-      </p:sp>
-      <p:sp>
-        <p:nvSpPr>
-          <p:cNvPr id="6" name="Text 4"/>
-          <p:cNvSpPr/>
-          <p:nvPr/>
-        </p:nvSpPr>
-        <p:spPr>
-          <a:xfrm>
-            <a:off x="731520" y="1664208"/>
-            <a:ext cx="4475988" cy="347472"/>
+              <a:t>TAM · LATAM</a:t>
+            </a:r>
+            <a:endParaRPr lang="en-US" sz="850" dirty="0"/>
+          </a:p>
+        </p:txBody>
+      </p:sp>
+      <p:sp>
+        <p:nvSpPr>
+          <p:cNvPr id="8" name="Text 5"/>
+          <p:cNvSpPr/>
+          <p:nvPr/>
+        </p:nvSpPr>
+        <p:spPr>
+          <a:xfrm>
+            <a:off x="594360" y="2478024"/>
+            <a:ext cx="2359152" cy="384048"/>
+          </a:xfrm>
+          <a:prstGeom prst="rect">
+            <a:avLst/>
+          </a:prstGeom>
+          <a:noFill/>
+          <a:ln/>
+        </p:spPr>
+        <p:txBody>
+          <a:bodyPr wrap="square" lIns="0" tIns="0" rIns="0" bIns="0" rtlCol="0" anchor="ctr"/>
+          <a:lstStyle/>
+          <a:p>
+            <a:pPr algn="ctr" indent="0" marL="0">
+              <a:buNone/>
+            </a:pPr>
+            <a:r>
+              <a:rPr lang="en-US" sz="1900" b="1" dirty="0">
+                <a:solidFill>
+                  <a:srgbClr val="0A3D91"/>
+                </a:solidFill>
+                <a:latin typeface="Arial" pitchFamily="34" charset="0"/>
+                <a:ea typeface="Arial" pitchFamily="34" charset="-122"/>
+                <a:cs typeface="Arial" pitchFamily="34" charset="-120"/>
+              </a:rPr>
+              <a:t>USD 66.400M</a:t>
+            </a:r>
+            <a:endParaRPr lang="en-US" sz="1900" dirty="0"/>
+          </a:p>
+        </p:txBody>
+      </p:sp>
+      <p:sp>
+        <p:nvSpPr>
+          <p:cNvPr id="9" name="Text 6"/>
+          <p:cNvSpPr/>
+          <p:nvPr/>
+        </p:nvSpPr>
+        <p:spPr>
+          <a:xfrm>
+            <a:off x="667512" y="2880360"/>
+            <a:ext cx="2212848" cy="457200"/>
           </a:xfrm>
           <a:prstGeom prst="rect">
             <a:avLst/>
@@ -11050,116 +11133,38 @@
           <a:bodyPr wrap="square" lIns="0" tIns="0" rIns="0" bIns="0" rtlCol="0" anchor="t"/>
           <a:lstStyle/>
           <a:p>
-            <a:pPr indent="0" marL="0">
-              <a:buNone/>
-            </a:pPr>
-            <a:r>
-              <a:rPr lang="en-US" sz="950" b="1" dirty="0">
-                <a:solidFill>
-                  <a:srgbClr val="1D1D1F"/>
-                </a:solidFill>
-                <a:latin typeface="Arial" pitchFamily="34" charset="0"/>
-                <a:ea typeface="Arial" pitchFamily="34" charset="-122"/>
-                <a:cs typeface="Arial" pitchFamily="34" charset="-120"/>
-              </a:rPr>
-              <a:t>Salud digital en LatAm</a:t>
-            </a:r>
-            <a:endParaRPr lang="en-US" sz="950" dirty="0"/>
-          </a:p>
-        </p:txBody>
-      </p:sp>
-      <p:sp>
-        <p:nvSpPr>
-          <p:cNvPr id="7" name="Text 5"/>
-          <p:cNvSpPr/>
-          <p:nvPr/>
-        </p:nvSpPr>
-        <p:spPr>
-          <a:xfrm>
-            <a:off x="731520" y="2029968"/>
-            <a:ext cx="7680960" cy="256032"/>
-          </a:xfrm>
-          <a:prstGeom prst="rect">
-            <a:avLst/>
-          </a:prstGeom>
-          <a:noFill/>
-          <a:ln/>
-        </p:spPr>
-        <p:txBody>
-          <a:bodyPr wrap="square" lIns="0" tIns="0" rIns="0" bIns="0" rtlCol="0" anchor="ctr"/>
-          <a:lstStyle/>
-          <a:p>
-            <a:pPr indent="0" marL="0">
-              <a:buNone/>
-            </a:pPr>
-            <a:r>
-              <a:rPr lang="en-US" sz="1250" b="1" dirty="0">
-                <a:solidFill>
-                  <a:srgbClr val="0A3D91"/>
-                </a:solidFill>
-                <a:latin typeface="Arial" pitchFamily="34" charset="0"/>
-                <a:ea typeface="Arial" pitchFamily="34" charset="-122"/>
-                <a:cs typeface="Arial" pitchFamily="34" charset="-120"/>
-              </a:rPr>
-              <a:t>USD 12.800M → 66.400M</a:t>
-            </a:r>
-            <a:endParaRPr lang="en-US" sz="1250" dirty="0"/>
-          </a:p>
-        </p:txBody>
-      </p:sp>
-      <p:sp>
-        <p:nvSpPr>
-          <p:cNvPr id="8" name="Text 6"/>
-          <p:cNvSpPr/>
-          <p:nvPr/>
-        </p:nvSpPr>
-        <p:spPr>
-          <a:xfrm>
-            <a:off x="4978908" y="1463040"/>
-            <a:ext cx="3418027" cy="777240"/>
-          </a:xfrm>
-          <a:prstGeom prst="rect">
-            <a:avLst/>
-          </a:prstGeom>
-          <a:noFill/>
-          <a:ln/>
-        </p:spPr>
-        <p:txBody>
-          <a:bodyPr wrap="square" lIns="0" tIns="0" rIns="0" bIns="0" rtlCol="0" anchor="ctr"/>
-          <a:lstStyle/>
-          <a:p>
-            <a:pPr algn="r" indent="0" marL="0">
-              <a:buNone/>
-            </a:pPr>
-            <a:r>
-              <a:rPr lang="en-US" sz="750" dirty="0">
-                <a:solidFill>
-                  <a:srgbClr val="6E6E73"/>
-                </a:solidFill>
-                <a:latin typeface="Arial" pitchFamily="34" charset="0"/>
-                <a:ea typeface="Arial" pitchFamily="34" charset="-122"/>
-                <a:cs typeface="Arial" pitchFamily="34" charset="-120"/>
-              </a:rPr>
-              <a:t>Tamaño 2024 y proyección 2033 · CAGR ≈ 20% anual</a:t>
-            </a:r>
-            <a:endParaRPr lang="en-US" sz="750" dirty="0"/>
-          </a:p>
-        </p:txBody>
-      </p:sp>
-      <p:sp>
-        <p:nvSpPr>
-          <p:cNvPr id="9" name="Shape 7"/>
-          <p:cNvSpPr/>
-          <p:nvPr/>
-        </p:nvSpPr>
-        <p:spPr>
-          <a:xfrm>
-            <a:off x="1398118" y="2459736"/>
-            <a:ext cx="6347765" cy="960120"/>
+            <a:pPr algn="ctr" indent="0" marL="0">
+              <a:buNone/>
+            </a:pPr>
+            <a:r>
+              <a:rPr lang="en-US" sz="900" dirty="0">
+                <a:solidFill>
+                  <a:srgbClr val="48484A"/>
+                </a:solidFill>
+                <a:latin typeface="Arial" pitchFamily="34" charset="0"/>
+                <a:ea typeface="Arial" pitchFamily="34" charset="-122"/>
+                <a:cs typeface="Arial" pitchFamily="34" charset="-120"/>
+              </a:rPr>
+              <a:t>Salud digital en LatAm para 2033 · CAGR ≈20%/año</a:t>
+            </a:r>
+            <a:endParaRPr lang="en-US" sz="900" dirty="0"/>
+          </a:p>
+        </p:txBody>
+      </p:sp>
+      <p:sp>
+        <p:nvSpPr>
+          <p:cNvPr id="10" name="Shape 7"/>
+          <p:cNvSpPr/>
+          <p:nvPr/>
+        </p:nvSpPr>
+        <p:spPr>
+          <a:xfrm>
+            <a:off x="3300984" y="1417320"/>
+            <a:ext cx="2542032" cy="1965960"/>
           </a:xfrm>
           <a:prstGeom prst="roundRect">
             <a:avLst>
-              <a:gd name="adj" fmla="val 8571"/>
+              <a:gd name="adj" fmla="val 4186"/>
             </a:avLst>
           </a:prstGeom>
           <a:solidFill>
@@ -11182,14 +11187,58 @@
       </p:sp>
       <p:sp>
         <p:nvSpPr>
-          <p:cNvPr id="10" name="Text 8"/>
-          <p:cNvSpPr/>
-          <p:nvPr/>
-        </p:nvSpPr>
-        <p:spPr>
-          <a:xfrm>
-            <a:off x="1626718" y="2551176"/>
-            <a:ext cx="3491271" cy="201168"/>
+          <p:cNvPr id="11" name="Shape 8"/>
+          <p:cNvSpPr/>
+          <p:nvPr/>
+        </p:nvSpPr>
+        <p:spPr>
+          <a:xfrm>
+            <a:off x="4315968" y="1618488"/>
+            <a:ext cx="512064" cy="512064"/>
+          </a:xfrm>
+          <a:prstGeom prst="ellipse">
+            <a:avLst/>
+          </a:prstGeom>
+          <a:solidFill>
+            <a:srgbClr val="FFFFFF"/>
+          </a:solidFill>
+          <a:ln/>
+        </p:spPr>
+      </p:sp>
+      <p:pic>
+        <p:nvPicPr>
+          <p:cNvPr id="12" name="Image 1" descr="preencoded.png">    </p:cNvPr>
+          <p:cNvPicPr>
+            <a:picLocks noChangeAspect="1"/>
+          </p:cNvPicPr>
+          <p:nvPr/>
+        </p:nvPicPr>
+        <p:blipFill>
+          <a:blip r:embed="rId2"/>
+          <a:stretch>
+            <a:fillRect/>
+          </a:stretch>
+        </p:blipFill>
+        <p:spPr>
+          <a:xfrm>
+            <a:off x="4387657" y="1690177"/>
+            <a:ext cx="368686" cy="368686"/>
+          </a:xfrm>
+          <a:prstGeom prst="rect">
+            <a:avLst/>
+          </a:prstGeom>
+        </p:spPr>
+      </p:pic>
+      <p:sp>
+        <p:nvSpPr>
+          <p:cNvPr id="13" name="Text 9"/>
+          <p:cNvSpPr/>
+          <p:nvPr/>
+        </p:nvSpPr>
+        <p:spPr>
+          <a:xfrm>
+            <a:off x="3438144" y="2240280"/>
+            <a:ext cx="2267712" cy="219456"/>
           </a:xfrm>
           <a:prstGeom prst="rect">
             <a:avLst/>
@@ -11201,11 +11250,11 @@
           <a:bodyPr wrap="square" lIns="0" tIns="0" rIns="0" bIns="0" rtlCol="0" anchor="ctr"/>
           <a:lstStyle/>
           <a:p>
-            <a:pPr indent="0" marL="0">
-              <a:buNone/>
-            </a:pPr>
-            <a:r>
-              <a:rPr lang="en-US" sz="800" b="1" spc="100" kern="0" dirty="0">
+            <a:pPr algn="ctr" indent="0" marL="0">
+              <a:buNone/>
+            </a:pPr>
+            <a:r>
+              <a:rPr lang="en-US" sz="850" b="1" spc="100" kern="0" dirty="0">
                 <a:solidFill>
                   <a:srgbClr val="0071E3"/>
                 </a:solidFill>
@@ -11215,20 +11264,59 @@
               </a:rPr>
               <a:t>SAM · COLOMBIA</a:t>
             </a:r>
-            <a:endParaRPr lang="en-US" sz="800" dirty="0"/>
-          </a:p>
-        </p:txBody>
-      </p:sp>
-      <p:sp>
-        <p:nvSpPr>
-          <p:cNvPr id="11" name="Text 9"/>
-          <p:cNvSpPr/>
-          <p:nvPr/>
-        </p:nvSpPr>
-        <p:spPr>
-          <a:xfrm>
-            <a:off x="1626718" y="2752344"/>
-            <a:ext cx="3491271" cy="347472"/>
+            <a:endParaRPr lang="en-US" sz="850" dirty="0"/>
+          </a:p>
+        </p:txBody>
+      </p:sp>
+      <p:sp>
+        <p:nvSpPr>
+          <p:cNvPr id="14" name="Text 10"/>
+          <p:cNvSpPr/>
+          <p:nvPr/>
+        </p:nvSpPr>
+        <p:spPr>
+          <a:xfrm>
+            <a:off x="3392424" y="2478024"/>
+            <a:ext cx="2359152" cy="384048"/>
+          </a:xfrm>
+          <a:prstGeom prst="rect">
+            <a:avLst/>
+          </a:prstGeom>
+          <a:noFill/>
+          <a:ln/>
+        </p:spPr>
+        <p:txBody>
+          <a:bodyPr wrap="square" lIns="0" tIns="0" rIns="0" bIns="0" rtlCol="0" anchor="ctr"/>
+          <a:lstStyle/>
+          <a:p>
+            <a:pPr algn="ctr" indent="0" marL="0">
+              <a:buNone/>
+            </a:pPr>
+            <a:r>
+              <a:rPr lang="en-US" sz="1900" b="1" dirty="0">
+                <a:solidFill>
+                  <a:srgbClr val="0A3D91"/>
+                </a:solidFill>
+                <a:latin typeface="Arial" pitchFamily="34" charset="0"/>
+                <a:ea typeface="Arial" pitchFamily="34" charset="-122"/>
+                <a:cs typeface="Arial" pitchFamily="34" charset="-120"/>
+              </a:rPr>
+              <a:t>137.700+</a:t>
+            </a:r>
+            <a:endParaRPr lang="en-US" sz="1900" dirty="0"/>
+          </a:p>
+        </p:txBody>
+      </p:sp>
+      <p:sp>
+        <p:nvSpPr>
+          <p:cNvPr id="15" name="Text 11"/>
+          <p:cNvSpPr/>
+          <p:nvPr/>
+        </p:nvSpPr>
+        <p:spPr>
+          <a:xfrm>
+            <a:off x="3465576" y="2880360"/>
+            <a:ext cx="2212848" cy="457200"/>
           </a:xfrm>
           <a:prstGeom prst="rect">
             <a:avLst/>
@@ -11240,116 +11328,38 @@
           <a:bodyPr wrap="square" lIns="0" tIns="0" rIns="0" bIns="0" rtlCol="0" anchor="t"/>
           <a:lstStyle/>
           <a:p>
-            <a:pPr indent="0" marL="0">
-              <a:buNone/>
-            </a:pPr>
-            <a:r>
-              <a:rPr lang="en-US" sz="950" b="1" dirty="0">
-                <a:solidFill>
-                  <a:srgbClr val="1D1D1F"/>
-                </a:solidFill>
-                <a:latin typeface="Arial" pitchFamily="34" charset="0"/>
-                <a:ea typeface="Arial" pitchFamily="34" charset="-122"/>
-                <a:cs typeface="Arial" pitchFamily="34" charset="-120"/>
-              </a:rPr>
-              <a:t>Documentación clínica asistida por IA</a:t>
-            </a:r>
-            <a:endParaRPr lang="en-US" sz="950" dirty="0"/>
-          </a:p>
-        </p:txBody>
-      </p:sp>
-      <p:sp>
-        <p:nvSpPr>
-          <p:cNvPr id="12" name="Text 10"/>
-          <p:cNvSpPr/>
-          <p:nvPr/>
-        </p:nvSpPr>
-        <p:spPr>
-          <a:xfrm>
-            <a:off x="1626718" y="3118104"/>
-            <a:ext cx="5890565" cy="256032"/>
-          </a:xfrm>
-          <a:prstGeom prst="rect">
-            <a:avLst/>
-          </a:prstGeom>
-          <a:noFill/>
-          <a:ln/>
-        </p:spPr>
-        <p:txBody>
-          <a:bodyPr wrap="square" lIns="0" tIns="0" rIns="0" bIns="0" rtlCol="0" anchor="ctr"/>
-          <a:lstStyle/>
-          <a:p>
-            <a:pPr indent="0" marL="0">
-              <a:buNone/>
-            </a:pPr>
-            <a:r>
-              <a:rPr lang="en-US" sz="1250" b="1" dirty="0">
-                <a:solidFill>
-                  <a:srgbClr val="0A3D91"/>
-                </a:solidFill>
-                <a:latin typeface="Arial" pitchFamily="34" charset="0"/>
-                <a:ea typeface="Arial" pitchFamily="34" charset="-122"/>
-                <a:cs typeface="Arial" pitchFamily="34" charset="-120"/>
-              </a:rPr>
-              <a:t>137.700+ médicos · 10.839 IPS</a:t>
-            </a:r>
-            <a:endParaRPr lang="en-US" sz="1250" dirty="0"/>
-          </a:p>
-        </p:txBody>
-      </p:sp>
-      <p:sp>
-        <p:nvSpPr>
-          <p:cNvPr id="13" name="Text 11"/>
-          <p:cNvSpPr/>
-          <p:nvPr/>
-        </p:nvSpPr>
-        <p:spPr>
-          <a:xfrm>
-            <a:off x="4889388" y="2551176"/>
-            <a:ext cx="2666061" cy="777240"/>
-          </a:xfrm>
-          <a:prstGeom prst="rect">
-            <a:avLst/>
-          </a:prstGeom>
-          <a:noFill/>
-          <a:ln/>
-        </p:spPr>
-        <p:txBody>
-          <a:bodyPr wrap="square" lIns="0" tIns="0" rIns="0" bIns="0" rtlCol="0" anchor="ctr"/>
-          <a:lstStyle/>
-          <a:p>
-            <a:pPr algn="r" indent="0" marL="0">
-              <a:buNone/>
-            </a:pPr>
-            <a:r>
-              <a:rPr lang="en-US" sz="750" dirty="0">
-                <a:solidFill>
-                  <a:srgbClr val="6E6E73"/>
-                </a:solidFill>
-                <a:latin typeface="Arial" pitchFamily="34" charset="0"/>
-                <a:ea typeface="Arial" pitchFamily="34" charset="-122"/>
-                <a:cs typeface="Arial" pitchFamily="34" charset="-120"/>
-              </a:rPr>
-              <a:t>Médicos activos (2023) e IPS habilitadas (91% privadas, jun 2025)</a:t>
-            </a:r>
-            <a:endParaRPr lang="en-US" sz="750" dirty="0"/>
-          </a:p>
-        </p:txBody>
-      </p:sp>
-      <p:sp>
-        <p:nvSpPr>
-          <p:cNvPr id="14" name="Shape 12"/>
-          <p:cNvSpPr/>
-          <p:nvPr/>
-        </p:nvSpPr>
-        <p:spPr>
-          <a:xfrm>
-            <a:off x="2293315" y="3547872"/>
-            <a:ext cx="4557370" cy="960120"/>
+            <a:pPr algn="ctr" indent="0" marL="0">
+              <a:buNone/>
+            </a:pPr>
+            <a:r>
+              <a:rPr lang="en-US" sz="900" dirty="0">
+                <a:solidFill>
+                  <a:srgbClr val="48484A"/>
+                </a:solidFill>
+                <a:latin typeface="Arial" pitchFamily="34" charset="0"/>
+                <a:ea typeface="Arial" pitchFamily="34" charset="-122"/>
+                <a:cs typeface="Arial" pitchFamily="34" charset="-120"/>
+              </a:rPr>
+              <a:t>médicos activos · 10.839 IPS habilitadas</a:t>
+            </a:r>
+            <a:endParaRPr lang="en-US" sz="900" dirty="0"/>
+          </a:p>
+        </p:txBody>
+      </p:sp>
+      <p:sp>
+        <p:nvSpPr>
+          <p:cNvPr id="16" name="Shape 12"/>
+          <p:cNvSpPr/>
+          <p:nvPr/>
+        </p:nvSpPr>
+        <p:spPr>
+          <a:xfrm>
+            <a:off x="6099048" y="1417320"/>
+            <a:ext cx="2542032" cy="1965960"/>
           </a:xfrm>
           <a:prstGeom prst="roundRect">
             <a:avLst>
-              <a:gd name="adj" fmla="val 8571"/>
+              <a:gd name="adj" fmla="val 4186"/>
             </a:avLst>
           </a:prstGeom>
           <a:solidFill>
@@ -11372,14 +11382,58 @@
       </p:sp>
       <p:sp>
         <p:nvSpPr>
-          <p:cNvPr id="15" name="Text 13"/>
-          <p:cNvSpPr/>
-          <p:nvPr/>
-        </p:nvSpPr>
-        <p:spPr>
-          <a:xfrm>
-            <a:off x="2521915" y="3639312"/>
-            <a:ext cx="2506553" cy="201168"/>
+          <p:cNvPr id="17" name="Shape 13"/>
+          <p:cNvSpPr/>
+          <p:nvPr/>
+        </p:nvSpPr>
+        <p:spPr>
+          <a:xfrm>
+            <a:off x="7114032" y="1618488"/>
+            <a:ext cx="512064" cy="512064"/>
+          </a:xfrm>
+          <a:prstGeom prst="ellipse">
+            <a:avLst/>
+          </a:prstGeom>
+          <a:solidFill>
+            <a:srgbClr val="FFFFFF"/>
+          </a:solidFill>
+          <a:ln/>
+        </p:spPr>
+      </p:sp>
+      <p:pic>
+        <p:nvPicPr>
+          <p:cNvPr id="18" name="Image 2" descr="preencoded.png">    </p:cNvPr>
+          <p:cNvPicPr>
+            <a:picLocks noChangeAspect="1"/>
+          </p:cNvPicPr>
+          <p:nvPr/>
+        </p:nvPicPr>
+        <p:blipFill>
+          <a:blip r:embed="rId3"/>
+          <a:stretch>
+            <a:fillRect/>
+          </a:stretch>
+        </p:blipFill>
+        <p:spPr>
+          <a:xfrm>
+            <a:off x="7185721" y="1690177"/>
+            <a:ext cx="368686" cy="368686"/>
+          </a:xfrm>
+          <a:prstGeom prst="rect">
+            <a:avLst/>
+          </a:prstGeom>
+        </p:spPr>
+      </p:pic>
+      <p:sp>
+        <p:nvSpPr>
+          <p:cNvPr id="19" name="Text 14"/>
+          <p:cNvSpPr/>
+          <p:nvPr/>
+        </p:nvSpPr>
+        <p:spPr>
+          <a:xfrm>
+            <a:off x="6236208" y="2240280"/>
+            <a:ext cx="2267712" cy="219456"/>
           </a:xfrm>
           <a:prstGeom prst="rect">
             <a:avLst/>
@@ -11391,127 +11445,127 @@
           <a:bodyPr wrap="square" lIns="0" tIns="0" rIns="0" bIns="0" rtlCol="0" anchor="ctr"/>
           <a:lstStyle/>
           <a:p>
+            <a:pPr algn="ctr" indent="0" marL="0">
+              <a:buNone/>
+            </a:pPr>
+            <a:r>
+              <a:rPr lang="en-US" sz="850" b="1" spc="100" kern="0" dirty="0">
+                <a:solidFill>
+                  <a:srgbClr val="0071E3"/>
+                </a:solidFill>
+                <a:latin typeface="Arial" pitchFamily="34" charset="0"/>
+                <a:ea typeface="Arial" pitchFamily="34" charset="-122"/>
+                <a:cs typeface="Arial" pitchFamily="34" charset="-120"/>
+              </a:rPr>
+              <a:t>SOM · ANTIOQUIA</a:t>
+            </a:r>
+            <a:endParaRPr lang="en-US" sz="850" dirty="0"/>
+          </a:p>
+        </p:txBody>
+      </p:sp>
+      <p:sp>
+        <p:nvSpPr>
+          <p:cNvPr id="20" name="Text 15"/>
+          <p:cNvSpPr/>
+          <p:nvPr/>
+        </p:nvSpPr>
+        <p:spPr>
+          <a:xfrm>
+            <a:off x="6190488" y="2478024"/>
+            <a:ext cx="2359152" cy="384048"/>
+          </a:xfrm>
+          <a:prstGeom prst="rect">
+            <a:avLst/>
+          </a:prstGeom>
+          <a:noFill/>
+          <a:ln/>
+        </p:spPr>
+        <p:txBody>
+          <a:bodyPr wrap="square" lIns="0" tIns="0" rIns="0" bIns="0" rtlCol="0" anchor="ctr"/>
+          <a:lstStyle/>
+          <a:p>
+            <a:pPr algn="ctr" indent="0" marL="0">
+              <a:buNone/>
+            </a:pPr>
+            <a:r>
+              <a:rPr lang="en-US" sz="1900" b="1" dirty="0">
+                <a:solidFill>
+                  <a:srgbClr val="0A3D91"/>
+                </a:solidFill>
+                <a:latin typeface="Arial" pitchFamily="34" charset="0"/>
+                <a:ea typeface="Arial" pitchFamily="34" charset="-122"/>
+                <a:cs typeface="Arial" pitchFamily="34" charset="-120"/>
+              </a:rPr>
+              <a:t>≈ 940 IPS</a:t>
+            </a:r>
+            <a:endParaRPr lang="en-US" sz="1900" dirty="0"/>
+          </a:p>
+        </p:txBody>
+      </p:sp>
+      <p:sp>
+        <p:nvSpPr>
+          <p:cNvPr id="21" name="Text 16"/>
+          <p:cNvSpPr/>
+          <p:nvPr/>
+        </p:nvSpPr>
+        <p:spPr>
+          <a:xfrm>
+            <a:off x="6263640" y="2880360"/>
+            <a:ext cx="2212848" cy="457200"/>
+          </a:xfrm>
+          <a:prstGeom prst="rect">
+            <a:avLst/>
+          </a:prstGeom>
+          <a:noFill/>
+          <a:ln/>
+        </p:spPr>
+        <p:txBody>
+          <a:bodyPr wrap="square" lIns="0" tIns="0" rIns="0" bIns="0" rtlCol="0" anchor="t"/>
+          <a:lstStyle/>
+          <a:p>
+            <a:pPr algn="ctr" indent="0" marL="0">
+              <a:buNone/>
+            </a:pPr>
+            <a:r>
+              <a:rPr lang="en-US" sz="900" dirty="0">
+                <a:solidFill>
+                  <a:srgbClr val="48484A"/>
+                </a:solidFill>
+                <a:latin typeface="Arial" pitchFamily="34" charset="0"/>
+                <a:ea typeface="Arial" pitchFamily="34" charset="-122"/>
+                <a:cs typeface="Arial" pitchFamily="34" charset="-120"/>
+              </a:rPr>
+              <a:t>Pilotos en Medellín y área metropolitana</a:t>
+            </a:r>
+            <a:endParaRPr lang="en-US" sz="900" dirty="0"/>
+          </a:p>
+        </p:txBody>
+      </p:sp>
+      <p:sp>
+        <p:nvSpPr>
+          <p:cNvPr id="22" name="Text 17"/>
+          <p:cNvSpPr/>
+          <p:nvPr/>
+        </p:nvSpPr>
+        <p:spPr>
+          <a:xfrm>
+            <a:off x="502920" y="3520440"/>
+            <a:ext cx="8138160" cy="365760"/>
+          </a:xfrm>
+          <a:prstGeom prst="rect">
+            <a:avLst/>
+          </a:prstGeom>
+          <a:noFill/>
+          <a:ln/>
+        </p:spPr>
+        <p:txBody>
+          <a:bodyPr wrap="square" lIns="0" tIns="0" rIns="0" bIns="0" rtlCol="0" anchor="ctr"/>
+          <a:lstStyle/>
+          <a:p>
             <a:pPr indent="0" marL="0">
               <a:buNone/>
             </a:pPr>
             <a:r>
-              <a:rPr lang="en-US" sz="800" b="1" spc="100" kern="0" dirty="0">
-                <a:solidFill>
-                  <a:srgbClr val="0071E3"/>
-                </a:solidFill>
-                <a:latin typeface="Arial" pitchFamily="34" charset="0"/>
-                <a:ea typeface="Arial" pitchFamily="34" charset="-122"/>
-                <a:cs typeface="Arial" pitchFamily="34" charset="-120"/>
-              </a:rPr>
-              <a:t>SOM · ANTIOQUIA PRIMERO</a:t>
-            </a:r>
-            <a:endParaRPr lang="en-US" sz="800" dirty="0"/>
-          </a:p>
-        </p:txBody>
-      </p:sp>
-      <p:sp>
-        <p:nvSpPr>
-          <p:cNvPr id="16" name="Text 14"/>
-          <p:cNvSpPr/>
-          <p:nvPr/>
-        </p:nvSpPr>
-        <p:spPr>
-          <a:xfrm>
-            <a:off x="2521915" y="3840480"/>
-            <a:ext cx="2506553" cy="347472"/>
-          </a:xfrm>
-          <a:prstGeom prst="rect">
-            <a:avLst/>
-          </a:prstGeom>
-          <a:noFill/>
-          <a:ln/>
-        </p:spPr>
-        <p:txBody>
-          <a:bodyPr wrap="square" lIns="0" tIns="0" rIns="0" bIns="0" rtlCol="0" anchor="t"/>
-          <a:lstStyle/>
-          <a:p>
-            <a:pPr indent="0" marL="0">
-              <a:buNone/>
-            </a:pPr>
-            <a:r>
-              <a:rPr lang="en-US" sz="950" b="1" dirty="0">
-                <a:solidFill>
-                  <a:srgbClr val="1D1D1F"/>
-                </a:solidFill>
-                <a:latin typeface="Arial" pitchFamily="34" charset="0"/>
-                <a:ea typeface="Arial" pitchFamily="34" charset="-122"/>
-                <a:cs typeface="Arial" pitchFamily="34" charset="-120"/>
-              </a:rPr>
-              <a:t>Pilotos en Medellín y área metropolitana</a:t>
-            </a:r>
-            <a:endParaRPr lang="en-US" sz="950" dirty="0"/>
-          </a:p>
-        </p:txBody>
-      </p:sp>
-      <p:sp>
-        <p:nvSpPr>
-          <p:cNvPr id="17" name="Text 15"/>
-          <p:cNvSpPr/>
-          <p:nvPr/>
-        </p:nvSpPr>
-        <p:spPr>
-          <a:xfrm>
-            <a:off x="2521915" y="4206240"/>
-            <a:ext cx="4100170" cy="256032"/>
-          </a:xfrm>
-          <a:prstGeom prst="rect">
-            <a:avLst/>
-          </a:prstGeom>
-          <a:noFill/>
-          <a:ln/>
-        </p:spPr>
-        <p:txBody>
-          <a:bodyPr wrap="square" lIns="0" tIns="0" rIns="0" bIns="0" rtlCol="0" anchor="ctr"/>
-          <a:lstStyle/>
-          <a:p>
-            <a:pPr indent="0" marL="0">
-              <a:buNone/>
-            </a:pPr>
-            <a:r>
-              <a:rPr lang="en-US" sz="1250" b="1" dirty="0">
-                <a:solidFill>
-                  <a:srgbClr val="0A3D91"/>
-                </a:solidFill>
-                <a:latin typeface="Arial" pitchFamily="34" charset="0"/>
-                <a:ea typeface="Arial" pitchFamily="34" charset="-122"/>
-                <a:cs typeface="Arial" pitchFamily="34" charset="-120"/>
-              </a:rPr>
-              <a:t>≈ 940 IPS</a:t>
-            </a:r>
-            <a:endParaRPr lang="en-US" sz="1250" dirty="0"/>
-          </a:p>
-        </p:txBody>
-      </p:sp>
-      <p:sp>
-        <p:nvSpPr>
-          <p:cNvPr id="18" name="Text 16"/>
-          <p:cNvSpPr/>
-          <p:nvPr/>
-        </p:nvSpPr>
-        <p:spPr>
-          <a:xfrm>
-            <a:off x="4799868" y="3639312"/>
-            <a:ext cx="1914095" cy="777240"/>
-          </a:xfrm>
-          <a:prstGeom prst="rect">
-            <a:avLst/>
-          </a:prstGeom>
-          <a:noFill/>
-          <a:ln/>
-        </p:spPr>
-        <p:txBody>
-          <a:bodyPr wrap="square" lIns="0" tIns="0" rIns="0" bIns="0" rtlCol="0" anchor="ctr"/>
-          <a:lstStyle/>
-          <a:p>
-            <a:pPr algn="r" indent="0" marL="0">
-              <a:buNone/>
-            </a:pPr>
-            <a:r>
               <a:rPr lang="en-US" sz="750" dirty="0">
                 <a:solidFill>
                   <a:srgbClr val="6E6E73"/>
@@ -11520,48 +11574,9 @@
                 <a:ea typeface="Arial" pitchFamily="34" charset="-122"/>
                 <a:cs typeface="Arial" pitchFamily="34" charset="-120"/>
               </a:rPr>
-              <a:t>Consultorios, clínicas e IPS de alto volumen</a:t>
+              <a:t>Fuentes: Market Data Forecast — LatAm Digital Health (CAGR 20,05%); MinSalud 2023; REPS jun 2025 vía Consultorsalud/UNIPS; datos.gov.co — Prestadores de Salud Antioquia.</a:t>
             </a:r>
             <a:endParaRPr lang="en-US" sz="750" dirty="0"/>
-          </a:p>
-        </p:txBody>
-      </p:sp>
-      <p:sp>
-        <p:nvSpPr>
-          <p:cNvPr id="19" name="Text 17"/>
-          <p:cNvSpPr/>
-          <p:nvPr/>
-        </p:nvSpPr>
-        <p:spPr>
-          <a:xfrm>
-            <a:off x="502920" y="4727448"/>
-            <a:ext cx="8138160" cy="457200"/>
-          </a:xfrm>
-          <a:prstGeom prst="rect">
-            <a:avLst/>
-          </a:prstGeom>
-          <a:noFill/>
-          <a:ln/>
-        </p:spPr>
-        <p:txBody>
-          <a:bodyPr wrap="square" lIns="0" tIns="0" rIns="0" bIns="0" rtlCol="0" anchor="ctr"/>
-          <a:lstStyle/>
-          <a:p>
-            <a:pPr indent="0" marL="0">
-              <a:buNone/>
-            </a:pPr>
-            <a:r>
-              <a:rPr lang="en-US" sz="700" dirty="0">
-                <a:solidFill>
-                  <a:srgbClr val="6E6E73"/>
-                </a:solidFill>
-                <a:latin typeface="Arial" pitchFamily="34" charset="0"/>
-                <a:ea typeface="Arial" pitchFamily="34" charset="-122"/>
-                <a:cs typeface="Arial" pitchFamily="34" charset="-120"/>
-              </a:rPr>
-              <a:t>Fuentes: Market Data Forecast — LatAm Digital Health (USD 12,82 mil M en 2024 → USD 66,4 mil M en 2033, CAGR 20,05%); MinSalud 2023 (137.700+ médicos); REPS jun 2025 vía Consultorsalud/UNIPS (10.839 IPS); datos.gov.co — Prestadores de Salud Antioquia.</a:t>
-            </a:r>
-            <a:endParaRPr lang="en-US" sz="700" dirty="0"/>
           </a:p>
         </p:txBody>
       </p:sp>

--- a/miracle_capital_semilla_pitch.pptx
+++ b/miracle_capital_semilla_pitch.pptx
@@ -17,10 +17,9 @@
     <p:sldId id="265" r:id="rId11"/>
     <p:sldId id="266" r:id="rId12"/>
     <p:sldId id="267" r:id="rId13"/>
-    <p:sldId id="268" r:id="rId14"/>
   </p:sldIdLst>
   <p:notesMasterIdLst>
-    <p:notesMasterId r:id="rId15"/>
+    <p:notesMasterId r:id="rId14"/>
   </p:notesMasterIdLst>
   <p:sldSz cx="9144000" cy="5143500"/>
   <p:notesSz cx="5143500" cy="9144000"/>
@@ -802,94 +801,6 @@
             <a:fld id="{F7021451-1387-4CA6-816F-3879F97B5CBC}" type="slidenum">
               <a:rPr lang="en-US"/>
               <a:t>12</a:t>
-            </a:fld>
-            <a:endParaRPr lang="en-US"/>
-          </a:p>
-        </p:txBody>
-      </p:sp>
-    </p:spTree>
-    <p:extLst>
-      <p:ext uri="{BB962C8B-B14F-4D97-AF65-F5344CB8AC3E}">
-        <p14:creationId xmlns:p14="http://schemas.microsoft.com/office/powerpoint/2010/main" val="1024086991"/>
-      </p:ext>
-    </p:extLst>
-  </p:cSld>
-  <p:clrMapOvr>
-    <a:masterClrMapping/>
-  </p:clrMapOvr>
-</p:notes>
-</file>
-
-<file path=ppt/notesSlides/notesSlide13.xml><?xml version="1.0" encoding="utf-8"?>
-<p:notes xmlns:a="http://schemas.openxmlformats.org/drawingml/2006/main" xmlns:r="http://schemas.openxmlformats.org/officeDocument/2006/relationships" xmlns:p="http://schemas.openxmlformats.org/presentationml/2006/main">
-  <p:cSld>
-    <p:spTree>
-      <p:nvGrpSpPr>
-        <p:cNvPr id="1" name=""/>
-        <p:cNvGrpSpPr/>
-        <p:nvPr/>
-      </p:nvGrpSpPr>
-      <p:grpSpPr>
-        <a:xfrm>
-          <a:off x="0" y="0"/>
-          <a:ext cx="0" cy="0"/>
-          <a:chOff x="0" y="0"/>
-          <a:chExt cx="0" cy="0"/>
-        </a:xfrm>
-      </p:grpSpPr>
-      <p:sp>
-        <p:nvSpPr>
-          <p:cNvPr id="2" name="Slide Image Placeholder 1"/>
-          <p:cNvSpPr>
-            <a:spLocks noGrp="1" noRot="1" noChangeAspect="1"/>
-          </p:cNvSpPr>
-          <p:nvPr>
-            <p:ph type="sldImg"/>
-          </p:nvPr>
-        </p:nvSpPr>
-        <p:spPr/>
-      </p:sp>
-      <p:sp>
-        <p:nvSpPr>
-          <p:cNvPr id="3" name="Notes Placeholder 2"/>
-          <p:cNvSpPr>
-            <a:spLocks noGrp="1"/>
-          </p:cNvSpPr>
-          <p:nvPr>
-            <p:ph type="body" idx="1"/>
-          </p:nvPr>
-        </p:nvSpPr>
-        <p:spPr/>
-        <p:txBody>
-          <a:bodyPr/>
-          <a:lstStyle/>
-          <a:p>
-            <a:r>
-              <a:rPr lang="en-US" dirty="0"/>
-              <a:t/>
-            </a:r>
-            <a:endParaRPr lang="en-US" dirty="0"/>
-          </a:p>
-        </p:txBody>
-      </p:sp>
-      <p:sp>
-        <p:nvSpPr>
-          <p:cNvPr id="4" name="Slide Number Placeholder 3"/>
-          <p:cNvSpPr>
-            <a:spLocks noGrp="1"/>
-          </p:cNvSpPr>
-          <p:nvPr>
-            <p:ph type="sldNum" sz="quarter" idx="10"/>
-          </p:nvPr>
-        </p:nvSpPr>
-        <p:spPr/>
-        <p:txBody>
-          <a:bodyPr/>
-          <a:lstStyle/>
-          <a:p>
-            <a:fld id="{F7021451-1387-4CA6-816F-3879F97B5CBC}" type="slidenum">
-              <a:rPr lang="en-US"/>
-              <a:t>13</a:t>
             </a:fld>
             <a:endParaRPr lang="en-US"/>
           </a:p>
@@ -2479,7 +2390,7 @@
                 <a:ea typeface="Arial" pitchFamily="34" charset="-122"/>
                 <a:cs typeface="Arial" pitchFamily="34" charset="-120"/>
               </a:rPr>
-              <a:t>DEFENSIBILIDAD</a:t>
+              <a:t>EQUIPO</a:t>
             </a:r>
             <a:endParaRPr lang="en-US" sz="1050" dirty="0"/>
           </a:p>
@@ -2493,7 +2404,7 @@
         </p:nvSpPr>
         <p:spPr>
           <a:xfrm>
-            <a:off x="502920" y="658368"/>
+            <a:off x="502920" y="685800"/>
             <a:ext cx="8138160" cy="548640"/>
           </a:xfrm>
           <a:prstGeom prst="rect">
@@ -2510,7 +2421,7 @@
               <a:buNone/>
             </a:pPr>
             <a:r>
-              <a:rPr lang="en-US" sz="2200" b="1" dirty="0">
+              <a:rPr lang="en-US" sz="2300" b="1" dirty="0">
                 <a:solidFill>
                   <a:srgbClr val="1D1D1F"/>
                 </a:solidFill>
@@ -2518,23 +2429,9 @@
                 <a:ea typeface="Arial" pitchFamily="34" charset="-122"/>
                 <a:cs typeface="Arial" pitchFamily="34" charset="-120"/>
               </a:rPr>
-              <a:t>Lo difícil no es transcribir. </a:t>
-            </a:r>
-            <a:pPr indent="0" marL="0">
-              <a:buNone/>
-            </a:pPr>
-            <a:r>
-              <a:rPr lang="en-US" sz="2200" b="1" dirty="0">
-                <a:solidFill>
-                  <a:srgbClr val="0A3D91"/>
-                </a:solidFill>
-                <a:latin typeface="Arial" pitchFamily="34" charset="0"/>
-                <a:ea typeface="Arial" pitchFamily="34" charset="-122"/>
-                <a:cs typeface="Arial" pitchFamily="34" charset="-120"/>
-              </a:rPr>
-              <a:t>Es todo lo demás.</a:t>
-            </a:r>
-            <a:endParaRPr lang="en-US" sz="2200" dirty="0"/>
+              <a:t>El equipo para construir, vender y validar en salud.</a:t>
+            </a:r>
+            <a:endParaRPr lang="en-US" sz="2300" dirty="0"/>
           </a:p>
         </p:txBody>
       </p:sp>
@@ -2546,12 +2443,12 @@
         </p:nvSpPr>
         <p:spPr>
           <a:xfrm>
-            <a:off x="502920" y="1325880"/>
-            <a:ext cx="2542032" cy="2148840"/>
+            <a:off x="502920" y="1463040"/>
+            <a:ext cx="3931920" cy="1234440"/>
           </a:xfrm>
           <a:prstGeom prst="roundRect">
             <a:avLst>
-              <a:gd name="adj" fmla="val 3830"/>
+              <a:gd name="adj" fmla="val 6667"/>
             </a:avLst>
           </a:prstGeom>
           <a:solidFill>
@@ -2580,8 +2477,8 @@
         </p:nvSpPr>
         <p:spPr>
           <a:xfrm>
-            <a:off x="685800" y="1508760"/>
-            <a:ext cx="384048" cy="384048"/>
+            <a:off x="704088" y="1664208"/>
+            <a:ext cx="502920" cy="502920"/>
           </a:xfrm>
           <a:prstGeom prst="ellipse">
             <a:avLst/>
@@ -2608,8 +2505,8 @@
         </p:blipFill>
         <p:spPr>
           <a:xfrm>
-            <a:off x="739567" y="1562527"/>
-            <a:ext cx="276515" cy="276515"/>
+            <a:off x="774497" y="1734617"/>
+            <a:ext cx="362102" cy="362102"/>
           </a:xfrm>
           <a:prstGeom prst="rect">
             <a:avLst/>
@@ -2624,8 +2521,8 @@
         </p:nvSpPr>
         <p:spPr>
           <a:xfrm>
-            <a:off x="685800" y="1984248"/>
-            <a:ext cx="2176272" cy="457200"/>
+            <a:off x="1325880" y="1609344"/>
+            <a:ext cx="2926080" cy="365760"/>
           </a:xfrm>
           <a:prstGeom prst="rect">
             <a:avLst/>
@@ -2641,7 +2538,46 @@
               <a:buNone/>
             </a:pPr>
             <a:r>
-              <a:rPr lang="en-US" sz="1150" b="1" dirty="0">
+              <a:rPr lang="en-US" sz="850" b="1" spc="50" kern="0" dirty="0">
+                <a:solidFill>
+                  <a:srgbClr val="0071E3"/>
+                </a:solidFill>
+                <a:latin typeface="Arial" pitchFamily="34" charset="0"/>
+                <a:ea typeface="Arial" pitchFamily="34" charset="-122"/>
+                <a:cs typeface="Arial" pitchFamily="34" charset="-120"/>
+              </a:rPr>
+              <a:t>DESARROLLO DE SOFTWARE Y ARQUITECTURA</a:t>
+            </a:r>
+            <a:endParaRPr lang="en-US" sz="850" dirty="0"/>
+          </a:p>
+        </p:txBody>
+      </p:sp>
+      <p:sp>
+        <p:nvSpPr>
+          <p:cNvPr id="8" name="Text 5"/>
+          <p:cNvSpPr/>
+          <p:nvPr/>
+        </p:nvSpPr>
+        <p:spPr>
+          <a:xfrm>
+            <a:off x="1325880" y="2029968"/>
+            <a:ext cx="2926080" cy="274320"/>
+          </a:xfrm>
+          <a:prstGeom prst="rect">
+            <a:avLst/>
+          </a:prstGeom>
+          <a:noFill/>
+          <a:ln/>
+        </p:spPr>
+        <p:txBody>
+          <a:bodyPr wrap="square" lIns="0" tIns="0" rIns="0" bIns="0" rtlCol="0" anchor="ctr"/>
+          <a:lstStyle/>
+          <a:p>
+            <a:pPr indent="0" marL="0">
+              <a:buNone/>
+            </a:pPr>
+            <a:r>
+              <a:rPr lang="en-US" sz="1300" b="1" dirty="0">
                 <a:solidFill>
                   <a:srgbClr val="1D1D1F"/>
                 </a:solidFill>
@@ -2649,22 +2585,22 @@
                 <a:ea typeface="Arial" pitchFamily="34" charset="-122"/>
                 <a:cs typeface="Arial" pitchFamily="34" charset="-120"/>
               </a:rPr>
-              <a:t>Datos que mejoran el producto</a:t>
-            </a:r>
-            <a:endParaRPr lang="en-US" sz="1150" dirty="0"/>
-          </a:p>
-        </p:txBody>
-      </p:sp>
-      <p:sp>
-        <p:nvSpPr>
-          <p:cNvPr id="8" name="Text 5"/>
-          <p:cNvSpPr/>
-          <p:nvPr/>
-        </p:nvSpPr>
-        <p:spPr>
-          <a:xfrm>
-            <a:off x="685800" y="2496312"/>
-            <a:ext cx="2176272" cy="886968"/>
+              <a:t>José David Jaramillo Cortés</a:t>
+            </a:r>
+            <a:endParaRPr lang="en-US" sz="1300" dirty="0"/>
+          </a:p>
+        </p:txBody>
+      </p:sp>
+      <p:sp>
+        <p:nvSpPr>
+          <p:cNvPr id="9" name="Text 6"/>
+          <p:cNvSpPr/>
+          <p:nvPr/>
+        </p:nvSpPr>
+        <p:spPr>
+          <a:xfrm>
+            <a:off x="1325880" y="2322576"/>
+            <a:ext cx="2926080" cy="274320"/>
           </a:xfrm>
           <a:prstGeom prst="rect">
             <a:avLst/>
@@ -2673,41 +2609,41 @@
           <a:ln/>
         </p:spPr>
         <p:txBody>
-          <a:bodyPr wrap="square" lIns="0" tIns="0" rIns="0" bIns="0" rtlCol="0" anchor="t"/>
+          <a:bodyPr wrap="square" lIns="0" tIns="0" rIns="0" bIns="0" rtlCol="0" anchor="ctr"/>
           <a:lstStyle/>
           <a:p>
             <a:pPr indent="0" marL="0">
               <a:buNone/>
             </a:pPr>
             <a:r>
-              <a:rPr lang="en-US" sz="880" dirty="0">
-                <a:solidFill>
-                  <a:srgbClr val="48484A"/>
-                </a:solidFill>
-                <a:latin typeface="Arial" pitchFamily="34" charset="0"/>
-                <a:ea typeface="Arial" pitchFamily="34" charset="-122"/>
-                <a:cs typeface="Arial" pitchFamily="34" charset="-120"/>
-              </a:rPr>
-              <a:t>Cada consulta documentada afina el español clínico regional del sistema. Más médicos → mejor producto → más médicos.</a:t>
-            </a:r>
-            <a:endParaRPr lang="en-US" sz="880" dirty="0"/>
-          </a:p>
-        </p:txBody>
-      </p:sp>
-      <p:sp>
-        <p:nvSpPr>
-          <p:cNvPr id="9" name="Shape 6"/>
-          <p:cNvSpPr/>
-          <p:nvPr/>
-        </p:nvSpPr>
-        <p:spPr>
-          <a:xfrm>
-            <a:off x="3300984" y="1325880"/>
-            <a:ext cx="2542032" cy="2148840"/>
+              <a:rPr lang="en-US" sz="1000" dirty="0">
+                <a:solidFill>
+                  <a:srgbClr val="6E6E73"/>
+                </a:solidFill>
+                <a:latin typeface="Arial" pitchFamily="34" charset="0"/>
+                <a:ea typeface="Arial" pitchFamily="34" charset="-122"/>
+                <a:cs typeface="Arial" pitchFamily="34" charset="-120"/>
+              </a:rPr>
+              <a:t>CTO</a:t>
+            </a:r>
+            <a:endParaRPr lang="en-US" sz="1000" dirty="0"/>
+          </a:p>
+        </p:txBody>
+      </p:sp>
+      <p:sp>
+        <p:nvSpPr>
+          <p:cNvPr id="10" name="Shape 7"/>
+          <p:cNvSpPr/>
+          <p:nvPr/>
+        </p:nvSpPr>
+        <p:spPr>
+          <a:xfrm>
+            <a:off x="4709160" y="1463040"/>
+            <a:ext cx="3931920" cy="1234440"/>
           </a:xfrm>
           <a:prstGeom prst="roundRect">
             <a:avLst>
-              <a:gd name="adj" fmla="val 3830"/>
+              <a:gd name="adj" fmla="val 6667"/>
             </a:avLst>
           </a:prstGeom>
           <a:solidFill>
@@ -2730,14 +2666,14 @@
       </p:sp>
       <p:sp>
         <p:nvSpPr>
-          <p:cNvPr id="10" name="Shape 7"/>
-          <p:cNvSpPr/>
-          <p:nvPr/>
-        </p:nvSpPr>
-        <p:spPr>
-          <a:xfrm>
-            <a:off x="3483864" y="1508760"/>
-            <a:ext cx="384048" cy="384048"/>
+          <p:cNvPr id="11" name="Shape 8"/>
+          <p:cNvSpPr/>
+          <p:nvPr/>
+        </p:nvSpPr>
+        <p:spPr>
+          <a:xfrm>
+            <a:off x="4910328" y="1664208"/>
+            <a:ext cx="502920" cy="502920"/>
           </a:xfrm>
           <a:prstGeom prst="ellipse">
             <a:avLst/>
@@ -2750,7 +2686,7 @@
       </p:sp>
       <p:pic>
         <p:nvPicPr>
-          <p:cNvPr id="11" name="Image 1" descr="preencoded.png">    </p:cNvPr>
+          <p:cNvPr id="12" name="Image 1" descr="preencoded.png">    </p:cNvPr>
           <p:cNvPicPr>
             <a:picLocks noChangeAspect="1"/>
           </p:cNvPicPr>
@@ -2764,8 +2700,8 @@
         </p:blipFill>
         <p:spPr>
           <a:xfrm>
-            <a:off x="3537631" y="1562527"/>
-            <a:ext cx="276515" cy="276515"/>
+            <a:off x="4980737" y="1734617"/>
+            <a:ext cx="362102" cy="362102"/>
           </a:xfrm>
           <a:prstGeom prst="rect">
             <a:avLst/>
@@ -2774,14 +2710,14 @@
       </p:pic>
       <p:sp>
         <p:nvSpPr>
-          <p:cNvPr id="12" name="Text 8"/>
-          <p:cNvSpPr/>
-          <p:nvPr/>
-        </p:nvSpPr>
-        <p:spPr>
-          <a:xfrm>
-            <a:off x="3483864" y="1984248"/>
-            <a:ext cx="2176272" cy="457200"/>
+          <p:cNvPr id="13" name="Text 9"/>
+          <p:cNvSpPr/>
+          <p:nvPr/>
+        </p:nvSpPr>
+        <p:spPr>
+          <a:xfrm>
+            <a:off x="5532120" y="1609344"/>
+            <a:ext cx="2926080" cy="365760"/>
           </a:xfrm>
           <a:prstGeom prst="rect">
             <a:avLst/>
@@ -2797,7 +2733,46 @@
               <a:buNone/>
             </a:pPr>
             <a:r>
-              <a:rPr lang="en-US" sz="1150" b="1" dirty="0">
+              <a:rPr lang="en-US" sz="850" b="1" spc="50" kern="0" dirty="0">
+                <a:solidFill>
+                  <a:srgbClr val="0071E3"/>
+                </a:solidFill>
+                <a:latin typeface="Arial" pitchFamily="34" charset="0"/>
+                <a:ea typeface="Arial" pitchFamily="34" charset="-122"/>
+                <a:cs typeface="Arial" pitchFamily="34" charset="-120"/>
+              </a:rPr>
+              <a:t>IA, AUTOMATIZACIÓN Y PRODUCTO</a:t>
+            </a:r>
+            <a:endParaRPr lang="en-US" sz="850" dirty="0"/>
+          </a:p>
+        </p:txBody>
+      </p:sp>
+      <p:sp>
+        <p:nvSpPr>
+          <p:cNvPr id="14" name="Text 10"/>
+          <p:cNvSpPr/>
+          <p:nvPr/>
+        </p:nvSpPr>
+        <p:spPr>
+          <a:xfrm>
+            <a:off x="5532120" y="2029968"/>
+            <a:ext cx="2926080" cy="274320"/>
+          </a:xfrm>
+          <a:prstGeom prst="rect">
+            <a:avLst/>
+          </a:prstGeom>
+          <a:noFill/>
+          <a:ln/>
+        </p:spPr>
+        <p:txBody>
+          <a:bodyPr wrap="square" lIns="0" tIns="0" rIns="0" bIns="0" rtlCol="0" anchor="ctr"/>
+          <a:lstStyle/>
+          <a:p>
+            <a:pPr indent="0" marL="0">
+              <a:buNone/>
+            </a:pPr>
+            <a:r>
+              <a:rPr lang="en-US" sz="1300" b="1" dirty="0">
                 <a:solidFill>
                   <a:srgbClr val="1D1D1F"/>
                 </a:solidFill>
@@ -2805,22 +2780,22 @@
                 <a:ea typeface="Arial" pitchFamily="34" charset="-122"/>
                 <a:cs typeface="Arial" pitchFamily="34" charset="-120"/>
               </a:rPr>
-              <a:t>Sin fricción de integración</a:t>
-            </a:r>
-            <a:endParaRPr lang="en-US" sz="1150" dirty="0"/>
-          </a:p>
-        </p:txBody>
-      </p:sp>
-      <p:sp>
-        <p:nvSpPr>
-          <p:cNvPr id="13" name="Text 9"/>
-          <p:cNvSpPr/>
-          <p:nvPr/>
-        </p:nvSpPr>
-        <p:spPr>
-          <a:xfrm>
-            <a:off x="3483864" y="2496312"/>
-            <a:ext cx="2176272" cy="886968"/>
+              <a:t>Christian Felipe Maldonado Ortiz</a:t>
+            </a:r>
+            <a:endParaRPr lang="en-US" sz="1300" dirty="0"/>
+          </a:p>
+        </p:txBody>
+      </p:sp>
+      <p:sp>
+        <p:nvSpPr>
+          <p:cNvPr id="15" name="Text 11"/>
+          <p:cNvSpPr/>
+          <p:nvPr/>
+        </p:nvSpPr>
+        <p:spPr>
+          <a:xfrm>
+            <a:off x="5532120" y="2322576"/>
+            <a:ext cx="2926080" cy="274320"/>
           </a:xfrm>
           <a:prstGeom prst="rect">
             <a:avLst/>
@@ -2829,41 +2804,41 @@
           <a:ln/>
         </p:spPr>
         <p:txBody>
-          <a:bodyPr wrap="square" lIns="0" tIns="0" rIns="0" bIns="0" rtlCol="0" anchor="t"/>
+          <a:bodyPr wrap="square" lIns="0" tIns="0" rIns="0" bIns="0" rtlCol="0" anchor="ctr"/>
           <a:lstStyle/>
           <a:p>
             <a:pPr indent="0" marL="0">
               <a:buNone/>
             </a:pPr>
             <a:r>
-              <a:rPr lang="en-US" sz="880" dirty="0">
-                <a:solidFill>
-                  <a:srgbClr val="48484A"/>
-                </a:solidFill>
-                <a:latin typeface="Arial" pitchFamily="34" charset="0"/>
-                <a:ea typeface="Arial" pitchFamily="34" charset="-122"/>
-                <a:cs typeface="Arial" pitchFamily="34" charset="-120"/>
-              </a:rPr>
-              <a:t>Miracle opera el HIS que la clínica ya usa. Donde otros necesitan meses de integración, nosotros entramos el mismo día.</a:t>
-            </a:r>
-            <a:endParaRPr lang="en-US" sz="880" dirty="0"/>
-          </a:p>
-        </p:txBody>
-      </p:sp>
-      <p:sp>
-        <p:nvSpPr>
-          <p:cNvPr id="14" name="Shape 10"/>
-          <p:cNvSpPr/>
-          <p:nvPr/>
-        </p:nvSpPr>
-        <p:spPr>
-          <a:xfrm>
-            <a:off x="6099048" y="1325880"/>
-            <a:ext cx="2542032" cy="2148840"/>
+              <a:rPr lang="en-US" sz="1000" dirty="0">
+                <a:solidFill>
+                  <a:srgbClr val="6E6E73"/>
+                </a:solidFill>
+                <a:latin typeface="Arial" pitchFamily="34" charset="0"/>
+                <a:ea typeface="Arial" pitchFamily="34" charset="-122"/>
+                <a:cs typeface="Arial" pitchFamily="34" charset="-120"/>
+              </a:rPr>
+              <a:t>CEO</a:t>
+            </a:r>
+            <a:endParaRPr lang="en-US" sz="1000" dirty="0"/>
+          </a:p>
+        </p:txBody>
+      </p:sp>
+      <p:sp>
+        <p:nvSpPr>
+          <p:cNvPr id="16" name="Shape 12"/>
+          <p:cNvSpPr/>
+          <p:nvPr/>
+        </p:nvSpPr>
+        <p:spPr>
+          <a:xfrm>
+            <a:off x="502920" y="2971800"/>
+            <a:ext cx="3931920" cy="1234440"/>
           </a:xfrm>
           <a:prstGeom prst="roundRect">
             <a:avLst>
-              <a:gd name="adj" fmla="val 3830"/>
+              <a:gd name="adj" fmla="val 6667"/>
             </a:avLst>
           </a:prstGeom>
           <a:solidFill>
@@ -2886,14 +2861,14 @@
       </p:sp>
       <p:sp>
         <p:nvSpPr>
-          <p:cNvPr id="15" name="Shape 11"/>
-          <p:cNvSpPr/>
-          <p:nvPr/>
-        </p:nvSpPr>
-        <p:spPr>
-          <a:xfrm>
-            <a:off x="6281928" y="1508760"/>
-            <a:ext cx="384048" cy="384048"/>
+          <p:cNvPr id="17" name="Shape 13"/>
+          <p:cNvSpPr/>
+          <p:nvPr/>
+        </p:nvSpPr>
+        <p:spPr>
+          <a:xfrm>
+            <a:off x="704088" y="3172968"/>
+            <a:ext cx="502920" cy="502920"/>
           </a:xfrm>
           <a:prstGeom prst="ellipse">
             <a:avLst/>
@@ -2906,7 +2881,7 @@
       </p:sp>
       <p:pic>
         <p:nvPicPr>
-          <p:cNvPr id="16" name="Image 2" descr="preencoded.png">    </p:cNvPr>
+          <p:cNvPr id="18" name="Image 2" descr="preencoded.png">    </p:cNvPr>
           <p:cNvPicPr>
             <a:picLocks noChangeAspect="1"/>
           </p:cNvPicPr>
@@ -2920,8 +2895,8 @@
         </p:blipFill>
         <p:spPr>
           <a:xfrm>
-            <a:off x="6335695" y="1562527"/>
-            <a:ext cx="276515" cy="276515"/>
+            <a:off x="774497" y="3243377"/>
+            <a:ext cx="362102" cy="362102"/>
           </a:xfrm>
           <a:prstGeom prst="rect">
             <a:avLst/>
@@ -2930,14 +2905,14 @@
       </p:pic>
       <p:sp>
         <p:nvSpPr>
-          <p:cNvPr id="17" name="Text 12"/>
-          <p:cNvSpPr/>
-          <p:nvPr/>
-        </p:nvSpPr>
-        <p:spPr>
-          <a:xfrm>
-            <a:off x="6281928" y="1984248"/>
-            <a:ext cx="2176272" cy="457200"/>
+          <p:cNvPr id="19" name="Text 14"/>
+          <p:cNvSpPr/>
+          <p:nvPr/>
+        </p:nvSpPr>
+        <p:spPr>
+          <a:xfrm>
+            <a:off x="1325880" y="3118104"/>
+            <a:ext cx="2926080" cy="365760"/>
           </a:xfrm>
           <a:prstGeom prst="rect">
             <a:avLst/>
@@ -2953,7 +2928,46 @@
               <a:buNone/>
             </a:pPr>
             <a:r>
-              <a:rPr lang="en-US" sz="1150" b="1" dirty="0">
+              <a:rPr lang="en-US" sz="850" b="1" spc="50" kern="0" dirty="0">
+                <a:solidFill>
+                  <a:srgbClr val="0071E3"/>
+                </a:solidFill>
+                <a:latin typeface="Arial" pitchFamily="34" charset="0"/>
+                <a:ea typeface="Arial" pitchFamily="34" charset="-122"/>
+                <a:cs typeface="Arial" pitchFamily="34" charset="-120"/>
+              </a:rPr>
+              <a:t>ESTRATEGIA COMERCIAL, VENTAS Y VALIDACIÓN</a:t>
+            </a:r>
+            <a:endParaRPr lang="en-US" sz="850" dirty="0"/>
+          </a:p>
+        </p:txBody>
+      </p:sp>
+      <p:sp>
+        <p:nvSpPr>
+          <p:cNvPr id="20" name="Text 15"/>
+          <p:cNvSpPr/>
+          <p:nvPr/>
+        </p:nvSpPr>
+        <p:spPr>
+          <a:xfrm>
+            <a:off x="1325880" y="3538728"/>
+            <a:ext cx="2926080" cy="274320"/>
+          </a:xfrm>
+          <a:prstGeom prst="rect">
+            <a:avLst/>
+          </a:prstGeom>
+          <a:noFill/>
+          <a:ln/>
+        </p:spPr>
+        <p:txBody>
+          <a:bodyPr wrap="square" lIns="0" tIns="0" rIns="0" bIns="0" rtlCol="0" anchor="ctr"/>
+          <a:lstStyle/>
+          <a:p>
+            <a:pPr indent="0" marL="0">
+              <a:buNone/>
+            </a:pPr>
+            <a:r>
+              <a:rPr lang="en-US" sz="1300" b="1" dirty="0">
                 <a:solidFill>
                   <a:srgbClr val="1D1D1F"/>
                 </a:solidFill>
@@ -2961,22 +2975,22 @@
                 <a:ea typeface="Arial" pitchFamily="34" charset="-122"/>
                 <a:cs typeface="Arial" pitchFamily="34" charset="-120"/>
               </a:rPr>
-              <a:t>Presencia física en el consultorio</a:t>
-            </a:r>
-            <a:endParaRPr lang="en-US" sz="1150" dirty="0"/>
-          </a:p>
-        </p:txBody>
-      </p:sp>
-      <p:sp>
-        <p:nvSpPr>
-          <p:cNvPr id="18" name="Text 13"/>
-          <p:cNvSpPr/>
-          <p:nvPr/>
-        </p:nvSpPr>
-        <p:spPr>
-          <a:xfrm>
-            <a:off x="6281928" y="2496312"/>
-            <a:ext cx="2176272" cy="886968"/>
+              <a:t>Juan Pablo Arteaga</a:t>
+            </a:r>
+            <a:endParaRPr lang="en-US" sz="1300" dirty="0"/>
+          </a:p>
+        </p:txBody>
+      </p:sp>
+      <p:sp>
+        <p:nvSpPr>
+          <p:cNvPr id="21" name="Text 16"/>
+          <p:cNvSpPr/>
+          <p:nvPr/>
+        </p:nvSpPr>
+        <p:spPr>
+          <a:xfrm>
+            <a:off x="1325880" y="3831336"/>
+            <a:ext cx="2926080" cy="274320"/>
           </a:xfrm>
           <a:prstGeom prst="rect">
             <a:avLst/>
@@ -2985,49 +2999,49 @@
           <a:ln/>
         </p:spPr>
         <p:txBody>
-          <a:bodyPr wrap="square" lIns="0" tIns="0" rIns="0" bIns="0" rtlCol="0" anchor="t"/>
+          <a:bodyPr wrap="square" lIns="0" tIns="0" rIns="0" bIns="0" rtlCol="0" anchor="ctr"/>
           <a:lstStyle/>
           <a:p>
             <a:pPr indent="0" marL="0">
               <a:buNone/>
             </a:pPr>
             <a:r>
-              <a:rPr lang="en-US" sz="880" dirty="0">
-                <a:solidFill>
-                  <a:srgbClr val="48484A"/>
-                </a:solidFill>
-                <a:latin typeface="Arial" pitchFamily="34" charset="0"/>
-                <a:ea typeface="Arial" pitchFamily="34" charset="-122"/>
-                <a:cs typeface="Arial" pitchFamily="34" charset="-120"/>
-              </a:rPr>
-              <a:t>El dispositivo dedicado garantiza calidad de audio clínico y crea un hábito diario: un costo de cambio real frente a cualquier app.</a:t>
-            </a:r>
-            <a:endParaRPr lang="en-US" sz="880" dirty="0"/>
-          </a:p>
-        </p:txBody>
-      </p:sp>
-      <p:sp>
-        <p:nvSpPr>
-          <p:cNvPr id="19" name="Shape 14"/>
-          <p:cNvSpPr/>
-          <p:nvPr/>
-        </p:nvSpPr>
-        <p:spPr>
-          <a:xfrm>
-            <a:off x="502920" y="3749040"/>
-            <a:ext cx="8138160" cy="685800"/>
+              <a:rPr lang="en-US" sz="1000" dirty="0">
+                <a:solidFill>
+                  <a:srgbClr val="6E6E73"/>
+                </a:solidFill>
+                <a:latin typeface="Arial" pitchFamily="34" charset="0"/>
+                <a:ea typeface="Arial" pitchFamily="34" charset="-122"/>
+                <a:cs typeface="Arial" pitchFamily="34" charset="-120"/>
+              </a:rPr>
+              <a:t>CCO</a:t>
+            </a:r>
+            <a:endParaRPr lang="en-US" sz="1000" dirty="0"/>
+          </a:p>
+        </p:txBody>
+      </p:sp>
+      <p:sp>
+        <p:nvSpPr>
+          <p:cNvPr id="22" name="Shape 17"/>
+          <p:cNvSpPr/>
+          <p:nvPr/>
+        </p:nvSpPr>
+        <p:spPr>
+          <a:xfrm>
+            <a:off x="4709160" y="2971800"/>
+            <a:ext cx="3931920" cy="1234440"/>
           </a:xfrm>
           <a:prstGeom prst="roundRect">
             <a:avLst>
-              <a:gd name="adj" fmla="val 12000"/>
+              <a:gd name="adj" fmla="val 6667"/>
             </a:avLst>
           </a:prstGeom>
           <a:solidFill>
-            <a:srgbClr val="EAF3FF"/>
+            <a:srgbClr val="FFFFFF"/>
           </a:solidFill>
           <a:ln w="9525">
             <a:solidFill>
-              <a:srgbClr val="CFE4FB"/>
+              <a:srgbClr val="E2E2E6"/>
             </a:solidFill>
             <a:prstDash val="solid"/>
           </a:ln>
@@ -3042,27 +3056,27 @@
       </p:sp>
       <p:sp>
         <p:nvSpPr>
-          <p:cNvPr id="20" name="Shape 15"/>
-          <p:cNvSpPr/>
-          <p:nvPr/>
-        </p:nvSpPr>
-        <p:spPr>
-          <a:xfrm>
-            <a:off x="704088" y="3886200"/>
-            <a:ext cx="411480" cy="411480"/>
+          <p:cNvPr id="23" name="Shape 18"/>
+          <p:cNvSpPr/>
+          <p:nvPr/>
+        </p:nvSpPr>
+        <p:spPr>
+          <a:xfrm>
+            <a:off x="4910328" y="3172968"/>
+            <a:ext cx="502920" cy="502920"/>
           </a:xfrm>
           <a:prstGeom prst="ellipse">
             <a:avLst/>
           </a:prstGeom>
           <a:solidFill>
-            <a:srgbClr val="FFFFFF"/>
+            <a:srgbClr val="EAF3FF"/>
           </a:solidFill>
           <a:ln/>
         </p:spPr>
       </p:sp>
       <p:pic>
         <p:nvPicPr>
-          <p:cNvPr id="21" name="Image 3" descr="preencoded.png">    </p:cNvPr>
+          <p:cNvPr id="24" name="Image 3" descr="preencoded.png">    </p:cNvPr>
           <p:cNvPicPr>
             <a:picLocks noChangeAspect="1"/>
           </p:cNvPicPr>
@@ -3076,8 +3090,8 @@
         </p:blipFill>
         <p:spPr>
           <a:xfrm>
-            <a:off x="761695" y="3943807"/>
-            <a:ext cx="296266" cy="296266"/>
+            <a:off x="4980737" y="3243377"/>
+            <a:ext cx="362102" cy="362102"/>
           </a:xfrm>
           <a:prstGeom prst="rect">
             <a:avLst/>
@@ -3086,14 +3100,14 @@
       </p:pic>
       <p:sp>
         <p:nvSpPr>
-          <p:cNvPr id="22" name="Text 16"/>
-          <p:cNvSpPr/>
-          <p:nvPr/>
-        </p:nvSpPr>
-        <p:spPr>
-          <a:xfrm>
-            <a:off x="1280160" y="3749040"/>
-            <a:ext cx="7132320" cy="685800"/>
+          <p:cNvPr id="25" name="Text 19"/>
+          <p:cNvSpPr/>
+          <p:nvPr/>
+        </p:nvSpPr>
+        <p:spPr>
+          <a:xfrm>
+            <a:off x="5532120" y="3118104"/>
+            <a:ext cx="2926080" cy="365760"/>
           </a:xfrm>
           <a:prstGeom prst="rect">
             <a:avLst/>
@@ -3102,6 +3116,45 @@
           <a:ln/>
         </p:spPr>
         <p:txBody>
+          <a:bodyPr wrap="square" lIns="0" tIns="0" rIns="0" bIns="0" rtlCol="0" anchor="t"/>
+          <a:lstStyle/>
+          <a:p>
+            <a:pPr indent="0" marL="0">
+              <a:buNone/>
+            </a:pPr>
+            <a:r>
+              <a:rPr lang="en-US" sz="850" b="1" spc="50" kern="0" dirty="0">
+                <a:solidFill>
+                  <a:srgbClr val="0071E3"/>
+                </a:solidFill>
+                <a:latin typeface="Arial" pitchFamily="34" charset="0"/>
+                <a:ea typeface="Arial" pitchFamily="34" charset="-122"/>
+                <a:cs typeface="Arial" pitchFamily="34" charset="-120"/>
+              </a:rPr>
+              <a:t>LEGAL, CONTACTOS Y SECTOR SALUD</a:t>
+            </a:r>
+            <a:endParaRPr lang="en-US" sz="850" dirty="0"/>
+          </a:p>
+        </p:txBody>
+      </p:sp>
+      <p:sp>
+        <p:nvSpPr>
+          <p:cNvPr id="26" name="Text 20"/>
+          <p:cNvSpPr/>
+          <p:nvPr/>
+        </p:nvSpPr>
+        <p:spPr>
+          <a:xfrm>
+            <a:off x="5532120" y="3538728"/>
+            <a:ext cx="2926080" cy="274320"/>
+          </a:xfrm>
+          <a:prstGeom prst="rect">
+            <a:avLst/>
+          </a:prstGeom>
+          <a:noFill/>
+          <a:ln/>
+        </p:spPr>
+        <p:txBody>
           <a:bodyPr wrap="square" lIns="0" tIns="0" rIns="0" bIns="0" rtlCol="0" anchor="ctr"/>
           <a:lstStyle/>
           <a:p>
@@ -3109,7 +3162,85 @@
               <a:buNone/>
             </a:pPr>
             <a:r>
-              <a:rPr lang="en-US" sz="1100" b="1" dirty="0">
+              <a:rPr lang="en-US" sz="1300" b="1" dirty="0">
+                <a:solidFill>
+                  <a:srgbClr val="1D1D1F"/>
+                </a:solidFill>
+                <a:latin typeface="Arial" pitchFamily="34" charset="0"/>
+                <a:ea typeface="Arial" pitchFamily="34" charset="-122"/>
+                <a:cs typeface="Arial" pitchFamily="34" charset="-120"/>
+              </a:rPr>
+              <a:t>Isabel Sofía García</a:t>
+            </a:r>
+            <a:endParaRPr lang="en-US" sz="1300" dirty="0"/>
+          </a:p>
+        </p:txBody>
+      </p:sp>
+      <p:sp>
+        <p:nvSpPr>
+          <p:cNvPr id="27" name="Text 21"/>
+          <p:cNvSpPr/>
+          <p:nvPr/>
+        </p:nvSpPr>
+        <p:spPr>
+          <a:xfrm>
+            <a:off x="5532120" y="3831336"/>
+            <a:ext cx="2926080" cy="274320"/>
+          </a:xfrm>
+          <a:prstGeom prst="rect">
+            <a:avLst/>
+          </a:prstGeom>
+          <a:noFill/>
+          <a:ln/>
+        </p:spPr>
+        <p:txBody>
+          <a:bodyPr wrap="square" lIns="0" tIns="0" rIns="0" bIns="0" rtlCol="0" anchor="ctr"/>
+          <a:lstStyle/>
+          <a:p>
+            <a:pPr indent="0" marL="0">
+              <a:buNone/>
+            </a:pPr>
+            <a:r>
+              <a:rPr lang="en-US" sz="1000" dirty="0">
+                <a:solidFill>
+                  <a:srgbClr val="6E6E73"/>
+                </a:solidFill>
+                <a:latin typeface="Arial" pitchFamily="34" charset="0"/>
+                <a:ea typeface="Arial" pitchFamily="34" charset="-122"/>
+                <a:cs typeface="Arial" pitchFamily="34" charset="-120"/>
+              </a:rPr>
+              <a:t>CFO</a:t>
+            </a:r>
+            <a:endParaRPr lang="en-US" sz="1000" dirty="0"/>
+          </a:p>
+        </p:txBody>
+      </p:sp>
+      <p:sp>
+        <p:nvSpPr>
+          <p:cNvPr id="28" name="Text 22"/>
+          <p:cNvSpPr/>
+          <p:nvPr/>
+        </p:nvSpPr>
+        <p:spPr>
+          <a:xfrm>
+            <a:off x="502920" y="4297680"/>
+            <a:ext cx="8138160" cy="457200"/>
+          </a:xfrm>
+          <a:prstGeom prst="rect">
+            <a:avLst/>
+          </a:prstGeom>
+          <a:noFill/>
+          <a:ln/>
+        </p:spPr>
+        <p:txBody>
+          <a:bodyPr wrap="square" lIns="0" tIns="0" rIns="0" bIns="0" rtlCol="0" anchor="ctr"/>
+          <a:lstStyle/>
+          <a:p>
+            <a:pPr indent="0" marL="0">
+              <a:buNone/>
+            </a:pPr>
+            <a:r>
+              <a:rPr lang="en-US" sz="1300" b="1" i="1" dirty="0">
                 <a:solidFill>
                   <a:srgbClr val="0A3D91"/>
                 </a:solidFill>
@@ -3117,9 +3248,9 @@
                 <a:ea typeface="Arial" pitchFamily="34" charset="-122"/>
                 <a:cs typeface="Arial" pitchFamily="34" charset="-120"/>
               </a:rPr>
-              <a:t>Seguridad y protección de datos cubiertas desde el diseño, alineadas con la regulación colombiana para datos sensibles en salud.</a:t>
-            </a:r>
-            <a:endParaRPr lang="en-US" sz="1100" dirty="0"/>
+              <a:t>Tenemos la capacidad para construir, validar y vender la solución.</a:t>
+            </a:r>
+            <a:endParaRPr lang="en-US" sz="1300" dirty="0"/>
           </a:p>
         </p:txBody>
       </p:sp>
@@ -3188,935 +3319,6 @@
                 <a:ea typeface="Arial" pitchFamily="34" charset="-122"/>
                 <a:cs typeface="Arial" pitchFamily="34" charset="-120"/>
               </a:rPr>
-              <a:t>EQUIPO</a:t>
-            </a:r>
-            <a:endParaRPr lang="en-US" sz="1050" dirty="0"/>
-          </a:p>
-        </p:txBody>
-      </p:sp>
-      <p:sp>
-        <p:nvSpPr>
-          <p:cNvPr id="3" name="Text 1"/>
-          <p:cNvSpPr/>
-          <p:nvPr/>
-        </p:nvSpPr>
-        <p:spPr>
-          <a:xfrm>
-            <a:off x="502920" y="685800"/>
-            <a:ext cx="8138160" cy="548640"/>
-          </a:xfrm>
-          <a:prstGeom prst="rect">
-            <a:avLst/>
-          </a:prstGeom>
-          <a:noFill/>
-          <a:ln/>
-        </p:spPr>
-        <p:txBody>
-          <a:bodyPr wrap="square" lIns="0" tIns="0" rIns="0" bIns="0" rtlCol="0" anchor="ctr"/>
-          <a:lstStyle/>
-          <a:p>
-            <a:pPr indent="0" marL="0">
-              <a:buNone/>
-            </a:pPr>
-            <a:r>
-              <a:rPr lang="en-US" sz="2300" b="1" dirty="0">
-                <a:solidFill>
-                  <a:srgbClr val="1D1D1F"/>
-                </a:solidFill>
-                <a:latin typeface="Arial" pitchFamily="34" charset="0"/>
-                <a:ea typeface="Arial" pitchFamily="34" charset="-122"/>
-                <a:cs typeface="Arial" pitchFamily="34" charset="-120"/>
-              </a:rPr>
-              <a:t>El equipo para construir, vender y validar en salud.</a:t>
-            </a:r>
-            <a:endParaRPr lang="en-US" sz="2300" dirty="0"/>
-          </a:p>
-        </p:txBody>
-      </p:sp>
-      <p:sp>
-        <p:nvSpPr>
-          <p:cNvPr id="4" name="Shape 2"/>
-          <p:cNvSpPr/>
-          <p:nvPr/>
-        </p:nvSpPr>
-        <p:spPr>
-          <a:xfrm>
-            <a:off x="502920" y="1463040"/>
-            <a:ext cx="3931920" cy="1234440"/>
-          </a:xfrm>
-          <a:prstGeom prst="roundRect">
-            <a:avLst>
-              <a:gd name="adj" fmla="val 6667"/>
-            </a:avLst>
-          </a:prstGeom>
-          <a:solidFill>
-            <a:srgbClr val="FFFFFF"/>
-          </a:solidFill>
-          <a:ln w="9525">
-            <a:solidFill>
-              <a:srgbClr val="E2E2E6"/>
-            </a:solidFill>
-            <a:prstDash val="solid"/>
-          </a:ln>
-          <a:effectLst>
-            <a:outerShdw sx="100000" sy="100000" kx="0" ky="0" algn="bl" rotWithShape="0" blurRad="101600" dist="25400" dir="5400000">
-              <a:srgbClr val="0A3D91">
-                <a:alpha val="7000"/>
-              </a:srgbClr>
-            </a:outerShdw>
-          </a:effectLst>
-        </p:spPr>
-      </p:sp>
-      <p:sp>
-        <p:nvSpPr>
-          <p:cNvPr id="5" name="Shape 3"/>
-          <p:cNvSpPr/>
-          <p:nvPr/>
-        </p:nvSpPr>
-        <p:spPr>
-          <a:xfrm>
-            <a:off x="704088" y="1664208"/>
-            <a:ext cx="502920" cy="502920"/>
-          </a:xfrm>
-          <a:prstGeom prst="ellipse">
-            <a:avLst/>
-          </a:prstGeom>
-          <a:solidFill>
-            <a:srgbClr val="EAF3FF"/>
-          </a:solidFill>
-          <a:ln/>
-        </p:spPr>
-      </p:sp>
-      <p:pic>
-        <p:nvPicPr>
-          <p:cNvPr id="6" name="Image 0" descr="preencoded.png">    </p:cNvPr>
-          <p:cNvPicPr>
-            <a:picLocks noChangeAspect="1"/>
-          </p:cNvPicPr>
-          <p:nvPr/>
-        </p:nvPicPr>
-        <p:blipFill>
-          <a:blip r:embed="rId1"/>
-          <a:stretch>
-            <a:fillRect/>
-          </a:stretch>
-        </p:blipFill>
-        <p:spPr>
-          <a:xfrm>
-            <a:off x="774497" y="1734617"/>
-            <a:ext cx="362102" cy="362102"/>
-          </a:xfrm>
-          <a:prstGeom prst="rect">
-            <a:avLst/>
-          </a:prstGeom>
-        </p:spPr>
-      </p:pic>
-      <p:sp>
-        <p:nvSpPr>
-          <p:cNvPr id="7" name="Text 4"/>
-          <p:cNvSpPr/>
-          <p:nvPr/>
-        </p:nvSpPr>
-        <p:spPr>
-          <a:xfrm>
-            <a:off x="1325880" y="1609344"/>
-            <a:ext cx="2926080" cy="365760"/>
-          </a:xfrm>
-          <a:prstGeom prst="rect">
-            <a:avLst/>
-          </a:prstGeom>
-          <a:noFill/>
-          <a:ln/>
-        </p:spPr>
-        <p:txBody>
-          <a:bodyPr wrap="square" lIns="0" tIns="0" rIns="0" bIns="0" rtlCol="0" anchor="t"/>
-          <a:lstStyle/>
-          <a:p>
-            <a:pPr indent="0" marL="0">
-              <a:buNone/>
-            </a:pPr>
-            <a:r>
-              <a:rPr lang="en-US" sz="850" b="1" spc="50" kern="0" dirty="0">
-                <a:solidFill>
-                  <a:srgbClr val="0071E3"/>
-                </a:solidFill>
-                <a:latin typeface="Arial" pitchFamily="34" charset="0"/>
-                <a:ea typeface="Arial" pitchFamily="34" charset="-122"/>
-                <a:cs typeface="Arial" pitchFamily="34" charset="-120"/>
-              </a:rPr>
-              <a:t>DESARROLLO DE SOFTWARE Y ARQUITECTURA</a:t>
-            </a:r>
-            <a:endParaRPr lang="en-US" sz="850" dirty="0"/>
-          </a:p>
-        </p:txBody>
-      </p:sp>
-      <p:sp>
-        <p:nvSpPr>
-          <p:cNvPr id="8" name="Text 5"/>
-          <p:cNvSpPr/>
-          <p:nvPr/>
-        </p:nvSpPr>
-        <p:spPr>
-          <a:xfrm>
-            <a:off x="1325880" y="2029968"/>
-            <a:ext cx="2926080" cy="274320"/>
-          </a:xfrm>
-          <a:prstGeom prst="rect">
-            <a:avLst/>
-          </a:prstGeom>
-          <a:noFill/>
-          <a:ln/>
-        </p:spPr>
-        <p:txBody>
-          <a:bodyPr wrap="square" lIns="0" tIns="0" rIns="0" bIns="0" rtlCol="0" anchor="ctr"/>
-          <a:lstStyle/>
-          <a:p>
-            <a:pPr indent="0" marL="0">
-              <a:buNone/>
-            </a:pPr>
-            <a:r>
-              <a:rPr lang="en-US" sz="1300" b="1" dirty="0">
-                <a:solidFill>
-                  <a:srgbClr val="1D1D1F"/>
-                </a:solidFill>
-                <a:latin typeface="Arial" pitchFamily="34" charset="0"/>
-                <a:ea typeface="Arial" pitchFamily="34" charset="-122"/>
-                <a:cs typeface="Arial" pitchFamily="34" charset="-120"/>
-              </a:rPr>
-              <a:t>José David Jaramillo Cortés</a:t>
-            </a:r>
-            <a:endParaRPr lang="en-US" sz="1300" dirty="0"/>
-          </a:p>
-        </p:txBody>
-      </p:sp>
-      <p:sp>
-        <p:nvSpPr>
-          <p:cNvPr id="9" name="Text 6"/>
-          <p:cNvSpPr/>
-          <p:nvPr/>
-        </p:nvSpPr>
-        <p:spPr>
-          <a:xfrm>
-            <a:off x="1325880" y="2322576"/>
-            <a:ext cx="2926080" cy="274320"/>
-          </a:xfrm>
-          <a:prstGeom prst="rect">
-            <a:avLst/>
-          </a:prstGeom>
-          <a:noFill/>
-          <a:ln/>
-        </p:spPr>
-        <p:txBody>
-          <a:bodyPr wrap="square" lIns="0" tIns="0" rIns="0" bIns="0" rtlCol="0" anchor="ctr"/>
-          <a:lstStyle/>
-          <a:p>
-            <a:pPr indent="0" marL="0">
-              <a:buNone/>
-            </a:pPr>
-            <a:r>
-              <a:rPr lang="en-US" sz="1000" dirty="0">
-                <a:solidFill>
-                  <a:srgbClr val="6E6E73"/>
-                </a:solidFill>
-                <a:latin typeface="Arial" pitchFamily="34" charset="0"/>
-                <a:ea typeface="Arial" pitchFamily="34" charset="-122"/>
-                <a:cs typeface="Arial" pitchFamily="34" charset="-120"/>
-              </a:rPr>
-              <a:t>CTO</a:t>
-            </a:r>
-            <a:endParaRPr lang="en-US" sz="1000" dirty="0"/>
-          </a:p>
-        </p:txBody>
-      </p:sp>
-      <p:sp>
-        <p:nvSpPr>
-          <p:cNvPr id="10" name="Shape 7"/>
-          <p:cNvSpPr/>
-          <p:nvPr/>
-        </p:nvSpPr>
-        <p:spPr>
-          <a:xfrm>
-            <a:off x="4709160" y="1463040"/>
-            <a:ext cx="3931920" cy="1234440"/>
-          </a:xfrm>
-          <a:prstGeom prst="roundRect">
-            <a:avLst>
-              <a:gd name="adj" fmla="val 6667"/>
-            </a:avLst>
-          </a:prstGeom>
-          <a:solidFill>
-            <a:srgbClr val="FFFFFF"/>
-          </a:solidFill>
-          <a:ln w="9525">
-            <a:solidFill>
-              <a:srgbClr val="E2E2E6"/>
-            </a:solidFill>
-            <a:prstDash val="solid"/>
-          </a:ln>
-          <a:effectLst>
-            <a:outerShdw sx="100000" sy="100000" kx="0" ky="0" algn="bl" rotWithShape="0" blurRad="101600" dist="25400" dir="5400000">
-              <a:srgbClr val="0A3D91">
-                <a:alpha val="7000"/>
-              </a:srgbClr>
-            </a:outerShdw>
-          </a:effectLst>
-        </p:spPr>
-      </p:sp>
-      <p:sp>
-        <p:nvSpPr>
-          <p:cNvPr id="11" name="Shape 8"/>
-          <p:cNvSpPr/>
-          <p:nvPr/>
-        </p:nvSpPr>
-        <p:spPr>
-          <a:xfrm>
-            <a:off x="4910328" y="1664208"/>
-            <a:ext cx="502920" cy="502920"/>
-          </a:xfrm>
-          <a:prstGeom prst="ellipse">
-            <a:avLst/>
-          </a:prstGeom>
-          <a:solidFill>
-            <a:srgbClr val="EAF3FF"/>
-          </a:solidFill>
-          <a:ln/>
-        </p:spPr>
-      </p:sp>
-      <p:pic>
-        <p:nvPicPr>
-          <p:cNvPr id="12" name="Image 1" descr="preencoded.png">    </p:cNvPr>
-          <p:cNvPicPr>
-            <a:picLocks noChangeAspect="1"/>
-          </p:cNvPicPr>
-          <p:nvPr/>
-        </p:nvPicPr>
-        <p:blipFill>
-          <a:blip r:embed="rId2"/>
-          <a:stretch>
-            <a:fillRect/>
-          </a:stretch>
-        </p:blipFill>
-        <p:spPr>
-          <a:xfrm>
-            <a:off x="4980737" y="1734617"/>
-            <a:ext cx="362102" cy="362102"/>
-          </a:xfrm>
-          <a:prstGeom prst="rect">
-            <a:avLst/>
-          </a:prstGeom>
-        </p:spPr>
-      </p:pic>
-      <p:sp>
-        <p:nvSpPr>
-          <p:cNvPr id="13" name="Text 9"/>
-          <p:cNvSpPr/>
-          <p:nvPr/>
-        </p:nvSpPr>
-        <p:spPr>
-          <a:xfrm>
-            <a:off x="5532120" y="1609344"/>
-            <a:ext cx="2926080" cy="365760"/>
-          </a:xfrm>
-          <a:prstGeom prst="rect">
-            <a:avLst/>
-          </a:prstGeom>
-          <a:noFill/>
-          <a:ln/>
-        </p:spPr>
-        <p:txBody>
-          <a:bodyPr wrap="square" lIns="0" tIns="0" rIns="0" bIns="0" rtlCol="0" anchor="t"/>
-          <a:lstStyle/>
-          <a:p>
-            <a:pPr indent="0" marL="0">
-              <a:buNone/>
-            </a:pPr>
-            <a:r>
-              <a:rPr lang="en-US" sz="850" b="1" spc="50" kern="0" dirty="0">
-                <a:solidFill>
-                  <a:srgbClr val="0071E3"/>
-                </a:solidFill>
-                <a:latin typeface="Arial" pitchFamily="34" charset="0"/>
-                <a:ea typeface="Arial" pitchFamily="34" charset="-122"/>
-                <a:cs typeface="Arial" pitchFamily="34" charset="-120"/>
-              </a:rPr>
-              <a:t>IA, AUTOMATIZACIÓN Y PRODUCTO</a:t>
-            </a:r>
-            <a:endParaRPr lang="en-US" sz="850" dirty="0"/>
-          </a:p>
-        </p:txBody>
-      </p:sp>
-      <p:sp>
-        <p:nvSpPr>
-          <p:cNvPr id="14" name="Text 10"/>
-          <p:cNvSpPr/>
-          <p:nvPr/>
-        </p:nvSpPr>
-        <p:spPr>
-          <a:xfrm>
-            <a:off x="5532120" y="2029968"/>
-            <a:ext cx="2926080" cy="274320"/>
-          </a:xfrm>
-          <a:prstGeom prst="rect">
-            <a:avLst/>
-          </a:prstGeom>
-          <a:noFill/>
-          <a:ln/>
-        </p:spPr>
-        <p:txBody>
-          <a:bodyPr wrap="square" lIns="0" tIns="0" rIns="0" bIns="0" rtlCol="0" anchor="ctr"/>
-          <a:lstStyle/>
-          <a:p>
-            <a:pPr indent="0" marL="0">
-              <a:buNone/>
-            </a:pPr>
-            <a:r>
-              <a:rPr lang="en-US" sz="1300" b="1" dirty="0">
-                <a:solidFill>
-                  <a:srgbClr val="1D1D1F"/>
-                </a:solidFill>
-                <a:latin typeface="Arial" pitchFamily="34" charset="0"/>
-                <a:ea typeface="Arial" pitchFamily="34" charset="-122"/>
-                <a:cs typeface="Arial" pitchFamily="34" charset="-120"/>
-              </a:rPr>
-              <a:t>Christian Felipe Maldonado Ortiz</a:t>
-            </a:r>
-            <a:endParaRPr lang="en-US" sz="1300" dirty="0"/>
-          </a:p>
-        </p:txBody>
-      </p:sp>
-      <p:sp>
-        <p:nvSpPr>
-          <p:cNvPr id="15" name="Text 11"/>
-          <p:cNvSpPr/>
-          <p:nvPr/>
-        </p:nvSpPr>
-        <p:spPr>
-          <a:xfrm>
-            <a:off x="5532120" y="2322576"/>
-            <a:ext cx="2926080" cy="274320"/>
-          </a:xfrm>
-          <a:prstGeom prst="rect">
-            <a:avLst/>
-          </a:prstGeom>
-          <a:noFill/>
-          <a:ln/>
-        </p:spPr>
-        <p:txBody>
-          <a:bodyPr wrap="square" lIns="0" tIns="0" rIns="0" bIns="0" rtlCol="0" anchor="ctr"/>
-          <a:lstStyle/>
-          <a:p>
-            <a:pPr indent="0" marL="0">
-              <a:buNone/>
-            </a:pPr>
-            <a:r>
-              <a:rPr lang="en-US" sz="1000" dirty="0">
-                <a:solidFill>
-                  <a:srgbClr val="6E6E73"/>
-                </a:solidFill>
-                <a:latin typeface="Arial" pitchFamily="34" charset="0"/>
-                <a:ea typeface="Arial" pitchFamily="34" charset="-122"/>
-                <a:cs typeface="Arial" pitchFamily="34" charset="-120"/>
-              </a:rPr>
-              <a:t>CEO</a:t>
-            </a:r>
-            <a:endParaRPr lang="en-US" sz="1000" dirty="0"/>
-          </a:p>
-        </p:txBody>
-      </p:sp>
-      <p:sp>
-        <p:nvSpPr>
-          <p:cNvPr id="16" name="Shape 12"/>
-          <p:cNvSpPr/>
-          <p:nvPr/>
-        </p:nvSpPr>
-        <p:spPr>
-          <a:xfrm>
-            <a:off x="502920" y="2971800"/>
-            <a:ext cx="3931920" cy="1234440"/>
-          </a:xfrm>
-          <a:prstGeom prst="roundRect">
-            <a:avLst>
-              <a:gd name="adj" fmla="val 6667"/>
-            </a:avLst>
-          </a:prstGeom>
-          <a:solidFill>
-            <a:srgbClr val="FFFFFF"/>
-          </a:solidFill>
-          <a:ln w="9525">
-            <a:solidFill>
-              <a:srgbClr val="E2E2E6"/>
-            </a:solidFill>
-            <a:prstDash val="solid"/>
-          </a:ln>
-          <a:effectLst>
-            <a:outerShdw sx="100000" sy="100000" kx="0" ky="0" algn="bl" rotWithShape="0" blurRad="101600" dist="25400" dir="5400000">
-              <a:srgbClr val="0A3D91">
-                <a:alpha val="7000"/>
-              </a:srgbClr>
-            </a:outerShdw>
-          </a:effectLst>
-        </p:spPr>
-      </p:sp>
-      <p:sp>
-        <p:nvSpPr>
-          <p:cNvPr id="17" name="Shape 13"/>
-          <p:cNvSpPr/>
-          <p:nvPr/>
-        </p:nvSpPr>
-        <p:spPr>
-          <a:xfrm>
-            <a:off x="704088" y="3172968"/>
-            <a:ext cx="502920" cy="502920"/>
-          </a:xfrm>
-          <a:prstGeom prst="ellipse">
-            <a:avLst/>
-          </a:prstGeom>
-          <a:solidFill>
-            <a:srgbClr val="EAF3FF"/>
-          </a:solidFill>
-          <a:ln/>
-        </p:spPr>
-      </p:sp>
-      <p:pic>
-        <p:nvPicPr>
-          <p:cNvPr id="18" name="Image 2" descr="preencoded.png">    </p:cNvPr>
-          <p:cNvPicPr>
-            <a:picLocks noChangeAspect="1"/>
-          </p:cNvPicPr>
-          <p:nvPr/>
-        </p:nvPicPr>
-        <p:blipFill>
-          <a:blip r:embed="rId3"/>
-          <a:stretch>
-            <a:fillRect/>
-          </a:stretch>
-        </p:blipFill>
-        <p:spPr>
-          <a:xfrm>
-            <a:off x="774497" y="3243377"/>
-            <a:ext cx="362102" cy="362102"/>
-          </a:xfrm>
-          <a:prstGeom prst="rect">
-            <a:avLst/>
-          </a:prstGeom>
-        </p:spPr>
-      </p:pic>
-      <p:sp>
-        <p:nvSpPr>
-          <p:cNvPr id="19" name="Text 14"/>
-          <p:cNvSpPr/>
-          <p:nvPr/>
-        </p:nvSpPr>
-        <p:spPr>
-          <a:xfrm>
-            <a:off x="1325880" y="3118104"/>
-            <a:ext cx="2926080" cy="365760"/>
-          </a:xfrm>
-          <a:prstGeom prst="rect">
-            <a:avLst/>
-          </a:prstGeom>
-          <a:noFill/>
-          <a:ln/>
-        </p:spPr>
-        <p:txBody>
-          <a:bodyPr wrap="square" lIns="0" tIns="0" rIns="0" bIns="0" rtlCol="0" anchor="t"/>
-          <a:lstStyle/>
-          <a:p>
-            <a:pPr indent="0" marL="0">
-              <a:buNone/>
-            </a:pPr>
-            <a:r>
-              <a:rPr lang="en-US" sz="850" b="1" spc="50" kern="0" dirty="0">
-                <a:solidFill>
-                  <a:srgbClr val="0071E3"/>
-                </a:solidFill>
-                <a:latin typeface="Arial" pitchFamily="34" charset="0"/>
-                <a:ea typeface="Arial" pitchFamily="34" charset="-122"/>
-                <a:cs typeface="Arial" pitchFamily="34" charset="-120"/>
-              </a:rPr>
-              <a:t>ESTRATEGIA COMERCIAL, VENTAS Y VALIDACIÓN</a:t>
-            </a:r>
-            <a:endParaRPr lang="en-US" sz="850" dirty="0"/>
-          </a:p>
-        </p:txBody>
-      </p:sp>
-      <p:sp>
-        <p:nvSpPr>
-          <p:cNvPr id="20" name="Text 15"/>
-          <p:cNvSpPr/>
-          <p:nvPr/>
-        </p:nvSpPr>
-        <p:spPr>
-          <a:xfrm>
-            <a:off x="1325880" y="3538728"/>
-            <a:ext cx="2926080" cy="274320"/>
-          </a:xfrm>
-          <a:prstGeom prst="rect">
-            <a:avLst/>
-          </a:prstGeom>
-          <a:noFill/>
-          <a:ln/>
-        </p:spPr>
-        <p:txBody>
-          <a:bodyPr wrap="square" lIns="0" tIns="0" rIns="0" bIns="0" rtlCol="0" anchor="ctr"/>
-          <a:lstStyle/>
-          <a:p>
-            <a:pPr indent="0" marL="0">
-              <a:buNone/>
-            </a:pPr>
-            <a:r>
-              <a:rPr lang="en-US" sz="1300" b="1" dirty="0">
-                <a:solidFill>
-                  <a:srgbClr val="1D1D1F"/>
-                </a:solidFill>
-                <a:latin typeface="Arial" pitchFamily="34" charset="0"/>
-                <a:ea typeface="Arial" pitchFamily="34" charset="-122"/>
-                <a:cs typeface="Arial" pitchFamily="34" charset="-120"/>
-              </a:rPr>
-              <a:t>Juan Pablo Arteaga</a:t>
-            </a:r>
-            <a:endParaRPr lang="en-US" sz="1300" dirty="0"/>
-          </a:p>
-        </p:txBody>
-      </p:sp>
-      <p:sp>
-        <p:nvSpPr>
-          <p:cNvPr id="21" name="Text 16"/>
-          <p:cNvSpPr/>
-          <p:nvPr/>
-        </p:nvSpPr>
-        <p:spPr>
-          <a:xfrm>
-            <a:off x="1325880" y="3831336"/>
-            <a:ext cx="2926080" cy="274320"/>
-          </a:xfrm>
-          <a:prstGeom prst="rect">
-            <a:avLst/>
-          </a:prstGeom>
-          <a:noFill/>
-          <a:ln/>
-        </p:spPr>
-        <p:txBody>
-          <a:bodyPr wrap="square" lIns="0" tIns="0" rIns="0" bIns="0" rtlCol="0" anchor="ctr"/>
-          <a:lstStyle/>
-          <a:p>
-            <a:pPr indent="0" marL="0">
-              <a:buNone/>
-            </a:pPr>
-            <a:r>
-              <a:rPr lang="en-US" sz="1000" dirty="0">
-                <a:solidFill>
-                  <a:srgbClr val="6E6E73"/>
-                </a:solidFill>
-                <a:latin typeface="Arial" pitchFamily="34" charset="0"/>
-                <a:ea typeface="Arial" pitchFamily="34" charset="-122"/>
-                <a:cs typeface="Arial" pitchFamily="34" charset="-120"/>
-              </a:rPr>
-              <a:t>CCO</a:t>
-            </a:r>
-            <a:endParaRPr lang="en-US" sz="1000" dirty="0"/>
-          </a:p>
-        </p:txBody>
-      </p:sp>
-      <p:sp>
-        <p:nvSpPr>
-          <p:cNvPr id="22" name="Shape 17"/>
-          <p:cNvSpPr/>
-          <p:nvPr/>
-        </p:nvSpPr>
-        <p:spPr>
-          <a:xfrm>
-            <a:off x="4709160" y="2971800"/>
-            <a:ext cx="3931920" cy="1234440"/>
-          </a:xfrm>
-          <a:prstGeom prst="roundRect">
-            <a:avLst>
-              <a:gd name="adj" fmla="val 6667"/>
-            </a:avLst>
-          </a:prstGeom>
-          <a:solidFill>
-            <a:srgbClr val="FFFFFF"/>
-          </a:solidFill>
-          <a:ln w="9525">
-            <a:solidFill>
-              <a:srgbClr val="E2E2E6"/>
-            </a:solidFill>
-            <a:prstDash val="solid"/>
-          </a:ln>
-          <a:effectLst>
-            <a:outerShdw sx="100000" sy="100000" kx="0" ky="0" algn="bl" rotWithShape="0" blurRad="101600" dist="25400" dir="5400000">
-              <a:srgbClr val="0A3D91">
-                <a:alpha val="7000"/>
-              </a:srgbClr>
-            </a:outerShdw>
-          </a:effectLst>
-        </p:spPr>
-      </p:sp>
-      <p:sp>
-        <p:nvSpPr>
-          <p:cNvPr id="23" name="Shape 18"/>
-          <p:cNvSpPr/>
-          <p:nvPr/>
-        </p:nvSpPr>
-        <p:spPr>
-          <a:xfrm>
-            <a:off x="4910328" y="3172968"/>
-            <a:ext cx="502920" cy="502920"/>
-          </a:xfrm>
-          <a:prstGeom prst="ellipse">
-            <a:avLst/>
-          </a:prstGeom>
-          <a:solidFill>
-            <a:srgbClr val="EAF3FF"/>
-          </a:solidFill>
-          <a:ln/>
-        </p:spPr>
-      </p:sp>
-      <p:pic>
-        <p:nvPicPr>
-          <p:cNvPr id="24" name="Image 3" descr="preencoded.png">    </p:cNvPr>
-          <p:cNvPicPr>
-            <a:picLocks noChangeAspect="1"/>
-          </p:cNvPicPr>
-          <p:nvPr/>
-        </p:nvPicPr>
-        <p:blipFill>
-          <a:blip r:embed="rId4"/>
-          <a:stretch>
-            <a:fillRect/>
-          </a:stretch>
-        </p:blipFill>
-        <p:spPr>
-          <a:xfrm>
-            <a:off x="4980737" y="3243377"/>
-            <a:ext cx="362102" cy="362102"/>
-          </a:xfrm>
-          <a:prstGeom prst="rect">
-            <a:avLst/>
-          </a:prstGeom>
-        </p:spPr>
-      </p:pic>
-      <p:sp>
-        <p:nvSpPr>
-          <p:cNvPr id="25" name="Text 19"/>
-          <p:cNvSpPr/>
-          <p:nvPr/>
-        </p:nvSpPr>
-        <p:spPr>
-          <a:xfrm>
-            <a:off x="5532120" y="3118104"/>
-            <a:ext cx="2926080" cy="365760"/>
-          </a:xfrm>
-          <a:prstGeom prst="rect">
-            <a:avLst/>
-          </a:prstGeom>
-          <a:noFill/>
-          <a:ln/>
-        </p:spPr>
-        <p:txBody>
-          <a:bodyPr wrap="square" lIns="0" tIns="0" rIns="0" bIns="0" rtlCol="0" anchor="t"/>
-          <a:lstStyle/>
-          <a:p>
-            <a:pPr indent="0" marL="0">
-              <a:buNone/>
-            </a:pPr>
-            <a:r>
-              <a:rPr lang="en-US" sz="850" b="1" spc="50" kern="0" dirty="0">
-                <a:solidFill>
-                  <a:srgbClr val="0071E3"/>
-                </a:solidFill>
-                <a:latin typeface="Arial" pitchFamily="34" charset="0"/>
-                <a:ea typeface="Arial" pitchFamily="34" charset="-122"/>
-                <a:cs typeface="Arial" pitchFamily="34" charset="-120"/>
-              </a:rPr>
-              <a:t>LEGAL, CONTACTOS Y SECTOR SALUD</a:t>
-            </a:r>
-            <a:endParaRPr lang="en-US" sz="850" dirty="0"/>
-          </a:p>
-        </p:txBody>
-      </p:sp>
-      <p:sp>
-        <p:nvSpPr>
-          <p:cNvPr id="26" name="Text 20"/>
-          <p:cNvSpPr/>
-          <p:nvPr/>
-        </p:nvSpPr>
-        <p:spPr>
-          <a:xfrm>
-            <a:off x="5532120" y="3538728"/>
-            <a:ext cx="2926080" cy="274320"/>
-          </a:xfrm>
-          <a:prstGeom prst="rect">
-            <a:avLst/>
-          </a:prstGeom>
-          <a:noFill/>
-          <a:ln/>
-        </p:spPr>
-        <p:txBody>
-          <a:bodyPr wrap="square" lIns="0" tIns="0" rIns="0" bIns="0" rtlCol="0" anchor="ctr"/>
-          <a:lstStyle/>
-          <a:p>
-            <a:pPr indent="0" marL="0">
-              <a:buNone/>
-            </a:pPr>
-            <a:r>
-              <a:rPr lang="en-US" sz="1300" b="1" dirty="0">
-                <a:solidFill>
-                  <a:srgbClr val="1D1D1F"/>
-                </a:solidFill>
-                <a:latin typeface="Arial" pitchFamily="34" charset="0"/>
-                <a:ea typeface="Arial" pitchFamily="34" charset="-122"/>
-                <a:cs typeface="Arial" pitchFamily="34" charset="-120"/>
-              </a:rPr>
-              <a:t>Isabel Sofía García</a:t>
-            </a:r>
-            <a:endParaRPr lang="en-US" sz="1300" dirty="0"/>
-          </a:p>
-        </p:txBody>
-      </p:sp>
-      <p:sp>
-        <p:nvSpPr>
-          <p:cNvPr id="27" name="Text 21"/>
-          <p:cNvSpPr/>
-          <p:nvPr/>
-        </p:nvSpPr>
-        <p:spPr>
-          <a:xfrm>
-            <a:off x="5532120" y="3831336"/>
-            <a:ext cx="2926080" cy="274320"/>
-          </a:xfrm>
-          <a:prstGeom prst="rect">
-            <a:avLst/>
-          </a:prstGeom>
-          <a:noFill/>
-          <a:ln/>
-        </p:spPr>
-        <p:txBody>
-          <a:bodyPr wrap="square" lIns="0" tIns="0" rIns="0" bIns="0" rtlCol="0" anchor="ctr"/>
-          <a:lstStyle/>
-          <a:p>
-            <a:pPr indent="0" marL="0">
-              <a:buNone/>
-            </a:pPr>
-            <a:r>
-              <a:rPr lang="en-US" sz="1000" dirty="0">
-                <a:solidFill>
-                  <a:srgbClr val="6E6E73"/>
-                </a:solidFill>
-                <a:latin typeface="Arial" pitchFamily="34" charset="0"/>
-                <a:ea typeface="Arial" pitchFamily="34" charset="-122"/>
-                <a:cs typeface="Arial" pitchFamily="34" charset="-120"/>
-              </a:rPr>
-              <a:t>CFO</a:t>
-            </a:r>
-            <a:endParaRPr lang="en-US" sz="1000" dirty="0"/>
-          </a:p>
-        </p:txBody>
-      </p:sp>
-      <p:sp>
-        <p:nvSpPr>
-          <p:cNvPr id="28" name="Text 22"/>
-          <p:cNvSpPr/>
-          <p:nvPr/>
-        </p:nvSpPr>
-        <p:spPr>
-          <a:xfrm>
-            <a:off x="502920" y="4297680"/>
-            <a:ext cx="8138160" cy="457200"/>
-          </a:xfrm>
-          <a:prstGeom prst="rect">
-            <a:avLst/>
-          </a:prstGeom>
-          <a:noFill/>
-          <a:ln/>
-        </p:spPr>
-        <p:txBody>
-          <a:bodyPr wrap="square" lIns="0" tIns="0" rIns="0" bIns="0" rtlCol="0" anchor="ctr"/>
-          <a:lstStyle/>
-          <a:p>
-            <a:pPr indent="0" marL="0">
-              <a:buNone/>
-            </a:pPr>
-            <a:r>
-              <a:rPr lang="en-US" sz="1300" b="1" i="1" dirty="0">
-                <a:solidFill>
-                  <a:srgbClr val="0A3D91"/>
-                </a:solidFill>
-                <a:latin typeface="Arial" pitchFamily="34" charset="0"/>
-                <a:ea typeface="Arial" pitchFamily="34" charset="-122"/>
-                <a:cs typeface="Arial" pitchFamily="34" charset="-120"/>
-              </a:rPr>
-              <a:t>Tenemos la capacidad para construir, validar y vender la solución.</a:t>
-            </a:r>
-            <a:endParaRPr lang="en-US" sz="1300" dirty="0"/>
-          </a:p>
-        </p:txBody>
-      </p:sp>
-    </p:spTree>
-  </p:cSld>
-  <p:clrMapOvr>
-    <a:masterClrMapping/>
-  </p:clrMapOvr>
-</p:sld>
-</file>
-
-<file path=ppt/slides/slide12.xml><?xml version="1.0" encoding="utf-8"?>
-<p:sld xmlns:a="http://schemas.openxmlformats.org/drawingml/2006/main" xmlns:r="http://schemas.openxmlformats.org/officeDocument/2006/relationships" xmlns:p="http://schemas.openxmlformats.org/presentationml/2006/main">
-  <p:cSld name="Slide 12">
-    <p:bg>
-      <p:bgPr>
-        <a:solidFill>
-          <a:srgbClr val="FFFFFF"/>
-        </a:solidFill>
-      </p:bgPr>
-    </p:bg>
-    <p:spTree>
-      <p:nvGrpSpPr>
-        <p:cNvPr id="1" name=""/>
-        <p:cNvGrpSpPr/>
-        <p:nvPr/>
-      </p:nvGrpSpPr>
-      <p:grpSpPr>
-        <a:xfrm>
-          <a:off x="0" y="0"/>
-          <a:ext cx="0" cy="0"/>
-          <a:chOff x="0" y="0"/>
-          <a:chExt cx="0" cy="0"/>
-        </a:xfrm>
-      </p:grpSpPr>
-      <p:sp>
-        <p:nvSpPr>
-          <p:cNvPr id="2" name="Text 0"/>
-          <p:cNvSpPr/>
-          <p:nvPr/>
-        </p:nvSpPr>
-        <p:spPr>
-          <a:xfrm>
-            <a:off x="502920" y="320040"/>
-            <a:ext cx="8138160" cy="274320"/>
-          </a:xfrm>
-          <a:prstGeom prst="rect">
-            <a:avLst/>
-          </a:prstGeom>
-          <a:noFill/>
-          <a:ln/>
-        </p:spPr>
-        <p:txBody>
-          <a:bodyPr wrap="square" lIns="0" tIns="0" rIns="0" bIns="0" rtlCol="0" anchor="ctr"/>
-          <a:lstStyle/>
-          <a:p>
-            <a:pPr indent="0" marL="0">
-              <a:buNone/>
-            </a:pPr>
-            <a:r>
-              <a:rPr lang="en-US" sz="1050" b="1" spc="200" kern="0" dirty="0">
-                <a:solidFill>
-                  <a:srgbClr val="0071E3"/>
-                </a:solidFill>
-                <a:latin typeface="Arial" pitchFamily="34" charset="0"/>
-                <a:ea typeface="Arial" pitchFamily="34" charset="-122"/>
-                <a:cs typeface="Arial" pitchFamily="34" charset="-120"/>
-              </a:rPr>
               <a:t>USO DEL INCENTIVO</a:t>
             </a:r>
             <a:endParaRPr lang="en-US" sz="1050" dirty="0"/>
@@ -4164,7 +3366,7 @@
       </p:sp>
       <p:graphicFrame>
         <p:nvGraphicFramePr>
-          <p:cNvPr id="13" name="Table 0"/>
+          <p:cNvPr id="12" name="Table 0"/>
           <p:cNvGraphicFramePr>
             <a:graphicFrameLocks noGrp="1"/>
           </p:cNvGraphicFramePr>
@@ -5368,9 +4570,9 @@
 </p:sld>
 </file>
 
-<file path=ppt/slides/slide13.xml><?xml version="1.0" encoding="utf-8"?>
+<file path=ppt/slides/slide12.xml><?xml version="1.0" encoding="utf-8"?>
 <p:sld xmlns:a="http://schemas.openxmlformats.org/drawingml/2006/main" xmlns:r="http://schemas.openxmlformats.org/officeDocument/2006/relationships" xmlns:p="http://schemas.openxmlformats.org/presentationml/2006/main">
-  <p:cSld name="Slide 13">
+  <p:cSld name="Slide 12">
     <p:bg>
       <p:bgPr>
         <a:solidFill>
@@ -8343,1003 +7545,6 @@
                 <a:ea typeface="Arial" pitchFamily="34" charset="-122"/>
                 <a:cs typeface="Arial" pitchFamily="34" charset="-120"/>
               </a:rPr>
-              <a:t>CÓMO FUNCIONA</a:t>
-            </a:r>
-            <a:endParaRPr lang="en-US" sz="1050" dirty="0"/>
-          </a:p>
-        </p:txBody>
-      </p:sp>
-      <p:sp>
-        <p:nvSpPr>
-          <p:cNvPr id="3" name="Text 1"/>
-          <p:cNvSpPr/>
-          <p:nvPr/>
-        </p:nvSpPr>
-        <p:spPr>
-          <a:xfrm>
-            <a:off x="502920" y="658368"/>
-            <a:ext cx="8138160" cy="502920"/>
-          </a:xfrm>
-          <a:prstGeom prst="rect">
-            <a:avLst/>
-          </a:prstGeom>
-          <a:noFill/>
-          <a:ln/>
-        </p:spPr>
-        <p:txBody>
-          <a:bodyPr wrap="square" lIns="0" tIns="0" rIns="0" bIns="0" rtlCol="0" anchor="ctr"/>
-          <a:lstStyle/>
-          <a:p>
-            <a:pPr indent="0" marL="0">
-              <a:buNone/>
-            </a:pPr>
-            <a:r>
-              <a:rPr lang="en-US" sz="2200" b="1" dirty="0">
-                <a:solidFill>
-                  <a:srgbClr val="1D1D1F"/>
-                </a:solidFill>
-                <a:latin typeface="Arial" pitchFamily="34" charset="0"/>
-                <a:ea typeface="Arial" pitchFamily="34" charset="-122"/>
-                <a:cs typeface="Arial" pitchFamily="34" charset="-120"/>
-              </a:rPr>
-              <a:t>El médico deja de estar </a:t>
-            </a:r>
-            <a:pPr indent="0" marL="0">
-              <a:buNone/>
-            </a:pPr>
-            <a:r>
-              <a:rPr lang="en-US" sz="2200" b="1" dirty="0">
-                <a:solidFill>
-                  <a:srgbClr val="0A3D91"/>
-                </a:solidFill>
-                <a:latin typeface="Arial" pitchFamily="34" charset="0"/>
-                <a:ea typeface="Arial" pitchFamily="34" charset="-122"/>
-                <a:cs typeface="Arial" pitchFamily="34" charset="-120"/>
-              </a:rPr>
-              <a:t>pegado al computador</a:t>
-            </a:r>
-            <a:pPr indent="0" marL="0">
-              <a:buNone/>
-            </a:pPr>
-            <a:r>
-              <a:rPr lang="en-US" sz="2200" b="1" dirty="0">
-                <a:solidFill>
-                  <a:srgbClr val="1D1D1F"/>
-                </a:solidFill>
-                <a:latin typeface="Arial" pitchFamily="34" charset="0"/>
-                <a:ea typeface="Arial" pitchFamily="34" charset="-122"/>
-                <a:cs typeface="Arial" pitchFamily="34" charset="-120"/>
-              </a:rPr>
-              <a:t>.</a:t>
-            </a:r>
-            <a:endParaRPr lang="en-US" sz="2200" dirty="0"/>
-          </a:p>
-        </p:txBody>
-      </p:sp>
-      <p:sp>
-        <p:nvSpPr>
-          <p:cNvPr id="4" name="Text 2"/>
-          <p:cNvSpPr/>
-          <p:nvPr/>
-        </p:nvSpPr>
-        <p:spPr>
-          <a:xfrm>
-            <a:off x="502920" y="1252728"/>
-            <a:ext cx="457200" cy="347472"/>
-          </a:xfrm>
-          <a:prstGeom prst="rect">
-            <a:avLst/>
-          </a:prstGeom>
-          <a:noFill/>
-          <a:ln/>
-        </p:spPr>
-        <p:txBody>
-          <a:bodyPr wrap="square" lIns="0" tIns="0" rIns="0" bIns="0" rtlCol="0" anchor="ctr"/>
-          <a:lstStyle/>
-          <a:p>
-            <a:pPr indent="0" marL="0">
-              <a:buNone/>
-            </a:pPr>
-            <a:r>
-              <a:rPr lang="en-US" sz="1700" dirty="0">
-                <a:solidFill>
-                  <a:srgbClr val="0071E3"/>
-                </a:solidFill>
-                <a:latin typeface="Arial" pitchFamily="34" charset="0"/>
-                <a:ea typeface="Arial" pitchFamily="34" charset="-122"/>
-                <a:cs typeface="Arial" pitchFamily="34" charset="-120"/>
-              </a:rPr>
-              <a:t>1</a:t>
-            </a:r>
-            <a:endParaRPr lang="en-US" sz="1700" dirty="0"/>
-          </a:p>
-        </p:txBody>
-      </p:sp>
-      <p:sp>
-        <p:nvSpPr>
-          <p:cNvPr id="5" name="Text 3"/>
-          <p:cNvSpPr/>
-          <p:nvPr/>
-        </p:nvSpPr>
-        <p:spPr>
-          <a:xfrm>
-            <a:off x="1069848" y="1252728"/>
-            <a:ext cx="7571232" cy="365760"/>
-          </a:xfrm>
-          <a:prstGeom prst="rect">
-            <a:avLst/>
-          </a:prstGeom>
-          <a:noFill/>
-          <a:ln/>
-        </p:spPr>
-        <p:txBody>
-          <a:bodyPr wrap="square" lIns="0" tIns="0" rIns="0" bIns="0" rtlCol="0" anchor="ctr"/>
-          <a:lstStyle/>
-          <a:p>
-            <a:pPr indent="0" marL="0">
-              <a:buNone/>
-            </a:pPr>
-            <a:r>
-              <a:rPr lang="en-US" sz="1000" dirty="0">
-                <a:solidFill>
-                  <a:srgbClr val="1D1D1F"/>
-                </a:solidFill>
-                <a:latin typeface="Arial" pitchFamily="34" charset="0"/>
-                <a:ea typeface="Arial" pitchFamily="34" charset="-122"/>
-                <a:cs typeface="Arial" pitchFamily="34" charset="-120"/>
-              </a:rPr>
-              <a:t>Un dispositivo con micrófono dedicado en el consultorio captura la conversación con calidad clínica.</a:t>
-            </a:r>
-            <a:endParaRPr lang="en-US" sz="1000" dirty="0"/>
-          </a:p>
-        </p:txBody>
-      </p:sp>
-      <p:sp>
-        <p:nvSpPr>
-          <p:cNvPr id="6" name="Shape 4"/>
-          <p:cNvSpPr/>
-          <p:nvPr/>
-        </p:nvSpPr>
-        <p:spPr>
-          <a:xfrm>
-            <a:off x="502920" y="1627632"/>
-            <a:ext cx="8138160" cy="0"/>
-          </a:xfrm>
-          <a:prstGeom prst="line">
-            <a:avLst/>
-          </a:prstGeom>
-          <a:noFill/>
-          <a:ln w="9525">
-            <a:solidFill>
-              <a:srgbClr val="E2E2E6"/>
-            </a:solidFill>
-            <a:prstDash val="solid"/>
-          </a:ln>
-        </p:spPr>
-      </p:sp>
-      <p:sp>
-        <p:nvSpPr>
-          <p:cNvPr id="7" name="Text 5"/>
-          <p:cNvSpPr/>
-          <p:nvPr/>
-        </p:nvSpPr>
-        <p:spPr>
-          <a:xfrm>
-            <a:off x="502920" y="1655064"/>
-            <a:ext cx="457200" cy="347472"/>
-          </a:xfrm>
-          <a:prstGeom prst="rect">
-            <a:avLst/>
-          </a:prstGeom>
-          <a:noFill/>
-          <a:ln/>
-        </p:spPr>
-        <p:txBody>
-          <a:bodyPr wrap="square" lIns="0" tIns="0" rIns="0" bIns="0" rtlCol="0" anchor="ctr"/>
-          <a:lstStyle/>
-          <a:p>
-            <a:pPr indent="0" marL="0">
-              <a:buNone/>
-            </a:pPr>
-            <a:r>
-              <a:rPr lang="en-US" sz="1700" dirty="0">
-                <a:solidFill>
-                  <a:srgbClr val="0071E3"/>
-                </a:solidFill>
-                <a:latin typeface="Arial" pitchFamily="34" charset="0"/>
-                <a:ea typeface="Arial" pitchFamily="34" charset="-122"/>
-                <a:cs typeface="Arial" pitchFamily="34" charset="-120"/>
-              </a:rPr>
-              <a:t>2</a:t>
-            </a:r>
-            <a:endParaRPr lang="en-US" sz="1700" dirty="0"/>
-          </a:p>
-        </p:txBody>
-      </p:sp>
-      <p:sp>
-        <p:nvSpPr>
-          <p:cNvPr id="8" name="Text 6"/>
-          <p:cNvSpPr/>
-          <p:nvPr/>
-        </p:nvSpPr>
-        <p:spPr>
-          <a:xfrm>
-            <a:off x="1069848" y="1655064"/>
-            <a:ext cx="7571232" cy="365760"/>
-          </a:xfrm>
-          <a:prstGeom prst="rect">
-            <a:avLst/>
-          </a:prstGeom>
-          <a:noFill/>
-          <a:ln/>
-        </p:spPr>
-        <p:txBody>
-          <a:bodyPr wrap="square" lIns="0" tIns="0" rIns="0" bIns="0" rtlCol="0" anchor="ctr"/>
-          <a:lstStyle/>
-          <a:p>
-            <a:pPr indent="0" marL="0">
-              <a:buNone/>
-            </a:pPr>
-            <a:r>
-              <a:rPr lang="en-US" sz="1000" dirty="0">
-                <a:solidFill>
-                  <a:srgbClr val="1D1D1F"/>
-                </a:solidFill>
-                <a:latin typeface="Arial" pitchFamily="34" charset="0"/>
-                <a:ea typeface="Arial" pitchFamily="34" charset="-122"/>
-                <a:cs typeface="Arial" pitchFamily="34" charset="-120"/>
-              </a:rPr>
-              <a:t>La IA comprende la consulta y la estructura como información clínica: SOAP, resumen, plan.</a:t>
-            </a:r>
-            <a:endParaRPr lang="en-US" sz="1000" dirty="0"/>
-          </a:p>
-        </p:txBody>
-      </p:sp>
-      <p:sp>
-        <p:nvSpPr>
-          <p:cNvPr id="9" name="Shape 7"/>
-          <p:cNvSpPr/>
-          <p:nvPr/>
-        </p:nvSpPr>
-        <p:spPr>
-          <a:xfrm>
-            <a:off x="502920" y="2029968"/>
-            <a:ext cx="8138160" cy="0"/>
-          </a:xfrm>
-          <a:prstGeom prst="line">
-            <a:avLst/>
-          </a:prstGeom>
-          <a:noFill/>
-          <a:ln w="9525">
-            <a:solidFill>
-              <a:srgbClr val="E2E2E6"/>
-            </a:solidFill>
-            <a:prstDash val="solid"/>
-          </a:ln>
-        </p:spPr>
-      </p:sp>
-      <p:sp>
-        <p:nvSpPr>
-          <p:cNvPr id="10" name="Text 8"/>
-          <p:cNvSpPr/>
-          <p:nvPr/>
-        </p:nvSpPr>
-        <p:spPr>
-          <a:xfrm>
-            <a:off x="502920" y="2057400"/>
-            <a:ext cx="457200" cy="347472"/>
-          </a:xfrm>
-          <a:prstGeom prst="rect">
-            <a:avLst/>
-          </a:prstGeom>
-          <a:noFill/>
-          <a:ln/>
-        </p:spPr>
-        <p:txBody>
-          <a:bodyPr wrap="square" lIns="0" tIns="0" rIns="0" bIns="0" rtlCol="0" anchor="ctr"/>
-          <a:lstStyle/>
-          <a:p>
-            <a:pPr indent="0" marL="0">
-              <a:buNone/>
-            </a:pPr>
-            <a:r>
-              <a:rPr lang="en-US" sz="1700" dirty="0">
-                <a:solidFill>
-                  <a:srgbClr val="0071E3"/>
-                </a:solidFill>
-                <a:latin typeface="Arial" pitchFamily="34" charset="0"/>
-                <a:ea typeface="Arial" pitchFamily="34" charset="-122"/>
-                <a:cs typeface="Arial" pitchFamily="34" charset="-120"/>
-              </a:rPr>
-              <a:t>3</a:t>
-            </a:r>
-            <a:endParaRPr lang="en-US" sz="1700" dirty="0"/>
-          </a:p>
-        </p:txBody>
-      </p:sp>
-      <p:sp>
-        <p:nvSpPr>
-          <p:cNvPr id="11" name="Text 9"/>
-          <p:cNvSpPr/>
-          <p:nvPr/>
-        </p:nvSpPr>
-        <p:spPr>
-          <a:xfrm>
-            <a:off x="1069848" y="2057400"/>
-            <a:ext cx="7571232" cy="365760"/>
-          </a:xfrm>
-          <a:prstGeom prst="rect">
-            <a:avLst/>
-          </a:prstGeom>
-          <a:noFill/>
-          <a:ln/>
-        </p:spPr>
-        <p:txBody>
-          <a:bodyPr wrap="square" lIns="0" tIns="0" rIns="0" bIns="0" rtlCol="0" anchor="ctr"/>
-          <a:lstStyle/>
-          <a:p>
-            <a:pPr indent="0" marL="0">
-              <a:buNone/>
-            </a:pPr>
-            <a:r>
-              <a:rPr lang="en-US" sz="1000" dirty="0">
-                <a:solidFill>
-                  <a:srgbClr val="1D1D1F"/>
-                </a:solidFill>
-                <a:latin typeface="Arial" pitchFamily="34" charset="0"/>
-                <a:ea typeface="Arial" pitchFamily="34" charset="-122"/>
-                <a:cs typeface="Arial" pitchFamily="34" charset="-120"/>
-              </a:rPr>
-              <a:t>Miracle opera el computador del médico: navega el sistema de historia clínica y diligencia los campos — sin integraciones.</a:t>
-            </a:r>
-            <a:endParaRPr lang="en-US" sz="1000" dirty="0"/>
-          </a:p>
-        </p:txBody>
-      </p:sp>
-      <p:sp>
-        <p:nvSpPr>
-          <p:cNvPr id="12" name="Shape 10"/>
-          <p:cNvSpPr/>
-          <p:nvPr/>
-        </p:nvSpPr>
-        <p:spPr>
-          <a:xfrm>
-            <a:off x="502920" y="2432304"/>
-            <a:ext cx="8138160" cy="0"/>
-          </a:xfrm>
-          <a:prstGeom prst="line">
-            <a:avLst/>
-          </a:prstGeom>
-          <a:noFill/>
-          <a:ln w="9525">
-            <a:solidFill>
-              <a:srgbClr val="E2E2E6"/>
-            </a:solidFill>
-            <a:prstDash val="solid"/>
-          </a:ln>
-        </p:spPr>
-      </p:sp>
-      <p:sp>
-        <p:nvSpPr>
-          <p:cNvPr id="13" name="Text 11"/>
-          <p:cNvSpPr/>
-          <p:nvPr/>
-        </p:nvSpPr>
-        <p:spPr>
-          <a:xfrm>
-            <a:off x="502920" y="2459736"/>
-            <a:ext cx="457200" cy="347472"/>
-          </a:xfrm>
-          <a:prstGeom prst="rect">
-            <a:avLst/>
-          </a:prstGeom>
-          <a:noFill/>
-          <a:ln/>
-        </p:spPr>
-        <p:txBody>
-          <a:bodyPr wrap="square" lIns="0" tIns="0" rIns="0" bIns="0" rtlCol="0" anchor="ctr"/>
-          <a:lstStyle/>
-          <a:p>
-            <a:pPr indent="0" marL="0">
-              <a:buNone/>
-            </a:pPr>
-            <a:r>
-              <a:rPr lang="en-US" sz="1700" dirty="0">
-                <a:solidFill>
-                  <a:srgbClr val="0071E3"/>
-                </a:solidFill>
-                <a:latin typeface="Arial" pitchFamily="34" charset="0"/>
-                <a:ea typeface="Arial" pitchFamily="34" charset="-122"/>
-                <a:cs typeface="Arial" pitchFamily="34" charset="-120"/>
-              </a:rPr>
-              <a:t>4</a:t>
-            </a:r>
-            <a:endParaRPr lang="en-US" sz="1700" dirty="0"/>
-          </a:p>
-        </p:txBody>
-      </p:sp>
-      <p:sp>
-        <p:nvSpPr>
-          <p:cNvPr id="14" name="Text 12"/>
-          <p:cNvSpPr/>
-          <p:nvPr/>
-        </p:nvSpPr>
-        <p:spPr>
-          <a:xfrm>
-            <a:off x="1069848" y="2459736"/>
-            <a:ext cx="7571232" cy="365760"/>
-          </a:xfrm>
-          <a:prstGeom prst="rect">
-            <a:avLst/>
-          </a:prstGeom>
-          <a:noFill/>
-          <a:ln/>
-        </p:spPr>
-        <p:txBody>
-          <a:bodyPr wrap="square" lIns="0" tIns="0" rIns="0" bIns="0" rtlCol="0" anchor="ctr"/>
-          <a:lstStyle/>
-          <a:p>
-            <a:pPr indent="0" marL="0">
-              <a:buNone/>
-            </a:pPr>
-            <a:r>
-              <a:rPr lang="en-US" sz="1000" dirty="0">
-                <a:solidFill>
-                  <a:srgbClr val="1D1D1F"/>
-                </a:solidFill>
-                <a:latin typeface="Arial" pitchFamily="34" charset="0"/>
-                <a:ea typeface="Arial" pitchFamily="34" charset="-122"/>
-                <a:cs typeface="Arial" pitchFamily="34" charset="-120"/>
-              </a:rPr>
-              <a:t>El médico revisa y aprueba. La decisión clínica siempre es suya.</a:t>
-            </a:r>
-            <a:endParaRPr lang="en-US" sz="1000" dirty="0"/>
-          </a:p>
-        </p:txBody>
-      </p:sp>
-      <p:sp>
-        <p:nvSpPr>
-          <p:cNvPr id="15" name="Shape 13"/>
-          <p:cNvSpPr/>
-          <p:nvPr/>
-        </p:nvSpPr>
-        <p:spPr>
-          <a:xfrm>
-            <a:off x="502920" y="3063240"/>
-            <a:ext cx="2784897" cy="1691640"/>
-          </a:xfrm>
-          <a:prstGeom prst="roundRect">
-            <a:avLst>
-              <a:gd name="adj" fmla="val 4865"/>
-            </a:avLst>
-          </a:prstGeom>
-          <a:solidFill>
-            <a:srgbClr val="FFFFFF"/>
-          </a:solidFill>
-          <a:ln w="9525">
-            <a:solidFill>
-              <a:srgbClr val="E2E2E6"/>
-            </a:solidFill>
-            <a:prstDash val="solid"/>
-          </a:ln>
-          <a:effectLst>
-            <a:outerShdw sx="100000" sy="100000" kx="0" ky="0" algn="bl" rotWithShape="0" blurRad="101600" dist="25400" dir="5400000">
-              <a:srgbClr val="0A3D91">
-                <a:alpha val="7000"/>
-              </a:srgbClr>
-            </a:outerShdw>
-          </a:effectLst>
-        </p:spPr>
-      </p:sp>
-      <p:sp>
-        <p:nvSpPr>
-          <p:cNvPr id="16" name="Text 14"/>
-          <p:cNvSpPr/>
-          <p:nvPr/>
-        </p:nvSpPr>
-        <p:spPr>
-          <a:xfrm>
-            <a:off x="640080" y="3154680"/>
-            <a:ext cx="2510577" cy="201168"/>
-          </a:xfrm>
-          <a:prstGeom prst="rect">
-            <a:avLst/>
-          </a:prstGeom>
-          <a:noFill/>
-          <a:ln/>
-        </p:spPr>
-        <p:txBody>
-          <a:bodyPr wrap="square" lIns="0" tIns="0" rIns="0" bIns="0" rtlCol="0" anchor="ctr"/>
-          <a:lstStyle/>
-          <a:p>
-            <a:pPr indent="0" marL="0">
-              <a:buNone/>
-            </a:pPr>
-            <a:r>
-              <a:rPr lang="en-US" sz="650" b="1" spc="50" kern="0" dirty="0">
-                <a:solidFill>
-                  <a:srgbClr val="0071E3"/>
-                </a:solidFill>
-                <a:latin typeface="Arial" pitchFamily="34" charset="0"/>
-                <a:ea typeface="Arial" pitchFamily="34" charset="-122"/>
-                <a:cs typeface="Arial" pitchFamily="34" charset="-120"/>
-              </a:rPr>
-              <a:t>NOTA GENERADA · EJEMPLO</a:t>
-            </a:r>
-            <a:endParaRPr lang="en-US" sz="650" dirty="0"/>
-          </a:p>
-        </p:txBody>
-      </p:sp>
-      <p:sp>
-        <p:nvSpPr>
-          <p:cNvPr id="17" name="Text 15"/>
-          <p:cNvSpPr/>
-          <p:nvPr/>
-        </p:nvSpPr>
-        <p:spPr>
-          <a:xfrm>
-            <a:off x="640080" y="3392424"/>
-            <a:ext cx="2510577" cy="274320"/>
-          </a:xfrm>
-          <a:prstGeom prst="rect">
-            <a:avLst/>
-          </a:prstGeom>
-          <a:noFill/>
-          <a:ln/>
-        </p:spPr>
-        <p:txBody>
-          <a:bodyPr wrap="square" lIns="0" tIns="0" rIns="0" bIns="0" rtlCol="0" anchor="t"/>
-          <a:lstStyle/>
-          <a:p>
-            <a:pPr indent="0" marL="0">
-              <a:buNone/>
-            </a:pPr>
-            <a:r>
-              <a:rPr lang="en-US" sz="780" b="1" dirty="0">
-                <a:solidFill>
-                  <a:srgbClr val="0A3D91"/>
-                </a:solidFill>
-                <a:latin typeface="Arial" pitchFamily="34" charset="0"/>
-                <a:ea typeface="Arial" pitchFamily="34" charset="-122"/>
-                <a:cs typeface="Arial" pitchFamily="34" charset="-120"/>
-              </a:rPr>
-              <a:t>S  </a:t>
-            </a:r>
-            <a:pPr indent="0" marL="0">
-              <a:buNone/>
-            </a:pPr>
-            <a:r>
-              <a:rPr lang="en-US" sz="780" dirty="0">
-                <a:solidFill>
-                  <a:srgbClr val="48484A"/>
-                </a:solidFill>
-                <a:latin typeface="Arial" pitchFamily="34" charset="0"/>
-                <a:ea typeface="Arial" pitchFamily="34" charset="-122"/>
-                <a:cs typeface="Arial" pitchFamily="34" charset="-120"/>
-              </a:rPr>
-              <a:t>Cefalea de 3 días, pulsátil, sin fiebre</a:t>
-            </a:r>
-            <a:endParaRPr lang="en-US" sz="780" dirty="0"/>
-          </a:p>
-        </p:txBody>
-      </p:sp>
-      <p:sp>
-        <p:nvSpPr>
-          <p:cNvPr id="18" name="Text 16"/>
-          <p:cNvSpPr/>
-          <p:nvPr/>
-        </p:nvSpPr>
-        <p:spPr>
-          <a:xfrm>
-            <a:off x="640080" y="3685032"/>
-            <a:ext cx="2510577" cy="274320"/>
-          </a:xfrm>
-          <a:prstGeom prst="rect">
-            <a:avLst/>
-          </a:prstGeom>
-          <a:noFill/>
-          <a:ln/>
-        </p:spPr>
-        <p:txBody>
-          <a:bodyPr wrap="square" lIns="0" tIns="0" rIns="0" bIns="0" rtlCol="0" anchor="t"/>
-          <a:lstStyle/>
-          <a:p>
-            <a:pPr indent="0" marL="0">
-              <a:buNone/>
-            </a:pPr>
-            <a:r>
-              <a:rPr lang="en-US" sz="780" b="1" dirty="0">
-                <a:solidFill>
-                  <a:srgbClr val="0A3D91"/>
-                </a:solidFill>
-                <a:latin typeface="Arial" pitchFamily="34" charset="0"/>
-                <a:ea typeface="Arial" pitchFamily="34" charset="-122"/>
-                <a:cs typeface="Arial" pitchFamily="34" charset="-120"/>
-              </a:rPr>
-              <a:t>O  </a:t>
-            </a:r>
-            <a:pPr indent="0" marL="0">
-              <a:buNone/>
-            </a:pPr>
-            <a:r>
-              <a:rPr lang="en-US" sz="780" dirty="0">
-                <a:solidFill>
-                  <a:srgbClr val="48484A"/>
-                </a:solidFill>
-                <a:latin typeface="Arial" pitchFamily="34" charset="0"/>
-                <a:ea typeface="Arial" pitchFamily="34" charset="-122"/>
-                <a:cs typeface="Arial" pitchFamily="34" charset="-120"/>
-              </a:rPr>
-              <a:t>TA 118/76 · FC 72 · afebril</a:t>
-            </a:r>
-            <a:endParaRPr lang="en-US" sz="780" dirty="0"/>
-          </a:p>
-        </p:txBody>
-      </p:sp>
-      <p:sp>
-        <p:nvSpPr>
-          <p:cNvPr id="19" name="Text 17"/>
-          <p:cNvSpPr/>
-          <p:nvPr/>
-        </p:nvSpPr>
-        <p:spPr>
-          <a:xfrm>
-            <a:off x="640080" y="3977640"/>
-            <a:ext cx="2510577" cy="274320"/>
-          </a:xfrm>
-          <a:prstGeom prst="rect">
-            <a:avLst/>
-          </a:prstGeom>
-          <a:noFill/>
-          <a:ln/>
-        </p:spPr>
-        <p:txBody>
-          <a:bodyPr wrap="square" lIns="0" tIns="0" rIns="0" bIns="0" rtlCol="0" anchor="t"/>
-          <a:lstStyle/>
-          <a:p>
-            <a:pPr indent="0" marL="0">
-              <a:buNone/>
-            </a:pPr>
-            <a:r>
-              <a:rPr lang="en-US" sz="780" b="1" dirty="0">
-                <a:solidFill>
-                  <a:srgbClr val="0A3D91"/>
-                </a:solidFill>
-                <a:latin typeface="Arial" pitchFamily="34" charset="0"/>
-                <a:ea typeface="Arial" pitchFamily="34" charset="-122"/>
-                <a:cs typeface="Arial" pitchFamily="34" charset="-120"/>
-              </a:rPr>
-              <a:t>A  </a:t>
-            </a:r>
-            <a:pPr indent="0" marL="0">
-              <a:buNone/>
-            </a:pPr>
-            <a:r>
-              <a:rPr lang="en-US" sz="780" dirty="0">
-                <a:solidFill>
-                  <a:srgbClr val="48484A"/>
-                </a:solidFill>
-                <a:latin typeface="Arial" pitchFamily="34" charset="0"/>
-                <a:ea typeface="Arial" pitchFamily="34" charset="-122"/>
-                <a:cs typeface="Arial" pitchFamily="34" charset="-120"/>
-              </a:rPr>
-              <a:t>Cefalea tensional. Sin alarma</a:t>
-            </a:r>
-            <a:endParaRPr lang="en-US" sz="780" dirty="0"/>
-          </a:p>
-        </p:txBody>
-      </p:sp>
-      <p:sp>
-        <p:nvSpPr>
-          <p:cNvPr id="20" name="Text 18"/>
-          <p:cNvSpPr/>
-          <p:nvPr/>
-        </p:nvSpPr>
-        <p:spPr>
-          <a:xfrm>
-            <a:off x="640080" y="4270248"/>
-            <a:ext cx="2510577" cy="274320"/>
-          </a:xfrm>
-          <a:prstGeom prst="rect">
-            <a:avLst/>
-          </a:prstGeom>
-          <a:noFill/>
-          <a:ln/>
-        </p:spPr>
-        <p:txBody>
-          <a:bodyPr wrap="square" lIns="0" tIns="0" rIns="0" bIns="0" rtlCol="0" anchor="t"/>
-          <a:lstStyle/>
-          <a:p>
-            <a:pPr indent="0" marL="0">
-              <a:buNone/>
-            </a:pPr>
-            <a:r>
-              <a:rPr lang="en-US" sz="780" b="1" dirty="0">
-                <a:solidFill>
-                  <a:srgbClr val="0A3D91"/>
-                </a:solidFill>
-                <a:latin typeface="Arial" pitchFamily="34" charset="0"/>
-                <a:ea typeface="Arial" pitchFamily="34" charset="-122"/>
-                <a:cs typeface="Arial" pitchFamily="34" charset="-120"/>
-              </a:rPr>
-              <a:t>P  </a:t>
-            </a:r>
-            <a:pPr indent="0" marL="0">
-              <a:buNone/>
-            </a:pPr>
-            <a:r>
-              <a:rPr lang="en-US" sz="780" dirty="0">
-                <a:solidFill>
-                  <a:srgbClr val="48484A"/>
-                </a:solidFill>
-                <a:latin typeface="Arial" pitchFamily="34" charset="0"/>
-                <a:ea typeface="Arial" pitchFamily="34" charset="-122"/>
-                <a:cs typeface="Arial" pitchFamily="34" charset="-120"/>
-              </a:rPr>
-              <a:t>Analgesia, control en 7 días</a:t>
-            </a:r>
-            <a:endParaRPr lang="en-US" sz="780" dirty="0"/>
-          </a:p>
-        </p:txBody>
-      </p:sp>
-      <p:sp>
-        <p:nvSpPr>
-          <p:cNvPr id="21" name="Shape 19"/>
-          <p:cNvSpPr/>
-          <p:nvPr/>
-        </p:nvSpPr>
-        <p:spPr>
-          <a:xfrm>
-            <a:off x="3488985" y="3063240"/>
-            <a:ext cx="2320747" cy="1691640"/>
-          </a:xfrm>
-          <a:prstGeom prst="roundRect">
-            <a:avLst>
-              <a:gd name="adj" fmla="val 4865"/>
-            </a:avLst>
-          </a:prstGeom>
-          <a:solidFill>
-            <a:srgbClr val="EAF3FF"/>
-          </a:solidFill>
-          <a:ln w="12700">
-            <a:solidFill>
-              <a:srgbClr val="0071E3"/>
-            </a:solidFill>
-            <a:prstDash val="dash"/>
-          </a:ln>
-        </p:spPr>
-      </p:sp>
-      <p:sp>
-        <p:nvSpPr>
-          <p:cNvPr id="22" name="Text 20"/>
-          <p:cNvSpPr/>
-          <p:nvPr/>
-        </p:nvSpPr>
-        <p:spPr>
-          <a:xfrm>
-            <a:off x="3580425" y="3063240"/>
-            <a:ext cx="2137867" cy="1691640"/>
-          </a:xfrm>
-          <a:prstGeom prst="rect">
-            <a:avLst/>
-          </a:prstGeom>
-          <a:noFill/>
-          <a:ln/>
-        </p:spPr>
-        <p:txBody>
-          <a:bodyPr wrap="square" lIns="0" tIns="0" rIns="0" bIns="0" rtlCol="0" anchor="ctr"/>
-          <a:lstStyle/>
-          <a:p>
-            <a:pPr algn="ctr" indent="0" marL="0">
-              <a:buNone/>
-            </a:pPr>
-            <a:r>
-              <a:rPr lang="en-US" sz="900" dirty="0">
-                <a:solidFill>
-                  <a:srgbClr val="0A3D91"/>
-                </a:solidFill>
-                <a:latin typeface="Arial" pitchFamily="34" charset="0"/>
-                <a:ea typeface="Arial" pitchFamily="34" charset="-122"/>
-                <a:cs typeface="Arial" pitchFamily="34" charset="-120"/>
-              </a:rPr>
-              <a:t>Captura del PMV</a:t>
-            </a:r>
-            <a:endParaRPr lang="en-US" sz="900" dirty="0"/>
-          </a:p>
-          <a:p>
-            <a:pPr algn="ctr" indent="0" marL="0">
-              <a:buNone/>
-            </a:pPr>
-            <a:r>
-              <a:rPr lang="en-US" sz="900" dirty="0">
-                <a:solidFill>
-                  <a:srgbClr val="0A3D91"/>
-                </a:solidFill>
-                <a:latin typeface="Arial" pitchFamily="34" charset="0"/>
-                <a:ea typeface="Arial" pitchFamily="34" charset="-122"/>
-                <a:cs typeface="Arial" pitchFamily="34" charset="-120"/>
-              </a:rPr>
-              <a:t>· pantalla de nota generada ·</a:t>
-            </a:r>
-            <a:endParaRPr lang="en-US" sz="900" dirty="0"/>
-          </a:p>
-        </p:txBody>
-      </p:sp>
-      <p:sp>
-        <p:nvSpPr>
-          <p:cNvPr id="23" name="Shape 21"/>
-          <p:cNvSpPr/>
-          <p:nvPr/>
-        </p:nvSpPr>
-        <p:spPr>
-          <a:xfrm>
-            <a:off x="6010900" y="3063240"/>
-            <a:ext cx="2630180" cy="1691640"/>
-          </a:xfrm>
-          <a:prstGeom prst="roundRect">
-            <a:avLst>
-              <a:gd name="adj" fmla="val 4865"/>
-            </a:avLst>
-          </a:prstGeom>
-          <a:solidFill>
-            <a:srgbClr val="EAF3FF"/>
-          </a:solidFill>
-          <a:ln w="12700">
-            <a:solidFill>
-              <a:srgbClr val="0071E3"/>
-            </a:solidFill>
-            <a:prstDash val="dash"/>
-          </a:ln>
-        </p:spPr>
-      </p:sp>
-      <p:sp>
-        <p:nvSpPr>
-          <p:cNvPr id="24" name="Shape 22"/>
-          <p:cNvSpPr/>
-          <p:nvPr/>
-        </p:nvSpPr>
-        <p:spPr>
-          <a:xfrm>
-            <a:off x="7088246" y="3319272"/>
-            <a:ext cx="475488" cy="475488"/>
-          </a:xfrm>
-          <a:prstGeom prst="ellipse">
-            <a:avLst/>
-          </a:prstGeom>
-          <a:solidFill>
-            <a:srgbClr val="FFFFFF"/>
-          </a:solidFill>
-          <a:ln/>
-        </p:spPr>
-      </p:sp>
-      <p:pic>
-        <p:nvPicPr>
-          <p:cNvPr id="25" name="Image 0" descr="preencoded.png">    </p:cNvPr>
-          <p:cNvPicPr>
-            <a:picLocks noChangeAspect="1"/>
-          </p:cNvPicPr>
-          <p:nvPr/>
-        </p:nvPicPr>
-        <p:blipFill>
-          <a:blip r:embed="rId1"/>
-          <a:stretch>
-            <a:fillRect/>
-          </a:stretch>
-        </p:blipFill>
-        <p:spPr>
-          <a:xfrm>
-            <a:off x="7154814" y="3385840"/>
-            <a:ext cx="342351" cy="342351"/>
-          </a:xfrm>
-          <a:prstGeom prst="rect">
-            <a:avLst/>
-          </a:prstGeom>
-        </p:spPr>
-      </p:pic>
-      <p:sp>
-        <p:nvSpPr>
-          <p:cNvPr id="26" name="Text 23"/>
-          <p:cNvSpPr/>
-          <p:nvPr/>
-        </p:nvSpPr>
-        <p:spPr>
-          <a:xfrm>
-            <a:off x="6102340" y="3931920"/>
-            <a:ext cx="2447300" cy="777240"/>
-          </a:xfrm>
-          <a:prstGeom prst="rect">
-            <a:avLst/>
-          </a:prstGeom>
-          <a:noFill/>
-          <a:ln/>
-        </p:spPr>
-        <p:txBody>
-          <a:bodyPr wrap="square" lIns="0" tIns="0" rIns="0" bIns="0" rtlCol="0" anchor="t"/>
-          <a:lstStyle/>
-          <a:p>
-            <a:pPr algn="ctr" indent="0" marL="0">
-              <a:buNone/>
-            </a:pPr>
-            <a:r>
-              <a:rPr lang="en-US" sz="850" b="1" dirty="0">
-                <a:solidFill>
-                  <a:srgbClr val="0A3D91"/>
-                </a:solidFill>
-                <a:latin typeface="Arial" pitchFamily="34" charset="0"/>
-                <a:ea typeface="Arial" pitchFamily="34" charset="-122"/>
-                <a:cs typeface="Arial" pitchFamily="34" charset="-120"/>
-              </a:rPr>
-              <a:t>Video demo — Miracle diligenciando la historia clínica en vivo</a:t>
-            </a:r>
-            <a:endParaRPr lang="en-US" sz="850" dirty="0"/>
-          </a:p>
-        </p:txBody>
-      </p:sp>
-    </p:spTree>
-  </p:cSld>
-  <p:clrMapOvr>
-    <a:masterClrMapping/>
-  </p:clrMapOvr>
-</p:sld>
-</file>
-
-<file path=ppt/slides/slide6.xml><?xml version="1.0" encoding="utf-8"?>
-<p:sld xmlns:a="http://schemas.openxmlformats.org/drawingml/2006/main" xmlns:r="http://schemas.openxmlformats.org/officeDocument/2006/relationships" xmlns:p="http://schemas.openxmlformats.org/presentationml/2006/main">
-  <p:cSld name="Slide 6">
-    <p:bg>
-      <p:bgPr>
-        <a:solidFill>
-          <a:srgbClr val="FFFFFF"/>
-        </a:solidFill>
-      </p:bgPr>
-    </p:bg>
-    <p:spTree>
-      <p:nvGrpSpPr>
-        <p:cNvPr id="1" name=""/>
-        <p:cNvGrpSpPr/>
-        <p:nvPr/>
-      </p:nvGrpSpPr>
-      <p:grpSpPr>
-        <a:xfrm>
-          <a:off x="0" y="0"/>
-          <a:ext cx="0" cy="0"/>
-          <a:chOff x="0" y="0"/>
-          <a:chExt cx="0" cy="0"/>
-        </a:xfrm>
-      </p:grpSpPr>
-      <p:sp>
-        <p:nvSpPr>
-          <p:cNvPr id="2" name="Text 0"/>
-          <p:cNvSpPr/>
-          <p:nvPr/>
-        </p:nvSpPr>
-        <p:spPr>
-          <a:xfrm>
-            <a:off x="502920" y="320040"/>
-            <a:ext cx="8138160" cy="274320"/>
-          </a:xfrm>
-          <a:prstGeom prst="rect">
-            <a:avLst/>
-          </a:prstGeom>
-          <a:noFill/>
-          <a:ln/>
-        </p:spPr>
-        <p:txBody>
-          <a:bodyPr wrap="square" lIns="0" tIns="0" rIns="0" bIns="0" rtlCol="0" anchor="ctr"/>
-          <a:lstStyle/>
-          <a:p>
-            <a:pPr indent="0" marL="0">
-              <a:buNone/>
-            </a:pPr>
-            <a:r>
-              <a:rPr lang="en-US" sz="1050" b="1" spc="200" kern="0" dirty="0">
-                <a:solidFill>
-                  <a:srgbClr val="0071E3"/>
-                </a:solidFill>
-                <a:latin typeface="Arial" pitchFamily="34" charset="0"/>
-                <a:ea typeface="Arial" pitchFamily="34" charset="-122"/>
-                <a:cs typeface="Arial" pitchFamily="34" charset="-120"/>
-              </a:rPr>
               <a:t>COMPETENCIA</a:t>
             </a:r>
             <a:endParaRPr lang="en-US" sz="1050" dirty="0"/>
@@ -9415,7 +7620,7 @@
       </p:sp>
       <p:graphicFrame>
         <p:nvGraphicFramePr>
-          <p:cNvPr id="7" name="Table 0"/>
+          <p:cNvPr id="6" name="Table 0"/>
           <p:cNvGraphicFramePr>
             <a:graphicFrameLocks noGrp="1"/>
           </p:cNvGraphicFramePr>
@@ -10826,6 +9031,768 @@
 </p:sld>
 </file>
 
+<file path=ppt/slides/slide6.xml><?xml version="1.0" encoding="utf-8"?>
+<p:sld xmlns:a="http://schemas.openxmlformats.org/drawingml/2006/main" xmlns:r="http://schemas.openxmlformats.org/officeDocument/2006/relationships" xmlns:p="http://schemas.openxmlformats.org/presentationml/2006/main">
+  <p:cSld name="Slide 6">
+    <p:bg>
+      <p:bgPr>
+        <a:solidFill>
+          <a:srgbClr val="FFFFFF"/>
+        </a:solidFill>
+      </p:bgPr>
+    </p:bg>
+    <p:spTree>
+      <p:nvGrpSpPr>
+        <p:cNvPr id="1" name=""/>
+        <p:cNvGrpSpPr/>
+        <p:nvPr/>
+      </p:nvGrpSpPr>
+      <p:grpSpPr>
+        <a:xfrm>
+          <a:off x="0" y="0"/>
+          <a:ext cx="0" cy="0"/>
+          <a:chOff x="0" y="0"/>
+          <a:chExt cx="0" cy="0"/>
+        </a:xfrm>
+      </p:grpSpPr>
+      <p:sp>
+        <p:nvSpPr>
+          <p:cNvPr id="2" name="Text 0"/>
+          <p:cNvSpPr/>
+          <p:nvPr/>
+        </p:nvSpPr>
+        <p:spPr>
+          <a:xfrm>
+            <a:off x="502920" y="320040"/>
+            <a:ext cx="8138160" cy="274320"/>
+          </a:xfrm>
+          <a:prstGeom prst="rect">
+            <a:avLst/>
+          </a:prstGeom>
+          <a:noFill/>
+          <a:ln/>
+        </p:spPr>
+        <p:txBody>
+          <a:bodyPr wrap="square" lIns="0" tIns="0" rIns="0" bIns="0" rtlCol="0" anchor="ctr"/>
+          <a:lstStyle/>
+          <a:p>
+            <a:pPr indent="0" marL="0">
+              <a:buNone/>
+            </a:pPr>
+            <a:r>
+              <a:rPr lang="en-US" sz="1050" b="1" spc="200" kern="0" dirty="0">
+                <a:solidFill>
+                  <a:srgbClr val="0071E3"/>
+                </a:solidFill>
+                <a:latin typeface="Arial" pitchFamily="34" charset="0"/>
+                <a:ea typeface="Arial" pitchFamily="34" charset="-122"/>
+                <a:cs typeface="Arial" pitchFamily="34" charset="-120"/>
+              </a:rPr>
+              <a:t>MERCADO</a:t>
+            </a:r>
+            <a:endParaRPr lang="en-US" sz="1050" dirty="0"/>
+          </a:p>
+        </p:txBody>
+      </p:sp>
+      <p:sp>
+        <p:nvSpPr>
+          <p:cNvPr id="3" name="Text 1"/>
+          <p:cNvSpPr/>
+          <p:nvPr/>
+        </p:nvSpPr>
+        <p:spPr>
+          <a:xfrm>
+            <a:off x="502920" y="658368"/>
+            <a:ext cx="8138160" cy="548640"/>
+          </a:xfrm>
+          <a:prstGeom prst="rect">
+            <a:avLst/>
+          </a:prstGeom>
+          <a:noFill/>
+          <a:ln/>
+        </p:spPr>
+        <p:txBody>
+          <a:bodyPr wrap="square" lIns="0" tIns="0" rIns="0" bIns="0" rtlCol="0" anchor="ctr"/>
+          <a:lstStyle/>
+          <a:p>
+            <a:pPr indent="0" marL="0">
+              <a:buNone/>
+            </a:pPr>
+            <a:r>
+              <a:rPr lang="en-US" sz="2000" b="1" dirty="0">
+                <a:solidFill>
+                  <a:srgbClr val="1D1D1F"/>
+                </a:solidFill>
+                <a:latin typeface="Arial" pitchFamily="34" charset="0"/>
+                <a:ea typeface="Arial" pitchFamily="34" charset="-122"/>
+                <a:cs typeface="Arial" pitchFamily="34" charset="-120"/>
+              </a:rPr>
+              <a:t>Un mercado gigante — y la puerta de entrada está </a:t>
+            </a:r>
+            <a:pPr indent="0" marL="0">
+              <a:buNone/>
+            </a:pPr>
+            <a:r>
+              <a:rPr lang="en-US" sz="2000" b="1" dirty="0">
+                <a:solidFill>
+                  <a:srgbClr val="0A3D91"/>
+                </a:solidFill>
+                <a:latin typeface="Arial" pitchFamily="34" charset="0"/>
+                <a:ea typeface="Arial" pitchFamily="34" charset="-122"/>
+                <a:cs typeface="Arial" pitchFamily="34" charset="-120"/>
+              </a:rPr>
+              <a:t>en casa</a:t>
+            </a:r>
+            <a:pPr indent="0" marL="0">
+              <a:buNone/>
+            </a:pPr>
+            <a:r>
+              <a:rPr lang="en-US" sz="2000" b="1" dirty="0">
+                <a:solidFill>
+                  <a:srgbClr val="1D1D1F"/>
+                </a:solidFill>
+                <a:latin typeface="Arial" pitchFamily="34" charset="0"/>
+                <a:ea typeface="Arial" pitchFamily="34" charset="-122"/>
+                <a:cs typeface="Arial" pitchFamily="34" charset="-120"/>
+              </a:rPr>
+              <a:t>.</a:t>
+            </a:r>
+            <a:endParaRPr lang="en-US" sz="2000" dirty="0"/>
+          </a:p>
+        </p:txBody>
+      </p:sp>
+      <p:sp>
+        <p:nvSpPr>
+          <p:cNvPr id="4" name="Shape 2"/>
+          <p:cNvSpPr/>
+          <p:nvPr/>
+        </p:nvSpPr>
+        <p:spPr>
+          <a:xfrm>
+            <a:off x="502920" y="1417320"/>
+            <a:ext cx="2542032" cy="1965960"/>
+          </a:xfrm>
+          <a:prstGeom prst="roundRect">
+            <a:avLst>
+              <a:gd name="adj" fmla="val 4186"/>
+            </a:avLst>
+          </a:prstGeom>
+          <a:solidFill>
+            <a:srgbClr val="FFFFFF"/>
+          </a:solidFill>
+          <a:ln w="9525">
+            <a:solidFill>
+              <a:srgbClr val="E2E2E6"/>
+            </a:solidFill>
+            <a:prstDash val="solid"/>
+          </a:ln>
+          <a:effectLst>
+            <a:outerShdw sx="100000" sy="100000" kx="0" ky="0" algn="bl" rotWithShape="0" blurRad="101600" dist="25400" dir="5400000">
+              <a:srgbClr val="0A3D91">
+                <a:alpha val="7000"/>
+              </a:srgbClr>
+            </a:outerShdw>
+          </a:effectLst>
+        </p:spPr>
+      </p:sp>
+      <p:sp>
+        <p:nvSpPr>
+          <p:cNvPr id="5" name="Shape 3"/>
+          <p:cNvSpPr/>
+          <p:nvPr/>
+        </p:nvSpPr>
+        <p:spPr>
+          <a:xfrm>
+            <a:off x="1517904" y="1618488"/>
+            <a:ext cx="512064" cy="512064"/>
+          </a:xfrm>
+          <a:prstGeom prst="ellipse">
+            <a:avLst/>
+          </a:prstGeom>
+          <a:solidFill>
+            <a:srgbClr val="FFFFFF"/>
+          </a:solidFill>
+          <a:ln/>
+        </p:spPr>
+      </p:sp>
+      <p:pic>
+        <p:nvPicPr>
+          <p:cNvPr id="6" name="Image 0" descr="preencoded.png">    </p:cNvPr>
+          <p:cNvPicPr>
+            <a:picLocks noChangeAspect="1"/>
+          </p:cNvPicPr>
+          <p:nvPr/>
+        </p:nvPicPr>
+        <p:blipFill>
+          <a:blip r:embed="rId1"/>
+          <a:stretch>
+            <a:fillRect/>
+          </a:stretch>
+        </p:blipFill>
+        <p:spPr>
+          <a:xfrm>
+            <a:off x="1589593" y="1690177"/>
+            <a:ext cx="368686" cy="368686"/>
+          </a:xfrm>
+          <a:prstGeom prst="rect">
+            <a:avLst/>
+          </a:prstGeom>
+        </p:spPr>
+      </p:pic>
+      <p:sp>
+        <p:nvSpPr>
+          <p:cNvPr id="7" name="Text 4"/>
+          <p:cNvSpPr/>
+          <p:nvPr/>
+        </p:nvSpPr>
+        <p:spPr>
+          <a:xfrm>
+            <a:off x="640080" y="2240280"/>
+            <a:ext cx="2267712" cy="219456"/>
+          </a:xfrm>
+          <a:prstGeom prst="rect">
+            <a:avLst/>
+          </a:prstGeom>
+          <a:noFill/>
+          <a:ln/>
+        </p:spPr>
+        <p:txBody>
+          <a:bodyPr wrap="square" lIns="0" tIns="0" rIns="0" bIns="0" rtlCol="0" anchor="ctr"/>
+          <a:lstStyle/>
+          <a:p>
+            <a:pPr algn="ctr" indent="0" marL="0">
+              <a:buNone/>
+            </a:pPr>
+            <a:r>
+              <a:rPr lang="en-US" sz="850" b="1" spc="100" kern="0" dirty="0">
+                <a:solidFill>
+                  <a:srgbClr val="0071E3"/>
+                </a:solidFill>
+                <a:latin typeface="Arial" pitchFamily="34" charset="0"/>
+                <a:ea typeface="Arial" pitchFamily="34" charset="-122"/>
+                <a:cs typeface="Arial" pitchFamily="34" charset="-120"/>
+              </a:rPr>
+              <a:t>TAM · LATAM</a:t>
+            </a:r>
+            <a:endParaRPr lang="en-US" sz="850" dirty="0"/>
+          </a:p>
+        </p:txBody>
+      </p:sp>
+      <p:sp>
+        <p:nvSpPr>
+          <p:cNvPr id="8" name="Text 5"/>
+          <p:cNvSpPr/>
+          <p:nvPr/>
+        </p:nvSpPr>
+        <p:spPr>
+          <a:xfrm>
+            <a:off x="594360" y="2478024"/>
+            <a:ext cx="2359152" cy="384048"/>
+          </a:xfrm>
+          <a:prstGeom prst="rect">
+            <a:avLst/>
+          </a:prstGeom>
+          <a:noFill/>
+          <a:ln/>
+        </p:spPr>
+        <p:txBody>
+          <a:bodyPr wrap="square" lIns="0" tIns="0" rIns="0" bIns="0" rtlCol="0" anchor="ctr"/>
+          <a:lstStyle/>
+          <a:p>
+            <a:pPr algn="ctr" indent="0" marL="0">
+              <a:buNone/>
+            </a:pPr>
+            <a:r>
+              <a:rPr lang="en-US" sz="1900" b="1" dirty="0">
+                <a:solidFill>
+                  <a:srgbClr val="0A3D91"/>
+                </a:solidFill>
+                <a:latin typeface="Arial" pitchFamily="34" charset="0"/>
+                <a:ea typeface="Arial" pitchFamily="34" charset="-122"/>
+                <a:cs typeface="Arial" pitchFamily="34" charset="-120"/>
+              </a:rPr>
+              <a:t>USD 66.400M</a:t>
+            </a:r>
+            <a:endParaRPr lang="en-US" sz="1900" dirty="0"/>
+          </a:p>
+        </p:txBody>
+      </p:sp>
+      <p:sp>
+        <p:nvSpPr>
+          <p:cNvPr id="9" name="Text 6"/>
+          <p:cNvSpPr/>
+          <p:nvPr/>
+        </p:nvSpPr>
+        <p:spPr>
+          <a:xfrm>
+            <a:off x="667512" y="2880360"/>
+            <a:ext cx="2212848" cy="457200"/>
+          </a:xfrm>
+          <a:prstGeom prst="rect">
+            <a:avLst/>
+          </a:prstGeom>
+          <a:noFill/>
+          <a:ln/>
+        </p:spPr>
+        <p:txBody>
+          <a:bodyPr wrap="square" lIns="0" tIns="0" rIns="0" bIns="0" rtlCol="0" anchor="t"/>
+          <a:lstStyle/>
+          <a:p>
+            <a:pPr algn="ctr" indent="0" marL="0">
+              <a:buNone/>
+            </a:pPr>
+            <a:r>
+              <a:rPr lang="en-US" sz="900" dirty="0">
+                <a:solidFill>
+                  <a:srgbClr val="48484A"/>
+                </a:solidFill>
+                <a:latin typeface="Arial" pitchFamily="34" charset="0"/>
+                <a:ea typeface="Arial" pitchFamily="34" charset="-122"/>
+                <a:cs typeface="Arial" pitchFamily="34" charset="-120"/>
+              </a:rPr>
+              <a:t>Salud digital en LatAm para 2033 · CAGR ≈20%/año</a:t>
+            </a:r>
+            <a:endParaRPr lang="en-US" sz="900" dirty="0"/>
+          </a:p>
+        </p:txBody>
+      </p:sp>
+      <p:sp>
+        <p:nvSpPr>
+          <p:cNvPr id="10" name="Shape 7"/>
+          <p:cNvSpPr/>
+          <p:nvPr/>
+        </p:nvSpPr>
+        <p:spPr>
+          <a:xfrm>
+            <a:off x="3300984" y="1417320"/>
+            <a:ext cx="2542032" cy="1965960"/>
+          </a:xfrm>
+          <a:prstGeom prst="roundRect">
+            <a:avLst>
+              <a:gd name="adj" fmla="val 4186"/>
+            </a:avLst>
+          </a:prstGeom>
+          <a:solidFill>
+            <a:srgbClr val="EAF3FF"/>
+          </a:solidFill>
+          <a:ln w="9525">
+            <a:solidFill>
+              <a:srgbClr val="CFE4FB"/>
+            </a:solidFill>
+            <a:prstDash val="solid"/>
+          </a:ln>
+          <a:effectLst>
+            <a:outerShdw sx="100000" sy="100000" kx="0" ky="0" algn="bl" rotWithShape="0" blurRad="101600" dist="25400" dir="5400000">
+              <a:srgbClr val="0A3D91">
+                <a:alpha val="7000"/>
+              </a:srgbClr>
+            </a:outerShdw>
+          </a:effectLst>
+        </p:spPr>
+      </p:sp>
+      <p:sp>
+        <p:nvSpPr>
+          <p:cNvPr id="11" name="Shape 8"/>
+          <p:cNvSpPr/>
+          <p:nvPr/>
+        </p:nvSpPr>
+        <p:spPr>
+          <a:xfrm>
+            <a:off x="4315968" y="1618488"/>
+            <a:ext cx="512064" cy="512064"/>
+          </a:xfrm>
+          <a:prstGeom prst="ellipse">
+            <a:avLst/>
+          </a:prstGeom>
+          <a:solidFill>
+            <a:srgbClr val="FFFFFF"/>
+          </a:solidFill>
+          <a:ln/>
+        </p:spPr>
+      </p:sp>
+      <p:pic>
+        <p:nvPicPr>
+          <p:cNvPr id="12" name="Image 1" descr="preencoded.png">    </p:cNvPr>
+          <p:cNvPicPr>
+            <a:picLocks noChangeAspect="1"/>
+          </p:cNvPicPr>
+          <p:nvPr/>
+        </p:nvPicPr>
+        <p:blipFill>
+          <a:blip r:embed="rId2"/>
+          <a:stretch>
+            <a:fillRect/>
+          </a:stretch>
+        </p:blipFill>
+        <p:spPr>
+          <a:xfrm>
+            <a:off x="4387657" y="1690177"/>
+            <a:ext cx="368686" cy="368686"/>
+          </a:xfrm>
+          <a:prstGeom prst="rect">
+            <a:avLst/>
+          </a:prstGeom>
+        </p:spPr>
+      </p:pic>
+      <p:sp>
+        <p:nvSpPr>
+          <p:cNvPr id="13" name="Text 9"/>
+          <p:cNvSpPr/>
+          <p:nvPr/>
+        </p:nvSpPr>
+        <p:spPr>
+          <a:xfrm>
+            <a:off x="3438144" y="2240280"/>
+            <a:ext cx="2267712" cy="219456"/>
+          </a:xfrm>
+          <a:prstGeom prst="rect">
+            <a:avLst/>
+          </a:prstGeom>
+          <a:noFill/>
+          <a:ln/>
+        </p:spPr>
+        <p:txBody>
+          <a:bodyPr wrap="square" lIns="0" tIns="0" rIns="0" bIns="0" rtlCol="0" anchor="ctr"/>
+          <a:lstStyle/>
+          <a:p>
+            <a:pPr algn="ctr" indent="0" marL="0">
+              <a:buNone/>
+            </a:pPr>
+            <a:r>
+              <a:rPr lang="en-US" sz="850" b="1" spc="100" kern="0" dirty="0">
+                <a:solidFill>
+                  <a:srgbClr val="0071E3"/>
+                </a:solidFill>
+                <a:latin typeface="Arial" pitchFamily="34" charset="0"/>
+                <a:ea typeface="Arial" pitchFamily="34" charset="-122"/>
+                <a:cs typeface="Arial" pitchFamily="34" charset="-120"/>
+              </a:rPr>
+              <a:t>SAM · COLOMBIA</a:t>
+            </a:r>
+            <a:endParaRPr lang="en-US" sz="850" dirty="0"/>
+          </a:p>
+        </p:txBody>
+      </p:sp>
+      <p:sp>
+        <p:nvSpPr>
+          <p:cNvPr id="14" name="Text 10"/>
+          <p:cNvSpPr/>
+          <p:nvPr/>
+        </p:nvSpPr>
+        <p:spPr>
+          <a:xfrm>
+            <a:off x="3392424" y="2478024"/>
+            <a:ext cx="2359152" cy="384048"/>
+          </a:xfrm>
+          <a:prstGeom prst="rect">
+            <a:avLst/>
+          </a:prstGeom>
+          <a:noFill/>
+          <a:ln/>
+        </p:spPr>
+        <p:txBody>
+          <a:bodyPr wrap="square" lIns="0" tIns="0" rIns="0" bIns="0" rtlCol="0" anchor="ctr"/>
+          <a:lstStyle/>
+          <a:p>
+            <a:pPr algn="ctr" indent="0" marL="0">
+              <a:buNone/>
+            </a:pPr>
+            <a:r>
+              <a:rPr lang="en-US" sz="1900" b="1" dirty="0">
+                <a:solidFill>
+                  <a:srgbClr val="0A3D91"/>
+                </a:solidFill>
+                <a:latin typeface="Arial" pitchFamily="34" charset="0"/>
+                <a:ea typeface="Arial" pitchFamily="34" charset="-122"/>
+                <a:cs typeface="Arial" pitchFamily="34" charset="-120"/>
+              </a:rPr>
+              <a:t>137.700+</a:t>
+            </a:r>
+            <a:endParaRPr lang="en-US" sz="1900" dirty="0"/>
+          </a:p>
+        </p:txBody>
+      </p:sp>
+      <p:sp>
+        <p:nvSpPr>
+          <p:cNvPr id="15" name="Text 11"/>
+          <p:cNvSpPr/>
+          <p:nvPr/>
+        </p:nvSpPr>
+        <p:spPr>
+          <a:xfrm>
+            <a:off x="3465576" y="2880360"/>
+            <a:ext cx="2212848" cy="457200"/>
+          </a:xfrm>
+          <a:prstGeom prst="rect">
+            <a:avLst/>
+          </a:prstGeom>
+          <a:noFill/>
+          <a:ln/>
+        </p:spPr>
+        <p:txBody>
+          <a:bodyPr wrap="square" lIns="0" tIns="0" rIns="0" bIns="0" rtlCol="0" anchor="t"/>
+          <a:lstStyle/>
+          <a:p>
+            <a:pPr algn="ctr" indent="0" marL="0">
+              <a:buNone/>
+            </a:pPr>
+            <a:r>
+              <a:rPr lang="en-US" sz="900" dirty="0">
+                <a:solidFill>
+                  <a:srgbClr val="48484A"/>
+                </a:solidFill>
+                <a:latin typeface="Arial" pitchFamily="34" charset="0"/>
+                <a:ea typeface="Arial" pitchFamily="34" charset="-122"/>
+                <a:cs typeface="Arial" pitchFamily="34" charset="-120"/>
+              </a:rPr>
+              <a:t>médicos activos · 10.839 IPS habilitadas</a:t>
+            </a:r>
+            <a:endParaRPr lang="en-US" sz="900" dirty="0"/>
+          </a:p>
+        </p:txBody>
+      </p:sp>
+      <p:sp>
+        <p:nvSpPr>
+          <p:cNvPr id="16" name="Shape 12"/>
+          <p:cNvSpPr/>
+          <p:nvPr/>
+        </p:nvSpPr>
+        <p:spPr>
+          <a:xfrm>
+            <a:off x="6099048" y="1417320"/>
+            <a:ext cx="2542032" cy="1965960"/>
+          </a:xfrm>
+          <a:prstGeom prst="roundRect">
+            <a:avLst>
+              <a:gd name="adj" fmla="val 4186"/>
+            </a:avLst>
+          </a:prstGeom>
+          <a:solidFill>
+            <a:srgbClr val="D7E9FC"/>
+          </a:solidFill>
+          <a:ln w="9525">
+            <a:solidFill>
+              <a:srgbClr val="0071E3"/>
+            </a:solidFill>
+            <a:prstDash val="solid"/>
+          </a:ln>
+          <a:effectLst>
+            <a:outerShdw sx="100000" sy="100000" kx="0" ky="0" algn="bl" rotWithShape="0" blurRad="101600" dist="25400" dir="5400000">
+              <a:srgbClr val="0A3D91">
+                <a:alpha val="7000"/>
+              </a:srgbClr>
+            </a:outerShdw>
+          </a:effectLst>
+        </p:spPr>
+      </p:sp>
+      <p:sp>
+        <p:nvSpPr>
+          <p:cNvPr id="17" name="Shape 13"/>
+          <p:cNvSpPr/>
+          <p:nvPr/>
+        </p:nvSpPr>
+        <p:spPr>
+          <a:xfrm>
+            <a:off x="7114032" y="1618488"/>
+            <a:ext cx="512064" cy="512064"/>
+          </a:xfrm>
+          <a:prstGeom prst="ellipse">
+            <a:avLst/>
+          </a:prstGeom>
+          <a:solidFill>
+            <a:srgbClr val="FFFFFF"/>
+          </a:solidFill>
+          <a:ln/>
+        </p:spPr>
+      </p:sp>
+      <p:pic>
+        <p:nvPicPr>
+          <p:cNvPr id="18" name="Image 2" descr="preencoded.png">    </p:cNvPr>
+          <p:cNvPicPr>
+            <a:picLocks noChangeAspect="1"/>
+          </p:cNvPicPr>
+          <p:nvPr/>
+        </p:nvPicPr>
+        <p:blipFill>
+          <a:blip r:embed="rId3"/>
+          <a:stretch>
+            <a:fillRect/>
+          </a:stretch>
+        </p:blipFill>
+        <p:spPr>
+          <a:xfrm>
+            <a:off x="7185721" y="1690177"/>
+            <a:ext cx="368686" cy="368686"/>
+          </a:xfrm>
+          <a:prstGeom prst="rect">
+            <a:avLst/>
+          </a:prstGeom>
+        </p:spPr>
+      </p:pic>
+      <p:sp>
+        <p:nvSpPr>
+          <p:cNvPr id="19" name="Text 14"/>
+          <p:cNvSpPr/>
+          <p:nvPr/>
+        </p:nvSpPr>
+        <p:spPr>
+          <a:xfrm>
+            <a:off x="6236208" y="2240280"/>
+            <a:ext cx="2267712" cy="219456"/>
+          </a:xfrm>
+          <a:prstGeom prst="rect">
+            <a:avLst/>
+          </a:prstGeom>
+          <a:noFill/>
+          <a:ln/>
+        </p:spPr>
+        <p:txBody>
+          <a:bodyPr wrap="square" lIns="0" tIns="0" rIns="0" bIns="0" rtlCol="0" anchor="ctr"/>
+          <a:lstStyle/>
+          <a:p>
+            <a:pPr algn="ctr" indent="0" marL="0">
+              <a:buNone/>
+            </a:pPr>
+            <a:r>
+              <a:rPr lang="en-US" sz="850" b="1" spc="100" kern="0" dirty="0">
+                <a:solidFill>
+                  <a:srgbClr val="0071E3"/>
+                </a:solidFill>
+                <a:latin typeface="Arial" pitchFamily="34" charset="0"/>
+                <a:ea typeface="Arial" pitchFamily="34" charset="-122"/>
+                <a:cs typeface="Arial" pitchFamily="34" charset="-120"/>
+              </a:rPr>
+              <a:t>SOM · ANTIOQUIA</a:t>
+            </a:r>
+            <a:endParaRPr lang="en-US" sz="850" dirty="0"/>
+          </a:p>
+        </p:txBody>
+      </p:sp>
+      <p:sp>
+        <p:nvSpPr>
+          <p:cNvPr id="20" name="Text 15"/>
+          <p:cNvSpPr/>
+          <p:nvPr/>
+        </p:nvSpPr>
+        <p:spPr>
+          <a:xfrm>
+            <a:off x="6190488" y="2478024"/>
+            <a:ext cx="2359152" cy="384048"/>
+          </a:xfrm>
+          <a:prstGeom prst="rect">
+            <a:avLst/>
+          </a:prstGeom>
+          <a:noFill/>
+          <a:ln/>
+        </p:spPr>
+        <p:txBody>
+          <a:bodyPr wrap="square" lIns="0" tIns="0" rIns="0" bIns="0" rtlCol="0" anchor="ctr"/>
+          <a:lstStyle/>
+          <a:p>
+            <a:pPr algn="ctr" indent="0" marL="0">
+              <a:buNone/>
+            </a:pPr>
+            <a:r>
+              <a:rPr lang="en-US" sz="1900" b="1" dirty="0">
+                <a:solidFill>
+                  <a:srgbClr val="0A3D91"/>
+                </a:solidFill>
+                <a:latin typeface="Arial" pitchFamily="34" charset="0"/>
+                <a:ea typeface="Arial" pitchFamily="34" charset="-122"/>
+                <a:cs typeface="Arial" pitchFamily="34" charset="-120"/>
+              </a:rPr>
+              <a:t>≈ 940 IPS</a:t>
+            </a:r>
+            <a:endParaRPr lang="en-US" sz="1900" dirty="0"/>
+          </a:p>
+        </p:txBody>
+      </p:sp>
+      <p:sp>
+        <p:nvSpPr>
+          <p:cNvPr id="21" name="Text 16"/>
+          <p:cNvSpPr/>
+          <p:nvPr/>
+        </p:nvSpPr>
+        <p:spPr>
+          <a:xfrm>
+            <a:off x="6263640" y="2880360"/>
+            <a:ext cx="2212848" cy="457200"/>
+          </a:xfrm>
+          <a:prstGeom prst="rect">
+            <a:avLst/>
+          </a:prstGeom>
+          <a:noFill/>
+          <a:ln/>
+        </p:spPr>
+        <p:txBody>
+          <a:bodyPr wrap="square" lIns="0" tIns="0" rIns="0" bIns="0" rtlCol="0" anchor="t"/>
+          <a:lstStyle/>
+          <a:p>
+            <a:pPr algn="ctr" indent="0" marL="0">
+              <a:buNone/>
+            </a:pPr>
+            <a:r>
+              <a:rPr lang="en-US" sz="900" dirty="0">
+                <a:solidFill>
+                  <a:srgbClr val="48484A"/>
+                </a:solidFill>
+                <a:latin typeface="Arial" pitchFamily="34" charset="0"/>
+                <a:ea typeface="Arial" pitchFamily="34" charset="-122"/>
+                <a:cs typeface="Arial" pitchFamily="34" charset="-120"/>
+              </a:rPr>
+              <a:t>Pilotos en Medellín y área metropolitana</a:t>
+            </a:r>
+            <a:endParaRPr lang="en-US" sz="900" dirty="0"/>
+          </a:p>
+        </p:txBody>
+      </p:sp>
+      <p:sp>
+        <p:nvSpPr>
+          <p:cNvPr id="22" name="Text 17"/>
+          <p:cNvSpPr/>
+          <p:nvPr/>
+        </p:nvSpPr>
+        <p:spPr>
+          <a:xfrm>
+            <a:off x="502920" y="3520440"/>
+            <a:ext cx="8138160" cy="365760"/>
+          </a:xfrm>
+          <a:prstGeom prst="rect">
+            <a:avLst/>
+          </a:prstGeom>
+          <a:noFill/>
+          <a:ln/>
+        </p:spPr>
+        <p:txBody>
+          <a:bodyPr wrap="square" lIns="0" tIns="0" rIns="0" bIns="0" rtlCol="0" anchor="ctr"/>
+          <a:lstStyle/>
+          <a:p>
+            <a:pPr indent="0" marL="0">
+              <a:buNone/>
+            </a:pPr>
+            <a:r>
+              <a:rPr lang="en-US" sz="750" dirty="0">
+                <a:solidFill>
+                  <a:srgbClr val="6E6E73"/>
+                </a:solidFill>
+                <a:latin typeface="Arial" pitchFamily="34" charset="0"/>
+                <a:ea typeface="Arial" pitchFamily="34" charset="-122"/>
+                <a:cs typeface="Arial" pitchFamily="34" charset="-120"/>
+              </a:rPr>
+              <a:t>Fuentes: Market Data Forecast — LatAm Digital Health (CAGR 20,05%); MinSalud 2023; REPS jun 2025 vía Consultorsalud/UNIPS; datos.gov.co — Prestadores de Salud Antioquia.</a:t>
+            </a:r>
+            <a:endParaRPr lang="en-US" sz="750" dirty="0"/>
+          </a:p>
+        </p:txBody>
+      </p:sp>
+    </p:spTree>
+  </p:cSld>
+  <p:clrMapOvr>
+    <a:masterClrMapping/>
+  </p:clrMapOvr>
+</p:sld>
+</file>
+
 <file path=ppt/slides/slide7.xml><?xml version="1.0" encoding="utf-8"?>
 <p:sld xmlns:a="http://schemas.openxmlformats.org/drawingml/2006/main" xmlns:r="http://schemas.openxmlformats.org/officeDocument/2006/relationships" xmlns:p="http://schemas.openxmlformats.org/presentationml/2006/main">
   <p:cSld name="Slide 7">
@@ -10883,7 +9850,7 @@
                 <a:ea typeface="Arial" pitchFamily="34" charset="-122"/>
                 <a:cs typeface="Arial" pitchFamily="34" charset="-120"/>
               </a:rPr>
-              <a:t>MERCADO</a:t>
+              <a:t>NUESTROS CLIENTES</a:t>
             </a:r>
             <a:endParaRPr lang="en-US" sz="1050" dirty="0"/>
           </a:p>
@@ -10914,7 +9881,7 @@
               <a:buNone/>
             </a:pPr>
             <a:r>
-              <a:rPr lang="en-US" sz="2000" b="1" dirty="0">
+              <a:rPr lang="en-US" sz="2400" b="1" dirty="0">
                 <a:solidFill>
                   <a:srgbClr val="1D1D1F"/>
                 </a:solidFill>
@@ -10922,13 +9889,13 @@
                 <a:ea typeface="Arial" pitchFamily="34" charset="-122"/>
                 <a:cs typeface="Arial" pitchFamily="34" charset="-120"/>
               </a:rPr>
-              <a:t>Un mercado gigante — y la puerta de entrada está </a:t>
+              <a:t>Un solo producto. </a:t>
             </a:r>
             <a:pPr indent="0" marL="0">
               <a:buNone/>
             </a:pPr>
             <a:r>
-              <a:rPr lang="en-US" sz="2000" b="1" dirty="0">
+              <a:rPr lang="en-US" sz="2400" b="1" dirty="0">
                 <a:solidFill>
                   <a:srgbClr val="0A3D91"/>
                 </a:solidFill>
@@ -10936,13 +9903,13 @@
                 <a:ea typeface="Arial" pitchFamily="34" charset="-122"/>
                 <a:cs typeface="Arial" pitchFamily="34" charset="-120"/>
               </a:rPr>
-              <a:t>en casa</a:t>
+              <a:t>Dos motores</a:t>
             </a:r>
             <a:pPr indent="0" marL="0">
               <a:buNone/>
             </a:pPr>
             <a:r>
-              <a:rPr lang="en-US" sz="2000" b="1" dirty="0">
+              <a:rPr lang="en-US" sz="2400" b="1" dirty="0">
                 <a:solidFill>
                   <a:srgbClr val="1D1D1F"/>
                 </a:solidFill>
@@ -10950,9 +9917,9 @@
                 <a:ea typeface="Arial" pitchFamily="34" charset="-122"/>
                 <a:cs typeface="Arial" pitchFamily="34" charset="-120"/>
               </a:rPr>
-              <a:t>.</a:t>
-            </a:r>
-            <a:endParaRPr lang="en-US" sz="2000" dirty="0"/>
+              <a:t> de crecimiento.</a:t>
+            </a:r>
+            <a:endParaRPr lang="en-US" sz="2400" dirty="0"/>
           </a:p>
         </p:txBody>
       </p:sp>
@@ -10964,8 +9931,8 @@
         </p:nvSpPr>
         <p:spPr>
           <a:xfrm>
-            <a:off x="502920" y="1417320"/>
-            <a:ext cx="2542032" cy="1965960"/>
+            <a:off x="502920" y="1463040"/>
+            <a:ext cx="3931920" cy="1965960"/>
           </a:xfrm>
           <a:prstGeom prst="roundRect">
             <a:avLst>
@@ -10998,14 +9965,14 @@
         </p:nvSpPr>
         <p:spPr>
           <a:xfrm>
-            <a:off x="1517904" y="1618488"/>
-            <a:ext cx="512064" cy="512064"/>
+            <a:off x="731520" y="1664208"/>
+            <a:ext cx="411480" cy="411480"/>
           </a:xfrm>
           <a:prstGeom prst="ellipse">
             <a:avLst/>
           </a:prstGeom>
           <a:solidFill>
-            <a:srgbClr val="FFFFFF"/>
+            <a:srgbClr val="EAF3FF"/>
           </a:solidFill>
           <a:ln/>
         </p:spPr>
@@ -11026,8 +9993,8 @@
         </p:blipFill>
         <p:spPr>
           <a:xfrm>
-            <a:off x="1589593" y="1690177"/>
-            <a:ext cx="368686" cy="368686"/>
+            <a:off x="789127" y="1721815"/>
+            <a:ext cx="296266" cy="296266"/>
           </a:xfrm>
           <a:prstGeom prst="rect">
             <a:avLst/>
@@ -11036,14 +10003,36 @@
       </p:pic>
       <p:sp>
         <p:nvSpPr>
-          <p:cNvPr id="7" name="Text 4"/>
-          <p:cNvSpPr/>
-          <p:nvPr/>
-        </p:nvSpPr>
-        <p:spPr>
-          <a:xfrm>
-            <a:off x="640080" y="2240280"/>
-            <a:ext cx="2267712" cy="219456"/>
+          <p:cNvPr id="7" name="Shape 4"/>
+          <p:cNvSpPr/>
+          <p:nvPr/>
+        </p:nvSpPr>
+        <p:spPr>
+          <a:xfrm>
+            <a:off x="1280160" y="1737360"/>
+            <a:ext cx="1737360" cy="274320"/>
+          </a:xfrm>
+          <a:prstGeom prst="roundRect">
+            <a:avLst>
+              <a:gd name="adj" fmla="val 50000"/>
+            </a:avLst>
+          </a:prstGeom>
+          <a:solidFill>
+            <a:srgbClr val="EAF3FF"/>
+          </a:solidFill>
+          <a:ln/>
+        </p:spPr>
+      </p:sp>
+      <p:sp>
+        <p:nvSpPr>
+          <p:cNvPr id="8" name="Text 5"/>
+          <p:cNvSpPr/>
+          <p:nvPr/>
+        </p:nvSpPr>
+        <p:spPr>
+          <a:xfrm>
+            <a:off x="1280160" y="1737360"/>
+            <a:ext cx="1737360" cy="274320"/>
           </a:xfrm>
           <a:prstGeom prst="rect">
             <a:avLst/>
@@ -11059,7 +10048,7 @@
               <a:buNone/>
             </a:pPr>
             <a:r>
-              <a:rPr lang="en-US" sz="850" b="1" spc="100" kern="0" dirty="0">
+              <a:rPr lang="en-US" sz="650" b="1" spc="50" kern="0" dirty="0">
                 <a:solidFill>
                   <a:srgbClr val="0071E3"/>
                 </a:solidFill>
@@ -11067,22 +10056,22 @@
                 <a:ea typeface="Arial" pitchFamily="34" charset="-122"/>
                 <a:cs typeface="Arial" pitchFamily="34" charset="-120"/>
               </a:rPr>
-              <a:t>TAM · LATAM</a:t>
-            </a:r>
-            <a:endParaRPr lang="en-US" sz="850" dirty="0"/>
-          </a:p>
-        </p:txBody>
-      </p:sp>
-      <p:sp>
-        <p:nvSpPr>
-          <p:cNvPr id="8" name="Text 5"/>
-          <p:cNvSpPr/>
-          <p:nvPr/>
-        </p:nvSpPr>
-        <p:spPr>
-          <a:xfrm>
-            <a:off x="594360" y="2478024"/>
-            <a:ext cx="2359152" cy="384048"/>
+              <a:t>B2C · LA PUERTA DE ENTRADA</a:t>
+            </a:r>
+            <a:endParaRPr lang="en-US" sz="650" dirty="0"/>
+          </a:p>
+        </p:txBody>
+      </p:sp>
+      <p:sp>
+        <p:nvSpPr>
+          <p:cNvPr id="9" name="Text 6"/>
+          <p:cNvSpPr/>
+          <p:nvPr/>
+        </p:nvSpPr>
+        <p:spPr>
+          <a:xfrm>
+            <a:off x="731520" y="2212848"/>
+            <a:ext cx="3474720" cy="274320"/>
           </a:xfrm>
           <a:prstGeom prst="rect">
             <a:avLst/>
@@ -11094,34 +10083,34 @@
           <a:bodyPr wrap="square" lIns="0" tIns="0" rIns="0" bIns="0" rtlCol="0" anchor="ctr"/>
           <a:lstStyle/>
           <a:p>
-            <a:pPr algn="ctr" indent="0" marL="0">
-              <a:buNone/>
-            </a:pPr>
-            <a:r>
-              <a:rPr lang="en-US" sz="1900" b="1" dirty="0">
-                <a:solidFill>
-                  <a:srgbClr val="0A3D91"/>
-                </a:solidFill>
-                <a:latin typeface="Arial" pitchFamily="34" charset="0"/>
-                <a:ea typeface="Arial" pitchFamily="34" charset="-122"/>
-                <a:cs typeface="Arial" pitchFamily="34" charset="-120"/>
-              </a:rPr>
-              <a:t>USD 66.400M</a:t>
-            </a:r>
-            <a:endParaRPr lang="en-US" sz="1900" dirty="0"/>
-          </a:p>
-        </p:txBody>
-      </p:sp>
-      <p:sp>
-        <p:nvSpPr>
-          <p:cNvPr id="9" name="Text 6"/>
-          <p:cNvSpPr/>
-          <p:nvPr/>
-        </p:nvSpPr>
-        <p:spPr>
-          <a:xfrm>
-            <a:off x="667512" y="2880360"/>
-            <a:ext cx="2212848" cy="457200"/>
+            <a:pPr indent="0" marL="0">
+              <a:buNone/>
+            </a:pPr>
+            <a:r>
+              <a:rPr lang="en-US" sz="1350" b="1" dirty="0">
+                <a:solidFill>
+                  <a:srgbClr val="1D1D1F"/>
+                </a:solidFill>
+                <a:latin typeface="Arial" pitchFamily="34" charset="0"/>
+                <a:ea typeface="Arial" pitchFamily="34" charset="-122"/>
+                <a:cs typeface="Arial" pitchFamily="34" charset="-120"/>
+              </a:rPr>
+              <a:t>El médico adopta</a:t>
+            </a:r>
+            <a:endParaRPr lang="en-US" sz="1350" dirty="0"/>
+          </a:p>
+        </p:txBody>
+      </p:sp>
+      <p:sp>
+        <p:nvSpPr>
+          <p:cNvPr id="10" name="Text 7"/>
+          <p:cNvSpPr/>
+          <p:nvPr/>
+        </p:nvSpPr>
+        <p:spPr>
+          <a:xfrm>
+            <a:off x="731520" y="2542032"/>
+            <a:ext cx="3474720" cy="777240"/>
           </a:xfrm>
           <a:prstGeom prst="rect">
             <a:avLst/>
@@ -11133,11 +10122,15 @@
           <a:bodyPr wrap="square" lIns="0" tIns="0" rIns="0" bIns="0" rtlCol="0" anchor="t"/>
           <a:lstStyle/>
           <a:p>
-            <a:pPr algn="ctr" indent="0" marL="0">
-              <a:buNone/>
-            </a:pPr>
-            <a:r>
-              <a:rPr lang="en-US" sz="900" dirty="0">
+            <a:pPr marL="342900" indent="-342900">
+              <a:spcAft>
+                <a:spcPts val="500"/>
+              </a:spcAft>
+              <a:buSzPct val="100000"/>
+              <a:buChar char="•"/>
+            </a:pPr>
+            <a:r>
+              <a:rPr lang="en-US" sz="1050" dirty="0">
                 <a:solidFill>
                   <a:srgbClr val="48484A"/>
                 </a:solidFill>
@@ -11145,22 +10138,61 @@
                 <a:ea typeface="Arial" pitchFamily="34" charset="-122"/>
                 <a:cs typeface="Arial" pitchFamily="34" charset="-120"/>
               </a:rPr>
-              <a:t>Salud digital en LatAm para 2033 · CAGR ≈20%/año</a:t>
-            </a:r>
-            <a:endParaRPr lang="en-US" sz="900" dirty="0"/>
-          </a:p>
-        </p:txBody>
-      </p:sp>
-      <p:sp>
-        <p:nvSpPr>
-          <p:cNvPr id="10" name="Shape 7"/>
-          <p:cNvSpPr/>
-          <p:nvPr/>
-        </p:nvSpPr>
-        <p:spPr>
-          <a:xfrm>
-            <a:off x="3300984" y="1417320"/>
-            <a:ext cx="2542032" cy="1965960"/>
+              <a:t>Médicos y especialistas independientes</a:t>
+            </a:r>
+            <a:endParaRPr lang="en-US" sz="1050" dirty="0"/>
+          </a:p>
+          <a:p>
+            <a:pPr marL="342900" indent="-342900">
+              <a:spcAft>
+                <a:spcPts val="500"/>
+              </a:spcAft>
+              <a:buSzPct val="100000"/>
+              <a:buChar char="•"/>
+            </a:pPr>
+            <a:r>
+              <a:rPr lang="en-US" sz="1050" dirty="0">
+                <a:solidFill>
+                  <a:srgbClr val="48484A"/>
+                </a:solidFill>
+                <a:latin typeface="Arial" pitchFamily="34" charset="0"/>
+                <a:ea typeface="Arial" pitchFamily="34" charset="-122"/>
+                <a:cs typeface="Arial" pitchFamily="34" charset="-120"/>
+              </a:rPr>
+              <a:t>Consultorios propios</a:t>
+            </a:r>
+            <a:endParaRPr lang="en-US" sz="1050" dirty="0"/>
+          </a:p>
+          <a:p>
+            <a:pPr marL="342900" indent="-342900">
+              <a:buSzPct val="100000"/>
+              <a:buChar char="•"/>
+            </a:pPr>
+            <a:r>
+              <a:rPr lang="en-US" sz="1050" dirty="0">
+                <a:solidFill>
+                  <a:srgbClr val="48484A"/>
+                </a:solidFill>
+                <a:latin typeface="Arial" pitchFamily="34" charset="0"/>
+                <a:ea typeface="Arial" pitchFamily="34" charset="-122"/>
+                <a:cs typeface="Arial" pitchFamily="34" charset="-120"/>
+              </a:rPr>
+              <a:t>Suscripción individual por médico</a:t>
+            </a:r>
+            <a:endParaRPr lang="en-US" sz="1050" dirty="0"/>
+          </a:p>
+        </p:txBody>
+      </p:sp>
+      <p:sp>
+        <p:nvSpPr>
+          <p:cNvPr id="11" name="Shape 8"/>
+          <p:cNvSpPr/>
+          <p:nvPr/>
+        </p:nvSpPr>
+        <p:spPr>
+          <a:xfrm>
+            <a:off x="4709160" y="1463040"/>
+            <a:ext cx="3931920" cy="1965960"/>
           </a:xfrm>
           <a:prstGeom prst="roundRect">
             <a:avLst>
@@ -11168,11 +10200,11 @@
             </a:avLst>
           </a:prstGeom>
           <a:solidFill>
-            <a:srgbClr val="EAF3FF"/>
+            <a:srgbClr val="FFFFFF"/>
           </a:solidFill>
           <a:ln w="9525">
             <a:solidFill>
-              <a:srgbClr val="CFE4FB"/>
+              <a:srgbClr val="E2E2E6"/>
             </a:solidFill>
             <a:prstDash val="solid"/>
           </a:ln>
@@ -11187,27 +10219,27 @@
       </p:sp>
       <p:sp>
         <p:nvSpPr>
-          <p:cNvPr id="11" name="Shape 8"/>
-          <p:cNvSpPr/>
-          <p:nvPr/>
-        </p:nvSpPr>
-        <p:spPr>
-          <a:xfrm>
-            <a:off x="4315968" y="1618488"/>
-            <a:ext cx="512064" cy="512064"/>
+          <p:cNvPr id="12" name="Shape 9"/>
+          <p:cNvSpPr/>
+          <p:nvPr/>
+        </p:nvSpPr>
+        <p:spPr>
+          <a:xfrm>
+            <a:off x="4937760" y="1664208"/>
+            <a:ext cx="411480" cy="411480"/>
           </a:xfrm>
           <a:prstGeom prst="ellipse">
             <a:avLst/>
           </a:prstGeom>
           <a:solidFill>
-            <a:srgbClr val="FFFFFF"/>
+            <a:srgbClr val="EAF3FF"/>
           </a:solidFill>
           <a:ln/>
         </p:spPr>
       </p:sp>
       <p:pic>
         <p:nvPicPr>
-          <p:cNvPr id="12" name="Image 1" descr="preencoded.png">    </p:cNvPr>
+          <p:cNvPr id="13" name="Image 1" descr="preencoded.png">    </p:cNvPr>
           <p:cNvPicPr>
             <a:picLocks noChangeAspect="1"/>
           </p:cNvPicPr>
@@ -11221,8 +10253,8 @@
         </p:blipFill>
         <p:spPr>
           <a:xfrm>
-            <a:off x="4387657" y="1690177"/>
-            <a:ext cx="368686" cy="368686"/>
+            <a:off x="4995367" y="1721815"/>
+            <a:ext cx="296266" cy="296266"/>
           </a:xfrm>
           <a:prstGeom prst="rect">
             <a:avLst/>
@@ -11231,209 +10263,289 @@
       </p:pic>
       <p:sp>
         <p:nvSpPr>
-          <p:cNvPr id="13" name="Text 9"/>
-          <p:cNvSpPr/>
-          <p:nvPr/>
-        </p:nvSpPr>
-        <p:spPr>
-          <a:xfrm>
-            <a:off x="3438144" y="2240280"/>
-            <a:ext cx="2267712" cy="219456"/>
-          </a:xfrm>
-          <a:prstGeom prst="rect">
-            <a:avLst/>
-          </a:prstGeom>
-          <a:noFill/>
-          <a:ln/>
-        </p:spPr>
-        <p:txBody>
-          <a:bodyPr wrap="square" lIns="0" tIns="0" rIns="0" bIns="0" rtlCol="0" anchor="ctr"/>
-          <a:lstStyle/>
-          <a:p>
-            <a:pPr algn="ctr" indent="0" marL="0">
-              <a:buNone/>
-            </a:pPr>
-            <a:r>
-              <a:rPr lang="en-US" sz="850" b="1" spc="100" kern="0" dirty="0">
-                <a:solidFill>
-                  <a:srgbClr val="0071E3"/>
-                </a:solidFill>
-                <a:latin typeface="Arial" pitchFamily="34" charset="0"/>
-                <a:ea typeface="Arial" pitchFamily="34" charset="-122"/>
-                <a:cs typeface="Arial" pitchFamily="34" charset="-120"/>
-              </a:rPr>
-              <a:t>SAM · COLOMBIA</a:t>
-            </a:r>
-            <a:endParaRPr lang="en-US" sz="850" dirty="0"/>
-          </a:p>
-        </p:txBody>
-      </p:sp>
-      <p:sp>
-        <p:nvSpPr>
-          <p:cNvPr id="14" name="Text 10"/>
-          <p:cNvSpPr/>
-          <p:nvPr/>
-        </p:nvSpPr>
-        <p:spPr>
-          <a:xfrm>
-            <a:off x="3392424" y="2478024"/>
-            <a:ext cx="2359152" cy="384048"/>
-          </a:xfrm>
-          <a:prstGeom prst="rect">
-            <a:avLst/>
-          </a:prstGeom>
-          <a:noFill/>
-          <a:ln/>
-        </p:spPr>
-        <p:txBody>
-          <a:bodyPr wrap="square" lIns="0" tIns="0" rIns="0" bIns="0" rtlCol="0" anchor="ctr"/>
-          <a:lstStyle/>
-          <a:p>
-            <a:pPr algn="ctr" indent="0" marL="0">
-              <a:buNone/>
-            </a:pPr>
-            <a:r>
-              <a:rPr lang="en-US" sz="1900" b="1" dirty="0">
-                <a:solidFill>
-                  <a:srgbClr val="0A3D91"/>
-                </a:solidFill>
-                <a:latin typeface="Arial" pitchFamily="34" charset="0"/>
-                <a:ea typeface="Arial" pitchFamily="34" charset="-122"/>
-                <a:cs typeface="Arial" pitchFamily="34" charset="-120"/>
-              </a:rPr>
-              <a:t>137.700+</a:t>
-            </a:r>
-            <a:endParaRPr lang="en-US" sz="1900" dirty="0"/>
-          </a:p>
-        </p:txBody>
-      </p:sp>
-      <p:sp>
-        <p:nvSpPr>
-          <p:cNvPr id="15" name="Text 11"/>
-          <p:cNvSpPr/>
-          <p:nvPr/>
-        </p:nvSpPr>
-        <p:spPr>
-          <a:xfrm>
-            <a:off x="3465576" y="2880360"/>
-            <a:ext cx="2212848" cy="457200"/>
-          </a:xfrm>
-          <a:prstGeom prst="rect">
-            <a:avLst/>
-          </a:prstGeom>
-          <a:noFill/>
-          <a:ln/>
-        </p:spPr>
-        <p:txBody>
-          <a:bodyPr wrap="square" lIns="0" tIns="0" rIns="0" bIns="0" rtlCol="0" anchor="t"/>
-          <a:lstStyle/>
-          <a:p>
-            <a:pPr algn="ctr" indent="0" marL="0">
-              <a:buNone/>
-            </a:pPr>
-            <a:r>
-              <a:rPr lang="en-US" sz="900" dirty="0">
-                <a:solidFill>
-                  <a:srgbClr val="48484A"/>
-                </a:solidFill>
-                <a:latin typeface="Arial" pitchFamily="34" charset="0"/>
-                <a:ea typeface="Arial" pitchFamily="34" charset="-122"/>
-                <a:cs typeface="Arial" pitchFamily="34" charset="-120"/>
-              </a:rPr>
-              <a:t>médicos activos · 10.839 IPS habilitadas</a:t>
-            </a:r>
-            <a:endParaRPr lang="en-US" sz="900" dirty="0"/>
-          </a:p>
-        </p:txBody>
-      </p:sp>
-      <p:sp>
-        <p:nvSpPr>
-          <p:cNvPr id="16" name="Shape 12"/>
-          <p:cNvSpPr/>
-          <p:nvPr/>
-        </p:nvSpPr>
-        <p:spPr>
-          <a:xfrm>
-            <a:off x="6099048" y="1417320"/>
-            <a:ext cx="2542032" cy="1965960"/>
+          <p:cNvPr id="14" name="Shape 10"/>
+          <p:cNvSpPr/>
+          <p:nvPr/>
+        </p:nvSpPr>
+        <p:spPr>
+          <a:xfrm>
+            <a:off x="5486400" y="1737360"/>
+            <a:ext cx="1965960" cy="274320"/>
           </a:xfrm>
           <a:prstGeom prst="roundRect">
             <a:avLst>
-              <a:gd name="adj" fmla="val 4186"/>
+              <a:gd name="adj" fmla="val 50000"/>
             </a:avLst>
           </a:prstGeom>
           <a:solidFill>
-            <a:srgbClr val="D7E9FC"/>
+            <a:srgbClr val="EAF3FF"/>
           </a:solidFill>
-          <a:ln w="9525">
+          <a:ln/>
+        </p:spPr>
+      </p:sp>
+      <p:sp>
+        <p:nvSpPr>
+          <p:cNvPr id="15" name="Text 11"/>
+          <p:cNvSpPr/>
+          <p:nvPr/>
+        </p:nvSpPr>
+        <p:spPr>
+          <a:xfrm>
+            <a:off x="5486400" y="1737360"/>
+            <a:ext cx="1965960" cy="274320"/>
+          </a:xfrm>
+          <a:prstGeom prst="rect">
+            <a:avLst/>
+          </a:prstGeom>
+          <a:noFill/>
+          <a:ln/>
+        </p:spPr>
+        <p:txBody>
+          <a:bodyPr wrap="square" lIns="0" tIns="0" rIns="0" bIns="0" rtlCol="0" anchor="ctr"/>
+          <a:lstStyle/>
+          <a:p>
+            <a:pPr algn="ctr" indent="0" marL="0">
+              <a:buNone/>
+            </a:pPr>
+            <a:r>
+              <a:rPr lang="en-US" sz="650" b="1" spc="50" kern="0" dirty="0">
+                <a:solidFill>
+                  <a:srgbClr val="0071E3"/>
+                </a:solidFill>
+                <a:latin typeface="Arial" pitchFamily="34" charset="0"/>
+                <a:ea typeface="Arial" pitchFamily="34" charset="-122"/>
+                <a:cs typeface="Arial" pitchFamily="34" charset="-120"/>
+              </a:rPr>
+              <a:t>B2B · EL MOTOR DE EXPANSIÓN</a:t>
+            </a:r>
+            <a:endParaRPr lang="en-US" sz="650" dirty="0"/>
+          </a:p>
+        </p:txBody>
+      </p:sp>
+      <p:sp>
+        <p:nvSpPr>
+          <p:cNvPr id="16" name="Text 12"/>
+          <p:cNvSpPr/>
+          <p:nvPr/>
+        </p:nvSpPr>
+        <p:spPr>
+          <a:xfrm>
+            <a:off x="4937760" y="2212848"/>
+            <a:ext cx="3474720" cy="274320"/>
+          </a:xfrm>
+          <a:prstGeom prst="rect">
+            <a:avLst/>
+          </a:prstGeom>
+          <a:noFill/>
+          <a:ln/>
+        </p:spPr>
+        <p:txBody>
+          <a:bodyPr wrap="square" lIns="0" tIns="0" rIns="0" bIns="0" rtlCol="0" anchor="ctr"/>
+          <a:lstStyle/>
+          <a:p>
+            <a:pPr indent="0" marL="0">
+              <a:buNone/>
+            </a:pPr>
+            <a:r>
+              <a:rPr lang="en-US" sz="1350" b="1" dirty="0">
+                <a:solidFill>
+                  <a:srgbClr val="1D1D1F"/>
+                </a:solidFill>
+                <a:latin typeface="Arial" pitchFamily="34" charset="0"/>
+                <a:ea typeface="Arial" pitchFamily="34" charset="-122"/>
+                <a:cs typeface="Arial" pitchFamily="34" charset="-120"/>
+              </a:rPr>
+              <a:t>La institución escala</a:t>
+            </a:r>
+            <a:endParaRPr lang="en-US" sz="1350" dirty="0"/>
+          </a:p>
+        </p:txBody>
+      </p:sp>
+      <p:sp>
+        <p:nvSpPr>
+          <p:cNvPr id="17" name="Text 13"/>
+          <p:cNvSpPr/>
+          <p:nvPr/>
+        </p:nvSpPr>
+        <p:spPr>
+          <a:xfrm>
+            <a:off x="4937760" y="2542032"/>
+            <a:ext cx="3474720" cy="777240"/>
+          </a:xfrm>
+          <a:prstGeom prst="rect">
+            <a:avLst/>
+          </a:prstGeom>
+          <a:noFill/>
+          <a:ln/>
+        </p:spPr>
+        <p:txBody>
+          <a:bodyPr wrap="square" lIns="0" tIns="0" rIns="0" bIns="0" rtlCol="0" anchor="t"/>
+          <a:lstStyle/>
+          <a:p>
+            <a:pPr marL="342900" indent="-342900">
+              <a:spcAft>
+                <a:spcPts val="500"/>
+              </a:spcAft>
+              <a:buSzPct val="100000"/>
+              <a:buChar char="•"/>
+            </a:pPr>
+            <a:r>
+              <a:rPr lang="en-US" sz="1050" dirty="0">
+                <a:solidFill>
+                  <a:srgbClr val="48484A"/>
+                </a:solidFill>
+                <a:latin typeface="Arial" pitchFamily="34" charset="0"/>
+                <a:ea typeface="Arial" pitchFamily="34" charset="-122"/>
+                <a:cs typeface="Arial" pitchFamily="34" charset="-120"/>
+              </a:rPr>
+              <a:t>Clínicas, IPS y centros médicos</a:t>
+            </a:r>
+            <a:endParaRPr lang="en-US" sz="1050" dirty="0"/>
+          </a:p>
+          <a:p>
+            <a:pPr marL="342900" indent="-342900">
+              <a:spcAft>
+                <a:spcPts val="500"/>
+              </a:spcAft>
+              <a:buSzPct val="100000"/>
+              <a:buChar char="•"/>
+            </a:pPr>
+            <a:r>
+              <a:rPr lang="en-US" sz="1050" dirty="0">
+                <a:solidFill>
+                  <a:srgbClr val="48484A"/>
+                </a:solidFill>
+                <a:latin typeface="Arial" pitchFamily="34" charset="0"/>
+                <a:ea typeface="Arial" pitchFamily="34" charset="-122"/>
+                <a:cs typeface="Arial" pitchFamily="34" charset="-120"/>
+              </a:rPr>
+              <a:t>Administración de equipos y visibilidad de la documentación</a:t>
+            </a:r>
+            <a:endParaRPr lang="en-US" sz="1050" dirty="0"/>
+          </a:p>
+          <a:p>
+            <a:pPr marL="342900" indent="-342900">
+              <a:buSzPct val="100000"/>
+              <a:buChar char="•"/>
+            </a:pPr>
+            <a:r>
+              <a:rPr lang="en-US" sz="1050" dirty="0">
+                <a:solidFill>
+                  <a:srgbClr val="48484A"/>
+                </a:solidFill>
+                <a:latin typeface="Arial" pitchFamily="34" charset="0"/>
+                <a:ea typeface="Arial" pitchFamily="34" charset="-122"/>
+                <a:cs typeface="Arial" pitchFamily="34" charset="-120"/>
+              </a:rPr>
+              <a:t>Directores médicos y gerentes aprueban la compra</a:t>
+            </a:r>
+            <a:endParaRPr lang="en-US" sz="1050" dirty="0"/>
+          </a:p>
+        </p:txBody>
+      </p:sp>
+      <p:sp>
+        <p:nvSpPr>
+          <p:cNvPr id="18" name="Shape 14"/>
+          <p:cNvSpPr/>
+          <p:nvPr/>
+        </p:nvSpPr>
+        <p:spPr>
+          <a:xfrm>
+            <a:off x="502920" y="3639312"/>
+            <a:ext cx="1748333" cy="365760"/>
+          </a:xfrm>
+          <a:prstGeom prst="roundRect">
+            <a:avLst>
+              <a:gd name="adj" fmla="val 50000"/>
+            </a:avLst>
+          </a:prstGeom>
+          <a:solidFill>
+            <a:srgbClr val="FFFFFF"/>
+          </a:solidFill>
+          <a:ln w="12700">
             <a:solidFill>
               <a:srgbClr val="0071E3"/>
             </a:solidFill>
             <a:prstDash val="solid"/>
           </a:ln>
-          <a:effectLst>
-            <a:outerShdw sx="100000" sy="100000" kx="0" ky="0" algn="bl" rotWithShape="0" blurRad="101600" dist="25400" dir="5400000">
-              <a:srgbClr val="0A3D91">
-                <a:alpha val="7000"/>
-              </a:srgbClr>
-            </a:outerShdw>
-          </a:effectLst>
-        </p:spPr>
-      </p:sp>
-      <p:sp>
-        <p:nvSpPr>
-          <p:cNvPr id="17" name="Shape 13"/>
-          <p:cNvSpPr/>
-          <p:nvPr/>
-        </p:nvSpPr>
-        <p:spPr>
-          <a:xfrm>
-            <a:off x="7114032" y="1618488"/>
-            <a:ext cx="512064" cy="512064"/>
-          </a:xfrm>
-          <a:prstGeom prst="ellipse">
-            <a:avLst/>
+        </p:spPr>
+      </p:sp>
+      <p:sp>
+        <p:nvSpPr>
+          <p:cNvPr id="19" name="Text 15"/>
+          <p:cNvSpPr/>
+          <p:nvPr/>
+        </p:nvSpPr>
+        <p:spPr>
+          <a:xfrm>
+            <a:off x="502920" y="3639312"/>
+            <a:ext cx="1748333" cy="365760"/>
+          </a:xfrm>
+          <a:prstGeom prst="rect">
+            <a:avLst/>
+          </a:prstGeom>
+          <a:noFill/>
+          <a:ln/>
+        </p:spPr>
+        <p:txBody>
+          <a:bodyPr wrap="square" lIns="0" tIns="0" rIns="0" bIns="0" rtlCol="0" anchor="ctr"/>
+          <a:lstStyle/>
+          <a:p>
+            <a:pPr algn="ctr" indent="0" marL="0">
+              <a:buNone/>
+            </a:pPr>
+            <a:r>
+              <a:rPr lang="en-US" sz="950" b="1" dirty="0">
+                <a:solidFill>
+                  <a:srgbClr val="0A3D91"/>
+                </a:solidFill>
+                <a:latin typeface="Arial" pitchFamily="34" charset="0"/>
+                <a:ea typeface="Arial" pitchFamily="34" charset="-122"/>
+                <a:cs typeface="Arial" pitchFamily="34" charset="-120"/>
+              </a:rPr>
+              <a:t>Consultorios privados</a:t>
+            </a:r>
+            <a:endParaRPr lang="en-US" sz="950" dirty="0"/>
+          </a:p>
+        </p:txBody>
+      </p:sp>
+      <p:sp>
+        <p:nvSpPr>
+          <p:cNvPr id="20" name="Shape 16"/>
+          <p:cNvSpPr/>
+          <p:nvPr/>
+        </p:nvSpPr>
+        <p:spPr>
+          <a:xfrm>
+            <a:off x="2397557" y="3639312"/>
+            <a:ext cx="2209190" cy="365760"/>
+          </a:xfrm>
+          <a:prstGeom prst="roundRect">
+            <a:avLst>
+              <a:gd name="adj" fmla="val 50000"/>
+            </a:avLst>
           </a:prstGeom>
           <a:solidFill>
             <a:srgbClr val="FFFFFF"/>
           </a:solidFill>
-          <a:ln/>
-        </p:spPr>
-      </p:sp>
-      <p:pic>
-        <p:nvPicPr>
-          <p:cNvPr id="18" name="Image 2" descr="preencoded.png">    </p:cNvPr>
-          <p:cNvPicPr>
-            <a:picLocks noChangeAspect="1"/>
-          </p:cNvPicPr>
-          <p:nvPr/>
-        </p:nvPicPr>
-        <p:blipFill>
-          <a:blip r:embed="rId3"/>
-          <a:stretch>
-            <a:fillRect/>
-          </a:stretch>
-        </p:blipFill>
-        <p:spPr>
-          <a:xfrm>
-            <a:off x="7185721" y="1690177"/>
-            <a:ext cx="368686" cy="368686"/>
-          </a:xfrm>
-          <a:prstGeom prst="rect">
-            <a:avLst/>
-          </a:prstGeom>
-        </p:spPr>
-      </p:pic>
-      <p:sp>
-        <p:nvSpPr>
-          <p:cNvPr id="19" name="Text 14"/>
-          <p:cNvSpPr/>
-          <p:nvPr/>
-        </p:nvSpPr>
-        <p:spPr>
-          <a:xfrm>
-            <a:off x="6236208" y="2240280"/>
-            <a:ext cx="2267712" cy="219456"/>
+          <a:ln w="12700">
+            <a:solidFill>
+              <a:srgbClr val="0071E3"/>
+            </a:solidFill>
+            <a:prstDash val="solid"/>
+          </a:ln>
+        </p:spPr>
+      </p:sp>
+      <p:sp>
+        <p:nvSpPr>
+          <p:cNvPr id="21" name="Text 17"/>
+          <p:cNvSpPr/>
+          <p:nvPr/>
+        </p:nvSpPr>
+        <p:spPr>
+          <a:xfrm>
+            <a:off x="2397557" y="3639312"/>
+            <a:ext cx="2209190" cy="365760"/>
           </a:xfrm>
           <a:prstGeom prst="rect">
             <a:avLst/>
@@ -11449,30 +10561,57 @@
               <a:buNone/>
             </a:pPr>
             <a:r>
-              <a:rPr lang="en-US" sz="850" b="1" spc="100" kern="0" dirty="0">
-                <a:solidFill>
-                  <a:srgbClr val="0071E3"/>
-                </a:solidFill>
-                <a:latin typeface="Arial" pitchFamily="34" charset="0"/>
-                <a:ea typeface="Arial" pitchFamily="34" charset="-122"/>
-                <a:cs typeface="Arial" pitchFamily="34" charset="-120"/>
-              </a:rPr>
-              <a:t>SOM · ANTIOQUIA</a:t>
-            </a:r>
-            <a:endParaRPr lang="en-US" sz="850" dirty="0"/>
-          </a:p>
-        </p:txBody>
-      </p:sp>
-      <p:sp>
-        <p:nvSpPr>
-          <p:cNvPr id="20" name="Text 15"/>
-          <p:cNvSpPr/>
-          <p:nvPr/>
-        </p:nvSpPr>
-        <p:spPr>
-          <a:xfrm>
-            <a:off x="6190488" y="2478024"/>
-            <a:ext cx="2359152" cy="384048"/>
+              <a:rPr lang="en-US" sz="950" b="1" dirty="0">
+                <a:solidFill>
+                  <a:srgbClr val="0A3D91"/>
+                </a:solidFill>
+                <a:latin typeface="Arial" pitchFamily="34" charset="0"/>
+                <a:ea typeface="Arial" pitchFamily="34" charset="-122"/>
+                <a:cs typeface="Arial" pitchFamily="34" charset="-120"/>
+              </a:rPr>
+              <a:t>Clínicas pequeñas y medianas</a:t>
+            </a:r>
+            <a:endParaRPr lang="en-US" sz="950" dirty="0"/>
+          </a:p>
+        </p:txBody>
+      </p:sp>
+      <p:sp>
+        <p:nvSpPr>
+          <p:cNvPr id="22" name="Shape 18"/>
+          <p:cNvSpPr/>
+          <p:nvPr/>
+        </p:nvSpPr>
+        <p:spPr>
+          <a:xfrm>
+            <a:off x="4753051" y="3639312"/>
+            <a:ext cx="1616659" cy="365760"/>
+          </a:xfrm>
+          <a:prstGeom prst="roundRect">
+            <a:avLst>
+              <a:gd name="adj" fmla="val 50000"/>
+            </a:avLst>
+          </a:prstGeom>
+          <a:solidFill>
+            <a:srgbClr val="FFFFFF"/>
+          </a:solidFill>
+          <a:ln w="12700">
+            <a:solidFill>
+              <a:srgbClr val="0071E3"/>
+            </a:solidFill>
+            <a:prstDash val="solid"/>
+          </a:ln>
+        </p:spPr>
+      </p:sp>
+      <p:sp>
+        <p:nvSpPr>
+          <p:cNvPr id="23" name="Text 19"/>
+          <p:cNvSpPr/>
+          <p:nvPr/>
+        </p:nvSpPr>
+        <p:spPr>
+          <a:xfrm>
+            <a:off x="4753051" y="3639312"/>
+            <a:ext cx="1616659" cy="365760"/>
           </a:xfrm>
           <a:prstGeom prst="rect">
             <a:avLst/>
@@ -11488,7 +10627,7 @@
               <a:buNone/>
             </a:pPr>
             <a:r>
-              <a:rPr lang="en-US" sz="1900" b="1" dirty="0">
+              <a:rPr lang="en-US" sz="950" b="1" dirty="0">
                 <a:solidFill>
                   <a:srgbClr val="0A3D91"/>
                 </a:solidFill>
@@ -11496,22 +10635,49 @@
                 <a:ea typeface="Arial" pitchFamily="34" charset="-122"/>
                 <a:cs typeface="Arial" pitchFamily="34" charset="-120"/>
               </a:rPr>
-              <a:t>≈ 940 IPS</a:t>
-            </a:r>
-            <a:endParaRPr lang="en-US" sz="1900" dirty="0"/>
-          </a:p>
-        </p:txBody>
-      </p:sp>
-      <p:sp>
-        <p:nvSpPr>
-          <p:cNvPr id="21" name="Text 16"/>
-          <p:cNvSpPr/>
-          <p:nvPr/>
-        </p:nvSpPr>
-        <p:spPr>
-          <a:xfrm>
-            <a:off x="6263640" y="2880360"/>
-            <a:ext cx="2212848" cy="457200"/>
+              <a:t>IPS de alto volumen</a:t>
+            </a:r>
+            <a:endParaRPr lang="en-US" sz="950" dirty="0"/>
+          </a:p>
+        </p:txBody>
+      </p:sp>
+      <p:sp>
+        <p:nvSpPr>
+          <p:cNvPr id="24" name="Shape 20"/>
+          <p:cNvSpPr/>
+          <p:nvPr/>
+        </p:nvSpPr>
+        <p:spPr>
+          <a:xfrm>
+            <a:off x="502920" y="4133088"/>
+            <a:ext cx="3130906" cy="365760"/>
+          </a:xfrm>
+          <a:prstGeom prst="roundRect">
+            <a:avLst>
+              <a:gd name="adj" fmla="val 50000"/>
+            </a:avLst>
+          </a:prstGeom>
+          <a:solidFill>
+            <a:srgbClr val="FFFFFF"/>
+          </a:solidFill>
+          <a:ln w="12700">
+            <a:solidFill>
+              <a:srgbClr val="0071E3"/>
+            </a:solidFill>
+            <a:prstDash val="solid"/>
+          </a:ln>
+        </p:spPr>
+      </p:sp>
+      <p:sp>
+        <p:nvSpPr>
+          <p:cNvPr id="25" name="Text 21"/>
+          <p:cNvSpPr/>
+          <p:nvPr/>
+        </p:nvSpPr>
+        <p:spPr>
+          <a:xfrm>
+            <a:off x="502920" y="4133088"/>
+            <a:ext cx="3130906" cy="365760"/>
           </a:xfrm>
           <a:prstGeom prst="rect">
             <a:avLst/>
@@ -11520,37 +10686,37 @@
           <a:ln/>
         </p:spPr>
         <p:txBody>
-          <a:bodyPr wrap="square" lIns="0" tIns="0" rIns="0" bIns="0" rtlCol="0" anchor="t"/>
+          <a:bodyPr wrap="square" lIns="0" tIns="0" rIns="0" bIns="0" rtlCol="0" anchor="ctr"/>
           <a:lstStyle/>
           <a:p>
             <a:pPr algn="ctr" indent="0" marL="0">
               <a:buNone/>
             </a:pPr>
             <a:r>
-              <a:rPr lang="en-US" sz="900" dirty="0">
-                <a:solidFill>
-                  <a:srgbClr val="48484A"/>
-                </a:solidFill>
-                <a:latin typeface="Arial" pitchFamily="34" charset="0"/>
-                <a:ea typeface="Arial" pitchFamily="34" charset="-122"/>
-                <a:cs typeface="Arial" pitchFamily="34" charset="-120"/>
-              </a:rPr>
-              <a:t>Pilotos en Medellín y área metropolitana</a:t>
-            </a:r>
-            <a:endParaRPr lang="en-US" sz="900" dirty="0"/>
-          </a:p>
-        </p:txBody>
-      </p:sp>
-      <p:sp>
-        <p:nvSpPr>
-          <p:cNvPr id="22" name="Text 17"/>
-          <p:cNvSpPr/>
-          <p:nvPr/>
-        </p:nvSpPr>
-        <p:spPr>
-          <a:xfrm>
-            <a:off x="502920" y="3520440"/>
-            <a:ext cx="8138160" cy="365760"/>
+              <a:rPr lang="en-US" sz="950" b="1" dirty="0">
+                <a:solidFill>
+                  <a:srgbClr val="0A3D91"/>
+                </a:solidFill>
+                <a:latin typeface="Arial" pitchFamily="34" charset="0"/>
+                <a:ea typeface="Arial" pitchFamily="34" charset="-122"/>
+                <a:cs typeface="Arial" pitchFamily="34" charset="-120"/>
+              </a:rPr>
+              <a:t>Especialistas con documentación repetitiva</a:t>
+            </a:r>
+            <a:endParaRPr lang="en-US" sz="950" dirty="0"/>
+          </a:p>
+        </p:txBody>
+      </p:sp>
+      <p:sp>
+        <p:nvSpPr>
+          <p:cNvPr id="26" name="Text 22"/>
+          <p:cNvSpPr/>
+          <p:nvPr/>
+        </p:nvSpPr>
+        <p:spPr>
+          <a:xfrm>
+            <a:off x="502920" y="4434840"/>
+            <a:ext cx="8138160" cy="457200"/>
           </a:xfrm>
           <a:prstGeom prst="rect">
             <a:avLst/>
@@ -11566,17 +10732,17 @@
               <a:buNone/>
             </a:pPr>
             <a:r>
-              <a:rPr lang="en-US" sz="750" dirty="0">
-                <a:solidFill>
-                  <a:srgbClr val="6E6E73"/>
-                </a:solidFill>
-                <a:latin typeface="Arial" pitchFamily="34" charset="0"/>
-                <a:ea typeface="Arial" pitchFamily="34" charset="-122"/>
-                <a:cs typeface="Arial" pitchFamily="34" charset="-120"/>
-              </a:rPr>
-              <a:t>Fuentes: Market Data Forecast — LatAm Digital Health (CAGR 20,05%); MinSalud 2023; REPS jun 2025 vía Consultorsalud/UNIPS; datos.gov.co — Prestadores de Salud Antioquia.</a:t>
-            </a:r>
-            <a:endParaRPr lang="en-US" sz="750" dirty="0"/>
+              <a:rPr lang="en-US" sz="1250" b="1" i="1" dirty="0">
+                <a:solidFill>
+                  <a:srgbClr val="0A3D91"/>
+                </a:solidFill>
+                <a:latin typeface="Arial" pitchFamily="34" charset="0"/>
+                <a:ea typeface="Arial" pitchFamily="34" charset="-122"/>
+                <a:cs typeface="Arial" pitchFamily="34" charset="-120"/>
+              </a:rPr>
+              <a:t>La adopción individual abre la puerta. El contrato institucional escala el ingreso.</a:t>
+            </a:r>
+            <a:endParaRPr lang="en-US" sz="1250" dirty="0"/>
           </a:p>
         </p:txBody>
       </p:sp>
@@ -11645,7 +10811,7 @@
                 <a:ea typeface="Arial" pitchFamily="34" charset="-122"/>
                 <a:cs typeface="Arial" pitchFamily="34" charset="-120"/>
               </a:rPr>
-              <a:t>NUESTROS CLIENTES</a:t>
+              <a:t>MODELO DE NEGOCIO</a:t>
             </a:r>
             <a:endParaRPr lang="en-US" sz="1050" dirty="0"/>
           </a:p>
@@ -11659,8 +10825,8 @@
         </p:nvSpPr>
         <p:spPr>
           <a:xfrm>
-            <a:off x="502920" y="658368"/>
-            <a:ext cx="8138160" cy="548640"/>
+            <a:off x="502920" y="685800"/>
+            <a:ext cx="8138160" cy="777240"/>
           </a:xfrm>
           <a:prstGeom prst="rect">
             <a:avLst/>
@@ -11669,14 +10835,14 @@
           <a:ln/>
         </p:spPr>
         <p:txBody>
-          <a:bodyPr wrap="square" lIns="0" tIns="0" rIns="0" bIns="0" rtlCol="0" anchor="ctr"/>
+          <a:bodyPr wrap="square" lIns="0" tIns="0" rIns="0" bIns="0" rtlCol="0" anchor="t"/>
           <a:lstStyle/>
           <a:p>
             <a:pPr indent="0" marL="0">
               <a:buNone/>
             </a:pPr>
             <a:r>
-              <a:rPr lang="en-US" sz="2400" b="1" dirty="0">
+              <a:rPr lang="en-US" sz="2100" b="1" dirty="0">
                 <a:solidFill>
                   <a:srgbClr val="1D1D1F"/>
                 </a:solidFill>
@@ -11684,13 +10850,13 @@
                 <a:ea typeface="Arial" pitchFamily="34" charset="-122"/>
                 <a:cs typeface="Arial" pitchFamily="34" charset="-120"/>
               </a:rPr>
-              <a:t>Un solo producto. </a:t>
+              <a:t>Cada médico y cada clínica generan </a:t>
             </a:r>
             <a:pPr indent="0" marL="0">
               <a:buNone/>
             </a:pPr>
             <a:r>
-              <a:rPr lang="en-US" sz="2400" b="1" dirty="0">
+              <a:rPr lang="en-US" sz="2100" b="1" dirty="0">
                 <a:solidFill>
                   <a:srgbClr val="0A3D91"/>
                 </a:solidFill>
@@ -11698,13 +10864,13 @@
                 <a:ea typeface="Arial" pitchFamily="34" charset="-122"/>
                 <a:cs typeface="Arial" pitchFamily="34" charset="-120"/>
               </a:rPr>
-              <a:t>Dos motores</a:t>
+              <a:t>ingreso recurrente</a:t>
             </a:r>
             <a:pPr indent="0" marL="0">
               <a:buNone/>
             </a:pPr>
             <a:r>
-              <a:rPr lang="en-US" sz="2400" b="1" dirty="0">
+              <a:rPr lang="en-US" sz="2100" b="1" dirty="0">
                 <a:solidFill>
                   <a:srgbClr val="1D1D1F"/>
                 </a:solidFill>
@@ -11712,9 +10878,9 @@
                 <a:ea typeface="Arial" pitchFamily="34" charset="-122"/>
                 <a:cs typeface="Arial" pitchFamily="34" charset="-120"/>
               </a:rPr>
-              <a:t> de crecimiento.</a:t>
-            </a:r>
-            <a:endParaRPr lang="en-US" sz="2400" dirty="0"/>
+              <a:t>.</a:t>
+            </a:r>
+            <a:endParaRPr lang="en-US" sz="2100" dirty="0"/>
           </a:p>
         </p:txBody>
       </p:sp>
@@ -11726,12 +10892,12 @@
         </p:nvSpPr>
         <p:spPr>
           <a:xfrm>
-            <a:off x="502920" y="1463040"/>
-            <a:ext cx="3931920" cy="1965960"/>
+            <a:off x="502920" y="1691640"/>
+            <a:ext cx="2529840" cy="2011680"/>
           </a:xfrm>
           <a:prstGeom prst="roundRect">
             <a:avLst>
-              <a:gd name="adj" fmla="val 4186"/>
+              <a:gd name="adj" fmla="val 4091"/>
             </a:avLst>
           </a:prstGeom>
           <a:solidFill>
@@ -11760,8 +10926,8 @@
         </p:nvSpPr>
         <p:spPr>
           <a:xfrm>
-            <a:off x="731520" y="1664208"/>
-            <a:ext cx="411480" cy="411480"/>
+            <a:off x="1475232" y="1947672"/>
+            <a:ext cx="585216" cy="585216"/>
           </a:xfrm>
           <a:prstGeom prst="ellipse">
             <a:avLst/>
@@ -11788,8 +10954,8 @@
         </p:blipFill>
         <p:spPr>
           <a:xfrm>
-            <a:off x="789127" y="1721815"/>
-            <a:ext cx="296266" cy="296266"/>
+            <a:off x="1557162" y="2029602"/>
+            <a:ext cx="421356" cy="421356"/>
           </a:xfrm>
           <a:prstGeom prst="rect">
             <a:avLst/>
@@ -11798,200 +10964,96 @@
       </p:pic>
       <p:sp>
         <p:nvSpPr>
-          <p:cNvPr id="7" name="Shape 4"/>
-          <p:cNvSpPr/>
-          <p:nvPr/>
-        </p:nvSpPr>
-        <p:spPr>
-          <a:xfrm>
-            <a:off x="1280160" y="1737360"/>
-            <a:ext cx="1737360" cy="274320"/>
+          <p:cNvPr id="7" name="Text 4"/>
+          <p:cNvSpPr/>
+          <p:nvPr/>
+        </p:nvSpPr>
+        <p:spPr>
+          <a:xfrm>
+            <a:off x="612648" y="2679192"/>
+            <a:ext cx="2310384" cy="365760"/>
+          </a:xfrm>
+          <a:prstGeom prst="rect">
+            <a:avLst/>
+          </a:prstGeom>
+          <a:noFill/>
+          <a:ln/>
+        </p:spPr>
+        <p:txBody>
+          <a:bodyPr wrap="square" lIns="0" tIns="0" rIns="0" bIns="0" rtlCol="0" anchor="t"/>
+          <a:lstStyle/>
+          <a:p>
+            <a:pPr algn="ctr" indent="0" marL="0">
+              <a:buNone/>
+            </a:pPr>
+            <a:r>
+              <a:rPr lang="en-US" sz="1300" b="1" dirty="0">
+                <a:solidFill>
+                  <a:srgbClr val="1D1D1F"/>
+                </a:solidFill>
+                <a:latin typeface="Arial" pitchFamily="34" charset="0"/>
+                <a:ea typeface="Arial" pitchFamily="34" charset="-122"/>
+                <a:cs typeface="Arial" pitchFamily="34" charset="-120"/>
+              </a:rPr>
+              <a:t>Piloto pago</a:t>
+            </a:r>
+            <a:endParaRPr lang="en-US" sz="1300" dirty="0"/>
+          </a:p>
+        </p:txBody>
+      </p:sp>
+      <p:sp>
+        <p:nvSpPr>
+          <p:cNvPr id="8" name="Text 5"/>
+          <p:cNvSpPr/>
+          <p:nvPr/>
+        </p:nvSpPr>
+        <p:spPr>
+          <a:xfrm>
+            <a:off x="612648" y="3063240"/>
+            <a:ext cx="2310384" cy="365760"/>
+          </a:xfrm>
+          <a:prstGeom prst="rect">
+            <a:avLst/>
+          </a:prstGeom>
+          <a:noFill/>
+          <a:ln/>
+        </p:spPr>
+        <p:txBody>
+          <a:bodyPr wrap="square" lIns="0" tIns="0" rIns="0" bIns="0" rtlCol="0" anchor="t"/>
+          <a:lstStyle/>
+          <a:p>
+            <a:pPr algn="ctr" indent="0" marL="0">
+              <a:buNone/>
+            </a:pPr>
+            <a:r>
+              <a:rPr lang="en-US" sz="1050" dirty="0">
+                <a:solidFill>
+                  <a:srgbClr val="6E6E73"/>
+                </a:solidFill>
+                <a:latin typeface="Arial" pitchFamily="34" charset="0"/>
+                <a:ea typeface="Arial" pitchFamily="34" charset="-122"/>
+                <a:cs typeface="Arial" pitchFamily="34" charset="-120"/>
+              </a:rPr>
+              <a:t>Por clínica o consultorio.</a:t>
+            </a:r>
+            <a:endParaRPr lang="en-US" sz="1050" dirty="0"/>
+          </a:p>
+        </p:txBody>
+      </p:sp>
+      <p:sp>
+        <p:nvSpPr>
+          <p:cNvPr id="9" name="Shape 6"/>
+          <p:cNvSpPr/>
+          <p:nvPr/>
+        </p:nvSpPr>
+        <p:spPr>
+          <a:xfrm>
+            <a:off x="3307080" y="1691640"/>
+            <a:ext cx="2529840" cy="2011680"/>
           </a:xfrm>
           <a:prstGeom prst="roundRect">
             <a:avLst>
-              <a:gd name="adj" fmla="val 50000"/>
-            </a:avLst>
-          </a:prstGeom>
-          <a:solidFill>
-            <a:srgbClr val="EAF3FF"/>
-          </a:solidFill>
-          <a:ln/>
-        </p:spPr>
-      </p:sp>
-      <p:sp>
-        <p:nvSpPr>
-          <p:cNvPr id="8" name="Text 5"/>
-          <p:cNvSpPr/>
-          <p:nvPr/>
-        </p:nvSpPr>
-        <p:spPr>
-          <a:xfrm>
-            <a:off x="1280160" y="1737360"/>
-            <a:ext cx="1737360" cy="274320"/>
-          </a:xfrm>
-          <a:prstGeom prst="rect">
-            <a:avLst/>
-          </a:prstGeom>
-          <a:noFill/>
-          <a:ln/>
-        </p:spPr>
-        <p:txBody>
-          <a:bodyPr wrap="square" lIns="0" tIns="0" rIns="0" bIns="0" rtlCol="0" anchor="ctr"/>
-          <a:lstStyle/>
-          <a:p>
-            <a:pPr algn="ctr" indent="0" marL="0">
-              <a:buNone/>
-            </a:pPr>
-            <a:r>
-              <a:rPr lang="en-US" sz="650" b="1" spc="50" kern="0" dirty="0">
-                <a:solidFill>
-                  <a:srgbClr val="0071E3"/>
-                </a:solidFill>
-                <a:latin typeface="Arial" pitchFamily="34" charset="0"/>
-                <a:ea typeface="Arial" pitchFamily="34" charset="-122"/>
-                <a:cs typeface="Arial" pitchFamily="34" charset="-120"/>
-              </a:rPr>
-              <a:t>B2C · LA PUERTA DE ENTRADA</a:t>
-            </a:r>
-            <a:endParaRPr lang="en-US" sz="650" dirty="0"/>
-          </a:p>
-        </p:txBody>
-      </p:sp>
-      <p:sp>
-        <p:nvSpPr>
-          <p:cNvPr id="9" name="Text 6"/>
-          <p:cNvSpPr/>
-          <p:nvPr/>
-        </p:nvSpPr>
-        <p:spPr>
-          <a:xfrm>
-            <a:off x="731520" y="2212848"/>
-            <a:ext cx="3474720" cy="274320"/>
-          </a:xfrm>
-          <a:prstGeom prst="rect">
-            <a:avLst/>
-          </a:prstGeom>
-          <a:noFill/>
-          <a:ln/>
-        </p:spPr>
-        <p:txBody>
-          <a:bodyPr wrap="square" lIns="0" tIns="0" rIns="0" bIns="0" rtlCol="0" anchor="ctr"/>
-          <a:lstStyle/>
-          <a:p>
-            <a:pPr indent="0" marL="0">
-              <a:buNone/>
-            </a:pPr>
-            <a:r>
-              <a:rPr lang="en-US" sz="1350" b="1" dirty="0">
-                <a:solidFill>
-                  <a:srgbClr val="1D1D1F"/>
-                </a:solidFill>
-                <a:latin typeface="Arial" pitchFamily="34" charset="0"/>
-                <a:ea typeface="Arial" pitchFamily="34" charset="-122"/>
-                <a:cs typeface="Arial" pitchFamily="34" charset="-120"/>
-              </a:rPr>
-              <a:t>El médico adopta</a:t>
-            </a:r>
-            <a:endParaRPr lang="en-US" sz="1350" dirty="0"/>
-          </a:p>
-        </p:txBody>
-      </p:sp>
-      <p:sp>
-        <p:nvSpPr>
-          <p:cNvPr id="10" name="Text 7"/>
-          <p:cNvSpPr/>
-          <p:nvPr/>
-        </p:nvSpPr>
-        <p:spPr>
-          <a:xfrm>
-            <a:off x="731520" y="2542032"/>
-            <a:ext cx="3474720" cy="777240"/>
-          </a:xfrm>
-          <a:prstGeom prst="rect">
-            <a:avLst/>
-          </a:prstGeom>
-          <a:noFill/>
-          <a:ln/>
-        </p:spPr>
-        <p:txBody>
-          <a:bodyPr wrap="square" lIns="0" tIns="0" rIns="0" bIns="0" rtlCol="0" anchor="t"/>
-          <a:lstStyle/>
-          <a:p>
-            <a:pPr marL="342900" indent="-342900">
-              <a:spcAft>
-                <a:spcPts val="500"/>
-              </a:spcAft>
-              <a:buSzPct val="100000"/>
-              <a:buChar char="•"/>
-            </a:pPr>
-            <a:r>
-              <a:rPr lang="en-US" sz="1050" dirty="0">
-                <a:solidFill>
-                  <a:srgbClr val="48484A"/>
-                </a:solidFill>
-                <a:latin typeface="Arial" pitchFamily="34" charset="0"/>
-                <a:ea typeface="Arial" pitchFamily="34" charset="-122"/>
-                <a:cs typeface="Arial" pitchFamily="34" charset="-120"/>
-              </a:rPr>
-              <a:t>Médicos y especialistas independientes</a:t>
-            </a:r>
-            <a:endParaRPr lang="en-US" sz="1050" dirty="0"/>
-          </a:p>
-          <a:p>
-            <a:pPr marL="342900" indent="-342900">
-              <a:spcAft>
-                <a:spcPts val="500"/>
-              </a:spcAft>
-              <a:buSzPct val="100000"/>
-              <a:buChar char="•"/>
-            </a:pPr>
-            <a:r>
-              <a:rPr lang="en-US" sz="1050" dirty="0">
-                <a:solidFill>
-                  <a:srgbClr val="48484A"/>
-                </a:solidFill>
-                <a:latin typeface="Arial" pitchFamily="34" charset="0"/>
-                <a:ea typeface="Arial" pitchFamily="34" charset="-122"/>
-                <a:cs typeface="Arial" pitchFamily="34" charset="-120"/>
-              </a:rPr>
-              <a:t>Consultorios propios</a:t>
-            </a:r>
-            <a:endParaRPr lang="en-US" sz="1050" dirty="0"/>
-          </a:p>
-          <a:p>
-            <a:pPr marL="342900" indent="-342900">
-              <a:buSzPct val="100000"/>
-              <a:buChar char="•"/>
-            </a:pPr>
-            <a:r>
-              <a:rPr lang="en-US" sz="1050" dirty="0">
-                <a:solidFill>
-                  <a:srgbClr val="48484A"/>
-                </a:solidFill>
-                <a:latin typeface="Arial" pitchFamily="34" charset="0"/>
-                <a:ea typeface="Arial" pitchFamily="34" charset="-122"/>
-                <a:cs typeface="Arial" pitchFamily="34" charset="-120"/>
-              </a:rPr>
-              <a:t>Suscripción individual por médico</a:t>
-            </a:r>
-            <a:endParaRPr lang="en-US" sz="1050" dirty="0"/>
-          </a:p>
-        </p:txBody>
-      </p:sp>
-      <p:sp>
-        <p:nvSpPr>
-          <p:cNvPr id="11" name="Shape 8"/>
-          <p:cNvSpPr/>
-          <p:nvPr/>
-        </p:nvSpPr>
-        <p:spPr>
-          <a:xfrm>
-            <a:off x="4709160" y="1463040"/>
-            <a:ext cx="3931920" cy="1965960"/>
-          </a:xfrm>
-          <a:prstGeom prst="roundRect">
-            <a:avLst>
-              <a:gd name="adj" fmla="val 4186"/>
+              <a:gd name="adj" fmla="val 4091"/>
             </a:avLst>
           </a:prstGeom>
           <a:solidFill>
@@ -12014,14 +11076,14 @@
       </p:sp>
       <p:sp>
         <p:nvSpPr>
-          <p:cNvPr id="12" name="Shape 9"/>
-          <p:cNvSpPr/>
-          <p:nvPr/>
-        </p:nvSpPr>
-        <p:spPr>
-          <a:xfrm>
-            <a:off x="4937760" y="1664208"/>
-            <a:ext cx="411480" cy="411480"/>
+          <p:cNvPr id="10" name="Shape 7"/>
+          <p:cNvSpPr/>
+          <p:nvPr/>
+        </p:nvSpPr>
+        <p:spPr>
+          <a:xfrm>
+            <a:off x="4279392" y="1947672"/>
+            <a:ext cx="585216" cy="585216"/>
           </a:xfrm>
           <a:prstGeom prst="ellipse">
             <a:avLst/>
@@ -12034,7 +11096,7 @@
       </p:sp>
       <p:pic>
         <p:nvPicPr>
-          <p:cNvPr id="13" name="Image 1" descr="preencoded.png">    </p:cNvPr>
+          <p:cNvPr id="11" name="Image 1" descr="preencoded.png">    </p:cNvPr>
           <p:cNvPicPr>
             <a:picLocks noChangeAspect="1"/>
           </p:cNvPicPr>
@@ -12048,8 +11110,8 @@
         </p:blipFill>
         <p:spPr>
           <a:xfrm>
-            <a:off x="4995367" y="1721815"/>
-            <a:ext cx="296266" cy="296266"/>
+            <a:off x="4361322" y="2029602"/>
+            <a:ext cx="421356" cy="421356"/>
           </a:xfrm>
           <a:prstGeom prst="rect">
             <a:avLst/>
@@ -12058,19 +11120,129 @@
       </p:pic>
       <p:sp>
         <p:nvSpPr>
+          <p:cNvPr id="12" name="Text 8"/>
+          <p:cNvSpPr/>
+          <p:nvPr/>
+        </p:nvSpPr>
+        <p:spPr>
+          <a:xfrm>
+            <a:off x="3416808" y="2679192"/>
+            <a:ext cx="2310384" cy="365760"/>
+          </a:xfrm>
+          <a:prstGeom prst="rect">
+            <a:avLst/>
+          </a:prstGeom>
+          <a:noFill/>
+          <a:ln/>
+        </p:spPr>
+        <p:txBody>
+          <a:bodyPr wrap="square" lIns="0" tIns="0" rIns="0" bIns="0" rtlCol="0" anchor="t"/>
+          <a:lstStyle/>
+          <a:p>
+            <a:pPr algn="ctr" indent="0" marL="0">
+              <a:buNone/>
+            </a:pPr>
+            <a:r>
+              <a:rPr lang="en-US" sz="1300" b="1" dirty="0">
+                <a:solidFill>
+                  <a:srgbClr val="1D1D1F"/>
+                </a:solidFill>
+                <a:latin typeface="Arial" pitchFamily="34" charset="0"/>
+                <a:ea typeface="Arial" pitchFamily="34" charset="-122"/>
+                <a:cs typeface="Arial" pitchFamily="34" charset="-120"/>
+              </a:rPr>
+              <a:t>Suscripción mensual</a:t>
+            </a:r>
+            <a:endParaRPr lang="en-US" sz="1300" dirty="0"/>
+          </a:p>
+        </p:txBody>
+      </p:sp>
+      <p:sp>
+        <p:nvSpPr>
+          <p:cNvPr id="13" name="Text 9"/>
+          <p:cNvSpPr/>
+          <p:nvPr/>
+        </p:nvSpPr>
+        <p:spPr>
+          <a:xfrm>
+            <a:off x="3416808" y="3063240"/>
+            <a:ext cx="2310384" cy="365760"/>
+          </a:xfrm>
+          <a:prstGeom prst="rect">
+            <a:avLst/>
+          </a:prstGeom>
+          <a:noFill/>
+          <a:ln/>
+        </p:spPr>
+        <p:txBody>
+          <a:bodyPr wrap="square" lIns="0" tIns="0" rIns="0" bIns="0" rtlCol="0" anchor="t"/>
+          <a:lstStyle/>
+          <a:p>
+            <a:pPr algn="ctr" indent="0" marL="0">
+              <a:buNone/>
+            </a:pPr>
+            <a:r>
+              <a:rPr lang="en-US" sz="1050" dirty="0">
+                <a:solidFill>
+                  <a:srgbClr val="6E6E73"/>
+                </a:solidFill>
+                <a:latin typeface="Arial" pitchFamily="34" charset="0"/>
+                <a:ea typeface="Arial" pitchFamily="34" charset="-122"/>
+                <a:cs typeface="Arial" pitchFamily="34" charset="-120"/>
+              </a:rPr>
+              <a:t>Por médico.</a:t>
+            </a:r>
+            <a:endParaRPr lang="en-US" sz="1050" dirty="0"/>
+          </a:p>
+        </p:txBody>
+      </p:sp>
+      <p:sp>
+        <p:nvSpPr>
           <p:cNvPr id="14" name="Shape 10"/>
           <p:cNvSpPr/>
           <p:nvPr/>
         </p:nvSpPr>
         <p:spPr>
           <a:xfrm>
-            <a:off x="5486400" y="1737360"/>
-            <a:ext cx="1965960" cy="274320"/>
+            <a:off x="6111240" y="1691640"/>
+            <a:ext cx="2529840" cy="2011680"/>
           </a:xfrm>
           <a:prstGeom prst="roundRect">
             <a:avLst>
-              <a:gd name="adj" fmla="val 50000"/>
+              <a:gd name="adj" fmla="val 4091"/>
             </a:avLst>
+          </a:prstGeom>
+          <a:solidFill>
+            <a:srgbClr val="FFFFFF"/>
+          </a:solidFill>
+          <a:ln w="9525">
+            <a:solidFill>
+              <a:srgbClr val="E2E2E6"/>
+            </a:solidFill>
+            <a:prstDash val="solid"/>
+          </a:ln>
+          <a:effectLst>
+            <a:outerShdw sx="100000" sy="100000" kx="0" ky="0" algn="bl" rotWithShape="0" blurRad="101600" dist="25400" dir="5400000">
+              <a:srgbClr val="0A3D91">
+                <a:alpha val="7000"/>
+              </a:srgbClr>
+            </a:outerShdw>
+          </a:effectLst>
+        </p:spPr>
+      </p:sp>
+      <p:sp>
+        <p:nvSpPr>
+          <p:cNvPr id="15" name="Shape 11"/>
+          <p:cNvSpPr/>
+          <p:nvPr/>
+        </p:nvSpPr>
+        <p:spPr>
+          <a:xfrm>
+            <a:off x="7083552" y="1947672"/>
+            <a:ext cx="585216" cy="585216"/>
+          </a:xfrm>
+          <a:prstGeom prst="ellipse">
+            <a:avLst/>
           </a:prstGeom>
           <a:solidFill>
             <a:srgbClr val="EAF3FF"/>
@@ -12078,16 +11250,40 @@
           <a:ln/>
         </p:spPr>
       </p:sp>
-      <p:sp>
-        <p:nvSpPr>
-          <p:cNvPr id="15" name="Text 11"/>
-          <p:cNvSpPr/>
-          <p:nvPr/>
-        </p:nvSpPr>
-        <p:spPr>
-          <a:xfrm>
-            <a:off x="5486400" y="1737360"/>
-            <a:ext cx="1965960" cy="274320"/>
+      <p:pic>
+        <p:nvPicPr>
+          <p:cNvPr id="16" name="Image 2" descr="preencoded.png">    </p:cNvPr>
+          <p:cNvPicPr>
+            <a:picLocks noChangeAspect="1"/>
+          </p:cNvPicPr>
+          <p:nvPr/>
+        </p:nvPicPr>
+        <p:blipFill>
+          <a:blip r:embed="rId3"/>
+          <a:stretch>
+            <a:fillRect/>
+          </a:stretch>
+        </p:blipFill>
+        <p:spPr>
+          <a:xfrm>
+            <a:off x="7165482" y="2029602"/>
+            <a:ext cx="421356" cy="421356"/>
+          </a:xfrm>
+          <a:prstGeom prst="rect">
+            <a:avLst/>
+          </a:prstGeom>
+        </p:spPr>
+      </p:pic>
+      <p:sp>
+        <p:nvSpPr>
+          <p:cNvPr id="17" name="Text 12"/>
+          <p:cNvSpPr/>
+          <p:nvPr/>
+        </p:nvSpPr>
+        <p:spPr>
+          <a:xfrm>
+            <a:off x="6220968" y="2679192"/>
+            <a:ext cx="2310384" cy="365760"/>
           </a:xfrm>
           <a:prstGeom prst="rect">
             <a:avLst/>
@@ -12096,201 +11292,92 @@
           <a:ln/>
         </p:spPr>
         <p:txBody>
+          <a:bodyPr wrap="square" lIns="0" tIns="0" rIns="0" bIns="0" rtlCol="0" anchor="t"/>
+          <a:lstStyle/>
+          <a:p>
+            <a:pPr algn="ctr" indent="0" marL="0">
+              <a:buNone/>
+            </a:pPr>
+            <a:r>
+              <a:rPr lang="en-US" sz="1300" b="1" dirty="0">
+                <a:solidFill>
+                  <a:srgbClr val="1D1D1F"/>
+                </a:solidFill>
+                <a:latin typeface="Arial" pitchFamily="34" charset="0"/>
+                <a:ea typeface="Arial" pitchFamily="34" charset="-122"/>
+                <a:cs typeface="Arial" pitchFamily="34" charset="-120"/>
+              </a:rPr>
+              <a:t>Plan institucional</a:t>
+            </a:r>
+            <a:endParaRPr lang="en-US" sz="1300" dirty="0"/>
+          </a:p>
+        </p:txBody>
+      </p:sp>
+      <p:sp>
+        <p:nvSpPr>
+          <p:cNvPr id="18" name="Text 13"/>
+          <p:cNvSpPr/>
+          <p:nvPr/>
+        </p:nvSpPr>
+        <p:spPr>
+          <a:xfrm>
+            <a:off x="6220968" y="3063240"/>
+            <a:ext cx="2310384" cy="365760"/>
+          </a:xfrm>
+          <a:prstGeom prst="rect">
+            <a:avLst/>
+          </a:prstGeom>
+          <a:noFill/>
+          <a:ln/>
+        </p:spPr>
+        <p:txBody>
+          <a:bodyPr wrap="square" lIns="0" tIns="0" rIns="0" bIns="0" rtlCol="0" anchor="t"/>
+          <a:lstStyle/>
+          <a:p>
+            <a:pPr algn="ctr" indent="0" marL="0">
+              <a:buNone/>
+            </a:pPr>
+            <a:r>
+              <a:rPr lang="en-US" sz="1050" dirty="0">
+                <a:solidFill>
+                  <a:srgbClr val="6E6E73"/>
+                </a:solidFill>
+                <a:latin typeface="Arial" pitchFamily="34" charset="0"/>
+                <a:ea typeface="Arial" pitchFamily="34" charset="-122"/>
+                <a:cs typeface="Arial" pitchFamily="34" charset="-120"/>
+              </a:rPr>
+              <a:t>Por número de usuarios.</a:t>
+            </a:r>
+            <a:endParaRPr lang="en-US" sz="1050" dirty="0"/>
+          </a:p>
+        </p:txBody>
+      </p:sp>
+      <p:sp>
+        <p:nvSpPr>
+          <p:cNvPr id="19" name="Text 14"/>
+          <p:cNvSpPr/>
+          <p:nvPr/>
+        </p:nvSpPr>
+        <p:spPr>
+          <a:xfrm>
+            <a:off x="502920" y="3977640"/>
+            <a:ext cx="8138160" cy="548640"/>
+          </a:xfrm>
+          <a:prstGeom prst="rect">
+            <a:avLst/>
+          </a:prstGeom>
+          <a:noFill/>
+          <a:ln/>
+        </p:spPr>
+        <p:txBody>
           <a:bodyPr wrap="square" lIns="0" tIns="0" rIns="0" bIns="0" rtlCol="0" anchor="ctr"/>
           <a:lstStyle/>
           <a:p>
-            <a:pPr algn="ctr" indent="0" marL="0">
-              <a:buNone/>
-            </a:pPr>
-            <a:r>
-              <a:rPr lang="en-US" sz="650" b="1" spc="50" kern="0" dirty="0">
-                <a:solidFill>
-                  <a:srgbClr val="0071E3"/>
-                </a:solidFill>
-                <a:latin typeface="Arial" pitchFamily="34" charset="0"/>
-                <a:ea typeface="Arial" pitchFamily="34" charset="-122"/>
-                <a:cs typeface="Arial" pitchFamily="34" charset="-120"/>
-              </a:rPr>
-              <a:t>B2B · EL MOTOR DE EXPANSIÓN</a:t>
-            </a:r>
-            <a:endParaRPr lang="en-US" sz="650" dirty="0"/>
-          </a:p>
-        </p:txBody>
-      </p:sp>
-      <p:sp>
-        <p:nvSpPr>
-          <p:cNvPr id="16" name="Text 12"/>
-          <p:cNvSpPr/>
-          <p:nvPr/>
-        </p:nvSpPr>
-        <p:spPr>
-          <a:xfrm>
-            <a:off x="4937760" y="2212848"/>
-            <a:ext cx="3474720" cy="274320"/>
-          </a:xfrm>
-          <a:prstGeom prst="rect">
-            <a:avLst/>
-          </a:prstGeom>
-          <a:noFill/>
-          <a:ln/>
-        </p:spPr>
-        <p:txBody>
-          <a:bodyPr wrap="square" lIns="0" tIns="0" rIns="0" bIns="0" rtlCol="0" anchor="ctr"/>
-          <a:lstStyle/>
-          <a:p>
             <a:pPr indent="0" marL="0">
               <a:buNone/>
             </a:pPr>
             <a:r>
-              <a:rPr lang="en-US" sz="1350" b="1" dirty="0">
-                <a:solidFill>
-                  <a:srgbClr val="1D1D1F"/>
-                </a:solidFill>
-                <a:latin typeface="Arial" pitchFamily="34" charset="0"/>
-                <a:ea typeface="Arial" pitchFamily="34" charset="-122"/>
-                <a:cs typeface="Arial" pitchFamily="34" charset="-120"/>
-              </a:rPr>
-              <a:t>La institución escala</a:t>
-            </a:r>
-            <a:endParaRPr lang="en-US" sz="1350" dirty="0"/>
-          </a:p>
-        </p:txBody>
-      </p:sp>
-      <p:sp>
-        <p:nvSpPr>
-          <p:cNvPr id="17" name="Text 13"/>
-          <p:cNvSpPr/>
-          <p:nvPr/>
-        </p:nvSpPr>
-        <p:spPr>
-          <a:xfrm>
-            <a:off x="4937760" y="2542032"/>
-            <a:ext cx="3474720" cy="777240"/>
-          </a:xfrm>
-          <a:prstGeom prst="rect">
-            <a:avLst/>
-          </a:prstGeom>
-          <a:noFill/>
-          <a:ln/>
-        </p:spPr>
-        <p:txBody>
-          <a:bodyPr wrap="square" lIns="0" tIns="0" rIns="0" bIns="0" rtlCol="0" anchor="t"/>
-          <a:lstStyle/>
-          <a:p>
-            <a:pPr marL="342900" indent="-342900">
-              <a:spcAft>
-                <a:spcPts val="500"/>
-              </a:spcAft>
-              <a:buSzPct val="100000"/>
-              <a:buChar char="•"/>
-            </a:pPr>
-            <a:r>
-              <a:rPr lang="en-US" sz="1050" dirty="0">
-                <a:solidFill>
-                  <a:srgbClr val="48484A"/>
-                </a:solidFill>
-                <a:latin typeface="Arial" pitchFamily="34" charset="0"/>
-                <a:ea typeface="Arial" pitchFamily="34" charset="-122"/>
-                <a:cs typeface="Arial" pitchFamily="34" charset="-120"/>
-              </a:rPr>
-              <a:t>Clínicas, IPS y centros médicos</a:t>
-            </a:r>
-            <a:endParaRPr lang="en-US" sz="1050" dirty="0"/>
-          </a:p>
-          <a:p>
-            <a:pPr marL="342900" indent="-342900">
-              <a:spcAft>
-                <a:spcPts val="500"/>
-              </a:spcAft>
-              <a:buSzPct val="100000"/>
-              <a:buChar char="•"/>
-            </a:pPr>
-            <a:r>
-              <a:rPr lang="en-US" sz="1050" dirty="0">
-                <a:solidFill>
-                  <a:srgbClr val="48484A"/>
-                </a:solidFill>
-                <a:latin typeface="Arial" pitchFamily="34" charset="0"/>
-                <a:ea typeface="Arial" pitchFamily="34" charset="-122"/>
-                <a:cs typeface="Arial" pitchFamily="34" charset="-120"/>
-              </a:rPr>
-              <a:t>Administración de equipos y visibilidad de la documentación</a:t>
-            </a:r>
-            <a:endParaRPr lang="en-US" sz="1050" dirty="0"/>
-          </a:p>
-          <a:p>
-            <a:pPr marL="342900" indent="-342900">
-              <a:buSzPct val="100000"/>
-              <a:buChar char="•"/>
-            </a:pPr>
-            <a:r>
-              <a:rPr lang="en-US" sz="1050" dirty="0">
-                <a:solidFill>
-                  <a:srgbClr val="48484A"/>
-                </a:solidFill>
-                <a:latin typeface="Arial" pitchFamily="34" charset="0"/>
-                <a:ea typeface="Arial" pitchFamily="34" charset="-122"/>
-                <a:cs typeface="Arial" pitchFamily="34" charset="-120"/>
-              </a:rPr>
-              <a:t>Directores médicos y gerentes aprueban la compra</a:t>
-            </a:r>
-            <a:endParaRPr lang="en-US" sz="1050" dirty="0"/>
-          </a:p>
-        </p:txBody>
-      </p:sp>
-      <p:sp>
-        <p:nvSpPr>
-          <p:cNvPr id="18" name="Shape 14"/>
-          <p:cNvSpPr/>
-          <p:nvPr/>
-        </p:nvSpPr>
-        <p:spPr>
-          <a:xfrm>
-            <a:off x="502920" y="3639312"/>
-            <a:ext cx="1748333" cy="365760"/>
-          </a:xfrm>
-          <a:prstGeom prst="roundRect">
-            <a:avLst>
-              <a:gd name="adj" fmla="val 50000"/>
-            </a:avLst>
-          </a:prstGeom>
-          <a:solidFill>
-            <a:srgbClr val="FFFFFF"/>
-          </a:solidFill>
-          <a:ln w="12700">
-            <a:solidFill>
-              <a:srgbClr val="0071E3"/>
-            </a:solidFill>
-            <a:prstDash val="solid"/>
-          </a:ln>
-        </p:spPr>
-      </p:sp>
-      <p:sp>
-        <p:nvSpPr>
-          <p:cNvPr id="19" name="Text 15"/>
-          <p:cNvSpPr/>
-          <p:nvPr/>
-        </p:nvSpPr>
-        <p:spPr>
-          <a:xfrm>
-            <a:off x="502920" y="3639312"/>
-            <a:ext cx="1748333" cy="365760"/>
-          </a:xfrm>
-          <a:prstGeom prst="rect">
-            <a:avLst/>
-          </a:prstGeom>
-          <a:noFill/>
-          <a:ln/>
-        </p:spPr>
-        <p:txBody>
-          <a:bodyPr wrap="square" lIns="0" tIns="0" rIns="0" bIns="0" rtlCol="0" anchor="ctr"/>
-          <a:lstStyle/>
-          <a:p>
-            <a:pPr algn="ctr" indent="0" marL="0">
-              <a:buNone/>
-            </a:pPr>
-            <a:r>
-              <a:rPr lang="en-US" sz="950" b="1" dirty="0">
+              <a:rPr lang="en-US" sz="1400" b="1" i="1" dirty="0">
                 <a:solidFill>
                   <a:srgbClr val="0A3D91"/>
                 </a:solidFill>
@@ -12298,246 +11385,9 @@
                 <a:ea typeface="Arial" pitchFamily="34" charset="-122"/>
                 <a:cs typeface="Arial" pitchFamily="34" charset="-120"/>
               </a:rPr>
-              <a:t>Consultorios privados</a:t>
-            </a:r>
-            <a:endParaRPr lang="en-US" sz="950" dirty="0"/>
-          </a:p>
-        </p:txBody>
-      </p:sp>
-      <p:sp>
-        <p:nvSpPr>
-          <p:cNvPr id="20" name="Shape 16"/>
-          <p:cNvSpPr/>
-          <p:nvPr/>
-        </p:nvSpPr>
-        <p:spPr>
-          <a:xfrm>
-            <a:off x="2397557" y="3639312"/>
-            <a:ext cx="2209190" cy="365760"/>
-          </a:xfrm>
-          <a:prstGeom prst="roundRect">
-            <a:avLst>
-              <a:gd name="adj" fmla="val 50000"/>
-            </a:avLst>
-          </a:prstGeom>
-          <a:solidFill>
-            <a:srgbClr val="FFFFFF"/>
-          </a:solidFill>
-          <a:ln w="12700">
-            <a:solidFill>
-              <a:srgbClr val="0071E3"/>
-            </a:solidFill>
-            <a:prstDash val="solid"/>
-          </a:ln>
-        </p:spPr>
-      </p:sp>
-      <p:sp>
-        <p:nvSpPr>
-          <p:cNvPr id="21" name="Text 17"/>
-          <p:cNvSpPr/>
-          <p:nvPr/>
-        </p:nvSpPr>
-        <p:spPr>
-          <a:xfrm>
-            <a:off x="2397557" y="3639312"/>
-            <a:ext cx="2209190" cy="365760"/>
-          </a:xfrm>
-          <a:prstGeom prst="rect">
-            <a:avLst/>
-          </a:prstGeom>
-          <a:noFill/>
-          <a:ln/>
-        </p:spPr>
-        <p:txBody>
-          <a:bodyPr wrap="square" lIns="0" tIns="0" rIns="0" bIns="0" rtlCol="0" anchor="ctr"/>
-          <a:lstStyle/>
-          <a:p>
-            <a:pPr algn="ctr" indent="0" marL="0">
-              <a:buNone/>
-            </a:pPr>
-            <a:r>
-              <a:rPr lang="en-US" sz="950" b="1" dirty="0">
-                <a:solidFill>
-                  <a:srgbClr val="0A3D91"/>
-                </a:solidFill>
-                <a:latin typeface="Arial" pitchFamily="34" charset="0"/>
-                <a:ea typeface="Arial" pitchFamily="34" charset="-122"/>
-                <a:cs typeface="Arial" pitchFamily="34" charset="-120"/>
-              </a:rPr>
-              <a:t>Clínicas pequeñas y medianas</a:t>
-            </a:r>
-            <a:endParaRPr lang="en-US" sz="950" dirty="0"/>
-          </a:p>
-        </p:txBody>
-      </p:sp>
-      <p:sp>
-        <p:nvSpPr>
-          <p:cNvPr id="22" name="Shape 18"/>
-          <p:cNvSpPr/>
-          <p:nvPr/>
-        </p:nvSpPr>
-        <p:spPr>
-          <a:xfrm>
-            <a:off x="4753051" y="3639312"/>
-            <a:ext cx="1616659" cy="365760"/>
-          </a:xfrm>
-          <a:prstGeom prst="roundRect">
-            <a:avLst>
-              <a:gd name="adj" fmla="val 50000"/>
-            </a:avLst>
-          </a:prstGeom>
-          <a:solidFill>
-            <a:srgbClr val="FFFFFF"/>
-          </a:solidFill>
-          <a:ln w="12700">
-            <a:solidFill>
-              <a:srgbClr val="0071E3"/>
-            </a:solidFill>
-            <a:prstDash val="solid"/>
-          </a:ln>
-        </p:spPr>
-      </p:sp>
-      <p:sp>
-        <p:nvSpPr>
-          <p:cNvPr id="23" name="Text 19"/>
-          <p:cNvSpPr/>
-          <p:nvPr/>
-        </p:nvSpPr>
-        <p:spPr>
-          <a:xfrm>
-            <a:off x="4753051" y="3639312"/>
-            <a:ext cx="1616659" cy="365760"/>
-          </a:xfrm>
-          <a:prstGeom prst="rect">
-            <a:avLst/>
-          </a:prstGeom>
-          <a:noFill/>
-          <a:ln/>
-        </p:spPr>
-        <p:txBody>
-          <a:bodyPr wrap="square" lIns="0" tIns="0" rIns="0" bIns="0" rtlCol="0" anchor="ctr"/>
-          <a:lstStyle/>
-          <a:p>
-            <a:pPr algn="ctr" indent="0" marL="0">
-              <a:buNone/>
-            </a:pPr>
-            <a:r>
-              <a:rPr lang="en-US" sz="950" b="1" dirty="0">
-                <a:solidFill>
-                  <a:srgbClr val="0A3D91"/>
-                </a:solidFill>
-                <a:latin typeface="Arial" pitchFamily="34" charset="0"/>
-                <a:ea typeface="Arial" pitchFamily="34" charset="-122"/>
-                <a:cs typeface="Arial" pitchFamily="34" charset="-120"/>
-              </a:rPr>
-              <a:t>IPS de alto volumen</a:t>
-            </a:r>
-            <a:endParaRPr lang="en-US" sz="950" dirty="0"/>
-          </a:p>
-        </p:txBody>
-      </p:sp>
-      <p:sp>
-        <p:nvSpPr>
-          <p:cNvPr id="24" name="Shape 20"/>
-          <p:cNvSpPr/>
-          <p:nvPr/>
-        </p:nvSpPr>
-        <p:spPr>
-          <a:xfrm>
-            <a:off x="502920" y="4133088"/>
-            <a:ext cx="3130906" cy="365760"/>
-          </a:xfrm>
-          <a:prstGeom prst="roundRect">
-            <a:avLst>
-              <a:gd name="adj" fmla="val 50000"/>
-            </a:avLst>
-          </a:prstGeom>
-          <a:solidFill>
-            <a:srgbClr val="FFFFFF"/>
-          </a:solidFill>
-          <a:ln w="12700">
-            <a:solidFill>
-              <a:srgbClr val="0071E3"/>
-            </a:solidFill>
-            <a:prstDash val="solid"/>
-          </a:ln>
-        </p:spPr>
-      </p:sp>
-      <p:sp>
-        <p:nvSpPr>
-          <p:cNvPr id="25" name="Text 21"/>
-          <p:cNvSpPr/>
-          <p:nvPr/>
-        </p:nvSpPr>
-        <p:spPr>
-          <a:xfrm>
-            <a:off x="502920" y="4133088"/>
-            <a:ext cx="3130906" cy="365760"/>
-          </a:xfrm>
-          <a:prstGeom prst="rect">
-            <a:avLst/>
-          </a:prstGeom>
-          <a:noFill/>
-          <a:ln/>
-        </p:spPr>
-        <p:txBody>
-          <a:bodyPr wrap="square" lIns="0" tIns="0" rIns="0" bIns="0" rtlCol="0" anchor="ctr"/>
-          <a:lstStyle/>
-          <a:p>
-            <a:pPr algn="ctr" indent="0" marL="0">
-              <a:buNone/>
-            </a:pPr>
-            <a:r>
-              <a:rPr lang="en-US" sz="950" b="1" dirty="0">
-                <a:solidFill>
-                  <a:srgbClr val="0A3D91"/>
-                </a:solidFill>
-                <a:latin typeface="Arial" pitchFamily="34" charset="0"/>
-                <a:ea typeface="Arial" pitchFamily="34" charset="-122"/>
-                <a:cs typeface="Arial" pitchFamily="34" charset="-120"/>
-              </a:rPr>
-              <a:t>Especialistas con documentación repetitiva</a:t>
-            </a:r>
-            <a:endParaRPr lang="en-US" sz="950" dirty="0"/>
-          </a:p>
-        </p:txBody>
-      </p:sp>
-      <p:sp>
-        <p:nvSpPr>
-          <p:cNvPr id="26" name="Text 22"/>
-          <p:cNvSpPr/>
-          <p:nvPr/>
-        </p:nvSpPr>
-        <p:spPr>
-          <a:xfrm>
-            <a:off x="502920" y="4434840"/>
-            <a:ext cx="8138160" cy="457200"/>
-          </a:xfrm>
-          <a:prstGeom prst="rect">
-            <a:avLst/>
-          </a:prstGeom>
-          <a:noFill/>
-          <a:ln/>
-        </p:spPr>
-        <p:txBody>
-          <a:bodyPr wrap="square" lIns="0" tIns="0" rIns="0" bIns="0" rtlCol="0" anchor="ctr"/>
-          <a:lstStyle/>
-          <a:p>
-            <a:pPr indent="0" marL="0">
-              <a:buNone/>
-            </a:pPr>
-            <a:r>
-              <a:rPr lang="en-US" sz="1250" b="1" i="1" dirty="0">
-                <a:solidFill>
-                  <a:srgbClr val="0A3D91"/>
-                </a:solidFill>
-                <a:latin typeface="Arial" pitchFamily="34" charset="0"/>
-                <a:ea typeface="Arial" pitchFamily="34" charset="-122"/>
-                <a:cs typeface="Arial" pitchFamily="34" charset="-120"/>
-              </a:rPr>
-              <a:t>La adopción individual abre la puerta. El contrato institucional escala el ingreso.</a:t>
-            </a:r>
-            <a:endParaRPr lang="en-US" sz="1250" dirty="0"/>
+              <a:t>Empezamos con pilotos controlados y escalamos hacia contratos institucionales.</a:t>
+            </a:r>
+            <a:endParaRPr lang="en-US" sz="1400" dirty="0"/>
           </a:p>
         </p:txBody>
       </p:sp>
@@ -12606,7 +11456,7 @@
                 <a:ea typeface="Arial" pitchFamily="34" charset="-122"/>
                 <a:cs typeface="Arial" pitchFamily="34" charset="-120"/>
               </a:rPr>
-              <a:t>MODELO DE NEGOCIO</a:t>
+              <a:t>DEFENSIBILIDAD</a:t>
             </a:r>
             <a:endParaRPr lang="en-US" sz="1050" dirty="0"/>
           </a:p>
@@ -12620,8 +11470,8 @@
         </p:nvSpPr>
         <p:spPr>
           <a:xfrm>
-            <a:off x="502920" y="685800"/>
-            <a:ext cx="8138160" cy="777240"/>
+            <a:off x="502920" y="658368"/>
+            <a:ext cx="8138160" cy="548640"/>
           </a:xfrm>
           <a:prstGeom prst="rect">
             <a:avLst/>
@@ -12630,14 +11480,14 @@
           <a:ln/>
         </p:spPr>
         <p:txBody>
-          <a:bodyPr wrap="square" lIns="0" tIns="0" rIns="0" bIns="0" rtlCol="0" anchor="t"/>
+          <a:bodyPr wrap="square" lIns="0" tIns="0" rIns="0" bIns="0" rtlCol="0" anchor="ctr"/>
           <a:lstStyle/>
           <a:p>
             <a:pPr indent="0" marL="0">
               <a:buNone/>
             </a:pPr>
             <a:r>
-              <a:rPr lang="en-US" sz="2100" b="1" dirty="0">
+              <a:rPr lang="en-US" sz="2200" b="1" dirty="0">
                 <a:solidFill>
                   <a:srgbClr val="1D1D1F"/>
                 </a:solidFill>
@@ -12645,13 +11495,13 @@
                 <a:ea typeface="Arial" pitchFamily="34" charset="-122"/>
                 <a:cs typeface="Arial" pitchFamily="34" charset="-120"/>
               </a:rPr>
-              <a:t>Cada médico y cada clínica generan </a:t>
+              <a:t>Lo difícil no es transcribir. </a:t>
             </a:r>
             <a:pPr indent="0" marL="0">
               <a:buNone/>
             </a:pPr>
             <a:r>
-              <a:rPr lang="en-US" sz="2100" b="1" dirty="0">
+              <a:rPr lang="en-US" sz="2200" b="1" dirty="0">
                 <a:solidFill>
                   <a:srgbClr val="0A3D91"/>
                 </a:solidFill>
@@ -12659,23 +11509,9 @@
                 <a:ea typeface="Arial" pitchFamily="34" charset="-122"/>
                 <a:cs typeface="Arial" pitchFamily="34" charset="-120"/>
               </a:rPr>
-              <a:t>ingreso recurrente</a:t>
-            </a:r>
-            <a:pPr indent="0" marL="0">
-              <a:buNone/>
-            </a:pPr>
-            <a:r>
-              <a:rPr lang="en-US" sz="2100" b="1" dirty="0">
-                <a:solidFill>
-                  <a:srgbClr val="1D1D1F"/>
-                </a:solidFill>
-                <a:latin typeface="Arial" pitchFamily="34" charset="0"/>
-                <a:ea typeface="Arial" pitchFamily="34" charset="-122"/>
-                <a:cs typeface="Arial" pitchFamily="34" charset="-120"/>
-              </a:rPr>
-              <a:t>.</a:t>
-            </a:r>
-            <a:endParaRPr lang="en-US" sz="2100" dirty="0"/>
+              <a:t>Es todo lo demás.</a:t>
+            </a:r>
+            <a:endParaRPr lang="en-US" sz="2200" dirty="0"/>
           </a:p>
         </p:txBody>
       </p:sp>
@@ -12687,12 +11523,12 @@
         </p:nvSpPr>
         <p:spPr>
           <a:xfrm>
-            <a:off x="502920" y="1691640"/>
-            <a:ext cx="2529840" cy="2011680"/>
+            <a:off x="502920" y="1325880"/>
+            <a:ext cx="2542032" cy="2148840"/>
           </a:xfrm>
           <a:prstGeom prst="roundRect">
             <a:avLst>
-              <a:gd name="adj" fmla="val 4091"/>
+              <a:gd name="adj" fmla="val 3830"/>
             </a:avLst>
           </a:prstGeom>
           <a:solidFill>
@@ -12721,8 +11557,8 @@
         </p:nvSpPr>
         <p:spPr>
           <a:xfrm>
-            <a:off x="1475232" y="1947672"/>
-            <a:ext cx="585216" cy="585216"/>
+            <a:off x="685800" y="1508760"/>
+            <a:ext cx="384048" cy="384048"/>
           </a:xfrm>
           <a:prstGeom prst="ellipse">
             <a:avLst/>
@@ -12749,8 +11585,8 @@
         </p:blipFill>
         <p:spPr>
           <a:xfrm>
-            <a:off x="1557162" y="2029602"/>
-            <a:ext cx="421356" cy="421356"/>
+            <a:off x="739567" y="1562527"/>
+            <a:ext cx="276515" cy="276515"/>
           </a:xfrm>
           <a:prstGeom prst="rect">
             <a:avLst/>
@@ -12765,8 +11601,8 @@
         </p:nvSpPr>
         <p:spPr>
           <a:xfrm>
-            <a:off x="612648" y="2679192"/>
-            <a:ext cx="2310384" cy="365760"/>
+            <a:off x="685800" y="1984248"/>
+            <a:ext cx="2176272" cy="457200"/>
           </a:xfrm>
           <a:prstGeom prst="rect">
             <a:avLst/>
@@ -12778,11 +11614,11 @@
           <a:bodyPr wrap="square" lIns="0" tIns="0" rIns="0" bIns="0" rtlCol="0" anchor="t"/>
           <a:lstStyle/>
           <a:p>
-            <a:pPr algn="ctr" indent="0" marL="0">
-              <a:buNone/>
-            </a:pPr>
-            <a:r>
-              <a:rPr lang="en-US" sz="1300" b="1" dirty="0">
+            <a:pPr indent="0" marL="0">
+              <a:buNone/>
+            </a:pPr>
+            <a:r>
+              <a:rPr lang="en-US" sz="1150" b="1" dirty="0">
                 <a:solidFill>
                   <a:srgbClr val="1D1D1F"/>
                 </a:solidFill>
@@ -12790,9 +11626,9 @@
                 <a:ea typeface="Arial" pitchFamily="34" charset="-122"/>
                 <a:cs typeface="Arial" pitchFamily="34" charset="-120"/>
               </a:rPr>
-              <a:t>Piloto pago</a:t>
-            </a:r>
-            <a:endParaRPr lang="en-US" sz="1300" dirty="0"/>
+              <a:t>Datos que mejoran el producto</a:t>
+            </a:r>
+            <a:endParaRPr lang="en-US" sz="1150" dirty="0"/>
           </a:p>
         </p:txBody>
       </p:sp>
@@ -12804,8 +11640,8 @@
         </p:nvSpPr>
         <p:spPr>
           <a:xfrm>
-            <a:off x="612648" y="3063240"/>
-            <a:ext cx="2310384" cy="365760"/>
+            <a:off x="685800" y="2496312"/>
+            <a:ext cx="2176272" cy="886968"/>
           </a:xfrm>
           <a:prstGeom prst="rect">
             <a:avLst/>
@@ -12817,21 +11653,21 @@
           <a:bodyPr wrap="square" lIns="0" tIns="0" rIns="0" bIns="0" rtlCol="0" anchor="t"/>
           <a:lstStyle/>
           <a:p>
-            <a:pPr algn="ctr" indent="0" marL="0">
-              <a:buNone/>
-            </a:pPr>
-            <a:r>
-              <a:rPr lang="en-US" sz="1050" dirty="0">
-                <a:solidFill>
-                  <a:srgbClr val="6E6E73"/>
-                </a:solidFill>
-                <a:latin typeface="Arial" pitchFamily="34" charset="0"/>
-                <a:ea typeface="Arial" pitchFamily="34" charset="-122"/>
-                <a:cs typeface="Arial" pitchFamily="34" charset="-120"/>
-              </a:rPr>
-              <a:t>Por clínica o consultorio.</a:t>
-            </a:r>
-            <a:endParaRPr lang="en-US" sz="1050" dirty="0"/>
+            <a:pPr indent="0" marL="0">
+              <a:buNone/>
+            </a:pPr>
+            <a:r>
+              <a:rPr lang="en-US" sz="880" dirty="0">
+                <a:solidFill>
+                  <a:srgbClr val="48484A"/>
+                </a:solidFill>
+                <a:latin typeface="Arial" pitchFamily="34" charset="0"/>
+                <a:ea typeface="Arial" pitchFamily="34" charset="-122"/>
+                <a:cs typeface="Arial" pitchFamily="34" charset="-120"/>
+              </a:rPr>
+              <a:t>Cada consulta documentada afina el español clínico regional del sistema. Más médicos → mejor producto → más médicos.</a:t>
+            </a:r>
+            <a:endParaRPr lang="en-US" sz="880" dirty="0"/>
           </a:p>
         </p:txBody>
       </p:sp>
@@ -12843,12 +11679,12 @@
         </p:nvSpPr>
         <p:spPr>
           <a:xfrm>
-            <a:off x="3307080" y="1691640"/>
-            <a:ext cx="2529840" cy="2011680"/>
+            <a:off x="3300984" y="1325880"/>
+            <a:ext cx="2542032" cy="2148840"/>
           </a:xfrm>
           <a:prstGeom prst="roundRect">
             <a:avLst>
-              <a:gd name="adj" fmla="val 4091"/>
+              <a:gd name="adj" fmla="val 3830"/>
             </a:avLst>
           </a:prstGeom>
           <a:solidFill>
@@ -12877,8 +11713,8 @@
         </p:nvSpPr>
         <p:spPr>
           <a:xfrm>
-            <a:off x="4279392" y="1947672"/>
-            <a:ext cx="585216" cy="585216"/>
+            <a:off x="3483864" y="1508760"/>
+            <a:ext cx="384048" cy="384048"/>
           </a:xfrm>
           <a:prstGeom prst="ellipse">
             <a:avLst/>
@@ -12905,8 +11741,8 @@
         </p:blipFill>
         <p:spPr>
           <a:xfrm>
-            <a:off x="4361322" y="2029602"/>
-            <a:ext cx="421356" cy="421356"/>
+            <a:off x="3537631" y="1562527"/>
+            <a:ext cx="276515" cy="276515"/>
           </a:xfrm>
           <a:prstGeom prst="rect">
             <a:avLst/>
@@ -12921,8 +11757,8 @@
         </p:nvSpPr>
         <p:spPr>
           <a:xfrm>
-            <a:off x="3416808" y="2679192"/>
-            <a:ext cx="2310384" cy="365760"/>
+            <a:off x="3483864" y="1984248"/>
+            <a:ext cx="2176272" cy="457200"/>
           </a:xfrm>
           <a:prstGeom prst="rect">
             <a:avLst/>
@@ -12934,11 +11770,11 @@
           <a:bodyPr wrap="square" lIns="0" tIns="0" rIns="0" bIns="0" rtlCol="0" anchor="t"/>
           <a:lstStyle/>
           <a:p>
-            <a:pPr algn="ctr" indent="0" marL="0">
-              <a:buNone/>
-            </a:pPr>
-            <a:r>
-              <a:rPr lang="en-US" sz="1300" b="1" dirty="0">
+            <a:pPr indent="0" marL="0">
+              <a:buNone/>
+            </a:pPr>
+            <a:r>
+              <a:rPr lang="en-US" sz="1150" b="1" dirty="0">
                 <a:solidFill>
                   <a:srgbClr val="1D1D1F"/>
                 </a:solidFill>
@@ -12946,9 +11782,9 @@
                 <a:ea typeface="Arial" pitchFamily="34" charset="-122"/>
                 <a:cs typeface="Arial" pitchFamily="34" charset="-120"/>
               </a:rPr>
-              <a:t>Suscripción mensual</a:t>
-            </a:r>
-            <a:endParaRPr lang="en-US" sz="1300" dirty="0"/>
+              <a:t>Sin fricción de integración</a:t>
+            </a:r>
+            <a:endParaRPr lang="en-US" sz="1150" dirty="0"/>
           </a:p>
         </p:txBody>
       </p:sp>
@@ -12960,8 +11796,8 @@
         </p:nvSpPr>
         <p:spPr>
           <a:xfrm>
-            <a:off x="3416808" y="3063240"/>
-            <a:ext cx="2310384" cy="365760"/>
+            <a:off x="3483864" y="2496312"/>
+            <a:ext cx="2176272" cy="886968"/>
           </a:xfrm>
           <a:prstGeom prst="rect">
             <a:avLst/>
@@ -12973,21 +11809,21 @@
           <a:bodyPr wrap="square" lIns="0" tIns="0" rIns="0" bIns="0" rtlCol="0" anchor="t"/>
           <a:lstStyle/>
           <a:p>
-            <a:pPr algn="ctr" indent="0" marL="0">
-              <a:buNone/>
-            </a:pPr>
-            <a:r>
-              <a:rPr lang="en-US" sz="1050" dirty="0">
-                <a:solidFill>
-                  <a:srgbClr val="6E6E73"/>
-                </a:solidFill>
-                <a:latin typeface="Arial" pitchFamily="34" charset="0"/>
-                <a:ea typeface="Arial" pitchFamily="34" charset="-122"/>
-                <a:cs typeface="Arial" pitchFamily="34" charset="-120"/>
-              </a:rPr>
-              <a:t>Por médico.</a:t>
-            </a:r>
-            <a:endParaRPr lang="en-US" sz="1050" dirty="0"/>
+            <a:pPr indent="0" marL="0">
+              <a:buNone/>
+            </a:pPr>
+            <a:r>
+              <a:rPr lang="en-US" sz="880" dirty="0">
+                <a:solidFill>
+                  <a:srgbClr val="48484A"/>
+                </a:solidFill>
+                <a:latin typeface="Arial" pitchFamily="34" charset="0"/>
+                <a:ea typeface="Arial" pitchFamily="34" charset="-122"/>
+                <a:cs typeface="Arial" pitchFamily="34" charset="-120"/>
+              </a:rPr>
+              <a:t>Miracle opera el HIS que la clínica ya usa. Donde otros necesitan meses de integración, nosotros entramos el mismo día.</a:t>
+            </a:r>
+            <a:endParaRPr lang="en-US" sz="880" dirty="0"/>
           </a:p>
         </p:txBody>
       </p:sp>
@@ -12999,12 +11835,12 @@
         </p:nvSpPr>
         <p:spPr>
           <a:xfrm>
-            <a:off x="6111240" y="1691640"/>
-            <a:ext cx="2529840" cy="2011680"/>
+            <a:off x="6099048" y="1325880"/>
+            <a:ext cx="2542032" cy="2148840"/>
           </a:xfrm>
           <a:prstGeom prst="roundRect">
             <a:avLst>
-              <a:gd name="adj" fmla="val 4091"/>
+              <a:gd name="adj" fmla="val 3830"/>
             </a:avLst>
           </a:prstGeom>
           <a:solidFill>
@@ -13033,8 +11869,8 @@
         </p:nvSpPr>
         <p:spPr>
           <a:xfrm>
-            <a:off x="7083552" y="1947672"/>
-            <a:ext cx="585216" cy="585216"/>
+            <a:off x="6281928" y="1508760"/>
+            <a:ext cx="384048" cy="384048"/>
           </a:xfrm>
           <a:prstGeom prst="ellipse">
             <a:avLst/>
@@ -13061,8 +11897,8 @@
         </p:blipFill>
         <p:spPr>
           <a:xfrm>
-            <a:off x="7165482" y="2029602"/>
-            <a:ext cx="421356" cy="421356"/>
+            <a:off x="6335695" y="1562527"/>
+            <a:ext cx="276515" cy="276515"/>
           </a:xfrm>
           <a:prstGeom prst="rect">
             <a:avLst/>
@@ -13077,8 +11913,8 @@
         </p:nvSpPr>
         <p:spPr>
           <a:xfrm>
-            <a:off x="6220968" y="2679192"/>
-            <a:ext cx="2310384" cy="365760"/>
+            <a:off x="6281928" y="1984248"/>
+            <a:ext cx="2176272" cy="457200"/>
           </a:xfrm>
           <a:prstGeom prst="rect">
             <a:avLst/>
@@ -13090,11 +11926,11 @@
           <a:bodyPr wrap="square" lIns="0" tIns="0" rIns="0" bIns="0" rtlCol="0" anchor="t"/>
           <a:lstStyle/>
           <a:p>
-            <a:pPr algn="ctr" indent="0" marL="0">
-              <a:buNone/>
-            </a:pPr>
-            <a:r>
-              <a:rPr lang="en-US" sz="1300" b="1" dirty="0">
+            <a:pPr indent="0" marL="0">
+              <a:buNone/>
+            </a:pPr>
+            <a:r>
+              <a:rPr lang="en-US" sz="1150" b="1" dirty="0">
                 <a:solidFill>
                   <a:srgbClr val="1D1D1F"/>
                 </a:solidFill>
@@ -13102,9 +11938,9 @@
                 <a:ea typeface="Arial" pitchFamily="34" charset="-122"/>
                 <a:cs typeface="Arial" pitchFamily="34" charset="-120"/>
               </a:rPr>
-              <a:t>Plan institucional</a:t>
-            </a:r>
-            <a:endParaRPr lang="en-US" sz="1300" dirty="0"/>
+              <a:t>Presencia física en el consultorio</a:t>
+            </a:r>
+            <a:endParaRPr lang="en-US" sz="1150" dirty="0"/>
           </a:p>
         </p:txBody>
       </p:sp>
@@ -13116,8 +11952,8 @@
         </p:nvSpPr>
         <p:spPr>
           <a:xfrm>
-            <a:off x="6220968" y="3063240"/>
-            <a:ext cx="2310384" cy="365760"/>
+            <a:off x="6281928" y="2496312"/>
+            <a:ext cx="2176272" cy="886968"/>
           </a:xfrm>
           <a:prstGeom prst="rect">
             <a:avLst/>
@@ -13129,34 +11965,112 @@
           <a:bodyPr wrap="square" lIns="0" tIns="0" rIns="0" bIns="0" rtlCol="0" anchor="t"/>
           <a:lstStyle/>
           <a:p>
-            <a:pPr algn="ctr" indent="0" marL="0">
-              <a:buNone/>
-            </a:pPr>
-            <a:r>
-              <a:rPr lang="en-US" sz="1050" dirty="0">
-                <a:solidFill>
-                  <a:srgbClr val="6E6E73"/>
-                </a:solidFill>
-                <a:latin typeface="Arial" pitchFamily="34" charset="0"/>
-                <a:ea typeface="Arial" pitchFamily="34" charset="-122"/>
-                <a:cs typeface="Arial" pitchFamily="34" charset="-120"/>
-              </a:rPr>
-              <a:t>Por número de usuarios.</a:t>
-            </a:r>
-            <a:endParaRPr lang="en-US" sz="1050" dirty="0"/>
-          </a:p>
-        </p:txBody>
-      </p:sp>
-      <p:sp>
-        <p:nvSpPr>
-          <p:cNvPr id="19" name="Text 14"/>
-          <p:cNvSpPr/>
-          <p:nvPr/>
-        </p:nvSpPr>
-        <p:spPr>
-          <a:xfrm>
-            <a:off x="502920" y="3977640"/>
-            <a:ext cx="8138160" cy="548640"/>
+            <a:pPr indent="0" marL="0">
+              <a:buNone/>
+            </a:pPr>
+            <a:r>
+              <a:rPr lang="en-US" sz="880" dirty="0">
+                <a:solidFill>
+                  <a:srgbClr val="48484A"/>
+                </a:solidFill>
+                <a:latin typeface="Arial" pitchFamily="34" charset="0"/>
+                <a:ea typeface="Arial" pitchFamily="34" charset="-122"/>
+                <a:cs typeface="Arial" pitchFamily="34" charset="-120"/>
+              </a:rPr>
+              <a:t>El dispositivo dedicado garantiza calidad de audio clínico y crea un hábito diario: un costo de cambio real frente a cualquier app.</a:t>
+            </a:r>
+            <a:endParaRPr lang="en-US" sz="880" dirty="0"/>
+          </a:p>
+        </p:txBody>
+      </p:sp>
+      <p:sp>
+        <p:nvSpPr>
+          <p:cNvPr id="19" name="Shape 14"/>
+          <p:cNvSpPr/>
+          <p:nvPr/>
+        </p:nvSpPr>
+        <p:spPr>
+          <a:xfrm>
+            <a:off x="502920" y="3749040"/>
+            <a:ext cx="8138160" cy="685800"/>
+          </a:xfrm>
+          <a:prstGeom prst="roundRect">
+            <a:avLst>
+              <a:gd name="adj" fmla="val 12000"/>
+            </a:avLst>
+          </a:prstGeom>
+          <a:solidFill>
+            <a:srgbClr val="EAF3FF"/>
+          </a:solidFill>
+          <a:ln w="9525">
+            <a:solidFill>
+              <a:srgbClr val="CFE4FB"/>
+            </a:solidFill>
+            <a:prstDash val="solid"/>
+          </a:ln>
+          <a:effectLst>
+            <a:outerShdw sx="100000" sy="100000" kx="0" ky="0" algn="bl" rotWithShape="0" blurRad="101600" dist="25400" dir="5400000">
+              <a:srgbClr val="0A3D91">
+                <a:alpha val="7000"/>
+              </a:srgbClr>
+            </a:outerShdw>
+          </a:effectLst>
+        </p:spPr>
+      </p:sp>
+      <p:sp>
+        <p:nvSpPr>
+          <p:cNvPr id="20" name="Shape 15"/>
+          <p:cNvSpPr/>
+          <p:nvPr/>
+        </p:nvSpPr>
+        <p:spPr>
+          <a:xfrm>
+            <a:off x="704088" y="3886200"/>
+            <a:ext cx="411480" cy="411480"/>
+          </a:xfrm>
+          <a:prstGeom prst="ellipse">
+            <a:avLst/>
+          </a:prstGeom>
+          <a:solidFill>
+            <a:srgbClr val="FFFFFF"/>
+          </a:solidFill>
+          <a:ln/>
+        </p:spPr>
+      </p:sp>
+      <p:pic>
+        <p:nvPicPr>
+          <p:cNvPr id="21" name="Image 3" descr="preencoded.png">    </p:cNvPr>
+          <p:cNvPicPr>
+            <a:picLocks noChangeAspect="1"/>
+          </p:cNvPicPr>
+          <p:nvPr/>
+        </p:nvPicPr>
+        <p:blipFill>
+          <a:blip r:embed="rId4"/>
+          <a:stretch>
+            <a:fillRect/>
+          </a:stretch>
+        </p:blipFill>
+        <p:spPr>
+          <a:xfrm>
+            <a:off x="761695" y="3943807"/>
+            <a:ext cx="296266" cy="296266"/>
+          </a:xfrm>
+          <a:prstGeom prst="rect">
+            <a:avLst/>
+          </a:prstGeom>
+        </p:spPr>
+      </p:pic>
+      <p:sp>
+        <p:nvSpPr>
+          <p:cNvPr id="22" name="Text 16"/>
+          <p:cNvSpPr/>
+          <p:nvPr/>
+        </p:nvSpPr>
+        <p:spPr>
+          <a:xfrm>
+            <a:off x="1280160" y="3749040"/>
+            <a:ext cx="7132320" cy="685800"/>
           </a:xfrm>
           <a:prstGeom prst="rect">
             <a:avLst/>
@@ -13172,7 +12086,7 @@
               <a:buNone/>
             </a:pPr>
             <a:r>
-              <a:rPr lang="en-US" sz="1400" b="1" i="1" dirty="0">
+              <a:rPr lang="en-US" sz="1100" b="1" dirty="0">
                 <a:solidFill>
                   <a:srgbClr val="0A3D91"/>
                 </a:solidFill>
@@ -13180,9 +12094,9 @@
                 <a:ea typeface="Arial" pitchFamily="34" charset="-122"/>
                 <a:cs typeface="Arial" pitchFamily="34" charset="-120"/>
               </a:rPr>
-              <a:t>Empezamos con pilotos controlados y escalamos hacia contratos institucionales.</a:t>
-            </a:r>
-            <a:endParaRPr lang="en-US" sz="1400" dirty="0"/>
+              <a:t>Seguridad y protección de datos cubiertas desde el diseño, alineadas con la regulación colombiana para datos sensibles en salud.</a:t>
+            </a:r>
+            <a:endParaRPr lang="en-US" sz="1100" dirty="0"/>
           </a:p>
         </p:txBody>
       </p:sp>
